--- a/Login Threat Detection Project Presentation.pptx
+++ b/Login Threat Detection Project Presentation.pptx
@@ -1,22 +1,22 @@
 
 <file path=ppt/presentation.xml><?xml version="1.0" encoding="utf-8"?>
-<p:presentation xmlns:a="http://schemas.openxmlformats.org/drawingml/2006/main" xmlns:r="http://schemas.openxmlformats.org/officeDocument/2006/relationships" xmlns:p="http://schemas.openxmlformats.org/presentationml/2006/main" xmlns:m="http://schemas.openxmlformats.org/officeDocument/2006/math" xmlns:a14="http://schemas.microsoft.com/office/drawing/2010/main">
+<p:presentation xmlns:a="http://schemas.openxmlformats.org/drawingml/2006/main" xmlns:r="http://schemas.openxmlformats.org/officeDocument/2006/relationships" xmlns:p="http://schemas.openxmlformats.org/presentationml/2006/main">
   <p:sldMasterIdLst>
-    <p:sldMasterId id="2147483648" r:id="rId5"/>
+    <p:sldMasterId id="2147483648" r:id="rId1"/>
   </p:sldMasterIdLst>
   <p:notesMasterIdLst>
-    <p:notesMasterId r:id="rId7"/>
+    <p:notesMasterId r:id="rId11"/>
   </p:notesMasterIdLst>
   <p:sldIdLst>
-    <p:sldId id="256" r:id="rId8"/>
-    <p:sldId id="257" r:id="rId9"/>
-    <p:sldId id="258" r:id="rId10"/>
-    <p:sldId id="259" r:id="rId11"/>
-    <p:sldId id="260" r:id="rId12"/>
-    <p:sldId id="261" r:id="rId13"/>
-    <p:sldId id="262" r:id="rId14"/>
-    <p:sldId id="263" r:id="rId15"/>
-    <p:sldId id="264" r:id="rId16"/>
+    <p:sldId id="256" r:id="rId2"/>
+    <p:sldId id="257" r:id="rId3"/>
+    <p:sldId id="258" r:id="rId4"/>
+    <p:sldId id="259" r:id="rId5"/>
+    <p:sldId id="260" r:id="rId6"/>
+    <p:sldId id="261" r:id="rId7"/>
+    <p:sldId id="262" r:id="rId8"/>
+    <p:sldId id="263" r:id="rId9"/>
+    <p:sldId id="264" r:id="rId10"/>
   </p:sldIdLst>
   <p:sldSz cx="12192000" cy="6858000"/>
   <p:notesSz cx="6858000" cy="9144000"/>
@@ -36,7 +36,7 @@
       <a:buFontTx/>
       <a:buNone/>
       <a:tabLst/>
-      <a:defRPr b="0" baseline="0" cap="none" i="0" spc="0" strike="noStrike" sz="1800" u="none" kumimoji="0" normalizeH="0">
+      <a:defRPr kumimoji="0" sz="1800" b="0" i="0" u="none" strike="noStrike" cap="none" spc="0" normalizeH="0" baseline="0">
         <a:ln>
           <a:noFill/>
         </a:ln>
@@ -62,7 +62,7 @@
       <a:buFontTx/>
       <a:buNone/>
       <a:tabLst/>
-      <a:defRPr b="0" baseline="0" cap="none" i="0" spc="0" strike="noStrike" sz="1800" u="none" kumimoji="0" normalizeH="0">
+      <a:defRPr kumimoji="0" sz="1800" b="0" i="0" u="none" strike="noStrike" cap="none" spc="0" normalizeH="0" baseline="0">
         <a:ln>
           <a:noFill/>
         </a:ln>
@@ -92,7 +92,7 @@
       <a:buFontTx/>
       <a:buNone/>
       <a:tabLst/>
-      <a:defRPr b="0" baseline="0" cap="none" i="0" spc="0" strike="noStrike" sz="1800" u="none" kumimoji="0" normalizeH="0">
+      <a:defRPr kumimoji="0" sz="1800" b="0" i="0" u="none" strike="noStrike" cap="none" spc="0" normalizeH="0" baseline="0">
         <a:ln>
           <a:noFill/>
         </a:ln>
@@ -122,7 +122,7 @@
       <a:buFontTx/>
       <a:buNone/>
       <a:tabLst/>
-      <a:defRPr b="0" baseline="0" cap="none" i="0" spc="0" strike="noStrike" sz="1800" u="none" kumimoji="0" normalizeH="0">
+      <a:defRPr kumimoji="0" sz="1800" b="0" i="0" u="none" strike="noStrike" cap="none" spc="0" normalizeH="0" baseline="0">
         <a:ln>
           <a:noFill/>
         </a:ln>
@@ -152,7 +152,7 @@
       <a:buFontTx/>
       <a:buNone/>
       <a:tabLst/>
-      <a:defRPr b="0" baseline="0" cap="none" i="0" spc="0" strike="noStrike" sz="1800" u="none" kumimoji="0" normalizeH="0">
+      <a:defRPr kumimoji="0" sz="1800" b="0" i="0" u="none" strike="noStrike" cap="none" spc="0" normalizeH="0" baseline="0">
         <a:ln>
           <a:noFill/>
         </a:ln>
@@ -182,7 +182,7 @@
       <a:buFontTx/>
       <a:buNone/>
       <a:tabLst/>
-      <a:defRPr b="0" baseline="0" cap="none" i="0" spc="0" strike="noStrike" sz="1800" u="none" kumimoji="0" normalizeH="0">
+      <a:defRPr kumimoji="0" sz="1800" b="0" i="0" u="none" strike="noStrike" cap="none" spc="0" normalizeH="0" baseline="0">
         <a:ln>
           <a:noFill/>
         </a:ln>
@@ -212,7 +212,7 @@
       <a:buFontTx/>
       <a:buNone/>
       <a:tabLst/>
-      <a:defRPr b="0" baseline="0" cap="none" i="0" spc="0" strike="noStrike" sz="1800" u="none" kumimoji="0" normalizeH="0">
+      <a:defRPr kumimoji="0" sz="1800" b="0" i="0" u="none" strike="noStrike" cap="none" spc="0" normalizeH="0" baseline="0">
         <a:ln>
           <a:noFill/>
         </a:ln>
@@ -242,7 +242,7 @@
       <a:buFontTx/>
       <a:buNone/>
       <a:tabLst/>
-      <a:defRPr b="0" baseline="0" cap="none" i="0" spc="0" strike="noStrike" sz="1800" u="none" kumimoji="0" normalizeH="0">
+      <a:defRPr kumimoji="0" sz="1800" b="0" i="0" u="none" strike="noStrike" cap="none" spc="0" normalizeH="0" baseline="0">
         <a:ln>
           <a:noFill/>
         </a:ln>
@@ -272,7 +272,7 @@
       <a:buFontTx/>
       <a:buNone/>
       <a:tabLst/>
-      <a:defRPr b="0" baseline="0" cap="none" i="0" spc="0" strike="noStrike" sz="1800" u="none" kumimoji="0" normalizeH="0">
+      <a:defRPr kumimoji="0" sz="1800" b="0" i="0" u="none" strike="noStrike" cap="none" spc="0" normalizeH="0" baseline="0">
         <a:ln>
           <a:noFill/>
         </a:ln>
@@ -302,7 +302,7 @@
       <a:buFontTx/>
       <a:buNone/>
       <a:tabLst/>
-      <a:defRPr b="0" baseline="0" cap="none" i="0" spc="0" strike="noStrike" sz="1800" u="none" kumimoji="0" normalizeH="0">
+      <a:defRPr kumimoji="0" sz="1800" b="0" i="0" u="none" strike="noStrike" cap="none" spc="0" normalizeH="0" baseline="0">
         <a:ln>
           <a:noFill/>
         </a:ln>
@@ -321,13 +321,14 @@
 </p:presentation>
 </file>
 
-<file path=ppt/commentAuthors.xml><?xml version="1.0" encoding="utf-8"?>
-<p:cmAuthorLst xmlns:a="http://schemas.openxmlformats.org/drawingml/2006/main" xmlns:r="http://schemas.openxmlformats.org/officeDocument/2006/relationships" xmlns:p="http://schemas.openxmlformats.org/presentationml/2006/main" xmlns:m="http://schemas.openxmlformats.org/officeDocument/2006/math" xmlns:a14="http://schemas.microsoft.com/office/drawing/2010/main"/>
-</file>
-
 <file path=ppt/notesMasters/notesMaster1.xml><?xml version="1.0" encoding="utf-8"?>
-<p:notesMaster xmlns:a="http://schemas.openxmlformats.org/drawingml/2006/main" xmlns:r="http://schemas.openxmlformats.org/officeDocument/2006/relationships" xmlns:p="http://schemas.openxmlformats.org/presentationml/2006/main" xmlns:m="http://schemas.openxmlformats.org/officeDocument/2006/math" xmlns:a14="http://schemas.microsoft.com/office/drawing/2010/main">
+<p:notesMaster xmlns:a="http://schemas.openxmlformats.org/drawingml/2006/main" xmlns:r="http://schemas.openxmlformats.org/officeDocument/2006/relationships" xmlns:p="http://schemas.openxmlformats.org/presentationml/2006/main">
   <p:cSld>
+    <p:bg>
+      <p:bgRef idx="1001">
+        <a:schemeClr val="bg1"/>
+      </p:bgRef>
+    </p:bg>
     <p:spTree>
       <p:nvGrpSpPr>
         <p:cNvPr id="1" name=""/>
@@ -345,7 +346,9 @@
       <p:sp>
         <p:nvSpPr>
           <p:cNvPr id="17" name="Shape 17"/>
-          <p:cNvSpPr/>
+          <p:cNvSpPr>
+            <a:spLocks noGrp="1" noRot="1" noChangeAspect="1"/>
+          </p:cNvSpPr>
           <p:nvPr>
             <p:ph type="sldImg"/>
           </p:nvPr>
@@ -363,14 +366,16 @@
           <a:bodyPr/>
           <a:lstStyle/>
           <a:p>
-            <a:pPr/>
+            <a:endParaRPr/>
           </a:p>
         </p:txBody>
       </p:sp>
       <p:sp>
         <p:nvSpPr>
           <p:cNvPr id="18" name="Shape 18"/>
-          <p:cNvSpPr/>
+          <p:cNvSpPr>
+            <a:spLocks noGrp="1"/>
+          </p:cNvSpPr>
           <p:nvPr>
             <p:ph type="body" sz="quarter" idx="1"/>
           </p:nvPr>
@@ -388,7 +393,7 @@
           <a:bodyPr/>
           <a:lstStyle/>
           <a:p>
-            <a:pPr/>
+            <a:endParaRPr/>
           </a:p>
         </p:txBody>
       </p:sp>
@@ -473,7 +478,7 @@
 </file>
 
 <file path=ppt/slideLayouts/slideLayout1.xml><?xml version="1.0" encoding="utf-8"?>
-<p:sldLayout xmlns:a="http://schemas.openxmlformats.org/drawingml/2006/main" xmlns:r="http://schemas.openxmlformats.org/officeDocument/2006/relationships" xmlns:p="http://schemas.openxmlformats.org/presentationml/2006/main" xmlns:m="http://schemas.openxmlformats.org/officeDocument/2006/math" xmlns:a14="http://schemas.microsoft.com/office/drawing/2010/main" type="tx" showMasterSp="1" showMasterPhAnim="1">
+<p:sldLayout xmlns:a="http://schemas.openxmlformats.org/drawingml/2006/main" xmlns:r="http://schemas.openxmlformats.org/officeDocument/2006/relationships" xmlns:p="http://schemas.openxmlformats.org/presentationml/2006/main" type="tx">
   <p:cSld name="DEFAULT">
     <p:spTree>
       <p:nvGrpSpPr>
@@ -492,7 +497,9 @@
       <p:sp>
         <p:nvSpPr>
           <p:cNvPr id="11" name="Slide Number"/>
-          <p:cNvSpPr txBox="1"/>
+          <p:cNvSpPr txBox="1">
+            <a:spLocks noGrp="1"/>
+          </p:cNvSpPr>
           <p:nvPr>
             <p:ph type="sldNum" sz="quarter" idx="2"/>
           </p:nvPr>
@@ -506,8 +513,10 @@
           <a:bodyPr/>
           <a:lstStyle/>
           <a:p>
-            <a:pPr/>
-            <a:fld id="{86CB4B4D-7CA3-9044-876B-883B54F8677D}" type="slidenum"/>
+            <a:fld id="{86CB4B4D-7CA3-9044-876B-883B54F8677D}" type="slidenum">
+              <a:t>‹#›</a:t>
+            </a:fld>
+            <a:endParaRPr/>
           </a:p>
         </p:txBody>
       </p:sp>
@@ -516,18 +525,19 @@
   <p:clrMapOvr>
     <a:masterClrMapping/>
   </p:clrMapOvr>
-  <p:transition xmlns:p14="http://schemas.microsoft.com/office/powerpoint/2010/main" spd="med" advClick="1"/>
+  <p:transition spd="med"/>
 </p:sldLayout>
 </file>
 
 <file path=ppt/slideMasters/slideMaster1.xml><?xml version="1.0" encoding="utf-8"?>
-<p:sldMaster xmlns:a="http://schemas.openxmlformats.org/drawingml/2006/main" xmlns:r="http://schemas.openxmlformats.org/officeDocument/2006/relationships" xmlns:p="http://schemas.openxmlformats.org/presentationml/2006/main" xmlns:m="http://schemas.openxmlformats.org/officeDocument/2006/math" xmlns:a14="http://schemas.microsoft.com/office/drawing/2010/main">
+<p:sldMaster xmlns:a="http://schemas.openxmlformats.org/drawingml/2006/main" xmlns:r="http://schemas.openxmlformats.org/officeDocument/2006/relationships" xmlns:p="http://schemas.openxmlformats.org/presentationml/2006/main">
   <p:cSld>
     <p:bg>
       <p:bgPr>
         <a:solidFill>
           <a:srgbClr val="FFFFFF"/>
         </a:solidFill>
+        <a:effectLst/>
       </p:bgPr>
     </p:bg>
     <p:spTree>
@@ -547,7 +557,9 @@
       <p:sp>
         <p:nvSpPr>
           <p:cNvPr id="2" name="Title Text"/>
-          <p:cNvSpPr txBox="1"/>
+          <p:cNvSpPr txBox="1">
+            <a:spLocks noGrp="1"/>
+          </p:cNvSpPr>
           <p:nvPr>
             <p:ph type="title"/>
           </p:nvPr>
@@ -565,7 +577,7 @@
           </a:ln>
           <a:extLst>
             <a:ext uri="{C572A759-6A51-4108-AA02-DFA0A04FC94B}">
-              <ma14:wrappingTextBoxFlag xmlns:ma14="http://schemas.microsoft.com/office/mac/drawingml/2011/main" val="1"/>
+              <ma14:wrappingTextBoxFlag xmlns:ma14="http://schemas.microsoft.com/office/mac/drawingml/2011/main" xmlns:a14="http://schemas.microsoft.com/office/drawing/2010/main" xmlns:m="http://schemas.openxmlformats.org/officeDocument/2006/math" xmlns="" val="1"/>
             </a:ext>
           </a:extLst>
         </p:spPr>
@@ -573,7 +585,6 @@
           <a:bodyPr lIns="45719" rIns="45719" anchor="ctr"/>
           <a:lstStyle/>
           <a:p>
-            <a:pPr/>
             <a:r>
               <a:t>Title Text</a:t>
             </a:r>
@@ -583,7 +594,9 @@
       <p:sp>
         <p:nvSpPr>
           <p:cNvPr id="3" name="Body Level One…"/>
-          <p:cNvSpPr txBox="1"/>
+          <p:cNvSpPr txBox="1">
+            <a:spLocks noGrp="1"/>
+          </p:cNvSpPr>
           <p:nvPr>
             <p:ph type="body" idx="1"/>
           </p:nvPr>
@@ -601,7 +614,7 @@
           </a:ln>
           <a:extLst>
             <a:ext uri="{C572A759-6A51-4108-AA02-DFA0A04FC94B}">
-              <ma14:wrappingTextBoxFlag xmlns:ma14="http://schemas.microsoft.com/office/mac/drawingml/2011/main" val="1"/>
+              <ma14:wrappingTextBoxFlag xmlns:ma14="http://schemas.microsoft.com/office/mac/drawingml/2011/main" xmlns:a14="http://schemas.microsoft.com/office/drawing/2010/main" xmlns:m="http://schemas.openxmlformats.org/officeDocument/2006/math" xmlns="" val="1"/>
             </a:ext>
           </a:extLst>
         </p:spPr>
@@ -609,7 +622,6 @@
           <a:bodyPr lIns="45719" rIns="45719"/>
           <a:lstStyle/>
           <a:p>
-            <a:pPr/>
             <a:r>
               <a:t>Body Level One</a:t>
             </a:r>
@@ -643,7 +655,9 @@
       <p:sp>
         <p:nvSpPr>
           <p:cNvPr id="4" name="Slide Number"/>
-          <p:cNvSpPr txBox="1"/>
+          <p:cNvSpPr txBox="1">
+            <a:spLocks noGrp="1"/>
+          </p:cNvSpPr>
           <p:nvPr>
             <p:ph type="sldNum" sz="quarter" idx="2"/>
           </p:nvPr>
@@ -670,8 +684,10 @@
             </a:lvl1pPr>
           </a:lstStyle>
           <a:p>
-            <a:pPr/>
-            <a:fld id="{86CB4B4D-7CA3-9044-876B-883B54F8677D}" type="slidenum"/>
+            <a:fld id="{86CB4B4D-7CA3-9044-876B-883B54F8677D}" type="slidenum">
+              <a:t>‹#›</a:t>
+            </a:fld>
+            <a:endParaRPr/>
           </a:p>
         </p:txBody>
       </p:sp>
@@ -679,9 +695,9 @@
   </p:cSld>
   <p:clrMap bg1="lt1" tx1="dk1" bg2="lt2" tx2="dk2" accent1="accent1" accent2="accent2" accent3="accent3" accent4="accent4" accent5="accent5" accent6="accent6" hlink="hlink" folHlink="folHlink"/>
   <p:sldLayoutIdLst>
-    <p:sldLayoutId id="2147483649" r:id="rId2"/>
+    <p:sldLayoutId id="2147483649" r:id="rId1"/>
   </p:sldLayoutIdLst>
-  <p:transition xmlns:p14="http://schemas.microsoft.com/office/powerpoint/2010/main" spd="med" advClick="1"/>
+  <p:transition spd="med"/>
   <p:txStyles>
     <p:titleStyle>
       <a:lvl1pPr marL="0" marR="0" indent="0" algn="ctr" defTabSz="914400" rtl="0" latinLnBrk="0">
@@ -699,7 +715,7 @@
         <a:buFontTx/>
         <a:buNone/>
         <a:tabLst/>
-        <a:defRPr b="0" baseline="0" cap="none" i="0" spc="0" strike="noStrike" sz="4400" u="none">
+        <a:defRPr sz="4400" b="0" i="0" u="none" strike="noStrike" cap="none" spc="0" baseline="0">
           <a:solidFill>
             <a:srgbClr val="000000"/>
           </a:solidFill>
@@ -725,7 +741,7 @@
         <a:buFontTx/>
         <a:buNone/>
         <a:tabLst/>
-        <a:defRPr b="0" baseline="0" cap="none" i="0" spc="0" strike="noStrike" sz="4400" u="none">
+        <a:defRPr sz="4400" b="0" i="0" u="none" strike="noStrike" cap="none" spc="0" baseline="0">
           <a:solidFill>
             <a:srgbClr val="000000"/>
           </a:solidFill>
@@ -751,7 +767,7 @@
         <a:buFontTx/>
         <a:buNone/>
         <a:tabLst/>
-        <a:defRPr b="0" baseline="0" cap="none" i="0" spc="0" strike="noStrike" sz="4400" u="none">
+        <a:defRPr sz="4400" b="0" i="0" u="none" strike="noStrike" cap="none" spc="0" baseline="0">
           <a:solidFill>
             <a:srgbClr val="000000"/>
           </a:solidFill>
@@ -777,7 +793,7 @@
         <a:buFontTx/>
         <a:buNone/>
         <a:tabLst/>
-        <a:defRPr b="0" baseline="0" cap="none" i="0" spc="0" strike="noStrike" sz="4400" u="none">
+        <a:defRPr sz="4400" b="0" i="0" u="none" strike="noStrike" cap="none" spc="0" baseline="0">
           <a:solidFill>
             <a:srgbClr val="000000"/>
           </a:solidFill>
@@ -803,7 +819,7 @@
         <a:buFontTx/>
         <a:buNone/>
         <a:tabLst/>
-        <a:defRPr b="0" baseline="0" cap="none" i="0" spc="0" strike="noStrike" sz="4400" u="none">
+        <a:defRPr sz="4400" b="0" i="0" u="none" strike="noStrike" cap="none" spc="0" baseline="0">
           <a:solidFill>
             <a:srgbClr val="000000"/>
           </a:solidFill>
@@ -829,7 +845,7 @@
         <a:buFontTx/>
         <a:buNone/>
         <a:tabLst/>
-        <a:defRPr b="0" baseline="0" cap="none" i="0" spc="0" strike="noStrike" sz="4400" u="none">
+        <a:defRPr sz="4400" b="0" i="0" u="none" strike="noStrike" cap="none" spc="0" baseline="0">
           <a:solidFill>
             <a:srgbClr val="000000"/>
           </a:solidFill>
@@ -855,7 +871,7 @@
         <a:buFontTx/>
         <a:buNone/>
         <a:tabLst/>
-        <a:defRPr b="0" baseline="0" cap="none" i="0" spc="0" strike="noStrike" sz="4400" u="none">
+        <a:defRPr sz="4400" b="0" i="0" u="none" strike="noStrike" cap="none" spc="0" baseline="0">
           <a:solidFill>
             <a:srgbClr val="000000"/>
           </a:solidFill>
@@ -881,7 +897,7 @@
         <a:buFontTx/>
         <a:buNone/>
         <a:tabLst/>
-        <a:defRPr b="0" baseline="0" cap="none" i="0" spc="0" strike="noStrike" sz="4400" u="none">
+        <a:defRPr sz="4400" b="0" i="0" u="none" strike="noStrike" cap="none" spc="0" baseline="0">
           <a:solidFill>
             <a:srgbClr val="000000"/>
           </a:solidFill>
@@ -907,7 +923,7 @@
         <a:buFontTx/>
         <a:buNone/>
         <a:tabLst/>
-        <a:defRPr b="0" baseline="0" cap="none" i="0" spc="0" strike="noStrike" sz="4400" u="none">
+        <a:defRPr sz="4400" b="0" i="0" u="none" strike="noStrike" cap="none" spc="0" baseline="0">
           <a:solidFill>
             <a:srgbClr val="000000"/>
           </a:solidFill>
@@ -935,7 +951,7 @@
         <a:buFont typeface="Arial"/>
         <a:buChar char="•"/>
         <a:tabLst/>
-        <a:defRPr b="0" baseline="0" cap="none" i="0" spc="0" strike="noStrike" sz="3200" u="none">
+        <a:defRPr sz="3200" b="0" i="0" u="none" strike="noStrike" cap="none" spc="0" baseline="0">
           <a:solidFill>
             <a:srgbClr val="000000"/>
           </a:solidFill>
@@ -961,7 +977,7 @@
         <a:buFont typeface="Arial"/>
         <a:buChar char="–"/>
         <a:tabLst/>
-        <a:defRPr b="0" baseline="0" cap="none" i="0" spc="0" strike="noStrike" sz="3200" u="none">
+        <a:defRPr sz="3200" b="0" i="0" u="none" strike="noStrike" cap="none" spc="0" baseline="0">
           <a:solidFill>
             <a:srgbClr val="000000"/>
           </a:solidFill>
@@ -987,7 +1003,7 @@
         <a:buFont typeface="Arial"/>
         <a:buChar char="•"/>
         <a:tabLst/>
-        <a:defRPr b="0" baseline="0" cap="none" i="0" spc="0" strike="noStrike" sz="3200" u="none">
+        <a:defRPr sz="3200" b="0" i="0" u="none" strike="noStrike" cap="none" spc="0" baseline="0">
           <a:solidFill>
             <a:srgbClr val="000000"/>
           </a:solidFill>
@@ -1013,7 +1029,7 @@
         <a:buFont typeface="Arial"/>
         <a:buChar char="–"/>
         <a:tabLst/>
-        <a:defRPr b="0" baseline="0" cap="none" i="0" spc="0" strike="noStrike" sz="3200" u="none">
+        <a:defRPr sz="3200" b="0" i="0" u="none" strike="noStrike" cap="none" spc="0" baseline="0">
           <a:solidFill>
             <a:srgbClr val="000000"/>
           </a:solidFill>
@@ -1039,7 +1055,7 @@
         <a:buFont typeface="Arial"/>
         <a:buChar char="»"/>
         <a:tabLst/>
-        <a:defRPr b="0" baseline="0" cap="none" i="0" spc="0" strike="noStrike" sz="3200" u="none">
+        <a:defRPr sz="3200" b="0" i="0" u="none" strike="noStrike" cap="none" spc="0" baseline="0">
           <a:solidFill>
             <a:srgbClr val="000000"/>
           </a:solidFill>
@@ -1065,7 +1081,7 @@
         <a:buFont typeface="Arial"/>
         <a:buChar char="•"/>
         <a:tabLst/>
-        <a:defRPr b="0" baseline="0" cap="none" i="0" spc="0" strike="noStrike" sz="3200" u="none">
+        <a:defRPr sz="3200" b="0" i="0" u="none" strike="noStrike" cap="none" spc="0" baseline="0">
           <a:solidFill>
             <a:srgbClr val="000000"/>
           </a:solidFill>
@@ -1091,7 +1107,7 @@
         <a:buFont typeface="Arial"/>
         <a:buChar char="•"/>
         <a:tabLst/>
-        <a:defRPr b="0" baseline="0" cap="none" i="0" spc="0" strike="noStrike" sz="3200" u="none">
+        <a:defRPr sz="3200" b="0" i="0" u="none" strike="noStrike" cap="none" spc="0" baseline="0">
           <a:solidFill>
             <a:srgbClr val="000000"/>
           </a:solidFill>
@@ -1117,7 +1133,7 @@
         <a:buFont typeface="Arial"/>
         <a:buChar char="•"/>
         <a:tabLst/>
-        <a:defRPr b="0" baseline="0" cap="none" i="0" spc="0" strike="noStrike" sz="3200" u="none">
+        <a:defRPr sz="3200" b="0" i="0" u="none" strike="noStrike" cap="none" spc="0" baseline="0">
           <a:solidFill>
             <a:srgbClr val="000000"/>
           </a:solidFill>
@@ -1143,7 +1159,7 @@
         <a:buFont typeface="Arial"/>
         <a:buChar char="•"/>
         <a:tabLst/>
-        <a:defRPr b="0" baseline="0" cap="none" i="0" spc="0" strike="noStrike" sz="3200" u="none">
+        <a:defRPr sz="3200" b="0" i="0" u="none" strike="noStrike" cap="none" spc="0" baseline="0">
           <a:solidFill>
             <a:srgbClr val="000000"/>
           </a:solidFill>
@@ -1171,7 +1187,7 @@
         <a:buFontTx/>
         <a:buNone/>
         <a:tabLst/>
-        <a:defRPr b="0" baseline="0" cap="none" i="0" spc="0" strike="noStrike" sz="1200" u="none">
+        <a:defRPr sz="1200" b="0" i="0" u="none" strike="noStrike" cap="none" spc="0" baseline="0">
           <a:solidFill>
             <a:schemeClr val="tx1"/>
           </a:solidFill>
@@ -1197,7 +1213,7 @@
         <a:buFontTx/>
         <a:buNone/>
         <a:tabLst/>
-        <a:defRPr b="0" baseline="0" cap="none" i="0" spc="0" strike="noStrike" sz="1200" u="none">
+        <a:defRPr sz="1200" b="0" i="0" u="none" strike="noStrike" cap="none" spc="0" baseline="0">
           <a:solidFill>
             <a:schemeClr val="tx1"/>
           </a:solidFill>
@@ -1223,7 +1239,7 @@
         <a:buFontTx/>
         <a:buNone/>
         <a:tabLst/>
-        <a:defRPr b="0" baseline="0" cap="none" i="0" spc="0" strike="noStrike" sz="1200" u="none">
+        <a:defRPr sz="1200" b="0" i="0" u="none" strike="noStrike" cap="none" spc="0" baseline="0">
           <a:solidFill>
             <a:schemeClr val="tx1"/>
           </a:solidFill>
@@ -1249,7 +1265,7 @@
         <a:buFontTx/>
         <a:buNone/>
         <a:tabLst/>
-        <a:defRPr b="0" baseline="0" cap="none" i="0" spc="0" strike="noStrike" sz="1200" u="none">
+        <a:defRPr sz="1200" b="0" i="0" u="none" strike="noStrike" cap="none" spc="0" baseline="0">
           <a:solidFill>
             <a:schemeClr val="tx1"/>
           </a:solidFill>
@@ -1275,7 +1291,7 @@
         <a:buFontTx/>
         <a:buNone/>
         <a:tabLst/>
-        <a:defRPr b="0" baseline="0" cap="none" i="0" spc="0" strike="noStrike" sz="1200" u="none">
+        <a:defRPr sz="1200" b="0" i="0" u="none" strike="noStrike" cap="none" spc="0" baseline="0">
           <a:solidFill>
             <a:schemeClr val="tx1"/>
           </a:solidFill>
@@ -1301,7 +1317,7 @@
         <a:buFontTx/>
         <a:buNone/>
         <a:tabLst/>
-        <a:defRPr b="0" baseline="0" cap="none" i="0" spc="0" strike="noStrike" sz="1200" u="none">
+        <a:defRPr sz="1200" b="0" i="0" u="none" strike="noStrike" cap="none" spc="0" baseline="0">
           <a:solidFill>
             <a:schemeClr val="tx1"/>
           </a:solidFill>
@@ -1327,7 +1343,7 @@
         <a:buFontTx/>
         <a:buNone/>
         <a:tabLst/>
-        <a:defRPr b="0" baseline="0" cap="none" i="0" spc="0" strike="noStrike" sz="1200" u="none">
+        <a:defRPr sz="1200" b="0" i="0" u="none" strike="noStrike" cap="none" spc="0" baseline="0">
           <a:solidFill>
             <a:schemeClr val="tx1"/>
           </a:solidFill>
@@ -1353,7 +1369,7 @@
         <a:buFontTx/>
         <a:buNone/>
         <a:tabLst/>
-        <a:defRPr b="0" baseline="0" cap="none" i="0" spc="0" strike="noStrike" sz="1200" u="none">
+        <a:defRPr sz="1200" b="0" i="0" u="none" strike="noStrike" cap="none" spc="0" baseline="0">
           <a:solidFill>
             <a:schemeClr val="tx1"/>
           </a:solidFill>
@@ -1379,7 +1395,7 @@
         <a:buFontTx/>
         <a:buNone/>
         <a:tabLst/>
-        <a:defRPr b="0" baseline="0" cap="none" i="0" spc="0" strike="noStrike" sz="1200" u="none">
+        <a:defRPr sz="1200" b="0" i="0" u="none" strike="noStrike" cap="none" spc="0" baseline="0">
           <a:solidFill>
             <a:schemeClr val="tx1"/>
           </a:solidFill>
@@ -1396,13 +1412,14 @@
 </file>
 
 <file path=ppt/slides/slide1.xml><?xml version="1.0" encoding="utf-8"?>
-<p:sld xmlns:a="http://schemas.openxmlformats.org/drawingml/2006/main" xmlns:r="http://schemas.openxmlformats.org/officeDocument/2006/relationships" xmlns:p="http://schemas.openxmlformats.org/presentationml/2006/main" xmlns:m="http://schemas.openxmlformats.org/officeDocument/2006/math" xmlns:a14="http://schemas.microsoft.com/office/drawing/2010/main" showMasterSp="1" showMasterPhAnim="1">
+<p:sld xmlns:a="http://schemas.openxmlformats.org/drawingml/2006/main" xmlns:r="http://schemas.openxmlformats.org/officeDocument/2006/relationships" xmlns:p="http://schemas.openxmlformats.org/presentationml/2006/main">
   <p:cSld>
     <p:bg>
       <p:bgPr>
         <a:solidFill>
           <a:srgbClr val="0E1B2A"/>
         </a:solidFill>
+        <a:effectLst/>
       </p:bgPr>
     </p:bg>
     <p:spTree>
@@ -1444,7 +1461,7 @@
           <a:bodyPr lIns="45719" rIns="45719"/>
           <a:lstStyle/>
           <a:p>
-            <a:pPr/>
+            <a:endParaRPr/>
           </a:p>
         </p:txBody>
       </p:sp>
@@ -1473,7 +1490,7 @@
           <a:bodyPr lIns="45719" rIns="45719"/>
           <a:lstStyle/>
           <a:p>
-            <a:pPr/>
+            <a:endParaRPr/>
           </a:p>
         </p:txBody>
       </p:sp>
@@ -1496,7 +1513,7 @@
           </a:ln>
           <a:extLst>
             <a:ext uri="{C572A759-6A51-4108-AA02-DFA0A04FC94B}">
-              <ma14:wrappingTextBoxFlag xmlns:ma14="http://schemas.microsoft.com/office/mac/drawingml/2011/main" val="1"/>
+              <ma14:wrappingTextBoxFlag xmlns:ma14="http://schemas.microsoft.com/office/mac/drawingml/2011/main" xmlns:a14="http://schemas.microsoft.com/office/drawing/2010/main" xmlns:m="http://schemas.openxmlformats.org/officeDocument/2006/math" xmlns="" val="1"/>
             </a:ext>
           </a:extLst>
         </p:spPr>
@@ -1557,7 +1574,7 @@
           </a:ln>
           <a:extLst>
             <a:ext uri="{C572A759-6A51-4108-AA02-DFA0A04FC94B}">
-              <ma14:wrappingTextBoxFlag xmlns:ma14="http://schemas.microsoft.com/office/mac/drawingml/2011/main" val="1"/>
+              <ma14:wrappingTextBoxFlag xmlns:ma14="http://schemas.microsoft.com/office/mac/drawingml/2011/main" xmlns:a14="http://schemas.microsoft.com/office/drawing/2010/main" xmlns:m="http://schemas.openxmlformats.org/officeDocument/2006/math" xmlns="" val="1"/>
             </a:ext>
           </a:extLst>
         </p:spPr>
@@ -1567,7 +1584,7 @@
           </a:bodyPr>
           <a:lstStyle>
             <a:lvl1pPr>
-              <a:defRPr b="1" sz="4000">
+              <a:defRPr sz="4000" b="1">
                 <a:solidFill>
                   <a:srgbClr val="FFFFFF"/>
                 </a:solidFill>
@@ -1579,7 +1596,6 @@
             </a:lvl1pPr>
           </a:lstStyle>
           <a:p>
-            <a:pPr/>
             <a:r>
               <a:t>Safe Login</a:t>
             </a:r>
@@ -1605,7 +1621,7 @@
           </a:ln>
           <a:extLst>
             <a:ext uri="{C572A759-6A51-4108-AA02-DFA0A04FC94B}">
-              <ma14:wrappingTextBoxFlag xmlns:ma14="http://schemas.microsoft.com/office/mac/drawingml/2011/main" val="1"/>
+              <ma14:wrappingTextBoxFlag xmlns:ma14="http://schemas.microsoft.com/office/mac/drawingml/2011/main" xmlns:a14="http://schemas.microsoft.com/office/drawing/2010/main" xmlns:m="http://schemas.openxmlformats.org/officeDocument/2006/math" xmlns="" val="1"/>
             </a:ext>
           </a:extLst>
         </p:spPr>
@@ -1616,7 +1632,7 @@
           <a:lstStyle/>
           <a:p>
             <a:pPr>
-              <a:defRPr b="1" sz="2200">
+              <a:defRPr sz="2200" b="1">
                 <a:solidFill>
                   <a:srgbClr val="FFFFFF"/>
                 </a:solidFill>
@@ -1632,7 +1648,7 @@
           </a:p>
           <a:p>
             <a:pPr>
-              <a:defRPr b="1" sz="2200">
+              <a:defRPr sz="2200" b="1">
                 <a:solidFill>
                   <a:srgbClr val="FFFFFF"/>
                 </a:solidFill>
@@ -1667,7 +1683,7 @@
           </a:ln>
           <a:extLst>
             <a:ext uri="{C572A759-6A51-4108-AA02-DFA0A04FC94B}">
-              <ma14:wrappingTextBoxFlag xmlns:ma14="http://schemas.microsoft.com/office/mac/drawingml/2011/main" val="1"/>
+              <ma14:wrappingTextBoxFlag xmlns:ma14="http://schemas.microsoft.com/office/mac/drawingml/2011/main" xmlns:a14="http://schemas.microsoft.com/office/drawing/2010/main" xmlns:m="http://schemas.openxmlformats.org/officeDocument/2006/math" xmlns="" val="1"/>
             </a:ext>
           </a:extLst>
         </p:spPr>
@@ -1689,7 +1705,6 @@
             </a:lvl1pPr>
           </a:lstStyle>
           <a:p>
-            <a:pPr/>
             <a:r>
               <a:t>A Python-based cybersecurity classification project using the Risk-Based Authentication dataset</a:t>
             </a:r>
@@ -1725,7 +1740,7 @@
           <a:bodyPr lIns="45719" rIns="45719"/>
           <a:lstStyle/>
           <a:p>
-            <a:pPr/>
+            <a:endParaRPr/>
           </a:p>
         </p:txBody>
       </p:sp>
@@ -1748,7 +1763,7 @@
           </a:ln>
           <a:extLst>
             <a:ext uri="{C572A759-6A51-4108-AA02-DFA0A04FC94B}">
-              <ma14:wrappingTextBoxFlag xmlns:ma14="http://schemas.microsoft.com/office/mac/drawingml/2011/main" val="1"/>
+              <ma14:wrappingTextBoxFlag xmlns:ma14="http://schemas.microsoft.com/office/mac/drawingml/2011/main" xmlns:a14="http://schemas.microsoft.com/office/drawing/2010/main" xmlns:m="http://schemas.openxmlformats.org/officeDocument/2006/math" xmlns="" val="1"/>
             </a:ext>
           </a:extLst>
         </p:spPr>
@@ -1758,7 +1773,7 @@
           </a:bodyPr>
           <a:lstStyle>
             <a:lvl1pPr algn="ctr">
-              <a:defRPr b="1" sz="1000">
+              <a:defRPr sz="1000" b="1">
                 <a:solidFill>
                   <a:srgbClr val="2ECC8F"/>
                 </a:solidFill>
@@ -1770,7 +1785,6 @@
             </a:lvl1pPr>
           </a:lstStyle>
           <a:p>
-            <a:pPr/>
             <a:r>
               <a:t>PYTHON</a:t>
             </a:r>
@@ -1806,7 +1820,7 @@
           <a:bodyPr lIns="45719" rIns="45719"/>
           <a:lstStyle/>
           <a:p>
-            <a:pPr/>
+            <a:endParaRPr/>
           </a:p>
         </p:txBody>
       </p:sp>
@@ -1829,7 +1843,7 @@
           </a:ln>
           <a:extLst>
             <a:ext uri="{C572A759-6A51-4108-AA02-DFA0A04FC94B}">
-              <ma14:wrappingTextBoxFlag xmlns:ma14="http://schemas.microsoft.com/office/mac/drawingml/2011/main" val="1"/>
+              <ma14:wrappingTextBoxFlag xmlns:ma14="http://schemas.microsoft.com/office/mac/drawingml/2011/main" xmlns:a14="http://schemas.microsoft.com/office/drawing/2010/main" xmlns:m="http://schemas.openxmlformats.org/officeDocument/2006/math" xmlns="" val="1"/>
             </a:ext>
           </a:extLst>
         </p:spPr>
@@ -1839,7 +1853,7 @@
           </a:bodyPr>
           <a:lstStyle>
             <a:lvl1pPr algn="ctr">
-              <a:defRPr b="1" sz="1000">
+              <a:defRPr sz="1000" b="1">
                 <a:solidFill>
                   <a:srgbClr val="2ECC8F"/>
                 </a:solidFill>
@@ -1851,7 +1865,6 @@
             </a:lvl1pPr>
           </a:lstStyle>
           <a:p>
-            <a:pPr/>
             <a:r>
               <a:t>RANDOM FOREST</a:t>
             </a:r>
@@ -1887,7 +1900,7 @@
           <a:bodyPr lIns="45719" rIns="45719"/>
           <a:lstStyle/>
           <a:p>
-            <a:pPr/>
+            <a:endParaRPr/>
           </a:p>
         </p:txBody>
       </p:sp>
@@ -1910,7 +1923,7 @@
           </a:ln>
           <a:extLst>
             <a:ext uri="{C572A759-6A51-4108-AA02-DFA0A04FC94B}">
-              <ma14:wrappingTextBoxFlag xmlns:ma14="http://schemas.microsoft.com/office/mac/drawingml/2011/main" val="1"/>
+              <ma14:wrappingTextBoxFlag xmlns:ma14="http://schemas.microsoft.com/office/mac/drawingml/2011/main" xmlns:a14="http://schemas.microsoft.com/office/drawing/2010/main" xmlns:m="http://schemas.openxmlformats.org/officeDocument/2006/math" xmlns="" val="1"/>
             </a:ext>
           </a:extLst>
         </p:spPr>
@@ -1920,7 +1933,7 @@
           </a:bodyPr>
           <a:lstStyle>
             <a:lvl1pPr algn="ctr">
-              <a:defRPr b="1" sz="1000">
+              <a:defRPr sz="1000" b="1">
                 <a:solidFill>
                   <a:srgbClr val="2ECC8F"/>
                 </a:solidFill>
@@ -1932,7 +1945,6 @@
             </a:lvl1pPr>
           </a:lstStyle>
           <a:p>
-            <a:pPr/>
             <a:r>
               <a:t>CYBERSECURITY</a:t>
             </a:r>
@@ -1958,7 +1970,7 @@
           </a:ln>
           <a:extLst>
             <a:ext uri="{C572A759-6A51-4108-AA02-DFA0A04FC94B}">
-              <ma14:wrappingTextBoxFlag xmlns:ma14="http://schemas.microsoft.com/office/mac/drawingml/2011/main" val="1"/>
+              <ma14:wrappingTextBoxFlag xmlns:ma14="http://schemas.microsoft.com/office/mac/drawingml/2011/main" xmlns:a14="http://schemas.microsoft.com/office/drawing/2010/main" xmlns:m="http://schemas.openxmlformats.org/officeDocument/2006/math" xmlns="" val="1"/>
             </a:ext>
           </a:extLst>
         </p:spPr>
@@ -1968,7 +1980,7 @@
           </a:bodyPr>
           <a:lstStyle>
             <a:lvl1pPr>
-              <a:defRPr b="1" sz="1600">
+              <a:defRPr sz="1600" b="1">
                 <a:solidFill>
                   <a:srgbClr val="FFFFFF"/>
                 </a:solidFill>
@@ -1980,7 +1992,6 @@
             </a:lvl1pPr>
           </a:lstStyle>
           <a:p>
-            <a:pPr/>
             <a:r>
               <a:t>By: Pranav Das, Sahas Vijayakumar, Julia Jeng, Aarush Kikkuru</a:t>
             </a:r>
@@ -2006,7 +2017,7 @@
           </a:ln>
           <a:extLst>
             <a:ext uri="{C572A759-6A51-4108-AA02-DFA0A04FC94B}">
-              <ma14:wrappingTextBoxFlag xmlns:ma14="http://schemas.microsoft.com/office/mac/drawingml/2011/main" val="1"/>
+              <ma14:wrappingTextBoxFlag xmlns:ma14="http://schemas.microsoft.com/office/mac/drawingml/2011/main" xmlns:a14="http://schemas.microsoft.com/office/drawing/2010/main" xmlns:m="http://schemas.openxmlformats.org/officeDocument/2006/math" xmlns="" val="1"/>
             </a:ext>
           </a:extLst>
         </p:spPr>
@@ -2028,7 +2039,6 @@
             </a:lvl1pPr>
           </a:lstStyle>
           <a:p>
-            <a:pPr/>
             <a:r>
               <a:t>Programming Project Presentation</a:t>
             </a:r>
@@ -2040,18 +2050,19 @@
   <p:clrMapOvr>
     <a:masterClrMapping/>
   </p:clrMapOvr>
-  <p:transition xmlns:p14="http://schemas.microsoft.com/office/powerpoint/2010/main" spd="med" advClick="1"/>
+  <p:transition spd="med"/>
 </p:sld>
 </file>
 
 <file path=ppt/slides/slide2.xml><?xml version="1.0" encoding="utf-8"?>
-<p:sld xmlns:a="http://schemas.openxmlformats.org/drawingml/2006/main" xmlns:r="http://schemas.openxmlformats.org/officeDocument/2006/relationships" xmlns:p="http://schemas.openxmlformats.org/presentationml/2006/main" xmlns:m="http://schemas.openxmlformats.org/officeDocument/2006/math" xmlns:a14="http://schemas.microsoft.com/office/drawing/2010/main" showMasterSp="1" showMasterPhAnim="1">
+<p:sld xmlns:a="http://schemas.openxmlformats.org/drawingml/2006/main" xmlns:r="http://schemas.openxmlformats.org/officeDocument/2006/relationships" xmlns:p="http://schemas.openxmlformats.org/presentationml/2006/main">
   <p:cSld>
     <p:bg>
       <p:bgPr>
         <a:solidFill>
           <a:srgbClr val="F3F6FA"/>
         </a:solidFill>
+        <a:effectLst/>
       </p:bgPr>
     </p:bg>
     <p:spTree>
@@ -2087,7 +2098,7 @@
           </a:ln>
           <a:extLst>
             <a:ext uri="{C572A759-6A51-4108-AA02-DFA0A04FC94B}">
-              <ma14:wrappingTextBoxFlag xmlns:ma14="http://schemas.microsoft.com/office/mac/drawingml/2011/main" val="1"/>
+              <ma14:wrappingTextBoxFlag xmlns:ma14="http://schemas.microsoft.com/office/mac/drawingml/2011/main" xmlns:a14="http://schemas.microsoft.com/office/drawing/2010/main" xmlns:m="http://schemas.openxmlformats.org/officeDocument/2006/math" xmlns="" val="1"/>
             </a:ext>
           </a:extLst>
         </p:spPr>
@@ -2097,7 +2108,7 @@
           </a:bodyPr>
           <a:lstStyle>
             <a:lvl1pPr>
-              <a:defRPr b="1" spc="100" sz="1100">
+              <a:defRPr sz="1100" b="1" spc="100">
                 <a:solidFill>
                   <a:srgbClr val="6B7789"/>
                 </a:solidFill>
@@ -2109,7 +2120,6 @@
             </a:lvl1pPr>
           </a:lstStyle>
           <a:p>
-            <a:pPr/>
             <a:r>
               <a:t>LOGIN THREAT DETECTION • MACHINE LEARNING PROJECT</a:t>
             </a:r>
@@ -2141,7 +2151,7 @@
           <a:bodyPr lIns="45719" rIns="45719"/>
           <a:lstStyle/>
           <a:p>
-            <a:pPr/>
+            <a:endParaRPr/>
           </a:p>
         </p:txBody>
       </p:sp>
@@ -2164,7 +2174,7 @@
           </a:ln>
           <a:extLst>
             <a:ext uri="{C572A759-6A51-4108-AA02-DFA0A04FC94B}">
-              <ma14:wrappingTextBoxFlag xmlns:ma14="http://schemas.microsoft.com/office/mac/drawingml/2011/main" val="1"/>
+              <ma14:wrappingTextBoxFlag xmlns:ma14="http://schemas.microsoft.com/office/mac/drawingml/2011/main" xmlns:a14="http://schemas.microsoft.com/office/drawing/2010/main" xmlns:m="http://schemas.openxmlformats.org/officeDocument/2006/math" xmlns="" val="1"/>
             </a:ext>
           </a:extLst>
         </p:spPr>
@@ -2174,7 +2184,7 @@
           </a:bodyPr>
           <a:lstStyle>
             <a:lvl1pPr>
-              <a:defRPr b="1" sz="3000">
+              <a:defRPr sz="3000" b="1">
                 <a:solidFill>
                   <a:srgbClr val="16233A"/>
                 </a:solidFill>
@@ -2186,7 +2196,6 @@
             </a:lvl1pPr>
           </a:lstStyle>
           <a:p>
-            <a:pPr/>
             <a:r>
               <a:t>Introduction: Why This Project Matters</a:t>
             </a:r>
@@ -2212,7 +2221,7 @@
           </a:ln>
           <a:extLst>
             <a:ext uri="{C572A759-6A51-4108-AA02-DFA0A04FC94B}">
-              <ma14:wrappingTextBoxFlag xmlns:ma14="http://schemas.microsoft.com/office/mac/drawingml/2011/main" val="1"/>
+              <ma14:wrappingTextBoxFlag xmlns:ma14="http://schemas.microsoft.com/office/mac/drawingml/2011/main" xmlns:a14="http://schemas.microsoft.com/office/drawing/2010/main" xmlns:m="http://schemas.openxmlformats.org/officeDocument/2006/math" xmlns="" val="1"/>
             </a:ext>
           </a:extLst>
         </p:spPr>
@@ -2234,7 +2243,6 @@
             </a:lvl1pPr>
           </a:lstStyle>
           <a:p>
-            <a:pPr/>
             <a:r>
               <a:t>A login can look normal on the surface while still carrying multiple risk signals.</a:t>
             </a:r>
@@ -2266,7 +2274,7 @@
             </a:solidFill>
           </a:ln>
           <a:effectLst>
-            <a:outerShdw sx="100000" sy="100000" kx="0" ky="0" algn="b" rotWithShape="0" blurRad="76200" dist="25400" dir="5400000">
+            <a:outerShdw blurRad="76200" dist="25400" dir="5400000" rotWithShape="0">
               <a:srgbClr val="9AA5B1">
                 <a:alpha val="25000"/>
               </a:srgbClr>
@@ -2277,7 +2285,7 @@
           <a:bodyPr lIns="45719" rIns="45719"/>
           <a:lstStyle/>
           <a:p>
-            <a:pPr/>
+            <a:endParaRPr/>
           </a:p>
         </p:txBody>
       </p:sp>
@@ -2306,7 +2314,7 @@
           <a:bodyPr lIns="45719" rIns="45719"/>
           <a:lstStyle/>
           <a:p>
-            <a:pPr/>
+            <a:endParaRPr/>
           </a:p>
         </p:txBody>
       </p:sp>
@@ -2329,7 +2337,7 @@
           </a:ln>
           <a:extLst>
             <a:ext uri="{C572A759-6A51-4108-AA02-DFA0A04FC94B}">
-              <ma14:wrappingTextBoxFlag xmlns:ma14="http://schemas.microsoft.com/office/mac/drawingml/2011/main" val="1"/>
+              <ma14:wrappingTextBoxFlag xmlns:ma14="http://schemas.microsoft.com/office/mac/drawingml/2011/main" xmlns:a14="http://schemas.microsoft.com/office/drawing/2010/main" xmlns:m="http://schemas.openxmlformats.org/officeDocument/2006/math" xmlns="" val="1"/>
             </a:ext>
           </a:extLst>
         </p:spPr>
@@ -2339,7 +2347,7 @@
           </a:bodyPr>
           <a:lstStyle>
             <a:lvl1pPr algn="ctr">
-              <a:defRPr b="1" sz="1300">
+              <a:defRPr sz="1300" b="1">
                 <a:solidFill>
                   <a:srgbClr val="4C8DFF"/>
                 </a:solidFill>
@@ -2351,7 +2359,6 @@
             </a:lvl1pPr>
           </a:lstStyle>
           <a:p>
-            <a:pPr/>
             <a:r>
               <a:t>01</a:t>
             </a:r>
@@ -2377,7 +2384,7 @@
           </a:ln>
           <a:extLst>
             <a:ext uri="{C572A759-6A51-4108-AA02-DFA0A04FC94B}">
-              <ma14:wrappingTextBoxFlag xmlns:ma14="http://schemas.microsoft.com/office/mac/drawingml/2011/main" val="1"/>
+              <ma14:wrappingTextBoxFlag xmlns:ma14="http://schemas.microsoft.com/office/mac/drawingml/2011/main" xmlns:a14="http://schemas.microsoft.com/office/drawing/2010/main" xmlns:m="http://schemas.openxmlformats.org/officeDocument/2006/math" xmlns="" val="1"/>
             </a:ext>
           </a:extLst>
         </p:spPr>
@@ -2387,7 +2394,7 @@
           </a:bodyPr>
           <a:lstStyle>
             <a:lvl1pPr>
-              <a:defRPr b="1" sz="1600">
+              <a:defRPr sz="1600" b="1">
                 <a:solidFill>
                   <a:srgbClr val="16233A"/>
                 </a:solidFill>
@@ -2399,7 +2406,6 @@
             </a:lvl1pPr>
           </a:lstStyle>
           <a:p>
-            <a:pPr/>
             <a:r>
               <a:t>Passwords are not enough</a:t>
             </a:r>
@@ -2425,7 +2431,7 @@
           </a:ln>
           <a:extLst>
             <a:ext uri="{C572A759-6A51-4108-AA02-DFA0A04FC94B}">
-              <ma14:wrappingTextBoxFlag xmlns:ma14="http://schemas.microsoft.com/office/mac/drawingml/2011/main" val="1"/>
+              <ma14:wrappingTextBoxFlag xmlns:ma14="http://schemas.microsoft.com/office/mac/drawingml/2011/main" xmlns:a14="http://schemas.microsoft.com/office/drawing/2010/main" xmlns:m="http://schemas.openxmlformats.org/officeDocument/2006/math" xmlns="" val="1"/>
             </a:ext>
           </a:extLst>
         </p:spPr>
@@ -2447,7 +2453,6 @@
             </a:lvl1pPr>
           </a:lstStyle>
           <a:p>
-            <a:pPr/>
             <a:r>
               <a:t>A correct password does not prove that the person logging in is the legitimate account owner.</a:t>
             </a:r>
@@ -2479,7 +2484,7 @@
             </a:solidFill>
           </a:ln>
           <a:effectLst>
-            <a:outerShdw sx="100000" sy="100000" kx="0" ky="0" algn="b" rotWithShape="0" blurRad="76200" dist="25400" dir="5400000">
+            <a:outerShdw blurRad="76200" dist="25400" dir="5400000" rotWithShape="0">
               <a:srgbClr val="9AA5B1">
                 <a:alpha val="25000"/>
               </a:srgbClr>
@@ -2490,7 +2495,7 @@
           <a:bodyPr lIns="45719" rIns="45719"/>
           <a:lstStyle/>
           <a:p>
-            <a:pPr/>
+            <a:endParaRPr/>
           </a:p>
         </p:txBody>
       </p:sp>
@@ -2519,7 +2524,7 @@
           <a:bodyPr lIns="45719" rIns="45719"/>
           <a:lstStyle/>
           <a:p>
-            <a:pPr/>
+            <a:endParaRPr/>
           </a:p>
         </p:txBody>
       </p:sp>
@@ -2542,7 +2547,7 @@
           </a:ln>
           <a:extLst>
             <a:ext uri="{C572A759-6A51-4108-AA02-DFA0A04FC94B}">
-              <ma14:wrappingTextBoxFlag xmlns:ma14="http://schemas.microsoft.com/office/mac/drawingml/2011/main" val="1"/>
+              <ma14:wrappingTextBoxFlag xmlns:ma14="http://schemas.microsoft.com/office/mac/drawingml/2011/main" xmlns:a14="http://schemas.microsoft.com/office/drawing/2010/main" xmlns:m="http://schemas.openxmlformats.org/officeDocument/2006/math" xmlns="" val="1"/>
             </a:ext>
           </a:extLst>
         </p:spPr>
@@ -2552,7 +2557,7 @@
           </a:bodyPr>
           <a:lstStyle>
             <a:lvl1pPr algn="ctr">
-              <a:defRPr b="1" sz="1300">
+              <a:defRPr sz="1300" b="1">
                 <a:solidFill>
                   <a:srgbClr val="2ECC8F"/>
                 </a:solidFill>
@@ -2564,7 +2569,6 @@
             </a:lvl1pPr>
           </a:lstStyle>
           <a:p>
-            <a:pPr/>
             <a:r>
               <a:t>02</a:t>
             </a:r>
@@ -2590,7 +2594,7 @@
           </a:ln>
           <a:extLst>
             <a:ext uri="{C572A759-6A51-4108-AA02-DFA0A04FC94B}">
-              <ma14:wrappingTextBoxFlag xmlns:ma14="http://schemas.microsoft.com/office/mac/drawingml/2011/main" val="1"/>
+              <ma14:wrappingTextBoxFlag xmlns:ma14="http://schemas.microsoft.com/office/mac/drawingml/2011/main" xmlns:a14="http://schemas.microsoft.com/office/drawing/2010/main" xmlns:m="http://schemas.openxmlformats.org/officeDocument/2006/math" xmlns="" val="1"/>
             </a:ext>
           </a:extLst>
         </p:spPr>
@@ -2600,7 +2604,7 @@
           </a:bodyPr>
           <a:lstStyle>
             <a:lvl1pPr>
-              <a:defRPr b="1" sz="1600">
+              <a:defRPr sz="1600" b="1">
                 <a:solidFill>
                   <a:srgbClr val="16233A"/>
                 </a:solidFill>
@@ -2612,7 +2616,6 @@
             </a:lvl1pPr>
           </a:lstStyle>
           <a:p>
-            <a:pPr/>
             <a:r>
               <a:t>Context reveals risk</a:t>
             </a:r>
@@ -2638,7 +2641,7 @@
           </a:ln>
           <a:extLst>
             <a:ext uri="{C572A759-6A51-4108-AA02-DFA0A04FC94B}">
-              <ma14:wrappingTextBoxFlag xmlns:ma14="http://schemas.microsoft.com/office/mac/drawingml/2011/main" val="1"/>
+              <ma14:wrappingTextBoxFlag xmlns:ma14="http://schemas.microsoft.com/office/mac/drawingml/2011/main" xmlns:a14="http://schemas.microsoft.com/office/drawing/2010/main" xmlns:m="http://schemas.openxmlformats.org/officeDocument/2006/math" xmlns="" val="1"/>
             </a:ext>
           </a:extLst>
         </p:spPr>
@@ -2660,7 +2663,6 @@
             </a:lvl1pPr>
           </a:lstStyle>
           <a:p>
-            <a:pPr/>
             <a:r>
               <a:t>Time, location, device, network, latency, and login success patterns can make suspicious activity easier to detect.</a:t>
             </a:r>
@@ -2692,7 +2694,7 @@
             </a:solidFill>
           </a:ln>
           <a:effectLst>
-            <a:outerShdw sx="100000" sy="100000" kx="0" ky="0" algn="b" rotWithShape="0" blurRad="76200" dist="25400" dir="5400000">
+            <a:outerShdw blurRad="76200" dist="25400" dir="5400000" rotWithShape="0">
               <a:srgbClr val="9AA5B1">
                 <a:alpha val="25000"/>
               </a:srgbClr>
@@ -2703,7 +2705,7 @@
           <a:bodyPr lIns="45719" rIns="45719"/>
           <a:lstStyle/>
           <a:p>
-            <a:pPr/>
+            <a:endParaRPr/>
           </a:p>
         </p:txBody>
       </p:sp>
@@ -2732,7 +2734,7 @@
           <a:bodyPr lIns="45719" rIns="45719"/>
           <a:lstStyle/>
           <a:p>
-            <a:pPr/>
+            <a:endParaRPr/>
           </a:p>
         </p:txBody>
       </p:sp>
@@ -2755,7 +2757,7 @@
           </a:ln>
           <a:extLst>
             <a:ext uri="{C572A759-6A51-4108-AA02-DFA0A04FC94B}">
-              <ma14:wrappingTextBoxFlag xmlns:ma14="http://schemas.microsoft.com/office/mac/drawingml/2011/main" val="1"/>
+              <ma14:wrappingTextBoxFlag xmlns:ma14="http://schemas.microsoft.com/office/mac/drawingml/2011/main" xmlns:a14="http://schemas.microsoft.com/office/drawing/2010/main" xmlns:m="http://schemas.openxmlformats.org/officeDocument/2006/math" xmlns="" val="1"/>
             </a:ext>
           </a:extLst>
         </p:spPr>
@@ -2765,7 +2767,7 @@
           </a:bodyPr>
           <a:lstStyle>
             <a:lvl1pPr algn="ctr">
-              <a:defRPr b="1" sz="1300">
+              <a:defRPr sz="1300" b="1">
                 <a:solidFill>
                   <a:srgbClr val="F45B69"/>
                 </a:solidFill>
@@ -2777,7 +2779,6 @@
             </a:lvl1pPr>
           </a:lstStyle>
           <a:p>
-            <a:pPr/>
             <a:r>
               <a:t>03</a:t>
             </a:r>
@@ -2803,7 +2804,7 @@
           </a:ln>
           <a:extLst>
             <a:ext uri="{C572A759-6A51-4108-AA02-DFA0A04FC94B}">
-              <ma14:wrappingTextBoxFlag xmlns:ma14="http://schemas.microsoft.com/office/mac/drawingml/2011/main" val="1"/>
+              <ma14:wrappingTextBoxFlag xmlns:ma14="http://schemas.microsoft.com/office/mac/drawingml/2011/main" xmlns:a14="http://schemas.microsoft.com/office/drawing/2010/main" xmlns:m="http://schemas.openxmlformats.org/officeDocument/2006/math" xmlns="" val="1"/>
             </a:ext>
           </a:extLst>
         </p:spPr>
@@ -2813,7 +2814,7 @@
           </a:bodyPr>
           <a:lstStyle>
             <a:lvl1pPr>
-              <a:defRPr b="1" sz="1600">
+              <a:defRPr sz="1600" b="1">
                 <a:solidFill>
                   <a:srgbClr val="16233A"/>
                 </a:solidFill>
@@ -2825,7 +2826,6 @@
             </a:lvl1pPr>
           </a:lstStyle>
           <a:p>
-            <a:pPr/>
             <a:r>
               <a:t>ML combines signals</a:t>
             </a:r>
@@ -2851,7 +2851,7 @@
           </a:ln>
           <a:extLst>
             <a:ext uri="{C572A759-6A51-4108-AA02-DFA0A04FC94B}">
-              <ma14:wrappingTextBoxFlag xmlns:ma14="http://schemas.microsoft.com/office/mac/drawingml/2011/main" val="1"/>
+              <ma14:wrappingTextBoxFlag xmlns:ma14="http://schemas.microsoft.com/office/mac/drawingml/2011/main" xmlns:a14="http://schemas.microsoft.com/office/drawing/2010/main" xmlns:m="http://schemas.openxmlformats.org/officeDocument/2006/math" xmlns="" val="1"/>
             </a:ext>
           </a:extLst>
         </p:spPr>
@@ -2873,7 +2873,6 @@
             </a:lvl1pPr>
           </a:lstStyle>
           <a:p>
-            <a:pPr/>
             <a:r>
               <a:t>A classification model can evaluate many weak signals together and assign a risk decision to each login.</a:t>
             </a:r>
@@ -2907,7 +2906,7 @@
           <a:bodyPr lIns="45719" rIns="45719"/>
           <a:lstStyle/>
           <a:p>
-            <a:pPr/>
+            <a:endParaRPr/>
           </a:p>
         </p:txBody>
       </p:sp>
@@ -2930,7 +2929,7 @@
           </a:ln>
           <a:extLst>
             <a:ext uri="{C572A759-6A51-4108-AA02-DFA0A04FC94B}">
-              <ma14:wrappingTextBoxFlag xmlns:ma14="http://schemas.microsoft.com/office/mac/drawingml/2011/main" val="1"/>
+              <ma14:wrappingTextBoxFlag xmlns:ma14="http://schemas.microsoft.com/office/mac/drawingml/2011/main" xmlns:a14="http://schemas.microsoft.com/office/drawing/2010/main" xmlns:m="http://schemas.openxmlformats.org/officeDocument/2006/math" xmlns="" val="1"/>
             </a:ext>
           </a:extLst>
         </p:spPr>
@@ -2940,7 +2939,7 @@
           </a:bodyPr>
           <a:lstStyle>
             <a:lvl1pPr>
-              <a:defRPr b="1" sz="1100">
+              <a:defRPr sz="1100" b="1">
                 <a:solidFill>
                   <a:srgbClr val="2ECC8F"/>
                 </a:solidFill>
@@ -2952,7 +2951,6 @@
             </a:lvl1pPr>
           </a:lstStyle>
           <a:p>
-            <a:pPr/>
             <a:r>
               <a:t>Project question</a:t>
             </a:r>
@@ -2978,7 +2976,7 @@
           </a:ln>
           <a:extLst>
             <a:ext uri="{C572A759-6A51-4108-AA02-DFA0A04FC94B}">
-              <ma14:wrappingTextBoxFlag xmlns:ma14="http://schemas.microsoft.com/office/mac/drawingml/2011/main" val="1"/>
+              <ma14:wrappingTextBoxFlag xmlns:ma14="http://schemas.microsoft.com/office/mac/drawingml/2011/main" xmlns:a14="http://schemas.microsoft.com/office/drawing/2010/main" xmlns:m="http://schemas.openxmlformats.org/officeDocument/2006/math" xmlns="" val="1"/>
             </a:ext>
           </a:extLst>
         </p:spPr>
@@ -2988,7 +2986,7 @@
           </a:bodyPr>
           <a:lstStyle>
             <a:lvl1pPr>
-              <a:defRPr b="1" sz="1500">
+              <a:defRPr sz="1500" b="1">
                 <a:solidFill>
                   <a:srgbClr val="FFFFFF"/>
                 </a:solidFill>
@@ -3000,7 +2998,6 @@
             </a:lvl1pPr>
           </a:lstStyle>
           <a:p>
-            <a:pPr/>
             <a:r>
               <a:t>Can a machine learning model use login context to identify suspicious activity?</a:t>
             </a:r>
@@ -3031,7 +3028,7 @@
           <a:bodyPr lIns="45719" rIns="45719"/>
           <a:lstStyle/>
           <a:p>
-            <a:pPr/>
+            <a:endParaRPr/>
           </a:p>
         </p:txBody>
       </p:sp>
@@ -3054,7 +3051,7 @@
           </a:ln>
           <a:extLst>
             <a:ext uri="{C572A759-6A51-4108-AA02-DFA0A04FC94B}">
-              <ma14:wrappingTextBoxFlag xmlns:ma14="http://schemas.microsoft.com/office/mac/drawingml/2011/main" val="1"/>
+              <ma14:wrappingTextBoxFlag xmlns:ma14="http://schemas.microsoft.com/office/mac/drawingml/2011/main" xmlns:a14="http://schemas.microsoft.com/office/drawing/2010/main" xmlns:m="http://schemas.openxmlformats.org/officeDocument/2006/math" xmlns="" val="1"/>
             </a:ext>
           </a:extLst>
         </p:spPr>
@@ -3076,7 +3073,6 @@
             </a:lvl1pPr>
           </a:lstStyle>
           <a:p>
-            <a:pPr/>
             <a:r>
               <a:t>Safe Login</a:t>
             </a:r>
@@ -3102,7 +3098,7 @@
           </a:ln>
           <a:extLst>
             <a:ext uri="{C572A759-6A51-4108-AA02-DFA0A04FC94B}">
-              <ma14:wrappingTextBoxFlag xmlns:ma14="http://schemas.microsoft.com/office/mac/drawingml/2011/main" val="1"/>
+              <ma14:wrappingTextBoxFlag xmlns:ma14="http://schemas.microsoft.com/office/mac/drawingml/2011/main" xmlns:a14="http://schemas.microsoft.com/office/drawing/2010/main" xmlns:m="http://schemas.openxmlformats.org/officeDocument/2006/math" xmlns="" val="1"/>
             </a:ext>
           </a:extLst>
         </p:spPr>
@@ -3124,7 +3120,6 @@
             </a:lvl1pPr>
           </a:lstStyle>
           <a:p>
-            <a:pPr/>
             <a:r>
               <a:t>Programming Project</a:t>
             </a:r>
@@ -3150,7 +3145,7 @@
           </a:ln>
           <a:extLst>
             <a:ext uri="{C572A759-6A51-4108-AA02-DFA0A04FC94B}">
-              <ma14:wrappingTextBoxFlag xmlns:ma14="http://schemas.microsoft.com/office/mac/drawingml/2011/main" val="1"/>
+              <ma14:wrappingTextBoxFlag xmlns:ma14="http://schemas.microsoft.com/office/mac/drawingml/2011/main" xmlns:a14="http://schemas.microsoft.com/office/drawing/2010/main" xmlns:m="http://schemas.openxmlformats.org/officeDocument/2006/math" xmlns="" val="1"/>
             </a:ext>
           </a:extLst>
         </p:spPr>
@@ -3172,7 +3167,6 @@
             </a:lvl1pPr>
           </a:lstStyle>
           <a:p>
-            <a:pPr/>
             <a:r>
               <a:t>2</a:t>
             </a:r>
@@ -3184,18 +3178,19 @@
   <p:clrMapOvr>
     <a:masterClrMapping/>
   </p:clrMapOvr>
-  <p:transition xmlns:p14="http://schemas.microsoft.com/office/powerpoint/2010/main" spd="med" advClick="1"/>
+  <p:transition spd="med"/>
 </p:sld>
 </file>
 
 <file path=ppt/slides/slide3.xml><?xml version="1.0" encoding="utf-8"?>
-<p:sld xmlns:a="http://schemas.openxmlformats.org/drawingml/2006/main" xmlns:r="http://schemas.openxmlformats.org/officeDocument/2006/relationships" xmlns:p="http://schemas.openxmlformats.org/presentationml/2006/main" xmlns:m="http://schemas.openxmlformats.org/officeDocument/2006/math" xmlns:a14="http://schemas.microsoft.com/office/drawing/2010/main" showMasterSp="1" showMasterPhAnim="1">
+<p:sld xmlns:a="http://schemas.openxmlformats.org/drawingml/2006/main" xmlns:r="http://schemas.openxmlformats.org/officeDocument/2006/relationships" xmlns:p="http://schemas.openxmlformats.org/presentationml/2006/main">
   <p:cSld>
     <p:bg>
       <p:bgPr>
         <a:solidFill>
           <a:srgbClr val="F3F6FA"/>
         </a:solidFill>
+        <a:effectLst/>
       </p:bgPr>
     </p:bg>
     <p:spTree>
@@ -3231,7 +3226,7 @@
           </a:ln>
           <a:extLst>
             <a:ext uri="{C572A759-6A51-4108-AA02-DFA0A04FC94B}">
-              <ma14:wrappingTextBoxFlag xmlns:ma14="http://schemas.microsoft.com/office/mac/drawingml/2011/main" val="1"/>
+              <ma14:wrappingTextBoxFlag xmlns:ma14="http://schemas.microsoft.com/office/mac/drawingml/2011/main" xmlns:a14="http://schemas.microsoft.com/office/drawing/2010/main" xmlns:m="http://schemas.openxmlformats.org/officeDocument/2006/math" xmlns="" val="1"/>
             </a:ext>
           </a:extLst>
         </p:spPr>
@@ -3241,7 +3236,7 @@
           </a:bodyPr>
           <a:lstStyle>
             <a:lvl1pPr>
-              <a:defRPr b="1" spc="100" sz="1100">
+              <a:defRPr sz="1100" b="1" spc="100">
                 <a:solidFill>
                   <a:srgbClr val="6B7789"/>
                 </a:solidFill>
@@ -3253,7 +3248,6 @@
             </a:lvl1pPr>
           </a:lstStyle>
           <a:p>
-            <a:pPr/>
             <a:r>
               <a:t>LOGIN THREAT DETECTION • MACHINE LEARNING PROJECT</a:t>
             </a:r>
@@ -3285,7 +3279,7 @@
           <a:bodyPr lIns="45719" rIns="45719"/>
           <a:lstStyle/>
           <a:p>
-            <a:pPr/>
+            <a:endParaRPr/>
           </a:p>
         </p:txBody>
       </p:sp>
@@ -3308,7 +3302,7 @@
           </a:ln>
           <a:extLst>
             <a:ext uri="{C572A759-6A51-4108-AA02-DFA0A04FC94B}">
-              <ma14:wrappingTextBoxFlag xmlns:ma14="http://schemas.microsoft.com/office/mac/drawingml/2011/main" val="1"/>
+              <ma14:wrappingTextBoxFlag xmlns:ma14="http://schemas.microsoft.com/office/mac/drawingml/2011/main" xmlns:a14="http://schemas.microsoft.com/office/drawing/2010/main" xmlns:m="http://schemas.openxmlformats.org/officeDocument/2006/math" xmlns="" val="1"/>
             </a:ext>
           </a:extLst>
         </p:spPr>
@@ -3318,7 +3312,7 @@
           </a:bodyPr>
           <a:lstStyle>
             <a:lvl1pPr>
-              <a:defRPr b="1" sz="3000">
+              <a:defRPr sz="3000" b="1">
                 <a:solidFill>
                   <a:srgbClr val="16233A"/>
                 </a:solidFill>
@@ -3330,7 +3324,6 @@
             </a:lvl1pPr>
           </a:lstStyle>
           <a:p>
-            <a:pPr/>
             <a:r>
               <a:t>Design of the System</a:t>
             </a:r>
@@ -3356,7 +3349,7 @@
           </a:ln>
           <a:extLst>
             <a:ext uri="{C572A759-6A51-4108-AA02-DFA0A04FC94B}">
-              <ma14:wrappingTextBoxFlag xmlns:ma14="http://schemas.microsoft.com/office/mac/drawingml/2011/main" val="1"/>
+              <ma14:wrappingTextBoxFlag xmlns:ma14="http://schemas.microsoft.com/office/mac/drawingml/2011/main" xmlns:a14="http://schemas.microsoft.com/office/drawing/2010/main" xmlns:m="http://schemas.openxmlformats.org/officeDocument/2006/math" xmlns="" val="1"/>
             </a:ext>
           </a:extLst>
         </p:spPr>
@@ -3378,7 +3371,6 @@
             </a:lvl1pPr>
           </a:lstStyle>
           <a:p>
-            <a:pPr/>
             <a:r>
               <a:t>Convert raw login activity into a clear, explainable security decision.</a:t>
             </a:r>
@@ -3404,7 +3396,7 @@
           </a:ln>
           <a:extLst>
             <a:ext uri="{C572A759-6A51-4108-AA02-DFA0A04FC94B}">
-              <ma14:wrappingTextBoxFlag xmlns:ma14="http://schemas.microsoft.com/office/mac/drawingml/2011/main" val="1"/>
+              <ma14:wrappingTextBoxFlag xmlns:ma14="http://schemas.microsoft.com/office/mac/drawingml/2011/main" xmlns:a14="http://schemas.microsoft.com/office/drawing/2010/main" xmlns:m="http://schemas.openxmlformats.org/officeDocument/2006/math" xmlns="" val="1"/>
             </a:ext>
           </a:extLst>
         </p:spPr>
@@ -3414,7 +3406,7 @@
           </a:bodyPr>
           <a:lstStyle>
             <a:lvl1pPr>
-              <a:defRPr b="1" sz="1100">
+              <a:defRPr sz="1100" b="1">
                 <a:solidFill>
                   <a:srgbClr val="6B7789"/>
                 </a:solidFill>
@@ -3426,7 +3418,6 @@
             </a:lvl1pPr>
           </a:lstStyle>
           <a:p>
-            <a:pPr/>
             <a:r>
               <a:t>INPUT</a:t>
             </a:r>
@@ -3462,7 +3453,7 @@
           <a:bodyPr lIns="45719" rIns="45719"/>
           <a:lstStyle/>
           <a:p>
-            <a:pPr/>
+            <a:endParaRPr/>
           </a:p>
         </p:txBody>
       </p:sp>
@@ -3493,7 +3484,7 @@
           <a:bodyPr lIns="45719" rIns="45719"/>
           <a:lstStyle/>
           <a:p>
-            <a:pPr/>
+            <a:endParaRPr/>
           </a:p>
         </p:txBody>
       </p:sp>
@@ -3516,7 +3507,7 @@
           </a:ln>
           <a:extLst>
             <a:ext uri="{C572A759-6A51-4108-AA02-DFA0A04FC94B}">
-              <ma14:wrappingTextBoxFlag xmlns:ma14="http://schemas.microsoft.com/office/mac/drawingml/2011/main" val="1"/>
+              <ma14:wrappingTextBoxFlag xmlns:ma14="http://schemas.microsoft.com/office/mac/drawingml/2011/main" xmlns:a14="http://schemas.microsoft.com/office/drawing/2010/main" xmlns:m="http://schemas.openxmlformats.org/officeDocument/2006/math" xmlns="" val="1"/>
             </a:ext>
           </a:extLst>
         </p:spPr>
@@ -3574,7 +3565,7 @@
           </a:ln>
           <a:extLst>
             <a:ext uri="{C572A759-6A51-4108-AA02-DFA0A04FC94B}">
-              <ma14:wrappingTextBoxFlag xmlns:ma14="http://schemas.microsoft.com/office/mac/drawingml/2011/main" val="1"/>
+              <ma14:wrappingTextBoxFlag xmlns:ma14="http://schemas.microsoft.com/office/mac/drawingml/2011/main" xmlns:a14="http://schemas.microsoft.com/office/drawing/2010/main" xmlns:m="http://schemas.openxmlformats.org/officeDocument/2006/math" xmlns="" val="1"/>
             </a:ext>
           </a:extLst>
         </p:spPr>
@@ -3584,7 +3575,7 @@
           </a:bodyPr>
           <a:lstStyle>
             <a:lvl1pPr>
-              <a:defRPr b="1" sz="1300">
+              <a:defRPr sz="1300" b="1">
                 <a:solidFill>
                   <a:srgbClr val="16233A"/>
                 </a:solidFill>
@@ -3596,7 +3587,6 @@
             </a:lvl1pPr>
           </a:lstStyle>
           <a:p>
-            <a:pPr/>
             <a:r>
               <a:t>Login time</a:t>
             </a:r>
@@ -3630,7 +3620,7 @@
           <a:bodyPr lIns="45719" rIns="45719"/>
           <a:lstStyle/>
           <a:p>
-            <a:pPr/>
+            <a:endParaRPr/>
           </a:p>
         </p:txBody>
       </p:sp>
@@ -3653,7 +3643,7 @@
           </a:ln>
           <a:extLst>
             <a:ext uri="{C572A759-6A51-4108-AA02-DFA0A04FC94B}">
-              <ma14:wrappingTextBoxFlag xmlns:ma14="http://schemas.microsoft.com/office/mac/drawingml/2011/main" val="1"/>
+              <ma14:wrappingTextBoxFlag xmlns:ma14="http://schemas.microsoft.com/office/mac/drawingml/2011/main" xmlns:a14="http://schemas.microsoft.com/office/drawing/2010/main" xmlns:m="http://schemas.openxmlformats.org/officeDocument/2006/math" xmlns="" val="1"/>
             </a:ext>
           </a:extLst>
         </p:spPr>
@@ -3711,7 +3701,7 @@
           </a:ln>
           <a:extLst>
             <a:ext uri="{C572A759-6A51-4108-AA02-DFA0A04FC94B}">
-              <ma14:wrappingTextBoxFlag xmlns:ma14="http://schemas.microsoft.com/office/mac/drawingml/2011/main" val="1"/>
+              <ma14:wrappingTextBoxFlag xmlns:ma14="http://schemas.microsoft.com/office/mac/drawingml/2011/main" xmlns:a14="http://schemas.microsoft.com/office/drawing/2010/main" xmlns:m="http://schemas.openxmlformats.org/officeDocument/2006/math" xmlns="" val="1"/>
             </a:ext>
           </a:extLst>
         </p:spPr>
@@ -3721,7 +3711,7 @@
           </a:bodyPr>
           <a:lstStyle>
             <a:lvl1pPr>
-              <a:defRPr b="1" sz="1300">
+              <a:defRPr sz="1300" b="1">
                 <a:solidFill>
                   <a:srgbClr val="16233A"/>
                 </a:solidFill>
@@ -3733,7 +3723,6 @@
             </a:lvl1pPr>
           </a:lstStyle>
           <a:p>
-            <a:pPr/>
             <a:r>
               <a:t>Location &amp; ASN</a:t>
             </a:r>
@@ -3767,7 +3756,7 @@
           <a:bodyPr lIns="45719" rIns="45719"/>
           <a:lstStyle/>
           <a:p>
-            <a:pPr/>
+            <a:endParaRPr/>
           </a:p>
         </p:txBody>
       </p:sp>
@@ -3790,7 +3779,7 @@
           </a:ln>
           <a:extLst>
             <a:ext uri="{C572A759-6A51-4108-AA02-DFA0A04FC94B}">
-              <ma14:wrappingTextBoxFlag xmlns:ma14="http://schemas.microsoft.com/office/mac/drawingml/2011/main" val="1"/>
+              <ma14:wrappingTextBoxFlag xmlns:ma14="http://schemas.microsoft.com/office/mac/drawingml/2011/main" xmlns:a14="http://schemas.microsoft.com/office/drawing/2010/main" xmlns:m="http://schemas.openxmlformats.org/officeDocument/2006/math" xmlns="" val="1"/>
             </a:ext>
           </a:extLst>
         </p:spPr>
@@ -3848,7 +3837,7 @@
           </a:ln>
           <a:extLst>
             <a:ext uri="{C572A759-6A51-4108-AA02-DFA0A04FC94B}">
-              <ma14:wrappingTextBoxFlag xmlns:ma14="http://schemas.microsoft.com/office/mac/drawingml/2011/main" val="1"/>
+              <ma14:wrappingTextBoxFlag xmlns:ma14="http://schemas.microsoft.com/office/mac/drawingml/2011/main" xmlns:a14="http://schemas.microsoft.com/office/drawing/2010/main" xmlns:m="http://schemas.openxmlformats.org/officeDocument/2006/math" xmlns="" val="1"/>
             </a:ext>
           </a:extLst>
         </p:spPr>
@@ -3858,7 +3847,7 @@
           </a:bodyPr>
           <a:lstStyle>
             <a:lvl1pPr>
-              <a:defRPr b="1" sz="1300">
+              <a:defRPr sz="1300" b="1">
                 <a:solidFill>
                   <a:srgbClr val="16233A"/>
                 </a:solidFill>
@@ -3870,7 +3859,6 @@
             </a:lvl1pPr>
           </a:lstStyle>
           <a:p>
-            <a:pPr/>
             <a:r>
               <a:t>Device, OS &amp; browser</a:t>
             </a:r>
@@ -3896,7 +3884,7 @@
           </a:ln>
           <a:extLst>
             <a:ext uri="{C572A759-6A51-4108-AA02-DFA0A04FC94B}">
-              <ma14:wrappingTextBoxFlag xmlns:ma14="http://schemas.microsoft.com/office/mac/drawingml/2011/main" val="1"/>
+              <ma14:wrappingTextBoxFlag xmlns:ma14="http://schemas.microsoft.com/office/mac/drawingml/2011/main" xmlns:a14="http://schemas.microsoft.com/office/drawing/2010/main" xmlns:m="http://schemas.openxmlformats.org/officeDocument/2006/math" xmlns="" val="1"/>
             </a:ext>
           </a:extLst>
         </p:spPr>
@@ -3906,7 +3894,7 @@
           </a:bodyPr>
           <a:lstStyle>
             <a:lvl1pPr>
-              <a:defRPr i="1" sz="900">
+              <a:defRPr sz="900" i="1">
                 <a:solidFill>
                   <a:srgbClr val="6B7789"/>
                 </a:solidFill>
@@ -3918,7 +3906,6 @@
             </a:lvl1pPr>
           </a:lstStyle>
           <a:p>
-            <a:pPr/>
             <a:r>
               <a:t>+ login success and round-trip time</a:t>
             </a:r>
@@ -3944,7 +3931,7 @@
           </a:ln>
           <a:extLst>
             <a:ext uri="{C572A759-6A51-4108-AA02-DFA0A04FC94B}">
-              <ma14:wrappingTextBoxFlag xmlns:ma14="http://schemas.microsoft.com/office/mac/drawingml/2011/main" val="1"/>
+              <ma14:wrappingTextBoxFlag xmlns:ma14="http://schemas.microsoft.com/office/mac/drawingml/2011/main" xmlns:a14="http://schemas.microsoft.com/office/drawing/2010/main" xmlns:m="http://schemas.openxmlformats.org/officeDocument/2006/math" xmlns="" val="1"/>
             </a:ext>
           </a:extLst>
         </p:spPr>
@@ -4005,7 +3992,7 @@
           </a:ln>
           <a:extLst>
             <a:ext uri="{C572A759-6A51-4108-AA02-DFA0A04FC94B}">
-              <ma14:wrappingTextBoxFlag xmlns:ma14="http://schemas.microsoft.com/office/mac/drawingml/2011/main" val="1"/>
+              <ma14:wrappingTextBoxFlag xmlns:ma14="http://schemas.microsoft.com/office/mac/drawingml/2011/main" xmlns:a14="http://schemas.microsoft.com/office/drawing/2010/main" xmlns:m="http://schemas.openxmlformats.org/officeDocument/2006/math" xmlns="" val="1"/>
             </a:ext>
           </a:extLst>
         </p:spPr>
@@ -4015,7 +4002,7 @@
           </a:bodyPr>
           <a:lstStyle>
             <a:lvl1pPr>
-              <a:defRPr b="1" sz="1100">
+              <a:defRPr sz="1100" b="1">
                 <a:solidFill>
                   <a:srgbClr val="6B7789"/>
                 </a:solidFill>
@@ -4027,7 +4014,6 @@
             </a:lvl1pPr>
           </a:lstStyle>
           <a:p>
-            <a:pPr/>
             <a:r>
               <a:t>MODEL</a:t>
             </a:r>
@@ -4061,7 +4047,7 @@
           <a:bodyPr lIns="45719" rIns="45719"/>
           <a:lstStyle/>
           <a:p>
-            <a:pPr/>
+            <a:endParaRPr/>
           </a:p>
         </p:txBody>
       </p:sp>
@@ -4090,7 +4076,7 @@
           <a:bodyPr lIns="45719" rIns="45719"/>
           <a:lstStyle/>
           <a:p>
-            <a:pPr/>
+            <a:endParaRPr/>
           </a:p>
         </p:txBody>
       </p:sp>
@@ -4113,7 +4099,7 @@
           </a:ln>
           <a:extLst>
             <a:ext uri="{C572A759-6A51-4108-AA02-DFA0A04FC94B}">
-              <ma14:wrappingTextBoxFlag xmlns:ma14="http://schemas.microsoft.com/office/mac/drawingml/2011/main" val="1"/>
+              <ma14:wrappingTextBoxFlag xmlns:ma14="http://schemas.microsoft.com/office/mac/drawingml/2011/main" xmlns:a14="http://schemas.microsoft.com/office/drawing/2010/main" xmlns:m="http://schemas.openxmlformats.org/officeDocument/2006/math" xmlns="" val="1"/>
             </a:ext>
           </a:extLst>
         </p:spPr>
@@ -4171,7 +4157,7 @@
           </a:ln>
           <a:extLst>
             <a:ext uri="{C572A759-6A51-4108-AA02-DFA0A04FC94B}">
-              <ma14:wrappingTextBoxFlag xmlns:ma14="http://schemas.microsoft.com/office/mac/drawingml/2011/main" val="1"/>
+              <ma14:wrappingTextBoxFlag xmlns:ma14="http://schemas.microsoft.com/office/mac/drawingml/2011/main" xmlns:a14="http://schemas.microsoft.com/office/drawing/2010/main" xmlns:m="http://schemas.openxmlformats.org/officeDocument/2006/math" xmlns="" val="1"/>
             </a:ext>
           </a:extLst>
         </p:spPr>
@@ -4181,7 +4167,7 @@
           </a:bodyPr>
           <a:lstStyle>
             <a:lvl1pPr algn="ctr">
-              <a:defRPr b="1" sz="1600">
+              <a:defRPr sz="1600" b="1">
                 <a:solidFill>
                   <a:srgbClr val="FFFFFF"/>
                 </a:solidFill>
@@ -4193,7 +4179,6 @@
             </a:lvl1pPr>
           </a:lstStyle>
           <a:p>
-            <a:pPr/>
             <a:r>
               <a:t>Random Forest</a:t>
             </a:r>
@@ -4219,7 +4204,7 @@
           </a:ln>
           <a:extLst>
             <a:ext uri="{C572A759-6A51-4108-AA02-DFA0A04FC94B}">
-              <ma14:wrappingTextBoxFlag xmlns:ma14="http://schemas.microsoft.com/office/mac/drawingml/2011/main" val="1"/>
+              <ma14:wrappingTextBoxFlag xmlns:ma14="http://schemas.microsoft.com/office/mac/drawingml/2011/main" xmlns:a14="http://schemas.microsoft.com/office/drawing/2010/main" xmlns:m="http://schemas.openxmlformats.org/officeDocument/2006/math" xmlns="" val="1"/>
             </a:ext>
           </a:extLst>
         </p:spPr>
@@ -4241,7 +4226,6 @@
             </a:lvl1pPr>
           </a:lstStyle>
           <a:p>
-            <a:pPr/>
             <a:r>
               <a:t>Combines many decision trees to classify each login</a:t>
             </a:r>
@@ -4267,7 +4251,7 @@
           </a:ln>
           <a:extLst>
             <a:ext uri="{C572A759-6A51-4108-AA02-DFA0A04FC94B}">
-              <ma14:wrappingTextBoxFlag xmlns:ma14="http://schemas.microsoft.com/office/mac/drawingml/2011/main" val="1"/>
+              <ma14:wrappingTextBoxFlag xmlns:ma14="http://schemas.microsoft.com/office/mac/drawingml/2011/main" xmlns:a14="http://schemas.microsoft.com/office/drawing/2010/main" xmlns:m="http://schemas.openxmlformats.org/officeDocument/2006/math" xmlns="" val="1"/>
             </a:ext>
           </a:extLst>
         </p:spPr>
@@ -4328,7 +4312,7 @@
           </a:ln>
           <a:extLst>
             <a:ext uri="{C572A759-6A51-4108-AA02-DFA0A04FC94B}">
-              <ma14:wrappingTextBoxFlag xmlns:ma14="http://schemas.microsoft.com/office/mac/drawingml/2011/main" val="1"/>
+              <ma14:wrappingTextBoxFlag xmlns:ma14="http://schemas.microsoft.com/office/mac/drawingml/2011/main" xmlns:a14="http://schemas.microsoft.com/office/drawing/2010/main" xmlns:m="http://schemas.openxmlformats.org/officeDocument/2006/math" xmlns="" val="1"/>
             </a:ext>
           </a:extLst>
         </p:spPr>
@@ -4338,7 +4322,7 @@
           </a:bodyPr>
           <a:lstStyle>
             <a:lvl1pPr>
-              <a:defRPr b="1" sz="1100">
+              <a:defRPr sz="1100" b="1">
                 <a:solidFill>
                   <a:srgbClr val="6B7789"/>
                 </a:solidFill>
@@ -4350,7 +4334,6 @@
             </a:lvl1pPr>
           </a:lstStyle>
           <a:p>
-            <a:pPr/>
             <a:r>
               <a:t>OUTPUT</a:t>
             </a:r>
@@ -4384,7 +4367,7 @@
           <a:bodyPr lIns="45719" rIns="45719"/>
           <a:lstStyle/>
           <a:p>
-            <a:pPr/>
+            <a:endParaRPr/>
           </a:p>
         </p:txBody>
       </p:sp>
@@ -4413,7 +4396,7 @@
           <a:bodyPr lIns="45719" rIns="45719"/>
           <a:lstStyle/>
           <a:p>
-            <a:pPr/>
+            <a:endParaRPr/>
           </a:p>
         </p:txBody>
       </p:sp>
@@ -4436,7 +4419,7 @@
           </a:ln>
           <a:extLst>
             <a:ext uri="{C572A759-6A51-4108-AA02-DFA0A04FC94B}">
-              <ma14:wrappingTextBoxFlag xmlns:ma14="http://schemas.microsoft.com/office/mac/drawingml/2011/main" val="1"/>
+              <ma14:wrappingTextBoxFlag xmlns:ma14="http://schemas.microsoft.com/office/mac/drawingml/2011/main" xmlns:a14="http://schemas.microsoft.com/office/drawing/2010/main" xmlns:m="http://schemas.openxmlformats.org/officeDocument/2006/math" xmlns="" val="1"/>
             </a:ext>
           </a:extLst>
         </p:spPr>
@@ -4446,7 +4429,7 @@
           </a:bodyPr>
           <a:lstStyle>
             <a:lvl1pPr algn="ctr">
-              <a:defRPr b="1" sz="1600">
+              <a:defRPr sz="1600" b="1">
                 <a:solidFill>
                   <a:srgbClr val="FFFFFF"/>
                 </a:solidFill>
@@ -4497,7 +4480,7 @@
           </a:ln>
           <a:extLst>
             <a:ext uri="{C572A759-6A51-4108-AA02-DFA0A04FC94B}">
-              <ma14:wrappingTextBoxFlag xmlns:ma14="http://schemas.microsoft.com/office/mac/drawingml/2011/main" val="1"/>
+              <ma14:wrappingTextBoxFlag xmlns:ma14="http://schemas.microsoft.com/office/mac/drawingml/2011/main" xmlns:a14="http://schemas.microsoft.com/office/drawing/2010/main" xmlns:m="http://schemas.openxmlformats.org/officeDocument/2006/math" xmlns="" val="1"/>
             </a:ext>
           </a:extLst>
         </p:spPr>
@@ -4507,7 +4490,7 @@
           </a:bodyPr>
           <a:lstStyle>
             <a:lvl1pPr>
-              <a:defRPr b="1" sz="1300">
+              <a:defRPr sz="1300" b="1">
                 <a:solidFill>
                   <a:srgbClr val="16233A"/>
                 </a:solidFill>
@@ -4519,7 +4502,6 @@
             </a:lvl1pPr>
           </a:lstStyle>
           <a:p>
-            <a:pPr/>
             <a:r>
               <a:t>Normal / Low Risk</a:t>
             </a:r>
@@ -4553,7 +4535,7 @@
           <a:bodyPr lIns="45719" rIns="45719"/>
           <a:lstStyle/>
           <a:p>
-            <a:pPr/>
+            <a:endParaRPr/>
           </a:p>
         </p:txBody>
       </p:sp>
@@ -4582,7 +4564,7 @@
           <a:bodyPr lIns="45719" rIns="45719"/>
           <a:lstStyle/>
           <a:p>
-            <a:pPr/>
+            <a:endParaRPr/>
           </a:p>
         </p:txBody>
       </p:sp>
@@ -4605,7 +4587,7 @@
           </a:ln>
           <a:extLst>
             <a:ext uri="{C572A759-6A51-4108-AA02-DFA0A04FC94B}">
-              <ma14:wrappingTextBoxFlag xmlns:ma14="http://schemas.microsoft.com/office/mac/drawingml/2011/main" val="1"/>
+              <ma14:wrappingTextBoxFlag xmlns:ma14="http://schemas.microsoft.com/office/mac/drawingml/2011/main" xmlns:a14="http://schemas.microsoft.com/office/drawing/2010/main" xmlns:m="http://schemas.openxmlformats.org/officeDocument/2006/math" xmlns="" val="1"/>
             </a:ext>
           </a:extLst>
         </p:spPr>
@@ -4615,7 +4597,7 @@
           </a:bodyPr>
           <a:lstStyle>
             <a:lvl1pPr algn="ctr">
-              <a:defRPr b="1" sz="1600">
+              <a:defRPr sz="1600" b="1">
                 <a:solidFill>
                   <a:srgbClr val="FFFFFF"/>
                 </a:solidFill>
@@ -4623,7 +4605,6 @@
             </a:lvl1pPr>
           </a:lstStyle>
           <a:p>
-            <a:pPr/>
             <a:r>
               <a:t>!</a:t>
             </a:r>
@@ -4649,7 +4630,7 @@
           </a:ln>
           <a:extLst>
             <a:ext uri="{C572A759-6A51-4108-AA02-DFA0A04FC94B}">
-              <ma14:wrappingTextBoxFlag xmlns:ma14="http://schemas.microsoft.com/office/mac/drawingml/2011/main" val="1"/>
+              <ma14:wrappingTextBoxFlag xmlns:ma14="http://schemas.microsoft.com/office/mac/drawingml/2011/main" xmlns:a14="http://schemas.microsoft.com/office/drawing/2010/main" xmlns:m="http://schemas.openxmlformats.org/officeDocument/2006/math" xmlns="" val="1"/>
             </a:ext>
           </a:extLst>
         </p:spPr>
@@ -4659,7 +4640,7 @@
           </a:bodyPr>
           <a:lstStyle>
             <a:lvl1pPr>
-              <a:defRPr b="1" sz="1300">
+              <a:defRPr sz="1300" b="1">
                 <a:solidFill>
                   <a:srgbClr val="16233A"/>
                 </a:solidFill>
@@ -4671,7 +4652,6 @@
             </a:lvl1pPr>
           </a:lstStyle>
           <a:p>
-            <a:pPr/>
             <a:r>
               <a:t>Suspicious / Malicious</a:t>
             </a:r>
@@ -4697,7 +4677,7 @@
           </a:ln>
           <a:extLst>
             <a:ext uri="{C572A759-6A51-4108-AA02-DFA0A04FC94B}">
-              <ma14:wrappingTextBoxFlag xmlns:ma14="http://schemas.microsoft.com/office/mac/drawingml/2011/main" val="1"/>
+              <ma14:wrappingTextBoxFlag xmlns:ma14="http://schemas.microsoft.com/office/mac/drawingml/2011/main" xmlns:a14="http://schemas.microsoft.com/office/drawing/2010/main" xmlns:m="http://schemas.openxmlformats.org/officeDocument/2006/math" xmlns="" val="1"/>
             </a:ext>
           </a:extLst>
         </p:spPr>
@@ -4719,7 +4699,6 @@
             </a:lvl1pPr>
           </a:lstStyle>
           <a:p>
-            <a:pPr/>
             <a:r>
               <a:t>The system returns both a probability and a final label based on a tuned decision threshold.</a:t>
             </a:r>
@@ -4750,7 +4729,7 @@
           <a:bodyPr lIns="45719" rIns="45719"/>
           <a:lstStyle/>
           <a:p>
-            <a:pPr/>
+            <a:endParaRPr/>
           </a:p>
         </p:txBody>
       </p:sp>
@@ -4773,7 +4752,7 @@
           </a:ln>
           <a:extLst>
             <a:ext uri="{C572A759-6A51-4108-AA02-DFA0A04FC94B}">
-              <ma14:wrappingTextBoxFlag xmlns:ma14="http://schemas.microsoft.com/office/mac/drawingml/2011/main" val="1"/>
+              <ma14:wrappingTextBoxFlag xmlns:ma14="http://schemas.microsoft.com/office/mac/drawingml/2011/main" xmlns:a14="http://schemas.microsoft.com/office/drawing/2010/main" xmlns:m="http://schemas.openxmlformats.org/officeDocument/2006/math" xmlns="" val="1"/>
             </a:ext>
           </a:extLst>
         </p:spPr>
@@ -4795,7 +4774,6 @@
             </a:lvl1pPr>
           </a:lstStyle>
           <a:p>
-            <a:pPr/>
             <a:r>
               <a:t>Safe Login</a:t>
             </a:r>
@@ -4821,7 +4799,7 @@
           </a:ln>
           <a:extLst>
             <a:ext uri="{C572A759-6A51-4108-AA02-DFA0A04FC94B}">
-              <ma14:wrappingTextBoxFlag xmlns:ma14="http://schemas.microsoft.com/office/mac/drawingml/2011/main" val="1"/>
+              <ma14:wrappingTextBoxFlag xmlns:ma14="http://schemas.microsoft.com/office/mac/drawingml/2011/main" xmlns:a14="http://schemas.microsoft.com/office/drawing/2010/main" xmlns:m="http://schemas.openxmlformats.org/officeDocument/2006/math" xmlns="" val="1"/>
             </a:ext>
           </a:extLst>
         </p:spPr>
@@ -4843,7 +4821,6 @@
             </a:lvl1pPr>
           </a:lstStyle>
           <a:p>
-            <a:pPr/>
             <a:r>
               <a:t>Programming Project</a:t>
             </a:r>
@@ -4869,7 +4846,7 @@
           </a:ln>
           <a:extLst>
             <a:ext uri="{C572A759-6A51-4108-AA02-DFA0A04FC94B}">
-              <ma14:wrappingTextBoxFlag xmlns:ma14="http://schemas.microsoft.com/office/mac/drawingml/2011/main" val="1"/>
+              <ma14:wrappingTextBoxFlag xmlns:ma14="http://schemas.microsoft.com/office/mac/drawingml/2011/main" xmlns:a14="http://schemas.microsoft.com/office/drawing/2010/main" xmlns:m="http://schemas.openxmlformats.org/officeDocument/2006/math" xmlns="" val="1"/>
             </a:ext>
           </a:extLst>
         </p:spPr>
@@ -4891,7 +4868,6 @@
             </a:lvl1pPr>
           </a:lstStyle>
           <a:p>
-            <a:pPr/>
             <a:r>
               <a:t>3</a:t>
             </a:r>
@@ -4903,18 +4879,19 @@
   <p:clrMapOvr>
     <a:masterClrMapping/>
   </p:clrMapOvr>
-  <p:transition xmlns:p14="http://schemas.microsoft.com/office/powerpoint/2010/main" spd="med" advClick="1"/>
+  <p:transition spd="med"/>
 </p:sld>
 </file>
 
 <file path=ppt/slides/slide4.xml><?xml version="1.0" encoding="utf-8"?>
-<p:sld xmlns:a="http://schemas.openxmlformats.org/drawingml/2006/main" xmlns:r="http://schemas.openxmlformats.org/officeDocument/2006/relationships" xmlns:p="http://schemas.openxmlformats.org/presentationml/2006/main" xmlns:m="http://schemas.openxmlformats.org/officeDocument/2006/math" xmlns:a14="http://schemas.microsoft.com/office/drawing/2010/main" showMasterSp="1" showMasterPhAnim="1">
+<p:sld xmlns:a="http://schemas.openxmlformats.org/drawingml/2006/main" xmlns:r="http://schemas.openxmlformats.org/officeDocument/2006/relationships" xmlns:p="http://schemas.openxmlformats.org/presentationml/2006/main">
   <p:cSld>
     <p:bg>
       <p:bgPr>
         <a:solidFill>
           <a:srgbClr val="F3F6FA"/>
         </a:solidFill>
+        <a:effectLst/>
       </p:bgPr>
     </p:bg>
     <p:spTree>
@@ -4950,7 +4927,7 @@
           </a:ln>
           <a:extLst>
             <a:ext uri="{C572A759-6A51-4108-AA02-DFA0A04FC94B}">
-              <ma14:wrappingTextBoxFlag xmlns:ma14="http://schemas.microsoft.com/office/mac/drawingml/2011/main" val="1"/>
+              <ma14:wrappingTextBoxFlag xmlns:ma14="http://schemas.microsoft.com/office/mac/drawingml/2011/main" xmlns:a14="http://schemas.microsoft.com/office/drawing/2010/main" xmlns:m="http://schemas.openxmlformats.org/officeDocument/2006/math" xmlns="" val="1"/>
             </a:ext>
           </a:extLst>
         </p:spPr>
@@ -4960,7 +4937,7 @@
           </a:bodyPr>
           <a:lstStyle>
             <a:lvl1pPr>
-              <a:defRPr b="1" spc="100" sz="1100">
+              <a:defRPr sz="1100" b="1" spc="100">
                 <a:solidFill>
                   <a:srgbClr val="6B7789"/>
                 </a:solidFill>
@@ -4972,7 +4949,6 @@
             </a:lvl1pPr>
           </a:lstStyle>
           <a:p>
-            <a:pPr/>
             <a:r>
               <a:t>LOGIN THREAT DETECTION • MACHINE LEARNING PROJECT</a:t>
             </a:r>
@@ -5004,7 +4980,7 @@
           <a:bodyPr lIns="45719" rIns="45719"/>
           <a:lstStyle/>
           <a:p>
-            <a:pPr/>
+            <a:endParaRPr/>
           </a:p>
         </p:txBody>
       </p:sp>
@@ -5027,7 +5003,7 @@
           </a:ln>
           <a:extLst>
             <a:ext uri="{C572A759-6A51-4108-AA02-DFA0A04FC94B}">
-              <ma14:wrappingTextBoxFlag xmlns:ma14="http://schemas.microsoft.com/office/mac/drawingml/2011/main" val="1"/>
+              <ma14:wrappingTextBoxFlag xmlns:ma14="http://schemas.microsoft.com/office/mac/drawingml/2011/main" xmlns:a14="http://schemas.microsoft.com/office/drawing/2010/main" xmlns:m="http://schemas.openxmlformats.org/officeDocument/2006/math" xmlns="" val="1"/>
             </a:ext>
           </a:extLst>
         </p:spPr>
@@ -5037,7 +5013,7 @@
           </a:bodyPr>
           <a:lstStyle>
             <a:lvl1pPr>
-              <a:defRPr b="1" sz="3000">
+              <a:defRPr sz="3000" b="1">
                 <a:solidFill>
                   <a:srgbClr val="16233A"/>
                 </a:solidFill>
@@ -5049,7 +5025,6 @@
             </a:lvl1pPr>
           </a:lstStyle>
           <a:p>
-            <a:pPr/>
             <a:r>
               <a:t>Implementation</a:t>
             </a:r>
@@ -5075,7 +5050,7 @@
           </a:ln>
           <a:extLst>
             <a:ext uri="{C572A759-6A51-4108-AA02-DFA0A04FC94B}">
-              <ma14:wrappingTextBoxFlag xmlns:ma14="http://schemas.microsoft.com/office/mac/drawingml/2011/main" val="1"/>
+              <ma14:wrappingTextBoxFlag xmlns:ma14="http://schemas.microsoft.com/office/mac/drawingml/2011/main" xmlns:a14="http://schemas.microsoft.com/office/drawing/2010/main" xmlns:m="http://schemas.openxmlformats.org/officeDocument/2006/math" xmlns="" val="1"/>
             </a:ext>
           </a:extLst>
         </p:spPr>
@@ -5097,7 +5072,6 @@
             </a:lvl1pPr>
           </a:lstStyle>
           <a:p>
-            <a:pPr/>
             <a:r>
               <a:t>Dataset, pipeline, and model — built end-to-end in Python.</a:t>
             </a:r>
@@ -5133,7 +5107,7 @@
           <a:bodyPr lIns="45719" rIns="45719"/>
           <a:lstStyle/>
           <a:p>
-            <a:pPr/>
+            <a:endParaRPr/>
           </a:p>
         </p:txBody>
       </p:sp>
@@ -5162,7 +5136,7 @@
           <a:bodyPr lIns="45719" rIns="45719"/>
           <a:lstStyle/>
           <a:p>
-            <a:pPr/>
+            <a:endParaRPr/>
           </a:p>
         </p:txBody>
       </p:sp>
@@ -5185,7 +5159,7 @@
           </a:ln>
           <a:extLst>
             <a:ext uri="{C572A759-6A51-4108-AA02-DFA0A04FC94B}">
-              <ma14:wrappingTextBoxFlag xmlns:ma14="http://schemas.microsoft.com/office/mac/drawingml/2011/main" val="1"/>
+              <ma14:wrappingTextBoxFlag xmlns:ma14="http://schemas.microsoft.com/office/mac/drawingml/2011/main" xmlns:a14="http://schemas.microsoft.com/office/drawing/2010/main" xmlns:m="http://schemas.openxmlformats.org/officeDocument/2006/math" xmlns="" val="1"/>
             </a:ext>
           </a:extLst>
         </p:spPr>
@@ -5195,7 +5169,7 @@
           </a:bodyPr>
           <a:lstStyle>
             <a:lvl1pPr>
-              <a:defRPr b="1" sz="900">
+              <a:defRPr sz="900" b="1">
                 <a:solidFill>
                   <a:srgbClr val="6B7789"/>
                 </a:solidFill>
@@ -5207,7 +5181,6 @@
             </a:lvl1pPr>
           </a:lstStyle>
           <a:p>
-            <a:pPr/>
             <a:r>
               <a:t>LOGIN ATTEMPTS</a:t>
             </a:r>
@@ -5233,7 +5206,7 @@
           </a:ln>
           <a:extLst>
             <a:ext uri="{C572A759-6A51-4108-AA02-DFA0A04FC94B}">
-              <ma14:wrappingTextBoxFlag xmlns:ma14="http://schemas.microsoft.com/office/mac/drawingml/2011/main" val="1"/>
+              <ma14:wrappingTextBoxFlag xmlns:ma14="http://schemas.microsoft.com/office/mac/drawingml/2011/main" xmlns:a14="http://schemas.microsoft.com/office/drawing/2010/main" xmlns:m="http://schemas.openxmlformats.org/officeDocument/2006/math" xmlns="" val="1"/>
             </a:ext>
           </a:extLst>
         </p:spPr>
@@ -5243,7 +5216,7 @@
           </a:bodyPr>
           <a:lstStyle>
             <a:lvl1pPr>
-              <a:defRPr b="1" sz="2100">
+              <a:defRPr sz="2100" b="1">
                 <a:solidFill>
                   <a:srgbClr val="16233A"/>
                 </a:solidFill>
@@ -5255,7 +5228,6 @@
             </a:lvl1pPr>
           </a:lstStyle>
           <a:p>
-            <a:pPr/>
             <a:r>
               <a:t>33M+</a:t>
             </a:r>
@@ -5291,7 +5263,7 @@
           <a:bodyPr lIns="45719" rIns="45719"/>
           <a:lstStyle/>
           <a:p>
-            <a:pPr/>
+            <a:endParaRPr/>
           </a:p>
         </p:txBody>
       </p:sp>
@@ -5320,7 +5292,7 @@
           <a:bodyPr lIns="45719" rIns="45719"/>
           <a:lstStyle/>
           <a:p>
-            <a:pPr/>
+            <a:endParaRPr/>
           </a:p>
         </p:txBody>
       </p:sp>
@@ -5343,7 +5315,7 @@
           </a:ln>
           <a:extLst>
             <a:ext uri="{C572A759-6A51-4108-AA02-DFA0A04FC94B}">
-              <ma14:wrappingTextBoxFlag xmlns:ma14="http://schemas.microsoft.com/office/mac/drawingml/2011/main" val="1"/>
+              <ma14:wrappingTextBoxFlag xmlns:ma14="http://schemas.microsoft.com/office/mac/drawingml/2011/main" xmlns:a14="http://schemas.microsoft.com/office/drawing/2010/main" xmlns:m="http://schemas.openxmlformats.org/officeDocument/2006/math" xmlns="" val="1"/>
             </a:ext>
           </a:extLst>
         </p:spPr>
@@ -5353,7 +5325,7 @@
           </a:bodyPr>
           <a:lstStyle>
             <a:lvl1pPr>
-              <a:defRPr b="1" sz="900">
+              <a:defRPr sz="900" b="1">
                 <a:solidFill>
                   <a:srgbClr val="6B7789"/>
                 </a:solidFill>
@@ -5365,7 +5337,6 @@
             </a:lvl1pPr>
           </a:lstStyle>
           <a:p>
-            <a:pPr/>
             <a:r>
               <a:t>USERS</a:t>
             </a:r>
@@ -5391,7 +5362,7 @@
           </a:ln>
           <a:extLst>
             <a:ext uri="{C572A759-6A51-4108-AA02-DFA0A04FC94B}">
-              <ma14:wrappingTextBoxFlag xmlns:ma14="http://schemas.microsoft.com/office/mac/drawingml/2011/main" val="1"/>
+              <ma14:wrappingTextBoxFlag xmlns:ma14="http://schemas.microsoft.com/office/mac/drawingml/2011/main" xmlns:a14="http://schemas.microsoft.com/office/drawing/2010/main" xmlns:m="http://schemas.openxmlformats.org/officeDocument/2006/math" xmlns="" val="1"/>
             </a:ext>
           </a:extLst>
         </p:spPr>
@@ -5401,7 +5372,7 @@
           </a:bodyPr>
           <a:lstStyle>
             <a:lvl1pPr>
-              <a:defRPr b="1" sz="2100">
+              <a:defRPr sz="2100" b="1">
                 <a:solidFill>
                   <a:srgbClr val="16233A"/>
                 </a:solidFill>
@@ -5413,7 +5384,6 @@
             </a:lvl1pPr>
           </a:lstStyle>
           <a:p>
-            <a:pPr/>
             <a:r>
               <a:t>3.3M+</a:t>
             </a:r>
@@ -5449,7 +5419,7 @@
           <a:bodyPr lIns="45719" rIns="45719"/>
           <a:lstStyle/>
           <a:p>
-            <a:pPr/>
+            <a:endParaRPr/>
           </a:p>
         </p:txBody>
       </p:sp>
@@ -5478,7 +5448,7 @@
           <a:bodyPr lIns="45719" rIns="45719"/>
           <a:lstStyle/>
           <a:p>
-            <a:pPr/>
+            <a:endParaRPr/>
           </a:p>
         </p:txBody>
       </p:sp>
@@ -5501,7 +5471,7 @@
           </a:ln>
           <a:extLst>
             <a:ext uri="{C572A759-6A51-4108-AA02-DFA0A04FC94B}">
-              <ma14:wrappingTextBoxFlag xmlns:ma14="http://schemas.microsoft.com/office/mac/drawingml/2011/main" val="1"/>
+              <ma14:wrappingTextBoxFlag xmlns:ma14="http://schemas.microsoft.com/office/mac/drawingml/2011/main" xmlns:a14="http://schemas.microsoft.com/office/drawing/2010/main" xmlns:m="http://schemas.openxmlformats.org/officeDocument/2006/math" xmlns="" val="1"/>
             </a:ext>
           </a:extLst>
         </p:spPr>
@@ -5511,7 +5481,7 @@
           </a:bodyPr>
           <a:lstStyle>
             <a:lvl1pPr>
-              <a:defRPr b="1" sz="900">
+              <a:defRPr sz="900" b="1">
                 <a:solidFill>
                   <a:srgbClr val="6B7789"/>
                 </a:solidFill>
@@ -5523,7 +5493,6 @@
             </a:lvl1pPr>
           </a:lstStyle>
           <a:p>
-            <a:pPr/>
             <a:r>
               <a:t>COLUMNS</a:t>
             </a:r>
@@ -5549,7 +5518,7 @@
           </a:ln>
           <a:extLst>
             <a:ext uri="{C572A759-6A51-4108-AA02-DFA0A04FC94B}">
-              <ma14:wrappingTextBoxFlag xmlns:ma14="http://schemas.microsoft.com/office/mac/drawingml/2011/main" val="1"/>
+              <ma14:wrappingTextBoxFlag xmlns:ma14="http://schemas.microsoft.com/office/mac/drawingml/2011/main" xmlns:a14="http://schemas.microsoft.com/office/drawing/2010/main" xmlns:m="http://schemas.openxmlformats.org/officeDocument/2006/math" xmlns="" val="1"/>
             </a:ext>
           </a:extLst>
         </p:spPr>
@@ -5559,7 +5528,7 @@
           </a:bodyPr>
           <a:lstStyle>
             <a:lvl1pPr>
-              <a:defRPr b="1" sz="2100">
+              <a:defRPr sz="2100" b="1">
                 <a:solidFill>
                   <a:srgbClr val="16233A"/>
                 </a:solidFill>
@@ -5571,7 +5540,6 @@
             </a:lvl1pPr>
           </a:lstStyle>
           <a:p>
-            <a:pPr/>
             <a:r>
               <a:t>15</a:t>
             </a:r>
@@ -5607,7 +5575,7 @@
           <a:bodyPr lIns="45719" rIns="45719"/>
           <a:lstStyle/>
           <a:p>
-            <a:pPr/>
+            <a:endParaRPr/>
           </a:p>
         </p:txBody>
       </p:sp>
@@ -5636,7 +5604,7 @@
           <a:bodyPr lIns="45719" rIns="45719"/>
           <a:lstStyle/>
           <a:p>
-            <a:pPr/>
+            <a:endParaRPr/>
           </a:p>
         </p:txBody>
       </p:sp>
@@ -5659,7 +5627,7 @@
           </a:ln>
           <a:extLst>
             <a:ext uri="{C572A759-6A51-4108-AA02-DFA0A04FC94B}">
-              <ma14:wrappingTextBoxFlag xmlns:ma14="http://schemas.microsoft.com/office/mac/drawingml/2011/main" val="1"/>
+              <ma14:wrappingTextBoxFlag xmlns:ma14="http://schemas.microsoft.com/office/mac/drawingml/2011/main" xmlns:a14="http://schemas.microsoft.com/office/drawing/2010/main" xmlns:m="http://schemas.openxmlformats.org/officeDocument/2006/math" xmlns="" val="1"/>
             </a:ext>
           </a:extLst>
         </p:spPr>
@@ -5669,7 +5637,7 @@
           </a:bodyPr>
           <a:lstStyle>
             <a:lvl1pPr>
-              <a:defRPr b="1" sz="900">
+              <a:defRPr sz="900" b="1">
                 <a:solidFill>
                   <a:srgbClr val="6B7789"/>
                 </a:solidFill>
@@ -5681,7 +5649,6 @@
             </a:lvl1pPr>
           </a:lstStyle>
           <a:p>
-            <a:pPr/>
             <a:r>
               <a:t>DOWNLOAD</a:t>
             </a:r>
@@ -5707,7 +5674,7 @@
           </a:ln>
           <a:extLst>
             <a:ext uri="{C572A759-6A51-4108-AA02-DFA0A04FC94B}">
-              <ma14:wrappingTextBoxFlag xmlns:ma14="http://schemas.microsoft.com/office/mac/drawingml/2011/main" val="1"/>
+              <ma14:wrappingTextBoxFlag xmlns:ma14="http://schemas.microsoft.com/office/mac/drawingml/2011/main" xmlns:a14="http://schemas.microsoft.com/office/drawing/2010/main" xmlns:m="http://schemas.openxmlformats.org/officeDocument/2006/math" xmlns="" val="1"/>
             </a:ext>
           </a:extLst>
         </p:spPr>
@@ -5717,7 +5684,7 @@
           </a:bodyPr>
           <a:lstStyle>
             <a:lvl1pPr>
-              <a:defRPr b="1" sz="2100">
+              <a:defRPr sz="2100" b="1">
                 <a:solidFill>
                   <a:srgbClr val="16233A"/>
                 </a:solidFill>
@@ -5729,7 +5696,6 @@
             </a:lvl1pPr>
           </a:lstStyle>
           <a:p>
-            <a:pPr/>
             <a:r>
               <a:t>1.1 GB</a:t>
             </a:r>
@@ -5755,7 +5721,7 @@
           </a:ln>
           <a:extLst>
             <a:ext uri="{C572A759-6A51-4108-AA02-DFA0A04FC94B}">
-              <ma14:wrappingTextBoxFlag xmlns:ma14="http://schemas.microsoft.com/office/mac/drawingml/2011/main" val="1"/>
+              <ma14:wrappingTextBoxFlag xmlns:ma14="http://schemas.microsoft.com/office/mac/drawingml/2011/main" xmlns:a14="http://schemas.microsoft.com/office/drawing/2010/main" xmlns:m="http://schemas.openxmlformats.org/officeDocument/2006/math" xmlns="" val="1"/>
             </a:ext>
           </a:extLst>
         </p:spPr>
@@ -5765,7 +5731,7 @@
           </a:bodyPr>
           <a:lstStyle>
             <a:lvl1pPr>
-              <a:defRPr i="1" sz="1000">
+              <a:defRPr sz="1000" i="1">
                 <a:solidFill>
                   <a:srgbClr val="6B7789"/>
                 </a:solidFill>
@@ -5777,7 +5743,6 @@
             </a:lvl1pPr>
           </a:lstStyle>
           <a:p>
-            <a:pPr/>
             <a:r>
               <a:t>Dataset: RBA (Risk-Based Authentication) — Zenodo, synthesized from real-world login behavior.</a:t>
             </a:r>
@@ -5803,7 +5768,7 @@
           </a:ln>
           <a:extLst>
             <a:ext uri="{C572A759-6A51-4108-AA02-DFA0A04FC94B}">
-              <ma14:wrappingTextBoxFlag xmlns:ma14="http://schemas.microsoft.com/office/mac/drawingml/2011/main" val="1"/>
+              <ma14:wrappingTextBoxFlag xmlns:ma14="http://schemas.microsoft.com/office/mac/drawingml/2011/main" xmlns:a14="http://schemas.microsoft.com/office/drawing/2010/main" xmlns:m="http://schemas.openxmlformats.org/officeDocument/2006/math" xmlns="" val="1"/>
             </a:ext>
           </a:extLst>
         </p:spPr>
@@ -5813,7 +5778,7 @@
           </a:bodyPr>
           <a:lstStyle>
             <a:lvl1pPr>
-              <a:defRPr b="1" sz="1100">
+              <a:defRPr sz="1100" b="1">
                 <a:solidFill>
                   <a:srgbClr val="6B7789"/>
                 </a:solidFill>
@@ -5825,7 +5790,6 @@
             </a:lvl1pPr>
           </a:lstStyle>
           <a:p>
-            <a:pPr/>
             <a:r>
               <a:t>PIPELINE</a:t>
             </a:r>
@@ -5857,7 +5821,7 @@
           <a:bodyPr lIns="45719" rIns="45719"/>
           <a:lstStyle/>
           <a:p>
-            <a:pPr/>
+            <a:endParaRPr/>
           </a:p>
         </p:txBody>
       </p:sp>
@@ -5880,7 +5844,7 @@
           </a:ln>
           <a:extLst>
             <a:ext uri="{C572A759-6A51-4108-AA02-DFA0A04FC94B}">
-              <ma14:wrappingTextBoxFlag xmlns:ma14="http://schemas.microsoft.com/office/mac/drawingml/2011/main" val="1"/>
+              <ma14:wrappingTextBoxFlag xmlns:ma14="http://schemas.microsoft.com/office/mac/drawingml/2011/main" xmlns:a14="http://schemas.microsoft.com/office/drawing/2010/main" xmlns:m="http://schemas.openxmlformats.org/officeDocument/2006/math" xmlns="" val="1"/>
             </a:ext>
           </a:extLst>
         </p:spPr>
@@ -5890,7 +5854,7 @@
           </a:bodyPr>
           <a:lstStyle>
             <a:lvl1pPr algn="ctr">
-              <a:defRPr b="1" sz="1200">
+              <a:defRPr sz="1200" b="1">
                 <a:solidFill>
                   <a:srgbClr val="FFFFFF"/>
                 </a:solidFill>
@@ -5902,7 +5866,6 @@
             </a:lvl1pPr>
           </a:lstStyle>
           <a:p>
-            <a:pPr/>
             <a:r>
               <a:t>1</a:t>
             </a:r>
@@ -5928,7 +5891,7 @@
           </a:ln>
           <a:extLst>
             <a:ext uri="{C572A759-6A51-4108-AA02-DFA0A04FC94B}">
-              <ma14:wrappingTextBoxFlag xmlns:ma14="http://schemas.microsoft.com/office/mac/drawingml/2011/main" val="1"/>
+              <ma14:wrappingTextBoxFlag xmlns:ma14="http://schemas.microsoft.com/office/mac/drawingml/2011/main" xmlns:a14="http://schemas.microsoft.com/office/drawing/2010/main" xmlns:m="http://schemas.openxmlformats.org/officeDocument/2006/math" xmlns="" val="1"/>
             </a:ext>
           </a:extLst>
         </p:spPr>
@@ -5939,7 +5902,7 @@
           <a:lstStyle/>
           <a:p>
             <a:pPr algn="ctr">
-              <a:defRPr b="1" sz="1000">
+              <a:defRPr sz="1000" b="1">
                 <a:solidFill>
                   <a:srgbClr val="16233A"/>
                 </a:solidFill>
@@ -5955,7 +5918,7 @@
           </a:p>
           <a:p>
             <a:pPr algn="ctr">
-              <a:defRPr b="1" sz="1000">
+              <a:defRPr sz="1000" b="1">
                 <a:solidFill>
                   <a:srgbClr val="16233A"/>
                 </a:solidFill>
@@ -5990,7 +5953,7 @@
           </a:ln>
           <a:extLst>
             <a:ext uri="{C572A759-6A51-4108-AA02-DFA0A04FC94B}">
-              <ma14:wrappingTextBoxFlag xmlns:ma14="http://schemas.microsoft.com/office/mac/drawingml/2011/main" val="1"/>
+              <ma14:wrappingTextBoxFlag xmlns:ma14="http://schemas.microsoft.com/office/mac/drawingml/2011/main" xmlns:a14="http://schemas.microsoft.com/office/drawing/2010/main" xmlns:m="http://schemas.openxmlformats.org/officeDocument/2006/math" xmlns="" val="1"/>
             </a:ext>
           </a:extLst>
         </p:spPr>
@@ -6008,7 +5971,6 @@
             </a:lvl1pPr>
           </a:lstStyle>
           <a:p>
-            <a:pPr/>
             <a:r>
               <a:t>→</a:t>
             </a:r>
@@ -6040,7 +6002,7 @@
           <a:bodyPr lIns="45719" rIns="45719"/>
           <a:lstStyle/>
           <a:p>
-            <a:pPr/>
+            <a:endParaRPr/>
           </a:p>
         </p:txBody>
       </p:sp>
@@ -6063,7 +6025,7 @@
           </a:ln>
           <a:extLst>
             <a:ext uri="{C572A759-6A51-4108-AA02-DFA0A04FC94B}">
-              <ma14:wrappingTextBoxFlag xmlns:ma14="http://schemas.microsoft.com/office/mac/drawingml/2011/main" val="1"/>
+              <ma14:wrappingTextBoxFlag xmlns:ma14="http://schemas.microsoft.com/office/mac/drawingml/2011/main" xmlns:a14="http://schemas.microsoft.com/office/drawing/2010/main" xmlns:m="http://schemas.openxmlformats.org/officeDocument/2006/math" xmlns="" val="1"/>
             </a:ext>
           </a:extLst>
         </p:spPr>
@@ -6073,7 +6035,7 @@
           </a:bodyPr>
           <a:lstStyle>
             <a:lvl1pPr algn="ctr">
-              <a:defRPr b="1" sz="1200">
+              <a:defRPr sz="1200" b="1">
                 <a:solidFill>
                   <a:srgbClr val="FFFFFF"/>
                 </a:solidFill>
@@ -6085,7 +6047,6 @@
             </a:lvl1pPr>
           </a:lstStyle>
           <a:p>
-            <a:pPr/>
             <a:r>
               <a:t>2</a:t>
             </a:r>
@@ -6111,7 +6072,7 @@
           </a:ln>
           <a:extLst>
             <a:ext uri="{C572A759-6A51-4108-AA02-DFA0A04FC94B}">
-              <ma14:wrappingTextBoxFlag xmlns:ma14="http://schemas.microsoft.com/office/mac/drawingml/2011/main" val="1"/>
+              <ma14:wrappingTextBoxFlag xmlns:ma14="http://schemas.microsoft.com/office/mac/drawingml/2011/main" xmlns:a14="http://schemas.microsoft.com/office/drawing/2010/main" xmlns:m="http://schemas.openxmlformats.org/officeDocument/2006/math" xmlns="" val="1"/>
             </a:ext>
           </a:extLst>
         </p:spPr>
@@ -6122,7 +6083,7 @@
           <a:lstStyle/>
           <a:p>
             <a:pPr algn="ctr">
-              <a:defRPr b="1" sz="1000">
+              <a:defRPr sz="1000" b="1">
                 <a:solidFill>
                   <a:srgbClr val="16233A"/>
                 </a:solidFill>
@@ -6138,7 +6099,7 @@
           </a:p>
           <a:p>
             <a:pPr algn="ctr">
-              <a:defRPr b="1" sz="1000">
+              <a:defRPr sz="1000" b="1">
                 <a:solidFill>
                   <a:srgbClr val="16233A"/>
                 </a:solidFill>
@@ -6173,7 +6134,7 @@
           </a:ln>
           <a:extLst>
             <a:ext uri="{C572A759-6A51-4108-AA02-DFA0A04FC94B}">
-              <ma14:wrappingTextBoxFlag xmlns:ma14="http://schemas.microsoft.com/office/mac/drawingml/2011/main" val="1"/>
+              <ma14:wrappingTextBoxFlag xmlns:ma14="http://schemas.microsoft.com/office/mac/drawingml/2011/main" xmlns:a14="http://schemas.microsoft.com/office/drawing/2010/main" xmlns:m="http://schemas.openxmlformats.org/officeDocument/2006/math" xmlns="" val="1"/>
             </a:ext>
           </a:extLst>
         </p:spPr>
@@ -6191,7 +6152,6 @@
             </a:lvl1pPr>
           </a:lstStyle>
           <a:p>
-            <a:pPr/>
             <a:r>
               <a:t>→</a:t>
             </a:r>
@@ -6223,7 +6183,7 @@
           <a:bodyPr lIns="45719" rIns="45719"/>
           <a:lstStyle/>
           <a:p>
-            <a:pPr/>
+            <a:endParaRPr/>
           </a:p>
         </p:txBody>
       </p:sp>
@@ -6246,7 +6206,7 @@
           </a:ln>
           <a:extLst>
             <a:ext uri="{C572A759-6A51-4108-AA02-DFA0A04FC94B}">
-              <ma14:wrappingTextBoxFlag xmlns:ma14="http://schemas.microsoft.com/office/mac/drawingml/2011/main" val="1"/>
+              <ma14:wrappingTextBoxFlag xmlns:ma14="http://schemas.microsoft.com/office/mac/drawingml/2011/main" xmlns:a14="http://schemas.microsoft.com/office/drawing/2010/main" xmlns:m="http://schemas.openxmlformats.org/officeDocument/2006/math" xmlns="" val="1"/>
             </a:ext>
           </a:extLst>
         </p:spPr>
@@ -6256,7 +6216,7 @@
           </a:bodyPr>
           <a:lstStyle>
             <a:lvl1pPr algn="ctr">
-              <a:defRPr b="1" sz="1200">
+              <a:defRPr sz="1200" b="1">
                 <a:solidFill>
                   <a:srgbClr val="FFFFFF"/>
                 </a:solidFill>
@@ -6268,7 +6228,6 @@
             </a:lvl1pPr>
           </a:lstStyle>
           <a:p>
-            <a:pPr/>
             <a:r>
               <a:t>3</a:t>
             </a:r>
@@ -6294,7 +6253,7 @@
           </a:ln>
           <a:extLst>
             <a:ext uri="{C572A759-6A51-4108-AA02-DFA0A04FC94B}">
-              <ma14:wrappingTextBoxFlag xmlns:ma14="http://schemas.microsoft.com/office/mac/drawingml/2011/main" val="1"/>
+              <ma14:wrappingTextBoxFlag xmlns:ma14="http://schemas.microsoft.com/office/mac/drawingml/2011/main" xmlns:a14="http://schemas.microsoft.com/office/drawing/2010/main" xmlns:m="http://schemas.openxmlformats.org/officeDocument/2006/math" xmlns="" val="1"/>
             </a:ext>
           </a:extLst>
         </p:spPr>
@@ -6305,7 +6264,7 @@
           <a:lstStyle/>
           <a:p>
             <a:pPr algn="ctr">
-              <a:defRPr b="1" sz="1000">
+              <a:defRPr sz="1000" b="1">
                 <a:solidFill>
                   <a:srgbClr val="16233A"/>
                 </a:solidFill>
@@ -6321,7 +6280,7 @@
           </a:p>
           <a:p>
             <a:pPr algn="ctr">
-              <a:defRPr b="1" sz="1000">
+              <a:defRPr sz="1000" b="1">
                 <a:solidFill>
                   <a:srgbClr val="16233A"/>
                 </a:solidFill>
@@ -6356,7 +6315,7 @@
           </a:ln>
           <a:extLst>
             <a:ext uri="{C572A759-6A51-4108-AA02-DFA0A04FC94B}">
-              <ma14:wrappingTextBoxFlag xmlns:ma14="http://schemas.microsoft.com/office/mac/drawingml/2011/main" val="1"/>
+              <ma14:wrappingTextBoxFlag xmlns:ma14="http://schemas.microsoft.com/office/mac/drawingml/2011/main" xmlns:a14="http://schemas.microsoft.com/office/drawing/2010/main" xmlns:m="http://schemas.openxmlformats.org/officeDocument/2006/math" xmlns="" val="1"/>
             </a:ext>
           </a:extLst>
         </p:spPr>
@@ -6374,7 +6333,6 @@
             </a:lvl1pPr>
           </a:lstStyle>
           <a:p>
-            <a:pPr/>
             <a:r>
               <a:t>→</a:t>
             </a:r>
@@ -6406,7 +6364,7 @@
           <a:bodyPr lIns="45719" rIns="45719"/>
           <a:lstStyle/>
           <a:p>
-            <a:pPr/>
+            <a:endParaRPr/>
           </a:p>
         </p:txBody>
       </p:sp>
@@ -6429,7 +6387,7 @@
           </a:ln>
           <a:extLst>
             <a:ext uri="{C572A759-6A51-4108-AA02-DFA0A04FC94B}">
-              <ma14:wrappingTextBoxFlag xmlns:ma14="http://schemas.microsoft.com/office/mac/drawingml/2011/main" val="1"/>
+              <ma14:wrappingTextBoxFlag xmlns:ma14="http://schemas.microsoft.com/office/mac/drawingml/2011/main" xmlns:a14="http://schemas.microsoft.com/office/drawing/2010/main" xmlns:m="http://schemas.openxmlformats.org/officeDocument/2006/math" xmlns="" val="1"/>
             </a:ext>
           </a:extLst>
         </p:spPr>
@@ -6439,7 +6397,7 @@
           </a:bodyPr>
           <a:lstStyle>
             <a:lvl1pPr algn="ctr">
-              <a:defRPr b="1" sz="1200">
+              <a:defRPr sz="1200" b="1">
                 <a:solidFill>
                   <a:srgbClr val="FFFFFF"/>
                 </a:solidFill>
@@ -6451,7 +6409,6 @@
             </a:lvl1pPr>
           </a:lstStyle>
           <a:p>
-            <a:pPr/>
             <a:r>
               <a:t>4</a:t>
             </a:r>
@@ -6477,7 +6434,7 @@
           </a:ln>
           <a:extLst>
             <a:ext uri="{C572A759-6A51-4108-AA02-DFA0A04FC94B}">
-              <ma14:wrappingTextBoxFlag xmlns:ma14="http://schemas.microsoft.com/office/mac/drawingml/2011/main" val="1"/>
+              <ma14:wrappingTextBoxFlag xmlns:ma14="http://schemas.microsoft.com/office/mac/drawingml/2011/main" xmlns:a14="http://schemas.microsoft.com/office/drawing/2010/main" xmlns:m="http://schemas.openxmlformats.org/officeDocument/2006/math" xmlns="" val="1"/>
             </a:ext>
           </a:extLst>
         </p:spPr>
@@ -6488,7 +6445,7 @@
           <a:lstStyle/>
           <a:p>
             <a:pPr algn="ctr">
-              <a:defRPr b="1" sz="1000">
+              <a:defRPr sz="1000" b="1">
                 <a:solidFill>
                   <a:srgbClr val="16233A"/>
                 </a:solidFill>
@@ -6504,7 +6461,7 @@
           </a:p>
           <a:p>
             <a:pPr algn="ctr">
-              <a:defRPr b="1" sz="1000">
+              <a:defRPr sz="1000" b="1">
                 <a:solidFill>
                   <a:srgbClr val="16233A"/>
                 </a:solidFill>
@@ -6539,7 +6496,7 @@
           </a:ln>
           <a:extLst>
             <a:ext uri="{C572A759-6A51-4108-AA02-DFA0A04FC94B}">
-              <ma14:wrappingTextBoxFlag xmlns:ma14="http://schemas.microsoft.com/office/mac/drawingml/2011/main" val="1"/>
+              <ma14:wrappingTextBoxFlag xmlns:ma14="http://schemas.microsoft.com/office/mac/drawingml/2011/main" xmlns:a14="http://schemas.microsoft.com/office/drawing/2010/main" xmlns:m="http://schemas.openxmlformats.org/officeDocument/2006/math" xmlns="" val="1"/>
             </a:ext>
           </a:extLst>
         </p:spPr>
@@ -6557,7 +6514,6 @@
             </a:lvl1pPr>
           </a:lstStyle>
           <a:p>
-            <a:pPr/>
             <a:r>
               <a:t>→</a:t>
             </a:r>
@@ -6589,7 +6545,7 @@
           <a:bodyPr lIns="45719" rIns="45719"/>
           <a:lstStyle/>
           <a:p>
-            <a:pPr/>
+            <a:endParaRPr/>
           </a:p>
         </p:txBody>
       </p:sp>
@@ -6612,7 +6568,7 @@
           </a:ln>
           <a:extLst>
             <a:ext uri="{C572A759-6A51-4108-AA02-DFA0A04FC94B}">
-              <ma14:wrappingTextBoxFlag xmlns:ma14="http://schemas.microsoft.com/office/mac/drawingml/2011/main" val="1"/>
+              <ma14:wrappingTextBoxFlag xmlns:ma14="http://schemas.microsoft.com/office/mac/drawingml/2011/main" xmlns:a14="http://schemas.microsoft.com/office/drawing/2010/main" xmlns:m="http://schemas.openxmlformats.org/officeDocument/2006/math" xmlns="" val="1"/>
             </a:ext>
           </a:extLst>
         </p:spPr>
@@ -6622,7 +6578,7 @@
           </a:bodyPr>
           <a:lstStyle>
             <a:lvl1pPr algn="ctr">
-              <a:defRPr b="1" sz="1200">
+              <a:defRPr sz="1200" b="1">
                 <a:solidFill>
                   <a:srgbClr val="FFFFFF"/>
                 </a:solidFill>
@@ -6634,7 +6590,6 @@
             </a:lvl1pPr>
           </a:lstStyle>
           <a:p>
-            <a:pPr/>
             <a:r>
               <a:t>5</a:t>
             </a:r>
@@ -6660,7 +6615,7 @@
           </a:ln>
           <a:extLst>
             <a:ext uri="{C572A759-6A51-4108-AA02-DFA0A04FC94B}">
-              <ma14:wrappingTextBoxFlag xmlns:ma14="http://schemas.microsoft.com/office/mac/drawingml/2011/main" val="1"/>
+              <ma14:wrappingTextBoxFlag xmlns:ma14="http://schemas.microsoft.com/office/mac/drawingml/2011/main" xmlns:a14="http://schemas.microsoft.com/office/drawing/2010/main" xmlns:m="http://schemas.openxmlformats.org/officeDocument/2006/math" xmlns="" val="1"/>
             </a:ext>
           </a:extLst>
         </p:spPr>
@@ -6671,7 +6626,7 @@
           <a:lstStyle/>
           <a:p>
             <a:pPr algn="ctr">
-              <a:defRPr b="1" sz="1000">
+              <a:defRPr sz="1000" b="1">
                 <a:solidFill>
                   <a:srgbClr val="16233A"/>
                 </a:solidFill>
@@ -6687,7 +6642,7 @@
           </a:p>
           <a:p>
             <a:pPr algn="ctr">
-              <a:defRPr b="1" sz="1000">
+              <a:defRPr sz="1000" b="1">
                 <a:solidFill>
                   <a:srgbClr val="16233A"/>
                 </a:solidFill>
@@ -6722,7 +6677,7 @@
           </a:ln>
           <a:extLst>
             <a:ext uri="{C572A759-6A51-4108-AA02-DFA0A04FC94B}">
-              <ma14:wrappingTextBoxFlag xmlns:ma14="http://schemas.microsoft.com/office/mac/drawingml/2011/main" val="1"/>
+              <ma14:wrappingTextBoxFlag xmlns:ma14="http://schemas.microsoft.com/office/mac/drawingml/2011/main" xmlns:a14="http://schemas.microsoft.com/office/drawing/2010/main" xmlns:m="http://schemas.openxmlformats.org/officeDocument/2006/math" xmlns="" val="1"/>
             </a:ext>
           </a:extLst>
         </p:spPr>
@@ -6740,7 +6695,6 @@
             </a:lvl1pPr>
           </a:lstStyle>
           <a:p>
-            <a:pPr/>
             <a:r>
               <a:t>→</a:t>
             </a:r>
@@ -6772,7 +6726,7 @@
           <a:bodyPr lIns="45719" rIns="45719"/>
           <a:lstStyle/>
           <a:p>
-            <a:pPr/>
+            <a:endParaRPr/>
           </a:p>
         </p:txBody>
       </p:sp>
@@ -6795,7 +6749,7 @@
           </a:ln>
           <a:extLst>
             <a:ext uri="{C572A759-6A51-4108-AA02-DFA0A04FC94B}">
-              <ma14:wrappingTextBoxFlag xmlns:ma14="http://schemas.microsoft.com/office/mac/drawingml/2011/main" val="1"/>
+              <ma14:wrappingTextBoxFlag xmlns:ma14="http://schemas.microsoft.com/office/mac/drawingml/2011/main" xmlns:a14="http://schemas.microsoft.com/office/drawing/2010/main" xmlns:m="http://schemas.openxmlformats.org/officeDocument/2006/math" xmlns="" val="1"/>
             </a:ext>
           </a:extLst>
         </p:spPr>
@@ -6805,7 +6759,7 @@
           </a:bodyPr>
           <a:lstStyle>
             <a:lvl1pPr algn="ctr">
-              <a:defRPr b="1" sz="1200">
+              <a:defRPr sz="1200" b="1">
                 <a:solidFill>
                   <a:srgbClr val="FFFFFF"/>
                 </a:solidFill>
@@ -6817,7 +6771,6 @@
             </a:lvl1pPr>
           </a:lstStyle>
           <a:p>
-            <a:pPr/>
             <a:r>
               <a:t>6</a:t>
             </a:r>
@@ -6843,7 +6796,7 @@
           </a:ln>
           <a:extLst>
             <a:ext uri="{C572A759-6A51-4108-AA02-DFA0A04FC94B}">
-              <ma14:wrappingTextBoxFlag xmlns:ma14="http://schemas.microsoft.com/office/mac/drawingml/2011/main" val="1"/>
+              <ma14:wrappingTextBoxFlag xmlns:ma14="http://schemas.microsoft.com/office/mac/drawingml/2011/main" xmlns:a14="http://schemas.microsoft.com/office/drawing/2010/main" xmlns:m="http://schemas.openxmlformats.org/officeDocument/2006/math" xmlns="" val="1"/>
             </a:ext>
           </a:extLst>
         </p:spPr>
@@ -6854,7 +6807,7 @@
           <a:lstStyle/>
           <a:p>
             <a:pPr algn="ctr">
-              <a:defRPr b="1" sz="1000">
+              <a:defRPr sz="1000" b="1">
                 <a:solidFill>
                   <a:srgbClr val="16233A"/>
                 </a:solidFill>
@@ -6870,7 +6823,7 @@
           </a:p>
           <a:p>
             <a:pPr algn="ctr">
-              <a:defRPr b="1" sz="1000">
+              <a:defRPr sz="1000" b="1">
                 <a:solidFill>
                   <a:srgbClr val="16233A"/>
                 </a:solidFill>
@@ -6913,7 +6866,7 @@
           <a:bodyPr lIns="45719" rIns="45719"/>
           <a:lstStyle/>
           <a:p>
-            <a:pPr/>
+            <a:endParaRPr/>
           </a:p>
         </p:txBody>
       </p:sp>
@@ -6936,7 +6889,7 @@
           </a:ln>
           <a:extLst>
             <a:ext uri="{C572A759-6A51-4108-AA02-DFA0A04FC94B}">
-              <ma14:wrappingTextBoxFlag xmlns:ma14="http://schemas.microsoft.com/office/mac/drawingml/2011/main" val="1"/>
+              <ma14:wrappingTextBoxFlag xmlns:ma14="http://schemas.microsoft.com/office/mac/drawingml/2011/main" xmlns:a14="http://schemas.microsoft.com/office/drawing/2010/main" xmlns:m="http://schemas.openxmlformats.org/officeDocument/2006/math" xmlns="" val="1"/>
             </a:ext>
           </a:extLst>
         </p:spPr>
@@ -6946,7 +6899,7 @@
           </a:bodyPr>
           <a:lstStyle>
             <a:lvl1pPr>
-              <a:defRPr b="1" sz="1000">
+              <a:defRPr sz="1000" b="1">
                 <a:solidFill>
                   <a:srgbClr val="2ECC8F"/>
                 </a:solidFill>
@@ -6958,7 +6911,6 @@
             </a:lvl1pPr>
           </a:lstStyle>
           <a:p>
-            <a:pPr/>
             <a:r>
               <a:t>train_model_balanced.py</a:t>
             </a:r>
@@ -6984,7 +6936,7 @@
           </a:ln>
           <a:extLst>
             <a:ext uri="{C572A759-6A51-4108-AA02-DFA0A04FC94B}">
-              <ma14:wrappingTextBoxFlag xmlns:ma14="http://schemas.microsoft.com/office/mac/drawingml/2011/main" val="1"/>
+              <ma14:wrappingTextBoxFlag xmlns:ma14="http://schemas.microsoft.com/office/mac/drawingml/2011/main" xmlns:a14="http://schemas.microsoft.com/office/drawing/2010/main" xmlns:m="http://schemas.openxmlformats.org/officeDocument/2006/math" xmlns="" val="1"/>
             </a:ext>
           </a:extLst>
         </p:spPr>
@@ -7115,7 +7067,7 @@
           <a:bodyPr lIns="45719" rIns="45719"/>
           <a:lstStyle/>
           <a:p>
-            <a:pPr/>
+            <a:endParaRPr/>
           </a:p>
         </p:txBody>
       </p:sp>
@@ -7138,7 +7090,7 @@
           </a:ln>
           <a:extLst>
             <a:ext uri="{C572A759-6A51-4108-AA02-DFA0A04FC94B}">
-              <ma14:wrappingTextBoxFlag xmlns:ma14="http://schemas.microsoft.com/office/mac/drawingml/2011/main" val="1"/>
+              <ma14:wrappingTextBoxFlag xmlns:ma14="http://schemas.microsoft.com/office/mac/drawingml/2011/main" xmlns:a14="http://schemas.microsoft.com/office/drawing/2010/main" xmlns:m="http://schemas.openxmlformats.org/officeDocument/2006/math" xmlns="" val="1"/>
             </a:ext>
           </a:extLst>
         </p:spPr>
@@ -7148,7 +7100,7 @@
           </a:bodyPr>
           <a:lstStyle>
             <a:lvl1pPr>
-              <a:defRPr b="1" sz="1200">
+              <a:defRPr sz="1200" b="1">
                 <a:solidFill>
                   <a:srgbClr val="16233A"/>
                 </a:solidFill>
@@ -7160,7 +7112,6 @@
             </a:lvl1pPr>
           </a:lstStyle>
           <a:p>
-            <a:pPr/>
             <a:r>
               <a:t>250 decision trees</a:t>
             </a:r>
@@ -7192,7 +7143,7 @@
           <a:bodyPr lIns="45719" rIns="45719"/>
           <a:lstStyle/>
           <a:p>
-            <a:pPr/>
+            <a:endParaRPr/>
           </a:p>
         </p:txBody>
       </p:sp>
@@ -7215,7 +7166,7 @@
           </a:ln>
           <a:extLst>
             <a:ext uri="{C572A759-6A51-4108-AA02-DFA0A04FC94B}">
-              <ma14:wrappingTextBoxFlag xmlns:ma14="http://schemas.microsoft.com/office/mac/drawingml/2011/main" val="1"/>
+              <ma14:wrappingTextBoxFlag xmlns:ma14="http://schemas.microsoft.com/office/mac/drawingml/2011/main" xmlns:a14="http://schemas.microsoft.com/office/drawing/2010/main" xmlns:m="http://schemas.openxmlformats.org/officeDocument/2006/math" xmlns="" val="1"/>
             </a:ext>
           </a:extLst>
         </p:spPr>
@@ -7225,7 +7176,7 @@
           </a:bodyPr>
           <a:lstStyle>
             <a:lvl1pPr>
-              <a:defRPr b="1" sz="1200">
+              <a:defRPr sz="1200" b="1">
                 <a:solidFill>
                   <a:srgbClr val="16233A"/>
                 </a:solidFill>
@@ -7237,7 +7188,6 @@
             </a:lvl1pPr>
           </a:lstStyle>
           <a:p>
-            <a:pPr/>
             <a:r>
               <a:t>Balanced class weights</a:t>
             </a:r>
@@ -7269,7 +7219,7 @@
           <a:bodyPr lIns="45719" rIns="45719"/>
           <a:lstStyle/>
           <a:p>
-            <a:pPr/>
+            <a:endParaRPr/>
           </a:p>
         </p:txBody>
       </p:sp>
@@ -7292,7 +7242,7 @@
           </a:ln>
           <a:extLst>
             <a:ext uri="{C572A759-6A51-4108-AA02-DFA0A04FC94B}">
-              <ma14:wrappingTextBoxFlag xmlns:ma14="http://schemas.microsoft.com/office/mac/drawingml/2011/main" val="1"/>
+              <ma14:wrappingTextBoxFlag xmlns:ma14="http://schemas.microsoft.com/office/mac/drawingml/2011/main" xmlns:a14="http://schemas.microsoft.com/office/drawing/2010/main" xmlns:m="http://schemas.openxmlformats.org/officeDocument/2006/math" xmlns="" val="1"/>
             </a:ext>
           </a:extLst>
         </p:spPr>
@@ -7302,7 +7252,7 @@
           </a:bodyPr>
           <a:lstStyle>
             <a:lvl1pPr>
-              <a:defRPr b="1" sz="1200">
+              <a:defRPr sz="1200" b="1">
                 <a:solidFill>
                   <a:srgbClr val="16233A"/>
                 </a:solidFill>
@@ -7314,7 +7264,6 @@
             </a:lvl1pPr>
           </a:lstStyle>
           <a:p>
-            <a:pPr/>
             <a:r>
               <a:t>60 / 20 / 20 split</a:t>
             </a:r>
@@ -7346,7 +7295,7 @@
           <a:bodyPr lIns="45719" rIns="45719"/>
           <a:lstStyle/>
           <a:p>
-            <a:pPr/>
+            <a:endParaRPr/>
           </a:p>
         </p:txBody>
       </p:sp>
@@ -7369,7 +7318,7 @@
           </a:ln>
           <a:extLst>
             <a:ext uri="{C572A759-6A51-4108-AA02-DFA0A04FC94B}">
-              <ma14:wrappingTextBoxFlag xmlns:ma14="http://schemas.microsoft.com/office/mac/drawingml/2011/main" val="1"/>
+              <ma14:wrappingTextBoxFlag xmlns:ma14="http://schemas.microsoft.com/office/mac/drawingml/2011/main" xmlns:a14="http://schemas.microsoft.com/office/drawing/2010/main" xmlns:m="http://schemas.openxmlformats.org/officeDocument/2006/math" xmlns="" val="1"/>
             </a:ext>
           </a:extLst>
         </p:spPr>
@@ -7379,7 +7328,7 @@
           </a:bodyPr>
           <a:lstStyle>
             <a:lvl1pPr>
-              <a:defRPr b="1" sz="1200">
+              <a:defRPr sz="1200" b="1">
                 <a:solidFill>
                   <a:srgbClr val="16233A"/>
                 </a:solidFill>
@@ -7391,7 +7340,6 @@
             </a:lvl1pPr>
           </a:lstStyle>
           <a:p>
-            <a:pPr/>
             <a:r>
               <a:t>Threshold tuned on validation F1</a:t>
             </a:r>
@@ -7422,7 +7370,7 @@
           <a:bodyPr lIns="45719" rIns="45719"/>
           <a:lstStyle/>
           <a:p>
-            <a:pPr/>
+            <a:endParaRPr/>
           </a:p>
         </p:txBody>
       </p:sp>
@@ -7445,7 +7393,7 @@
           </a:ln>
           <a:extLst>
             <a:ext uri="{C572A759-6A51-4108-AA02-DFA0A04FC94B}">
-              <ma14:wrappingTextBoxFlag xmlns:ma14="http://schemas.microsoft.com/office/mac/drawingml/2011/main" val="1"/>
+              <ma14:wrappingTextBoxFlag xmlns:ma14="http://schemas.microsoft.com/office/mac/drawingml/2011/main" xmlns:a14="http://schemas.microsoft.com/office/drawing/2010/main" xmlns:m="http://schemas.openxmlformats.org/officeDocument/2006/math" xmlns="" val="1"/>
             </a:ext>
           </a:extLst>
         </p:spPr>
@@ -7467,7 +7415,6 @@
             </a:lvl1pPr>
           </a:lstStyle>
           <a:p>
-            <a:pPr/>
             <a:r>
               <a:t>Safe Login</a:t>
             </a:r>
@@ -7493,7 +7440,7 @@
           </a:ln>
           <a:extLst>
             <a:ext uri="{C572A759-6A51-4108-AA02-DFA0A04FC94B}">
-              <ma14:wrappingTextBoxFlag xmlns:ma14="http://schemas.microsoft.com/office/mac/drawingml/2011/main" val="1"/>
+              <ma14:wrappingTextBoxFlag xmlns:ma14="http://schemas.microsoft.com/office/mac/drawingml/2011/main" xmlns:a14="http://schemas.microsoft.com/office/drawing/2010/main" xmlns:m="http://schemas.openxmlformats.org/officeDocument/2006/math" xmlns="" val="1"/>
             </a:ext>
           </a:extLst>
         </p:spPr>
@@ -7515,7 +7462,6 @@
             </a:lvl1pPr>
           </a:lstStyle>
           <a:p>
-            <a:pPr/>
             <a:r>
               <a:t>Programming Project</a:t>
             </a:r>
@@ -7541,7 +7487,7 @@
           </a:ln>
           <a:extLst>
             <a:ext uri="{C572A759-6A51-4108-AA02-DFA0A04FC94B}">
-              <ma14:wrappingTextBoxFlag xmlns:ma14="http://schemas.microsoft.com/office/mac/drawingml/2011/main" val="1"/>
+              <ma14:wrappingTextBoxFlag xmlns:ma14="http://schemas.microsoft.com/office/mac/drawingml/2011/main" xmlns:a14="http://schemas.microsoft.com/office/drawing/2010/main" xmlns:m="http://schemas.openxmlformats.org/officeDocument/2006/math" xmlns="" val="1"/>
             </a:ext>
           </a:extLst>
         </p:spPr>
@@ -7563,7 +7509,6 @@
             </a:lvl1pPr>
           </a:lstStyle>
           <a:p>
-            <a:pPr/>
             <a:r>
               <a:t>4</a:t>
             </a:r>
@@ -7575,18 +7520,19 @@
   <p:clrMapOvr>
     <a:masterClrMapping/>
   </p:clrMapOvr>
-  <p:transition xmlns:p14="http://schemas.microsoft.com/office/powerpoint/2010/main" spd="med" advClick="1"/>
+  <p:transition spd="med"/>
 </p:sld>
 </file>
 
 <file path=ppt/slides/slide5.xml><?xml version="1.0" encoding="utf-8"?>
-<p:sld xmlns:a="http://schemas.openxmlformats.org/drawingml/2006/main" xmlns:r="http://schemas.openxmlformats.org/officeDocument/2006/relationships" xmlns:p="http://schemas.openxmlformats.org/presentationml/2006/main" xmlns:m="http://schemas.openxmlformats.org/officeDocument/2006/math" xmlns:a14="http://schemas.microsoft.com/office/drawing/2010/main" showMasterSp="1" showMasterPhAnim="1">
+<p:sld xmlns:a="http://schemas.openxmlformats.org/drawingml/2006/main" xmlns:r="http://schemas.openxmlformats.org/officeDocument/2006/relationships" xmlns:p="http://schemas.openxmlformats.org/presentationml/2006/main">
   <p:cSld>
     <p:bg>
       <p:bgPr>
         <a:solidFill>
           <a:srgbClr val="F3F6FA"/>
         </a:solidFill>
+        <a:effectLst/>
       </p:bgPr>
     </p:bg>
     <p:spTree>
@@ -7622,7 +7568,7 @@
           </a:ln>
           <a:extLst>
             <a:ext uri="{C572A759-6A51-4108-AA02-DFA0A04FC94B}">
-              <ma14:wrappingTextBoxFlag xmlns:ma14="http://schemas.microsoft.com/office/mac/drawingml/2011/main" val="1"/>
+              <ma14:wrappingTextBoxFlag xmlns:ma14="http://schemas.microsoft.com/office/mac/drawingml/2011/main" xmlns:a14="http://schemas.microsoft.com/office/drawing/2010/main" xmlns:m="http://schemas.openxmlformats.org/officeDocument/2006/math" xmlns="" val="1"/>
             </a:ext>
           </a:extLst>
         </p:spPr>
@@ -7632,7 +7578,7 @@
           </a:bodyPr>
           <a:lstStyle>
             <a:lvl1pPr>
-              <a:defRPr b="1" spc="100" sz="1100">
+              <a:defRPr sz="1100" b="1" spc="100">
                 <a:solidFill>
                   <a:srgbClr val="6B7789"/>
                 </a:solidFill>
@@ -7644,7 +7590,6 @@
             </a:lvl1pPr>
           </a:lstStyle>
           <a:p>
-            <a:pPr/>
             <a:r>
               <a:t>LOGIN THREAT DETECTION • MACHINE LEARNING PROJECT</a:t>
             </a:r>
@@ -7676,7 +7621,7 @@
           <a:bodyPr lIns="45719" rIns="45719"/>
           <a:lstStyle/>
           <a:p>
-            <a:pPr/>
+            <a:endParaRPr/>
           </a:p>
         </p:txBody>
       </p:sp>
@@ -7699,7 +7644,7 @@
           </a:ln>
           <a:extLst>
             <a:ext uri="{C572A759-6A51-4108-AA02-DFA0A04FC94B}">
-              <ma14:wrappingTextBoxFlag xmlns:ma14="http://schemas.microsoft.com/office/mac/drawingml/2011/main" val="1"/>
+              <ma14:wrappingTextBoxFlag xmlns:ma14="http://schemas.microsoft.com/office/mac/drawingml/2011/main" xmlns:a14="http://schemas.microsoft.com/office/drawing/2010/main" xmlns:m="http://schemas.openxmlformats.org/officeDocument/2006/math" xmlns="" val="1"/>
             </a:ext>
           </a:extLst>
         </p:spPr>
@@ -7709,7 +7654,7 @@
           </a:bodyPr>
           <a:lstStyle>
             <a:lvl1pPr>
-              <a:defRPr b="1" sz="3000">
+              <a:defRPr sz="3000" b="1">
                 <a:solidFill>
                   <a:srgbClr val="16233A"/>
                 </a:solidFill>
@@ -7721,7 +7666,6 @@
             </a:lvl1pPr>
           </a:lstStyle>
           <a:p>
-            <a:pPr/>
             <a:r>
               <a:t>Results Screenshots</a:t>
             </a:r>
@@ -7747,7 +7691,7 @@
           </a:ln>
           <a:extLst>
             <a:ext uri="{C572A759-6A51-4108-AA02-DFA0A04FC94B}">
-              <ma14:wrappingTextBoxFlag xmlns:ma14="http://schemas.microsoft.com/office/mac/drawingml/2011/main" val="1"/>
+              <ma14:wrappingTextBoxFlag xmlns:ma14="http://schemas.microsoft.com/office/mac/drawingml/2011/main" xmlns:a14="http://schemas.microsoft.com/office/drawing/2010/main" xmlns:m="http://schemas.openxmlformats.org/officeDocument/2006/math" xmlns="" val="1"/>
             </a:ext>
           </a:extLst>
         </p:spPr>
@@ -7769,7 +7713,6 @@
             </a:lvl1pPr>
           </a:lstStyle>
           <a:p>
-            <a:pPr/>
             <a:r>
               <a:t>Model performance and confusion matrix from the balanced test set.</a:t>
             </a:r>
@@ -7803,7 +7746,7 @@
           <a:bodyPr lIns="45719" rIns="45719"/>
           <a:lstStyle/>
           <a:p>
-            <a:pPr/>
+            <a:endParaRPr/>
           </a:p>
         </p:txBody>
       </p:sp>
@@ -7826,7 +7769,7 @@
           </a:ln>
           <a:extLst>
             <a:ext uri="{C572A759-6A51-4108-AA02-DFA0A04FC94B}">
-              <ma14:wrappingTextBoxFlag xmlns:ma14="http://schemas.microsoft.com/office/mac/drawingml/2011/main" val="1"/>
+              <ma14:wrappingTextBoxFlag xmlns:ma14="http://schemas.microsoft.com/office/mac/drawingml/2011/main" xmlns:a14="http://schemas.microsoft.com/office/drawing/2010/main" xmlns:m="http://schemas.openxmlformats.org/officeDocument/2006/math" xmlns="" val="1"/>
             </a:ext>
           </a:extLst>
         </p:spPr>
@@ -7836,7 +7779,7 @@
           </a:bodyPr>
           <a:lstStyle>
             <a:lvl1pPr algn="ctr">
-              <a:defRPr b="1" sz="1000">
+              <a:defRPr sz="1000" b="1">
                 <a:solidFill>
                   <a:srgbClr val="2ECC8F"/>
                 </a:solidFill>
@@ -7848,7 +7791,6 @@
             </a:lvl1pPr>
           </a:lstStyle>
           <a:p>
-            <a:pPr/>
             <a:r>
               <a:t>PRIMARY SECURITY METRIC</a:t>
             </a:r>
@@ -7882,7 +7824,7 @@
           <a:bodyPr lIns="45719" rIns="45719"/>
           <a:lstStyle/>
           <a:p>
-            <a:pPr/>
+            <a:endParaRPr/>
           </a:p>
         </p:txBody>
       </p:sp>
@@ -7905,7 +7847,7 @@
           </a:ln>
           <a:extLst>
             <a:ext uri="{C572A759-6A51-4108-AA02-DFA0A04FC94B}">
-              <ma14:wrappingTextBoxFlag xmlns:ma14="http://schemas.microsoft.com/office/mac/drawingml/2011/main" val="1"/>
+              <ma14:wrappingTextBoxFlag xmlns:ma14="http://schemas.microsoft.com/office/mac/drawingml/2011/main" xmlns:a14="http://schemas.microsoft.com/office/drawing/2010/main" xmlns:m="http://schemas.openxmlformats.org/officeDocument/2006/math" xmlns="" val="1"/>
             </a:ext>
           </a:extLst>
         </p:spPr>
@@ -7915,7 +7857,7 @@
           </a:bodyPr>
           <a:lstStyle>
             <a:lvl1pPr algn="ctr">
-              <a:defRPr b="1" sz="2400">
+              <a:defRPr sz="2400" b="1">
                 <a:solidFill>
                   <a:srgbClr val="FFFFFF"/>
                 </a:solidFill>
@@ -7927,7 +7869,6 @@
             </a:lvl1pPr>
           </a:lstStyle>
           <a:p>
-            <a:pPr/>
             <a:r>
               <a:t>87.33%</a:t>
             </a:r>
@@ -7953,7 +7894,7 @@
           </a:ln>
           <a:extLst>
             <a:ext uri="{C572A759-6A51-4108-AA02-DFA0A04FC94B}">
-              <ma14:wrappingTextBoxFlag xmlns:ma14="http://schemas.microsoft.com/office/mac/drawingml/2011/main" val="1"/>
+              <ma14:wrappingTextBoxFlag xmlns:ma14="http://schemas.microsoft.com/office/mac/drawingml/2011/main" xmlns:a14="http://schemas.microsoft.com/office/drawing/2010/main" xmlns:m="http://schemas.openxmlformats.org/officeDocument/2006/math" xmlns="" val="1"/>
             </a:ext>
           </a:extLst>
         </p:spPr>
@@ -7963,7 +7904,7 @@
           </a:bodyPr>
           <a:lstStyle>
             <a:lvl1pPr algn="ctr">
-              <a:defRPr b="1" sz="1000">
+              <a:defRPr sz="1000" b="1">
                 <a:solidFill>
                   <a:srgbClr val="2ECC8F"/>
                 </a:solidFill>
@@ -7975,7 +7916,6 @@
             </a:lvl1pPr>
           </a:lstStyle>
           <a:p>
-            <a:pPr/>
             <a:r>
               <a:t>RECALL</a:t>
             </a:r>
@@ -8001,7 +7941,7 @@
           </a:ln>
           <a:extLst>
             <a:ext uri="{C572A759-6A51-4108-AA02-DFA0A04FC94B}">
-              <ma14:wrappingTextBoxFlag xmlns:ma14="http://schemas.microsoft.com/office/mac/drawingml/2011/main" val="1"/>
+              <ma14:wrappingTextBoxFlag xmlns:ma14="http://schemas.microsoft.com/office/mac/drawingml/2011/main" xmlns:a14="http://schemas.microsoft.com/office/drawing/2010/main" xmlns:m="http://schemas.openxmlformats.org/officeDocument/2006/math" xmlns="" val="1"/>
             </a:ext>
           </a:extLst>
         </p:spPr>
@@ -8023,7 +7963,6 @@
             </a:lvl1pPr>
           </a:lstStyle>
           <a:p>
-            <a:pPr/>
             <a:r>
               <a:t>The model detected nearly 9 out of every 10 attack-IP logins in the test set.</a:t>
             </a:r>
@@ -8059,7 +7998,7 @@
           <a:bodyPr lIns="45719" rIns="45719"/>
           <a:lstStyle/>
           <a:p>
-            <a:pPr/>
+            <a:endParaRPr/>
           </a:p>
         </p:txBody>
       </p:sp>
@@ -8088,7 +8027,7 @@
           <a:bodyPr lIns="45719" rIns="45719"/>
           <a:lstStyle/>
           <a:p>
-            <a:pPr/>
+            <a:endParaRPr/>
           </a:p>
         </p:txBody>
       </p:sp>
@@ -8111,7 +8050,7 @@
           </a:ln>
           <a:extLst>
             <a:ext uri="{C572A759-6A51-4108-AA02-DFA0A04FC94B}">
-              <ma14:wrappingTextBoxFlag xmlns:ma14="http://schemas.microsoft.com/office/mac/drawingml/2011/main" val="1"/>
+              <ma14:wrappingTextBoxFlag xmlns:ma14="http://schemas.microsoft.com/office/mac/drawingml/2011/main" xmlns:a14="http://schemas.microsoft.com/office/drawing/2010/main" xmlns:m="http://schemas.openxmlformats.org/officeDocument/2006/math" xmlns="" val="1"/>
             </a:ext>
           </a:extLst>
         </p:spPr>
@@ -8121,7 +8060,7 @@
           </a:bodyPr>
           <a:lstStyle>
             <a:lvl1pPr>
-              <a:defRPr b="1" sz="800">
+              <a:defRPr sz="800" b="1">
                 <a:solidFill>
                   <a:srgbClr val="6B7789"/>
                 </a:solidFill>
@@ -8133,7 +8072,6 @@
             </a:lvl1pPr>
           </a:lstStyle>
           <a:p>
-            <a:pPr/>
             <a:r>
               <a:t>ACCURACY</a:t>
             </a:r>
@@ -8159,7 +8097,7 @@
           </a:ln>
           <a:extLst>
             <a:ext uri="{C572A759-6A51-4108-AA02-DFA0A04FC94B}">
-              <ma14:wrappingTextBoxFlag xmlns:ma14="http://schemas.microsoft.com/office/mac/drawingml/2011/main" val="1"/>
+              <ma14:wrappingTextBoxFlag xmlns:ma14="http://schemas.microsoft.com/office/mac/drawingml/2011/main" xmlns:a14="http://schemas.microsoft.com/office/drawing/2010/main" xmlns:m="http://schemas.openxmlformats.org/officeDocument/2006/math" xmlns="" val="1"/>
             </a:ext>
           </a:extLst>
         </p:spPr>
@@ -8169,7 +8107,7 @@
           </a:bodyPr>
           <a:lstStyle>
             <a:lvl1pPr>
-              <a:defRPr b="1" sz="1900">
+              <a:defRPr sz="1900" b="1">
                 <a:solidFill>
                   <a:srgbClr val="16233A"/>
                 </a:solidFill>
@@ -8181,7 +8119,6 @@
             </a:lvl1pPr>
           </a:lstStyle>
           <a:p>
-            <a:pPr/>
             <a:r>
               <a:t>85.58%</a:t>
             </a:r>
@@ -8217,7 +8154,7 @@
           <a:bodyPr lIns="45719" rIns="45719"/>
           <a:lstStyle/>
           <a:p>
-            <a:pPr/>
+            <a:endParaRPr/>
           </a:p>
         </p:txBody>
       </p:sp>
@@ -8246,7 +8183,7 @@
           <a:bodyPr lIns="45719" rIns="45719"/>
           <a:lstStyle/>
           <a:p>
-            <a:pPr/>
+            <a:endParaRPr/>
           </a:p>
         </p:txBody>
       </p:sp>
@@ -8269,7 +8206,7 @@
           </a:ln>
           <a:extLst>
             <a:ext uri="{C572A759-6A51-4108-AA02-DFA0A04FC94B}">
-              <ma14:wrappingTextBoxFlag xmlns:ma14="http://schemas.microsoft.com/office/mac/drawingml/2011/main" val="1"/>
+              <ma14:wrappingTextBoxFlag xmlns:ma14="http://schemas.microsoft.com/office/mac/drawingml/2011/main" xmlns:a14="http://schemas.microsoft.com/office/drawing/2010/main" xmlns:m="http://schemas.openxmlformats.org/officeDocument/2006/math" xmlns="" val="1"/>
             </a:ext>
           </a:extLst>
         </p:spPr>
@@ -8279,7 +8216,7 @@
           </a:bodyPr>
           <a:lstStyle>
             <a:lvl1pPr>
-              <a:defRPr b="1" sz="800">
+              <a:defRPr sz="800" b="1">
                 <a:solidFill>
                   <a:srgbClr val="6B7789"/>
                 </a:solidFill>
@@ -8291,7 +8228,6 @@
             </a:lvl1pPr>
           </a:lstStyle>
           <a:p>
-            <a:pPr/>
             <a:r>
               <a:t>PRECISION</a:t>
             </a:r>
@@ -8317,7 +8253,7 @@
           </a:ln>
           <a:extLst>
             <a:ext uri="{C572A759-6A51-4108-AA02-DFA0A04FC94B}">
-              <ma14:wrappingTextBoxFlag xmlns:ma14="http://schemas.microsoft.com/office/mac/drawingml/2011/main" val="1"/>
+              <ma14:wrappingTextBoxFlag xmlns:ma14="http://schemas.microsoft.com/office/mac/drawingml/2011/main" xmlns:a14="http://schemas.microsoft.com/office/drawing/2010/main" xmlns:m="http://schemas.openxmlformats.org/officeDocument/2006/math" xmlns="" val="1"/>
             </a:ext>
           </a:extLst>
         </p:spPr>
@@ -8327,7 +8263,7 @@
           </a:bodyPr>
           <a:lstStyle>
             <a:lvl1pPr>
-              <a:defRPr b="1" sz="1900">
+              <a:defRPr sz="1900" b="1">
                 <a:solidFill>
                   <a:srgbClr val="16233A"/>
                 </a:solidFill>
@@ -8339,7 +8275,6 @@
             </a:lvl1pPr>
           </a:lstStyle>
           <a:p>
-            <a:pPr/>
             <a:r>
               <a:t>54.18%</a:t>
             </a:r>
@@ -8375,7 +8310,7 @@
           <a:bodyPr lIns="45719" rIns="45719"/>
           <a:lstStyle/>
           <a:p>
-            <a:pPr/>
+            <a:endParaRPr/>
           </a:p>
         </p:txBody>
       </p:sp>
@@ -8404,7 +8339,7 @@
           <a:bodyPr lIns="45719" rIns="45719"/>
           <a:lstStyle/>
           <a:p>
-            <a:pPr/>
+            <a:endParaRPr/>
           </a:p>
         </p:txBody>
       </p:sp>
@@ -8427,7 +8362,7 @@
           </a:ln>
           <a:extLst>
             <a:ext uri="{C572A759-6A51-4108-AA02-DFA0A04FC94B}">
-              <ma14:wrappingTextBoxFlag xmlns:ma14="http://schemas.microsoft.com/office/mac/drawingml/2011/main" val="1"/>
+              <ma14:wrappingTextBoxFlag xmlns:ma14="http://schemas.microsoft.com/office/mac/drawingml/2011/main" xmlns:a14="http://schemas.microsoft.com/office/drawing/2010/main" xmlns:m="http://schemas.openxmlformats.org/officeDocument/2006/math" xmlns="" val="1"/>
             </a:ext>
           </a:extLst>
         </p:spPr>
@@ -8437,7 +8372,7 @@
           </a:bodyPr>
           <a:lstStyle>
             <a:lvl1pPr>
-              <a:defRPr b="1" sz="800">
+              <a:defRPr sz="800" b="1">
                 <a:solidFill>
                   <a:srgbClr val="6B7789"/>
                 </a:solidFill>
@@ -8449,7 +8384,6 @@
             </a:lvl1pPr>
           </a:lstStyle>
           <a:p>
-            <a:pPr/>
             <a:r>
               <a:t>F1-SCORE</a:t>
             </a:r>
@@ -8475,7 +8409,7 @@
           </a:ln>
           <a:extLst>
             <a:ext uri="{C572A759-6A51-4108-AA02-DFA0A04FC94B}">
-              <ma14:wrappingTextBoxFlag xmlns:ma14="http://schemas.microsoft.com/office/mac/drawingml/2011/main" val="1"/>
+              <ma14:wrappingTextBoxFlag xmlns:ma14="http://schemas.microsoft.com/office/mac/drawingml/2011/main" xmlns:a14="http://schemas.microsoft.com/office/drawing/2010/main" xmlns:m="http://schemas.openxmlformats.org/officeDocument/2006/math" xmlns="" val="1"/>
             </a:ext>
           </a:extLst>
         </p:spPr>
@@ -8485,7 +8419,7 @@
           </a:bodyPr>
           <a:lstStyle>
             <a:lvl1pPr>
-              <a:defRPr b="1" sz="1900">
+              <a:defRPr sz="1900" b="1">
                 <a:solidFill>
                   <a:srgbClr val="16233A"/>
                 </a:solidFill>
@@ -8497,7 +8431,6 @@
             </a:lvl1pPr>
           </a:lstStyle>
           <a:p>
-            <a:pPr/>
             <a:r>
               <a:t>66.87%</a:t>
             </a:r>
@@ -8533,7 +8466,7 @@
           <a:bodyPr lIns="45719" rIns="45719"/>
           <a:lstStyle/>
           <a:p>
-            <a:pPr/>
+            <a:endParaRPr/>
           </a:p>
         </p:txBody>
       </p:sp>
@@ -8562,7 +8495,7 @@
           <a:bodyPr lIns="45719" rIns="45719"/>
           <a:lstStyle/>
           <a:p>
-            <a:pPr/>
+            <a:endParaRPr/>
           </a:p>
         </p:txBody>
       </p:sp>
@@ -8585,7 +8518,7 @@
           </a:ln>
           <a:extLst>
             <a:ext uri="{C572A759-6A51-4108-AA02-DFA0A04FC94B}">
-              <ma14:wrappingTextBoxFlag xmlns:ma14="http://schemas.microsoft.com/office/mac/drawingml/2011/main" val="1"/>
+              <ma14:wrappingTextBoxFlag xmlns:ma14="http://schemas.microsoft.com/office/mac/drawingml/2011/main" xmlns:a14="http://schemas.microsoft.com/office/drawing/2010/main" xmlns:m="http://schemas.openxmlformats.org/officeDocument/2006/math" xmlns="" val="1"/>
             </a:ext>
           </a:extLst>
         </p:spPr>
@@ -8595,7 +8528,7 @@
           </a:bodyPr>
           <a:lstStyle>
             <a:lvl1pPr>
-              <a:defRPr b="1" sz="800">
+              <a:defRPr sz="800" b="1">
                 <a:solidFill>
                   <a:srgbClr val="6B7789"/>
                 </a:solidFill>
@@ -8607,7 +8540,6 @@
             </a:lvl1pPr>
           </a:lstStyle>
           <a:p>
-            <a:pPr/>
             <a:r>
               <a:t>ROC-AUC</a:t>
             </a:r>
@@ -8633,7 +8565,7 @@
           </a:ln>
           <a:extLst>
             <a:ext uri="{C572A759-6A51-4108-AA02-DFA0A04FC94B}">
-              <ma14:wrappingTextBoxFlag xmlns:ma14="http://schemas.microsoft.com/office/mac/drawingml/2011/main" val="1"/>
+              <ma14:wrappingTextBoxFlag xmlns:ma14="http://schemas.microsoft.com/office/mac/drawingml/2011/main" xmlns:a14="http://schemas.microsoft.com/office/drawing/2010/main" xmlns:m="http://schemas.openxmlformats.org/officeDocument/2006/math" xmlns="" val="1"/>
             </a:ext>
           </a:extLst>
         </p:spPr>
@@ -8643,7 +8575,7 @@
           </a:bodyPr>
           <a:lstStyle>
             <a:lvl1pPr>
-              <a:defRPr b="1" sz="1900">
+              <a:defRPr sz="1900" b="1">
                 <a:solidFill>
                   <a:srgbClr val="16233A"/>
                 </a:solidFill>
@@ -8655,7 +8587,6 @@
             </a:lvl1pPr>
           </a:lstStyle>
           <a:p>
-            <a:pPr/>
             <a:r>
               <a:t>92.21%</a:t>
             </a:r>
@@ -8691,7 +8622,7 @@
           <a:bodyPr lIns="45719" rIns="45719"/>
           <a:lstStyle/>
           <a:p>
-            <a:pPr/>
+            <a:endParaRPr/>
           </a:p>
         </p:txBody>
       </p:sp>
@@ -8720,7 +8651,7 @@
           <a:bodyPr lIns="45719" rIns="45719"/>
           <a:lstStyle/>
           <a:p>
-            <a:pPr/>
+            <a:endParaRPr/>
           </a:p>
         </p:txBody>
       </p:sp>
@@ -8743,7 +8674,7 @@
           </a:ln>
           <a:extLst>
             <a:ext uri="{C572A759-6A51-4108-AA02-DFA0A04FC94B}">
-              <ma14:wrappingTextBoxFlag xmlns:ma14="http://schemas.microsoft.com/office/mac/drawingml/2011/main" val="1"/>
+              <ma14:wrappingTextBoxFlag xmlns:ma14="http://schemas.microsoft.com/office/mac/drawingml/2011/main" xmlns:a14="http://schemas.microsoft.com/office/drawing/2010/main" xmlns:m="http://schemas.openxmlformats.org/officeDocument/2006/math" xmlns="" val="1"/>
             </a:ext>
           </a:extLst>
         </p:spPr>
@@ -8753,7 +8684,7 @@
           </a:bodyPr>
           <a:lstStyle>
             <a:lvl1pPr>
-              <a:defRPr b="1" sz="800">
+              <a:defRPr sz="800" b="1">
                 <a:solidFill>
                   <a:srgbClr val="6B7789"/>
                 </a:solidFill>
@@ -8765,7 +8696,6 @@
             </a:lvl1pPr>
           </a:lstStyle>
           <a:p>
-            <a:pPr/>
             <a:r>
               <a:t>PR-AUC</a:t>
             </a:r>
@@ -8791,7 +8721,7 @@
           </a:ln>
           <a:extLst>
             <a:ext uri="{C572A759-6A51-4108-AA02-DFA0A04FC94B}">
-              <ma14:wrappingTextBoxFlag xmlns:ma14="http://schemas.microsoft.com/office/mac/drawingml/2011/main" val="1"/>
+              <ma14:wrappingTextBoxFlag xmlns:ma14="http://schemas.microsoft.com/office/mac/drawingml/2011/main" xmlns:a14="http://schemas.microsoft.com/office/drawing/2010/main" xmlns:m="http://schemas.openxmlformats.org/officeDocument/2006/math" xmlns="" val="1"/>
             </a:ext>
           </a:extLst>
         </p:spPr>
@@ -8801,7 +8731,7 @@
           </a:bodyPr>
           <a:lstStyle>
             <a:lvl1pPr>
-              <a:defRPr b="1" sz="1900">
+              <a:defRPr sz="1900" b="1">
                 <a:solidFill>
                   <a:srgbClr val="16233A"/>
                 </a:solidFill>
@@ -8813,7 +8743,6 @@
             </a:lvl1pPr>
           </a:lstStyle>
           <a:p>
-            <a:pPr/>
             <a:r>
               <a:t>68.75%</a:t>
             </a:r>
@@ -8849,7 +8778,7 @@
           <a:bodyPr lIns="45719" rIns="45719"/>
           <a:lstStyle/>
           <a:p>
-            <a:pPr/>
+            <a:endParaRPr/>
           </a:p>
         </p:txBody>
       </p:sp>
@@ -8878,7 +8807,7 @@
           <a:bodyPr lIns="45719" rIns="45719"/>
           <a:lstStyle/>
           <a:p>
-            <a:pPr/>
+            <a:endParaRPr/>
           </a:p>
         </p:txBody>
       </p:sp>
@@ -8901,7 +8830,7 @@
           </a:ln>
           <a:extLst>
             <a:ext uri="{C572A759-6A51-4108-AA02-DFA0A04FC94B}">
-              <ma14:wrappingTextBoxFlag xmlns:ma14="http://schemas.microsoft.com/office/mac/drawingml/2011/main" val="1"/>
+              <ma14:wrappingTextBoxFlag xmlns:ma14="http://schemas.microsoft.com/office/mac/drawingml/2011/main" xmlns:a14="http://schemas.microsoft.com/office/drawing/2010/main" xmlns:m="http://schemas.openxmlformats.org/officeDocument/2006/math" xmlns="" val="1"/>
             </a:ext>
           </a:extLst>
         </p:spPr>
@@ -8911,7 +8840,7 @@
           </a:bodyPr>
           <a:lstStyle>
             <a:lvl1pPr>
-              <a:defRPr b="1" sz="800">
+              <a:defRPr sz="800" b="1">
                 <a:solidFill>
                   <a:srgbClr val="6B7789"/>
                 </a:solidFill>
@@ -8923,7 +8852,6 @@
             </a:lvl1pPr>
           </a:lstStyle>
           <a:p>
-            <a:pPr/>
             <a:r>
               <a:t>THRESHOLD</a:t>
             </a:r>
@@ -8949,7 +8877,7 @@
           </a:ln>
           <a:extLst>
             <a:ext uri="{C572A759-6A51-4108-AA02-DFA0A04FC94B}">
-              <ma14:wrappingTextBoxFlag xmlns:ma14="http://schemas.microsoft.com/office/mac/drawingml/2011/main" val="1"/>
+              <ma14:wrappingTextBoxFlag xmlns:ma14="http://schemas.microsoft.com/office/mac/drawingml/2011/main" xmlns:a14="http://schemas.microsoft.com/office/drawing/2010/main" xmlns:m="http://schemas.openxmlformats.org/officeDocument/2006/math" xmlns="" val="1"/>
             </a:ext>
           </a:extLst>
         </p:spPr>
@@ -8959,7 +8887,7 @@
           </a:bodyPr>
           <a:lstStyle>
             <a:lvl1pPr>
-              <a:defRPr b="1" sz="1900">
+              <a:defRPr sz="1900" b="1">
                 <a:solidFill>
                   <a:srgbClr val="16233A"/>
                 </a:solidFill>
@@ -8971,7 +8899,6 @@
             </a:lvl1pPr>
           </a:lstStyle>
           <a:p>
-            <a:pPr/>
             <a:r>
               <a:t>0.5188</a:t>
             </a:r>
@@ -8997,7 +8924,7 @@
           </a:ln>
           <a:extLst>
             <a:ext uri="{C572A759-6A51-4108-AA02-DFA0A04FC94B}">
-              <ma14:wrappingTextBoxFlag xmlns:ma14="http://schemas.microsoft.com/office/mac/drawingml/2011/main" val="1"/>
+              <ma14:wrappingTextBoxFlag xmlns:ma14="http://schemas.microsoft.com/office/mac/drawingml/2011/main" xmlns:a14="http://schemas.microsoft.com/office/drawing/2010/main" xmlns:m="http://schemas.openxmlformats.org/officeDocument/2006/math" xmlns="" val="1"/>
             </a:ext>
           </a:extLst>
         </p:spPr>
@@ -9007,7 +8934,7 @@
           </a:bodyPr>
           <a:lstStyle>
             <a:lvl1pPr>
-              <a:defRPr b="1" sz="1000">
+              <a:defRPr sz="1000" b="1">
                 <a:solidFill>
                   <a:srgbClr val="6B7789"/>
                 </a:solidFill>
@@ -9019,7 +8946,6 @@
             </a:lvl1pPr>
           </a:lstStyle>
           <a:p>
-            <a:pPr/>
             <a:r>
               <a:t>CONFUSION MATRIX</a:t>
             </a:r>
@@ -9053,7 +8979,7 @@
           <a:bodyPr lIns="45719" rIns="45719"/>
           <a:lstStyle/>
           <a:p>
-            <a:pPr/>
+            <a:endParaRPr/>
           </a:p>
         </p:txBody>
       </p:sp>
@@ -9076,7 +9002,7 @@
           </a:ln>
           <a:extLst>
             <a:ext uri="{C572A759-6A51-4108-AA02-DFA0A04FC94B}">
-              <ma14:wrappingTextBoxFlag xmlns:ma14="http://schemas.microsoft.com/office/mac/drawingml/2011/main" val="1"/>
+              <ma14:wrappingTextBoxFlag xmlns:ma14="http://schemas.microsoft.com/office/mac/drawingml/2011/main" xmlns:a14="http://schemas.microsoft.com/office/drawing/2010/main" xmlns:m="http://schemas.openxmlformats.org/officeDocument/2006/math" xmlns="" val="1"/>
             </a:ext>
           </a:extLst>
         </p:spPr>
@@ -9086,7 +9012,7 @@
           </a:bodyPr>
           <a:lstStyle>
             <a:lvl1pPr algn="ctr">
-              <a:defRPr b="1" sz="1600">
+              <a:defRPr sz="1600" b="1">
                 <a:solidFill>
                   <a:srgbClr val="2ECC8F"/>
                 </a:solidFill>
@@ -9098,7 +9024,6 @@
             </a:lvl1pPr>
           </a:lstStyle>
           <a:p>
-            <a:pPr/>
             <a:r>
               <a:t>84,833</a:t>
             </a:r>
@@ -9124,7 +9049,7 @@
           </a:ln>
           <a:extLst>
             <a:ext uri="{C572A759-6A51-4108-AA02-DFA0A04FC94B}">
-              <ma14:wrappingTextBoxFlag xmlns:ma14="http://schemas.microsoft.com/office/mac/drawingml/2011/main" val="1"/>
+              <ma14:wrappingTextBoxFlag xmlns:ma14="http://schemas.microsoft.com/office/mac/drawingml/2011/main" xmlns:a14="http://schemas.microsoft.com/office/drawing/2010/main" xmlns:m="http://schemas.openxmlformats.org/officeDocument/2006/math" xmlns="" val="1"/>
             </a:ext>
           </a:extLst>
         </p:spPr>
@@ -9146,7 +9071,6 @@
             </a:lvl1pPr>
           </a:lstStyle>
           <a:p>
-            <a:pPr/>
             <a:r>
               <a:t>True negatives</a:t>
             </a:r>
@@ -9180,7 +9104,7 @@
           <a:bodyPr lIns="45719" rIns="45719"/>
           <a:lstStyle/>
           <a:p>
-            <a:pPr/>
+            <a:endParaRPr/>
           </a:p>
         </p:txBody>
       </p:sp>
@@ -9203,7 +9127,7 @@
           </a:ln>
           <a:extLst>
             <a:ext uri="{C572A759-6A51-4108-AA02-DFA0A04FC94B}">
-              <ma14:wrappingTextBoxFlag xmlns:ma14="http://schemas.microsoft.com/office/mac/drawingml/2011/main" val="1"/>
+              <ma14:wrappingTextBoxFlag xmlns:ma14="http://schemas.microsoft.com/office/mac/drawingml/2011/main" xmlns:a14="http://schemas.microsoft.com/office/drawing/2010/main" xmlns:m="http://schemas.openxmlformats.org/officeDocument/2006/math" xmlns="" val="1"/>
             </a:ext>
           </a:extLst>
         </p:spPr>
@@ -9213,7 +9137,7 @@
           </a:bodyPr>
           <a:lstStyle>
             <a:lvl1pPr algn="ctr">
-              <a:defRPr b="1" sz="1600">
+              <a:defRPr sz="1600" b="1">
                 <a:solidFill>
                   <a:srgbClr val="F45B69"/>
                 </a:solidFill>
@@ -9225,7 +9149,6 @@
             </a:lvl1pPr>
           </a:lstStyle>
           <a:p>
-            <a:pPr/>
             <a:r>
               <a:t>14,701</a:t>
             </a:r>
@@ -9251,7 +9174,7 @@
           </a:ln>
           <a:extLst>
             <a:ext uri="{C572A759-6A51-4108-AA02-DFA0A04FC94B}">
-              <ma14:wrappingTextBoxFlag xmlns:ma14="http://schemas.microsoft.com/office/mac/drawingml/2011/main" val="1"/>
+              <ma14:wrappingTextBoxFlag xmlns:ma14="http://schemas.microsoft.com/office/mac/drawingml/2011/main" xmlns:a14="http://schemas.microsoft.com/office/drawing/2010/main" xmlns:m="http://schemas.openxmlformats.org/officeDocument/2006/math" xmlns="" val="1"/>
             </a:ext>
           </a:extLst>
         </p:spPr>
@@ -9273,7 +9196,6 @@
             </a:lvl1pPr>
           </a:lstStyle>
           <a:p>
-            <a:pPr/>
             <a:r>
               <a:t>False positives</a:t>
             </a:r>
@@ -9307,7 +9229,7 @@
           <a:bodyPr lIns="45719" rIns="45719"/>
           <a:lstStyle/>
           <a:p>
-            <a:pPr/>
+            <a:endParaRPr/>
           </a:p>
         </p:txBody>
       </p:sp>
@@ -9330,7 +9252,7 @@
           </a:ln>
           <a:extLst>
             <a:ext uri="{C572A759-6A51-4108-AA02-DFA0A04FC94B}">
-              <ma14:wrappingTextBoxFlag xmlns:ma14="http://schemas.microsoft.com/office/mac/drawingml/2011/main" val="1"/>
+              <ma14:wrappingTextBoxFlag xmlns:ma14="http://schemas.microsoft.com/office/mac/drawingml/2011/main" xmlns:a14="http://schemas.microsoft.com/office/drawing/2010/main" xmlns:m="http://schemas.openxmlformats.org/officeDocument/2006/math" xmlns="" val="1"/>
             </a:ext>
           </a:extLst>
         </p:spPr>
@@ -9340,7 +9262,7 @@
           </a:bodyPr>
           <a:lstStyle>
             <a:lvl1pPr algn="ctr">
-              <a:defRPr b="1" sz="1600">
+              <a:defRPr sz="1600" b="1">
                 <a:solidFill>
                   <a:srgbClr val="F5A623"/>
                 </a:solidFill>
@@ -9352,7 +9274,6 @@
             </a:lvl1pPr>
           </a:lstStyle>
           <a:p>
-            <a:pPr/>
             <a:r>
               <a:t>2,522</a:t>
             </a:r>
@@ -9378,7 +9299,7 @@
           </a:ln>
           <a:extLst>
             <a:ext uri="{C572A759-6A51-4108-AA02-DFA0A04FC94B}">
-              <ma14:wrappingTextBoxFlag xmlns:ma14="http://schemas.microsoft.com/office/mac/drawingml/2011/main" val="1"/>
+              <ma14:wrappingTextBoxFlag xmlns:ma14="http://schemas.microsoft.com/office/mac/drawingml/2011/main" xmlns:a14="http://schemas.microsoft.com/office/drawing/2010/main" xmlns:m="http://schemas.openxmlformats.org/officeDocument/2006/math" xmlns="" val="1"/>
             </a:ext>
           </a:extLst>
         </p:spPr>
@@ -9400,7 +9321,6 @@
             </a:lvl1pPr>
           </a:lstStyle>
           <a:p>
-            <a:pPr/>
             <a:r>
               <a:t>False negatives</a:t>
             </a:r>
@@ -9434,7 +9354,7 @@
           <a:bodyPr lIns="45719" rIns="45719"/>
           <a:lstStyle/>
           <a:p>
-            <a:pPr/>
+            <a:endParaRPr/>
           </a:p>
         </p:txBody>
       </p:sp>
@@ -9457,7 +9377,7 @@
           </a:ln>
           <a:extLst>
             <a:ext uri="{C572A759-6A51-4108-AA02-DFA0A04FC94B}">
-              <ma14:wrappingTextBoxFlag xmlns:ma14="http://schemas.microsoft.com/office/mac/drawingml/2011/main" val="1"/>
+              <ma14:wrappingTextBoxFlag xmlns:ma14="http://schemas.microsoft.com/office/mac/drawingml/2011/main" xmlns:a14="http://schemas.microsoft.com/office/drawing/2010/main" xmlns:m="http://schemas.openxmlformats.org/officeDocument/2006/math" xmlns="" val="1"/>
             </a:ext>
           </a:extLst>
         </p:spPr>
@@ -9467,7 +9387,7 @@
           </a:bodyPr>
           <a:lstStyle>
             <a:lvl1pPr algn="ctr">
-              <a:defRPr b="1" sz="1600">
+              <a:defRPr sz="1600" b="1">
                 <a:solidFill>
                   <a:srgbClr val="4C8DFF"/>
                 </a:solidFill>
@@ -9479,7 +9399,6 @@
             </a:lvl1pPr>
           </a:lstStyle>
           <a:p>
-            <a:pPr/>
             <a:r>
               <a:t>17,385</a:t>
             </a:r>
@@ -9505,7 +9424,7 @@
           </a:ln>
           <a:extLst>
             <a:ext uri="{C572A759-6A51-4108-AA02-DFA0A04FC94B}">
-              <ma14:wrappingTextBoxFlag xmlns:ma14="http://schemas.microsoft.com/office/mac/drawingml/2011/main" val="1"/>
+              <ma14:wrappingTextBoxFlag xmlns:ma14="http://schemas.microsoft.com/office/mac/drawingml/2011/main" xmlns:a14="http://schemas.microsoft.com/office/drawing/2010/main" xmlns:m="http://schemas.openxmlformats.org/officeDocument/2006/math" xmlns="" val="1"/>
             </a:ext>
           </a:extLst>
         </p:spPr>
@@ -9527,7 +9446,6 @@
             </a:lvl1pPr>
           </a:lstStyle>
           <a:p>
-            <a:pPr/>
             <a:r>
               <a:t>True positives</a:t>
             </a:r>
@@ -9553,7 +9471,7 @@
           </a:ln>
           <a:extLst>
             <a:ext uri="{C572A759-6A51-4108-AA02-DFA0A04FC94B}">
-              <ma14:wrappingTextBoxFlag xmlns:ma14="http://schemas.microsoft.com/office/mac/drawingml/2011/main" val="1"/>
+              <ma14:wrappingTextBoxFlag xmlns:ma14="http://schemas.microsoft.com/office/mac/drawingml/2011/main" xmlns:a14="http://schemas.microsoft.com/office/drawing/2010/main" xmlns:m="http://schemas.openxmlformats.org/officeDocument/2006/math" xmlns="" val="1"/>
             </a:ext>
           </a:extLst>
         </p:spPr>
@@ -9563,7 +9481,7 @@
           </a:bodyPr>
           <a:lstStyle>
             <a:lvl1pPr algn="ctr">
-              <a:defRPr i="1" sz="1000">
+              <a:defRPr sz="1000" i="1">
                 <a:solidFill>
                   <a:srgbClr val="6B7789"/>
                 </a:solidFill>
@@ -9575,7 +9493,6 @@
             </a:lvl1pPr>
           </a:lstStyle>
           <a:p>
-            <a:pPr/>
             <a:r>
               <a:t>Interpretation: strong recall &amp; ROC-AUC show good separation; moderate precision means the model still creates false alarms.</a:t>
             </a:r>
@@ -9606,7 +9523,7 @@
           <a:bodyPr lIns="45719" rIns="45719"/>
           <a:lstStyle/>
           <a:p>
-            <a:pPr/>
+            <a:endParaRPr/>
           </a:p>
         </p:txBody>
       </p:sp>
@@ -9629,7 +9546,7 @@
           </a:ln>
           <a:extLst>
             <a:ext uri="{C572A759-6A51-4108-AA02-DFA0A04FC94B}">
-              <ma14:wrappingTextBoxFlag xmlns:ma14="http://schemas.microsoft.com/office/mac/drawingml/2011/main" val="1"/>
+              <ma14:wrappingTextBoxFlag xmlns:ma14="http://schemas.microsoft.com/office/mac/drawingml/2011/main" xmlns:a14="http://schemas.microsoft.com/office/drawing/2010/main" xmlns:m="http://schemas.openxmlformats.org/officeDocument/2006/math" xmlns="" val="1"/>
             </a:ext>
           </a:extLst>
         </p:spPr>
@@ -9651,7 +9568,6 @@
             </a:lvl1pPr>
           </a:lstStyle>
           <a:p>
-            <a:pPr/>
             <a:r>
               <a:t>Safe Login</a:t>
             </a:r>
@@ -9677,7 +9593,7 @@
           </a:ln>
           <a:extLst>
             <a:ext uri="{C572A759-6A51-4108-AA02-DFA0A04FC94B}">
-              <ma14:wrappingTextBoxFlag xmlns:ma14="http://schemas.microsoft.com/office/mac/drawingml/2011/main" val="1"/>
+              <ma14:wrappingTextBoxFlag xmlns:ma14="http://schemas.microsoft.com/office/mac/drawingml/2011/main" xmlns:a14="http://schemas.microsoft.com/office/drawing/2010/main" xmlns:m="http://schemas.openxmlformats.org/officeDocument/2006/math" xmlns="" val="1"/>
             </a:ext>
           </a:extLst>
         </p:spPr>
@@ -9699,7 +9615,6 @@
             </a:lvl1pPr>
           </a:lstStyle>
           <a:p>
-            <a:pPr/>
             <a:r>
               <a:t>Programming Project</a:t>
             </a:r>
@@ -9725,7 +9640,7 @@
           </a:ln>
           <a:extLst>
             <a:ext uri="{C572A759-6A51-4108-AA02-DFA0A04FC94B}">
-              <ma14:wrappingTextBoxFlag xmlns:ma14="http://schemas.microsoft.com/office/mac/drawingml/2011/main" val="1"/>
+              <ma14:wrappingTextBoxFlag xmlns:ma14="http://schemas.microsoft.com/office/mac/drawingml/2011/main" xmlns:a14="http://schemas.microsoft.com/office/drawing/2010/main" xmlns:m="http://schemas.openxmlformats.org/officeDocument/2006/math" xmlns="" val="1"/>
             </a:ext>
           </a:extLst>
         </p:spPr>
@@ -9747,7 +9662,6 @@
             </a:lvl1pPr>
           </a:lstStyle>
           <a:p>
-            <a:pPr/>
             <a:r>
               <a:t>5</a:t>
             </a:r>
@@ -9759,18 +9673,19 @@
   <p:clrMapOvr>
     <a:masterClrMapping/>
   </p:clrMapOvr>
-  <p:transition xmlns:p14="http://schemas.microsoft.com/office/powerpoint/2010/main" spd="med" advClick="1"/>
+  <p:transition spd="med"/>
 </p:sld>
 </file>
 
 <file path=ppt/slides/slide6.xml><?xml version="1.0" encoding="utf-8"?>
-<p:sld xmlns:a="http://schemas.openxmlformats.org/drawingml/2006/main" xmlns:r="http://schemas.openxmlformats.org/officeDocument/2006/relationships" xmlns:p="http://schemas.openxmlformats.org/presentationml/2006/main" xmlns:m="http://schemas.openxmlformats.org/officeDocument/2006/math" xmlns:a14="http://schemas.microsoft.com/office/drawing/2010/main" showMasterSp="1" showMasterPhAnim="1">
+<p:sld xmlns:a="http://schemas.openxmlformats.org/drawingml/2006/main" xmlns:r="http://schemas.openxmlformats.org/officeDocument/2006/relationships" xmlns:p="http://schemas.openxmlformats.org/presentationml/2006/main">
   <p:cSld>
     <p:bg>
       <p:bgPr>
         <a:solidFill>
           <a:srgbClr val="F3F6FA"/>
         </a:solidFill>
+        <a:effectLst/>
       </p:bgPr>
     </p:bg>
     <p:spTree>
@@ -9806,7 +9721,7 @@
           </a:ln>
           <a:extLst>
             <a:ext uri="{C572A759-6A51-4108-AA02-DFA0A04FC94B}">
-              <ma14:wrappingTextBoxFlag xmlns:ma14="http://schemas.microsoft.com/office/mac/drawingml/2011/main" val="1"/>
+              <ma14:wrappingTextBoxFlag xmlns:ma14="http://schemas.microsoft.com/office/mac/drawingml/2011/main" xmlns:a14="http://schemas.microsoft.com/office/drawing/2010/main" xmlns:m="http://schemas.openxmlformats.org/officeDocument/2006/math" xmlns="" val="1"/>
             </a:ext>
           </a:extLst>
         </p:spPr>
@@ -9816,7 +9731,7 @@
           </a:bodyPr>
           <a:lstStyle>
             <a:lvl1pPr>
-              <a:defRPr b="1" spc="100" sz="1100">
+              <a:defRPr sz="1100" b="1" spc="100">
                 <a:solidFill>
                   <a:srgbClr val="6B7789"/>
                 </a:solidFill>
@@ -9828,7 +9743,6 @@
             </a:lvl1pPr>
           </a:lstStyle>
           <a:p>
-            <a:pPr/>
             <a:r>
               <a:t>LOGIN THREAT DETECTION • MACHINE LEARNING PROJECT</a:t>
             </a:r>
@@ -9860,7 +9774,7 @@
           <a:bodyPr lIns="45719" rIns="45719"/>
           <a:lstStyle/>
           <a:p>
-            <a:pPr/>
+            <a:endParaRPr/>
           </a:p>
         </p:txBody>
       </p:sp>
@@ -9883,7 +9797,7 @@
           </a:ln>
           <a:extLst>
             <a:ext uri="{C572A759-6A51-4108-AA02-DFA0A04FC94B}">
-              <ma14:wrappingTextBoxFlag xmlns:ma14="http://schemas.microsoft.com/office/mac/drawingml/2011/main" val="1"/>
+              <ma14:wrappingTextBoxFlag xmlns:ma14="http://schemas.microsoft.com/office/mac/drawingml/2011/main" xmlns:a14="http://schemas.microsoft.com/office/drawing/2010/main" xmlns:m="http://schemas.openxmlformats.org/officeDocument/2006/math" xmlns="" val="1"/>
             </a:ext>
           </a:extLst>
         </p:spPr>
@@ -9893,7 +9807,7 @@
           </a:bodyPr>
           <a:lstStyle>
             <a:lvl1pPr>
-              <a:defRPr b="1" sz="3000">
+              <a:defRPr sz="3000" b="1">
                 <a:solidFill>
                   <a:srgbClr val="16233A"/>
                 </a:solidFill>
@@ -9905,7 +9819,6 @@
             </a:lvl1pPr>
           </a:lstStyle>
           <a:p>
-            <a:pPr/>
             <a:r>
               <a:t>Problem Encountered: Choosing the Right Target</a:t>
             </a:r>
@@ -9931,7 +9844,7 @@
           </a:ln>
           <a:extLst>
             <a:ext uri="{C572A759-6A51-4108-AA02-DFA0A04FC94B}">
-              <ma14:wrappingTextBoxFlag xmlns:ma14="http://schemas.microsoft.com/office/mac/drawingml/2011/main" val="1"/>
+              <ma14:wrappingTextBoxFlag xmlns:ma14="http://schemas.microsoft.com/office/mac/drawingml/2011/main" xmlns:a14="http://schemas.microsoft.com/office/drawing/2010/main" xmlns:m="http://schemas.openxmlformats.org/officeDocument/2006/math" xmlns="" val="1"/>
             </a:ext>
           </a:extLst>
         </p:spPr>
@@ -9953,7 +9866,6 @@
             </a:lvl1pPr>
           </a:lstStyle>
           <a:p>
-            <a:pPr/>
             <a:r>
               <a:t>The first prediction target was too rare to support reliable training on a manageable sample.</a:t>
             </a:r>
@@ -9989,7 +9901,7 @@
           <a:bodyPr lIns="45719" rIns="45719"/>
           <a:lstStyle/>
           <a:p>
-            <a:pPr/>
+            <a:endParaRPr/>
           </a:p>
         </p:txBody>
       </p:sp>
@@ -10020,7 +9932,7 @@
           <a:bodyPr lIns="45719" rIns="45719"/>
           <a:lstStyle/>
           <a:p>
-            <a:pPr/>
+            <a:endParaRPr/>
           </a:p>
         </p:txBody>
       </p:sp>
@@ -10043,7 +9955,7 @@
           </a:ln>
           <a:extLst>
             <a:ext uri="{C572A759-6A51-4108-AA02-DFA0A04FC94B}">
-              <ma14:wrappingTextBoxFlag xmlns:ma14="http://schemas.microsoft.com/office/mac/drawingml/2011/main" val="1"/>
+              <ma14:wrappingTextBoxFlag xmlns:ma14="http://schemas.microsoft.com/office/mac/drawingml/2011/main" xmlns:a14="http://schemas.microsoft.com/office/drawing/2010/main" xmlns:m="http://schemas.openxmlformats.org/officeDocument/2006/math" xmlns="" val="1"/>
             </a:ext>
           </a:extLst>
         </p:spPr>
@@ -10053,7 +9965,7 @@
           </a:bodyPr>
           <a:lstStyle>
             <a:lvl1pPr algn="ctr">
-              <a:defRPr b="1" sz="900">
+              <a:defRPr sz="900" b="1">
                 <a:solidFill>
                   <a:srgbClr val="F45B69"/>
                 </a:solidFill>
@@ -10065,7 +9977,6 @@
             </a:lvl1pPr>
           </a:lstStyle>
           <a:p>
-            <a:pPr/>
             <a:r>
               <a:t>ORIGINAL TARGET</a:t>
             </a:r>
@@ -10091,7 +10002,7 @@
           </a:ln>
           <a:extLst>
             <a:ext uri="{C572A759-6A51-4108-AA02-DFA0A04FC94B}">
-              <ma14:wrappingTextBoxFlag xmlns:ma14="http://schemas.microsoft.com/office/mac/drawingml/2011/main" val="1"/>
+              <ma14:wrappingTextBoxFlag xmlns:ma14="http://schemas.microsoft.com/office/mac/drawingml/2011/main" xmlns:a14="http://schemas.microsoft.com/office/drawing/2010/main" xmlns:m="http://schemas.openxmlformats.org/officeDocument/2006/math" xmlns="" val="1"/>
             </a:ext>
           </a:extLst>
         </p:spPr>
@@ -10101,7 +10012,7 @@
           </a:bodyPr>
           <a:lstStyle>
             <a:lvl1pPr>
-              <a:defRPr b="1" sz="2000">
+              <a:defRPr sz="2000" b="1">
                 <a:solidFill>
                   <a:srgbClr val="16233A"/>
                 </a:solidFill>
@@ -10113,7 +10024,6 @@
             </a:lvl1pPr>
           </a:lstStyle>
           <a:p>
-            <a:pPr/>
             <a:r>
               <a:t>Is Account Takeover</a:t>
             </a:r>
@@ -10139,7 +10049,7 @@
           </a:ln>
           <a:extLst>
             <a:ext uri="{C572A759-6A51-4108-AA02-DFA0A04FC94B}">
-              <ma14:wrappingTextBoxFlag xmlns:ma14="http://schemas.microsoft.com/office/mac/drawingml/2011/main" val="1"/>
+              <ma14:wrappingTextBoxFlag xmlns:ma14="http://schemas.microsoft.com/office/mac/drawingml/2011/main" xmlns:a14="http://schemas.microsoft.com/office/drawing/2010/main" xmlns:m="http://schemas.openxmlformats.org/officeDocument/2006/math" xmlns="" val="1"/>
             </a:ext>
           </a:extLst>
         </p:spPr>
@@ -10149,7 +10059,7 @@
           </a:bodyPr>
           <a:lstStyle>
             <a:lvl1pPr>
-              <a:defRPr b="1" sz="3600">
+              <a:defRPr sz="3600" b="1">
                 <a:solidFill>
                   <a:srgbClr val="F45B69"/>
                 </a:solidFill>
@@ -10161,7 +10071,6 @@
             </a:lvl1pPr>
           </a:lstStyle>
           <a:p>
-            <a:pPr/>
             <a:r>
               <a:t>11</a:t>
             </a:r>
@@ -10187,7 +10096,7 @@
           </a:ln>
           <a:extLst>
             <a:ext uri="{C572A759-6A51-4108-AA02-DFA0A04FC94B}">
-              <ma14:wrappingTextBoxFlag xmlns:ma14="http://schemas.microsoft.com/office/mac/drawingml/2011/main" val="1"/>
+              <ma14:wrappingTextBoxFlag xmlns:ma14="http://schemas.microsoft.com/office/mac/drawingml/2011/main" xmlns:a14="http://schemas.microsoft.com/office/drawing/2010/main" xmlns:m="http://schemas.openxmlformats.org/officeDocument/2006/math" xmlns="" val="1"/>
             </a:ext>
           </a:extLst>
         </p:spPr>
@@ -10249,7 +10158,7 @@
           </a:ln>
           <a:extLst>
             <a:ext uri="{C572A759-6A51-4108-AA02-DFA0A04FC94B}">
-              <ma14:wrappingTextBoxFlag xmlns:ma14="http://schemas.microsoft.com/office/mac/drawingml/2011/main" val="1"/>
+              <ma14:wrappingTextBoxFlag xmlns:ma14="http://schemas.microsoft.com/office/mac/drawingml/2011/main" xmlns:a14="http://schemas.microsoft.com/office/drawing/2010/main" xmlns:m="http://schemas.openxmlformats.org/officeDocument/2006/math" xmlns="" val="1"/>
             </a:ext>
           </a:extLst>
         </p:spPr>
@@ -10271,7 +10180,6 @@
             </a:lvl1pPr>
           </a:lstStyle>
           <a:p>
-            <a:pPr/>
             <a:r>
               <a:t>Result: the model learned to predict nearly everything as normal.</a:t>
             </a:r>
@@ -10297,7 +10205,7 @@
           </a:ln>
           <a:extLst>
             <a:ext uri="{C572A759-6A51-4108-AA02-DFA0A04FC94B}">
-              <ma14:wrappingTextBoxFlag xmlns:ma14="http://schemas.microsoft.com/office/mac/drawingml/2011/main" val="1"/>
+              <ma14:wrappingTextBoxFlag xmlns:ma14="http://schemas.microsoft.com/office/mac/drawingml/2011/main" xmlns:a14="http://schemas.microsoft.com/office/drawing/2010/main" xmlns:m="http://schemas.openxmlformats.org/officeDocument/2006/math" xmlns="" val="1"/>
             </a:ext>
           </a:extLst>
         </p:spPr>
@@ -10358,7 +10266,7 @@
           </a:ln>
           <a:extLst>
             <a:ext uri="{C572A759-6A51-4108-AA02-DFA0A04FC94B}">
-              <ma14:wrappingTextBoxFlag xmlns:ma14="http://schemas.microsoft.com/office/mac/drawingml/2011/main" val="1"/>
+              <ma14:wrappingTextBoxFlag xmlns:ma14="http://schemas.microsoft.com/office/mac/drawingml/2011/main" xmlns:a14="http://schemas.microsoft.com/office/drawing/2010/main" xmlns:m="http://schemas.openxmlformats.org/officeDocument/2006/math" xmlns="" val="1"/>
             </a:ext>
           </a:extLst>
         </p:spPr>
@@ -10368,7 +10276,7 @@
           </a:bodyPr>
           <a:lstStyle>
             <a:lvl1pPr algn="ctr">
-              <a:defRPr b="1" sz="800">
+              <a:defRPr sz="800" b="1">
                 <a:solidFill>
                   <a:srgbClr val="2ECC8F"/>
                 </a:solidFill>
@@ -10380,7 +10288,6 @@
             </a:lvl1pPr>
           </a:lstStyle>
           <a:p>
-            <a:pPr/>
             <a:r>
               <a:t>SWITCHED TO</a:t>
             </a:r>
@@ -10414,7 +10321,7 @@
           <a:bodyPr lIns="45719" rIns="45719"/>
           <a:lstStyle/>
           <a:p>
-            <a:pPr/>
+            <a:endParaRPr/>
           </a:p>
         </p:txBody>
       </p:sp>
@@ -10445,7 +10352,7 @@
           <a:bodyPr lIns="45719" rIns="45719"/>
           <a:lstStyle/>
           <a:p>
-            <a:pPr/>
+            <a:endParaRPr/>
           </a:p>
         </p:txBody>
       </p:sp>
@@ -10468,7 +10375,7 @@
           </a:ln>
           <a:extLst>
             <a:ext uri="{C572A759-6A51-4108-AA02-DFA0A04FC94B}">
-              <ma14:wrappingTextBoxFlag xmlns:ma14="http://schemas.microsoft.com/office/mac/drawingml/2011/main" val="1"/>
+              <ma14:wrappingTextBoxFlag xmlns:ma14="http://schemas.microsoft.com/office/mac/drawingml/2011/main" xmlns:a14="http://schemas.microsoft.com/office/drawing/2010/main" xmlns:m="http://schemas.openxmlformats.org/officeDocument/2006/math" xmlns="" val="1"/>
             </a:ext>
           </a:extLst>
         </p:spPr>
@@ -10478,7 +10385,7 @@
           </a:bodyPr>
           <a:lstStyle>
             <a:lvl1pPr algn="ctr">
-              <a:defRPr b="1" sz="900">
+              <a:defRPr sz="900" b="1">
                 <a:solidFill>
                   <a:srgbClr val="2ECC8F"/>
                 </a:solidFill>
@@ -10490,7 +10397,6 @@
             </a:lvl1pPr>
           </a:lstStyle>
           <a:p>
-            <a:pPr/>
             <a:r>
               <a:t>MAIN TARGET</a:t>
             </a:r>
@@ -10516,7 +10422,7 @@
           </a:ln>
           <a:extLst>
             <a:ext uri="{C572A759-6A51-4108-AA02-DFA0A04FC94B}">
-              <ma14:wrappingTextBoxFlag xmlns:ma14="http://schemas.microsoft.com/office/mac/drawingml/2011/main" val="1"/>
+              <ma14:wrappingTextBoxFlag xmlns:ma14="http://schemas.microsoft.com/office/mac/drawingml/2011/main" xmlns:a14="http://schemas.microsoft.com/office/drawing/2010/main" xmlns:m="http://schemas.openxmlformats.org/officeDocument/2006/math" xmlns="" val="1"/>
             </a:ext>
           </a:extLst>
         </p:spPr>
@@ -10526,7 +10432,7 @@
           </a:bodyPr>
           <a:lstStyle>
             <a:lvl1pPr>
-              <a:defRPr b="1" sz="2000">
+              <a:defRPr sz="2000" b="1">
                 <a:solidFill>
                   <a:srgbClr val="FFFFFF"/>
                 </a:solidFill>
@@ -10538,7 +10444,6 @@
             </a:lvl1pPr>
           </a:lstStyle>
           <a:p>
-            <a:pPr/>
             <a:r>
               <a:t>Is Attack IP</a:t>
             </a:r>
@@ -10564,7 +10469,7 @@
           </a:ln>
           <a:extLst>
             <a:ext uri="{C572A759-6A51-4108-AA02-DFA0A04FC94B}">
-              <ma14:wrappingTextBoxFlag xmlns:ma14="http://schemas.microsoft.com/office/mac/drawingml/2011/main" val="1"/>
+              <ma14:wrappingTextBoxFlag xmlns:ma14="http://schemas.microsoft.com/office/mac/drawingml/2011/main" xmlns:a14="http://schemas.microsoft.com/office/drawing/2010/main" xmlns:m="http://schemas.openxmlformats.org/officeDocument/2006/math" xmlns="" val="1"/>
             </a:ext>
           </a:extLst>
         </p:spPr>
@@ -10574,7 +10479,7 @@
           </a:bodyPr>
           <a:lstStyle>
             <a:lvl1pPr>
-              <a:defRPr b="1" sz="3600">
+              <a:defRPr sz="3600" b="1">
                 <a:solidFill>
                   <a:srgbClr val="2ECC8F"/>
                 </a:solidFill>
@@ -10586,7 +10491,6 @@
             </a:lvl1pPr>
           </a:lstStyle>
           <a:p>
-            <a:pPr/>
             <a:r>
               <a:t>99,534</a:t>
             </a:r>
@@ -10612,7 +10516,7 @@
           </a:ln>
           <a:extLst>
             <a:ext uri="{C572A759-6A51-4108-AA02-DFA0A04FC94B}">
-              <ma14:wrappingTextBoxFlag xmlns:ma14="http://schemas.microsoft.com/office/mac/drawingml/2011/main" val="1"/>
+              <ma14:wrappingTextBoxFlag xmlns:ma14="http://schemas.microsoft.com/office/mac/drawingml/2011/main" xmlns:a14="http://schemas.microsoft.com/office/drawing/2010/main" xmlns:m="http://schemas.openxmlformats.org/officeDocument/2006/math" xmlns="" val="1"/>
             </a:ext>
           </a:extLst>
         </p:spPr>
@@ -10674,7 +10578,7 @@
           </a:ln>
           <a:extLst>
             <a:ext uri="{C572A759-6A51-4108-AA02-DFA0A04FC94B}">
-              <ma14:wrappingTextBoxFlag xmlns:ma14="http://schemas.microsoft.com/office/mac/drawingml/2011/main" val="1"/>
+              <ma14:wrappingTextBoxFlag xmlns:ma14="http://schemas.microsoft.com/office/mac/drawingml/2011/main" xmlns:a14="http://schemas.microsoft.com/office/drawing/2010/main" xmlns:m="http://schemas.openxmlformats.org/officeDocument/2006/math" xmlns="" val="1"/>
             </a:ext>
           </a:extLst>
         </p:spPr>
@@ -10696,7 +10600,6 @@
             </a:lvl1pPr>
           </a:lstStyle>
           <a:p>
-            <a:pPr/>
             <a:r>
               <a:t>Enough positive examples to train, validate, and test the model meaningfully.</a:t>
             </a:r>
@@ -10730,7 +10633,7 @@
           <a:bodyPr lIns="45719" rIns="45719"/>
           <a:lstStyle/>
           <a:p>
-            <a:pPr/>
+            <a:endParaRPr/>
           </a:p>
         </p:txBody>
       </p:sp>
@@ -10753,7 +10656,7 @@
           </a:ln>
           <a:extLst>
             <a:ext uri="{C572A759-6A51-4108-AA02-DFA0A04FC94B}">
-              <ma14:wrappingTextBoxFlag xmlns:ma14="http://schemas.microsoft.com/office/mac/drawingml/2011/main" val="1"/>
+              <ma14:wrappingTextBoxFlag xmlns:ma14="http://schemas.microsoft.com/office/mac/drawingml/2011/main" xmlns:a14="http://schemas.microsoft.com/office/drawing/2010/main" xmlns:m="http://schemas.openxmlformats.org/officeDocument/2006/math" xmlns="" val="1"/>
             </a:ext>
           </a:extLst>
         </p:spPr>
@@ -10763,7 +10666,7 @@
           </a:bodyPr>
           <a:lstStyle>
             <a:lvl1pPr algn="ctr">
-              <a:defRPr b="1" sz="1200">
+              <a:defRPr sz="1200" b="1">
                 <a:solidFill>
                   <a:srgbClr val="8A5A00"/>
                 </a:solidFill>
@@ -10775,7 +10678,6 @@
             </a:lvl1pPr>
           </a:lstStyle>
           <a:p>
-            <a:pPr/>
             <a:r>
               <a:t>Key lesson: a high accuracy score can be meaningless when the positive class is almost absent.</a:t>
             </a:r>
@@ -10806,7 +10708,7 @@
           <a:bodyPr lIns="45719" rIns="45719"/>
           <a:lstStyle/>
           <a:p>
-            <a:pPr/>
+            <a:endParaRPr/>
           </a:p>
         </p:txBody>
       </p:sp>
@@ -10829,7 +10731,7 @@
           </a:ln>
           <a:extLst>
             <a:ext uri="{C572A759-6A51-4108-AA02-DFA0A04FC94B}">
-              <ma14:wrappingTextBoxFlag xmlns:ma14="http://schemas.microsoft.com/office/mac/drawingml/2011/main" val="1"/>
+              <ma14:wrappingTextBoxFlag xmlns:ma14="http://schemas.microsoft.com/office/mac/drawingml/2011/main" xmlns:a14="http://schemas.microsoft.com/office/drawing/2010/main" xmlns:m="http://schemas.openxmlformats.org/officeDocument/2006/math" xmlns="" val="1"/>
             </a:ext>
           </a:extLst>
         </p:spPr>
@@ -10851,7 +10753,6 @@
             </a:lvl1pPr>
           </a:lstStyle>
           <a:p>
-            <a:pPr/>
             <a:r>
               <a:t>Safe Login</a:t>
             </a:r>
@@ -10877,7 +10778,7 @@
           </a:ln>
           <a:extLst>
             <a:ext uri="{C572A759-6A51-4108-AA02-DFA0A04FC94B}">
-              <ma14:wrappingTextBoxFlag xmlns:ma14="http://schemas.microsoft.com/office/mac/drawingml/2011/main" val="1"/>
+              <ma14:wrappingTextBoxFlag xmlns:ma14="http://schemas.microsoft.com/office/mac/drawingml/2011/main" xmlns:a14="http://schemas.microsoft.com/office/drawing/2010/main" xmlns:m="http://schemas.openxmlformats.org/officeDocument/2006/math" xmlns="" val="1"/>
             </a:ext>
           </a:extLst>
         </p:spPr>
@@ -10899,7 +10800,6 @@
             </a:lvl1pPr>
           </a:lstStyle>
           <a:p>
-            <a:pPr/>
             <a:r>
               <a:t>Programming Project</a:t>
             </a:r>
@@ -10925,7 +10825,7 @@
           </a:ln>
           <a:extLst>
             <a:ext uri="{C572A759-6A51-4108-AA02-DFA0A04FC94B}">
-              <ma14:wrappingTextBoxFlag xmlns:ma14="http://schemas.microsoft.com/office/mac/drawingml/2011/main" val="1"/>
+              <ma14:wrappingTextBoxFlag xmlns:ma14="http://schemas.microsoft.com/office/mac/drawingml/2011/main" xmlns:a14="http://schemas.microsoft.com/office/drawing/2010/main" xmlns:m="http://schemas.openxmlformats.org/officeDocument/2006/math" xmlns="" val="1"/>
             </a:ext>
           </a:extLst>
         </p:spPr>
@@ -10947,7 +10847,6 @@
             </a:lvl1pPr>
           </a:lstStyle>
           <a:p>
-            <a:pPr/>
             <a:r>
               <a:t>6</a:t>
             </a:r>
@@ -10959,18 +10858,19 @@
   <p:clrMapOvr>
     <a:masterClrMapping/>
   </p:clrMapOvr>
-  <p:transition xmlns:p14="http://schemas.microsoft.com/office/powerpoint/2010/main" spd="med" advClick="1"/>
+  <p:transition spd="med"/>
 </p:sld>
 </file>
 
 <file path=ppt/slides/slide7.xml><?xml version="1.0" encoding="utf-8"?>
-<p:sld xmlns:a="http://schemas.openxmlformats.org/drawingml/2006/main" xmlns:r="http://schemas.openxmlformats.org/officeDocument/2006/relationships" xmlns:p="http://schemas.openxmlformats.org/presentationml/2006/main" xmlns:m="http://schemas.openxmlformats.org/officeDocument/2006/math" xmlns:a14="http://schemas.microsoft.com/office/drawing/2010/main" showMasterSp="1" showMasterPhAnim="1">
+<p:sld xmlns:a="http://schemas.openxmlformats.org/drawingml/2006/main" xmlns:r="http://schemas.openxmlformats.org/officeDocument/2006/relationships" xmlns:p="http://schemas.openxmlformats.org/presentationml/2006/main">
   <p:cSld>
     <p:bg>
       <p:bgPr>
         <a:solidFill>
           <a:srgbClr val="F3F6FA"/>
         </a:solidFill>
+        <a:effectLst/>
       </p:bgPr>
     </p:bg>
     <p:spTree>
@@ -11006,7 +10906,7 @@
           </a:ln>
           <a:extLst>
             <a:ext uri="{C572A759-6A51-4108-AA02-DFA0A04FC94B}">
-              <ma14:wrappingTextBoxFlag xmlns:ma14="http://schemas.microsoft.com/office/mac/drawingml/2011/main" val="1"/>
+              <ma14:wrappingTextBoxFlag xmlns:ma14="http://schemas.microsoft.com/office/mac/drawingml/2011/main" xmlns:a14="http://schemas.microsoft.com/office/drawing/2010/main" xmlns:m="http://schemas.openxmlformats.org/officeDocument/2006/math" xmlns="" val="1"/>
             </a:ext>
           </a:extLst>
         </p:spPr>
@@ -11016,7 +10916,7 @@
           </a:bodyPr>
           <a:lstStyle>
             <a:lvl1pPr>
-              <a:defRPr b="1" spc="100" sz="1100">
+              <a:defRPr sz="1100" b="1" spc="100">
                 <a:solidFill>
                   <a:srgbClr val="6B7789"/>
                 </a:solidFill>
@@ -11028,7 +10928,6 @@
             </a:lvl1pPr>
           </a:lstStyle>
           <a:p>
-            <a:pPr/>
             <a:r>
               <a:t>LOGIN THREAT DETECTION • MACHINE LEARNING PROJECT</a:t>
             </a:r>
@@ -11060,7 +10959,7 @@
           <a:bodyPr lIns="45719" rIns="45719"/>
           <a:lstStyle/>
           <a:p>
-            <a:pPr/>
+            <a:endParaRPr/>
           </a:p>
         </p:txBody>
       </p:sp>
@@ -11083,7 +10982,7 @@
           </a:ln>
           <a:extLst>
             <a:ext uri="{C572A759-6A51-4108-AA02-DFA0A04FC94B}">
-              <ma14:wrappingTextBoxFlag xmlns:ma14="http://schemas.microsoft.com/office/mac/drawingml/2011/main" val="1"/>
+              <ma14:wrappingTextBoxFlag xmlns:ma14="http://schemas.microsoft.com/office/mac/drawingml/2011/main" xmlns:a14="http://schemas.microsoft.com/office/drawing/2010/main" xmlns:m="http://schemas.openxmlformats.org/officeDocument/2006/math" xmlns="" val="1"/>
             </a:ext>
           </a:extLst>
         </p:spPr>
@@ -11093,7 +10992,7 @@
           </a:bodyPr>
           <a:lstStyle>
             <a:lvl1pPr>
-              <a:defRPr b="1" sz="3000">
+              <a:defRPr sz="3000" b="1">
                 <a:solidFill>
                   <a:srgbClr val="16233A"/>
                 </a:solidFill>
@@ -11105,7 +11004,6 @@
             </a:lvl1pPr>
           </a:lstStyle>
           <a:p>
-            <a:pPr/>
             <a:r>
               <a:t>Future Enhancements</a:t>
             </a:r>
@@ -11131,7 +11029,7 @@
           </a:ln>
           <a:extLst>
             <a:ext uri="{C572A759-6A51-4108-AA02-DFA0A04FC94B}">
-              <ma14:wrappingTextBoxFlag xmlns:ma14="http://schemas.microsoft.com/office/mac/drawingml/2011/main" val="1"/>
+              <ma14:wrappingTextBoxFlag xmlns:ma14="http://schemas.microsoft.com/office/mac/drawingml/2011/main" xmlns:a14="http://schemas.microsoft.com/office/drawing/2010/main" xmlns:m="http://schemas.openxmlformats.org/officeDocument/2006/math" xmlns="" val="1"/>
             </a:ext>
           </a:extLst>
         </p:spPr>
@@ -11153,7 +11051,6 @@
             </a:lvl1pPr>
           </a:lstStyle>
           <a:p>
-            <a:pPr/>
             <a:r>
               <a:t>The model is a strong prototype — here's how it could grow toward production readiness.</a:t>
             </a:r>
@@ -11187,7 +11084,7 @@
           <a:bodyPr lIns="45719" rIns="45719"/>
           <a:lstStyle/>
           <a:p>
-            <a:pPr/>
+            <a:endParaRPr/>
           </a:p>
         </p:txBody>
       </p:sp>
@@ -11218,7 +11115,7 @@
           <a:bodyPr lIns="45719" rIns="45719"/>
           <a:lstStyle/>
           <a:p>
-            <a:pPr/>
+            <a:endParaRPr/>
           </a:p>
         </p:txBody>
       </p:sp>
@@ -11241,7 +11138,7 @@
           </a:ln>
           <a:extLst>
             <a:ext uri="{C572A759-6A51-4108-AA02-DFA0A04FC94B}">
-              <ma14:wrappingTextBoxFlag xmlns:ma14="http://schemas.microsoft.com/office/mac/drawingml/2011/main" val="1"/>
+              <ma14:wrappingTextBoxFlag xmlns:ma14="http://schemas.microsoft.com/office/mac/drawingml/2011/main" xmlns:a14="http://schemas.microsoft.com/office/drawing/2010/main" xmlns:m="http://schemas.openxmlformats.org/officeDocument/2006/math" xmlns="" val="1"/>
             </a:ext>
           </a:extLst>
         </p:spPr>
@@ -11251,7 +11148,7 @@
           </a:bodyPr>
           <a:lstStyle>
             <a:lvl1pPr algn="ctr">
-              <a:defRPr b="1" sz="900">
+              <a:defRPr sz="900" b="1">
                 <a:solidFill>
                   <a:srgbClr val="2ECC8F"/>
                 </a:solidFill>
@@ -11263,7 +11160,6 @@
             </a:lvl1pPr>
           </a:lstStyle>
           <a:p>
-            <a:pPr/>
             <a:r>
               <a:t>NEXT STEPS</a:t>
             </a:r>
@@ -11295,7 +11191,7 @@
           <a:bodyPr lIns="45719" rIns="45719"/>
           <a:lstStyle/>
           <a:p>
-            <a:pPr/>
+            <a:endParaRPr/>
           </a:p>
         </p:txBody>
       </p:sp>
@@ -11318,7 +11214,7 @@
           </a:ln>
           <a:extLst>
             <a:ext uri="{C572A759-6A51-4108-AA02-DFA0A04FC94B}">
-              <ma14:wrappingTextBoxFlag xmlns:ma14="http://schemas.microsoft.com/office/mac/drawingml/2011/main" val="1"/>
+              <ma14:wrappingTextBoxFlag xmlns:ma14="http://schemas.microsoft.com/office/mac/drawingml/2011/main" xmlns:a14="http://schemas.microsoft.com/office/drawing/2010/main" xmlns:m="http://schemas.openxmlformats.org/officeDocument/2006/math" xmlns="" val="1"/>
             </a:ext>
           </a:extLst>
         </p:spPr>
@@ -11328,7 +11224,7 @@
           </a:bodyPr>
           <a:lstStyle>
             <a:lvl1pPr>
-              <a:defRPr b="1" sz="1300">
+              <a:defRPr sz="1300" b="1">
                 <a:solidFill>
                   <a:srgbClr val="FFFFFF"/>
                 </a:solidFill>
@@ -11340,7 +11236,6 @@
             </a:lvl1pPr>
           </a:lstStyle>
           <a:p>
-            <a:pPr/>
             <a:r>
               <a:t>Test on natural class distribution</a:t>
             </a:r>
@@ -11366,7 +11261,7 @@
           </a:ln>
           <a:extLst>
             <a:ext uri="{C572A759-6A51-4108-AA02-DFA0A04FC94B}">
-              <ma14:wrappingTextBoxFlag xmlns:ma14="http://schemas.microsoft.com/office/mac/drawingml/2011/main" val="1"/>
+              <ma14:wrappingTextBoxFlag xmlns:ma14="http://schemas.microsoft.com/office/mac/drawingml/2011/main" xmlns:a14="http://schemas.microsoft.com/office/drawing/2010/main" xmlns:m="http://schemas.openxmlformats.org/officeDocument/2006/math" xmlns="" val="1"/>
             </a:ext>
           </a:extLst>
         </p:spPr>
@@ -11388,7 +11283,6 @@
             </a:lvl1pPr>
           </a:lstStyle>
           <a:p>
-            <a:pPr/>
             <a:r>
               <a:t>Measure real false-alarm rates on untouched data.</a:t>
             </a:r>
@@ -11420,7 +11314,7 @@
           <a:bodyPr lIns="45719" rIns="45719"/>
           <a:lstStyle/>
           <a:p>
-            <a:pPr/>
+            <a:endParaRPr/>
           </a:p>
         </p:txBody>
       </p:sp>
@@ -11443,7 +11337,7 @@
           </a:ln>
           <a:extLst>
             <a:ext uri="{C572A759-6A51-4108-AA02-DFA0A04FC94B}">
-              <ma14:wrappingTextBoxFlag xmlns:ma14="http://schemas.microsoft.com/office/mac/drawingml/2011/main" val="1"/>
+              <ma14:wrappingTextBoxFlag xmlns:ma14="http://schemas.microsoft.com/office/mac/drawingml/2011/main" xmlns:a14="http://schemas.microsoft.com/office/drawing/2010/main" xmlns:m="http://schemas.openxmlformats.org/officeDocument/2006/math" xmlns="" val="1"/>
             </a:ext>
           </a:extLst>
         </p:spPr>
@@ -11453,7 +11347,7 @@
           </a:bodyPr>
           <a:lstStyle>
             <a:lvl1pPr>
-              <a:defRPr b="1" sz="1300">
+              <a:defRPr sz="1300" b="1">
                 <a:solidFill>
                   <a:srgbClr val="FFFFFF"/>
                 </a:solidFill>
@@ -11465,7 +11359,6 @@
             </a:lvl1pPr>
           </a:lstStyle>
           <a:p>
-            <a:pPr/>
             <a:r>
               <a:t>Use time-based splitting</a:t>
             </a:r>
@@ -11491,7 +11384,7 @@
           </a:ln>
           <a:extLst>
             <a:ext uri="{C572A759-6A51-4108-AA02-DFA0A04FC94B}">
-              <ma14:wrappingTextBoxFlag xmlns:ma14="http://schemas.microsoft.com/office/mac/drawingml/2011/main" val="1"/>
+              <ma14:wrappingTextBoxFlag xmlns:ma14="http://schemas.microsoft.com/office/mac/drawingml/2011/main" xmlns:a14="http://schemas.microsoft.com/office/drawing/2010/main" xmlns:m="http://schemas.openxmlformats.org/officeDocument/2006/math" xmlns="" val="1"/>
             </a:ext>
           </a:extLst>
         </p:spPr>
@@ -11513,7 +11406,6 @@
             </a:lvl1pPr>
           </a:lstStyle>
           <a:p>
-            <a:pPr/>
             <a:r>
               <a:t>Train on earlier logins and test on later ones.</a:t>
             </a:r>
@@ -11545,7 +11437,7 @@
           <a:bodyPr lIns="45719" rIns="45719"/>
           <a:lstStyle/>
           <a:p>
-            <a:pPr/>
+            <a:endParaRPr/>
           </a:p>
         </p:txBody>
       </p:sp>
@@ -11568,7 +11460,7 @@
           </a:ln>
           <a:extLst>
             <a:ext uri="{C572A759-6A51-4108-AA02-DFA0A04FC94B}">
-              <ma14:wrappingTextBoxFlag xmlns:ma14="http://schemas.microsoft.com/office/mac/drawingml/2011/main" val="1"/>
+              <ma14:wrappingTextBoxFlag xmlns:ma14="http://schemas.microsoft.com/office/mac/drawingml/2011/main" xmlns:a14="http://schemas.microsoft.com/office/drawing/2010/main" xmlns:m="http://schemas.openxmlformats.org/officeDocument/2006/math" xmlns="" val="1"/>
             </a:ext>
           </a:extLst>
         </p:spPr>
@@ -11578,7 +11470,7 @@
           </a:bodyPr>
           <a:lstStyle>
             <a:lvl1pPr>
-              <a:defRPr b="1" sz="1300">
+              <a:defRPr sz="1300" b="1">
                 <a:solidFill>
                   <a:srgbClr val="FFFFFF"/>
                 </a:solidFill>
@@ -11590,7 +11482,6 @@
             </a:lvl1pPr>
           </a:lstStyle>
           <a:p>
-            <a:pPr/>
             <a:r>
               <a:t>Compare more models</a:t>
             </a:r>
@@ -11616,7 +11507,7 @@
           </a:ln>
           <a:extLst>
             <a:ext uri="{C572A759-6A51-4108-AA02-DFA0A04FC94B}">
-              <ma14:wrappingTextBoxFlag xmlns:ma14="http://schemas.microsoft.com/office/mac/drawingml/2011/main" val="1"/>
+              <ma14:wrappingTextBoxFlag xmlns:ma14="http://schemas.microsoft.com/office/mac/drawingml/2011/main" xmlns:a14="http://schemas.microsoft.com/office/drawing/2010/main" xmlns:m="http://schemas.openxmlformats.org/officeDocument/2006/math" xmlns="" val="1"/>
             </a:ext>
           </a:extLst>
         </p:spPr>
@@ -11638,7 +11529,6 @@
             </a:lvl1pPr>
           </a:lstStyle>
           <a:p>
-            <a:pPr/>
             <a:r>
               <a:t>Try gradient boosting, XGBoost, and anomaly detection.</a:t>
             </a:r>
@@ -11670,7 +11560,7 @@
           <a:bodyPr lIns="45719" rIns="45719"/>
           <a:lstStyle/>
           <a:p>
-            <a:pPr/>
+            <a:endParaRPr/>
           </a:p>
         </p:txBody>
       </p:sp>
@@ -11693,7 +11583,7 @@
           </a:ln>
           <a:extLst>
             <a:ext uri="{C572A759-6A51-4108-AA02-DFA0A04FC94B}">
-              <ma14:wrappingTextBoxFlag xmlns:ma14="http://schemas.microsoft.com/office/mac/drawingml/2011/main" val="1"/>
+              <ma14:wrappingTextBoxFlag xmlns:ma14="http://schemas.microsoft.com/office/mac/drawingml/2011/main" xmlns:a14="http://schemas.microsoft.com/office/drawing/2010/main" xmlns:m="http://schemas.openxmlformats.org/officeDocument/2006/math" xmlns="" val="1"/>
             </a:ext>
           </a:extLst>
         </p:spPr>
@@ -11703,7 +11593,7 @@
           </a:bodyPr>
           <a:lstStyle>
             <a:lvl1pPr>
-              <a:defRPr b="1" sz="1300">
+              <a:defRPr sz="1300" b="1">
                 <a:solidFill>
                   <a:srgbClr val="FFFFFF"/>
                 </a:solidFill>
@@ -11715,7 +11605,6 @@
             </a:lvl1pPr>
           </a:lstStyle>
           <a:p>
-            <a:pPr/>
             <a:r>
               <a:t>Add explainability</a:t>
             </a:r>
@@ -11741,7 +11630,7 @@
           </a:ln>
           <a:extLst>
             <a:ext uri="{C572A759-6A51-4108-AA02-DFA0A04FC94B}">
-              <ma14:wrappingTextBoxFlag xmlns:ma14="http://schemas.microsoft.com/office/mac/drawingml/2011/main" val="1"/>
+              <ma14:wrappingTextBoxFlag xmlns:ma14="http://schemas.microsoft.com/office/mac/drawingml/2011/main" xmlns:a14="http://schemas.microsoft.com/office/drawing/2010/main" xmlns:m="http://schemas.openxmlformats.org/officeDocument/2006/math" xmlns="" val="1"/>
             </a:ext>
           </a:extLst>
         </p:spPr>
@@ -11763,7 +11652,6 @@
             </a:lvl1pPr>
           </a:lstStyle>
           <a:p>
-            <a:pPr/>
             <a:r>
               <a:t>Show feature importance or SHAP explanations.</a:t>
             </a:r>
@@ -11795,7 +11683,7 @@
           <a:bodyPr lIns="45719" rIns="45719"/>
           <a:lstStyle/>
           <a:p>
-            <a:pPr/>
+            <a:endParaRPr/>
           </a:p>
         </p:txBody>
       </p:sp>
@@ -11818,7 +11706,7 @@
           </a:ln>
           <a:extLst>
             <a:ext uri="{C572A759-6A51-4108-AA02-DFA0A04FC94B}">
-              <ma14:wrappingTextBoxFlag xmlns:ma14="http://schemas.microsoft.com/office/mac/drawingml/2011/main" val="1"/>
+              <ma14:wrappingTextBoxFlag xmlns:ma14="http://schemas.microsoft.com/office/mac/drawingml/2011/main" xmlns:a14="http://schemas.microsoft.com/office/drawing/2010/main" xmlns:m="http://schemas.openxmlformats.org/officeDocument/2006/math" xmlns="" val="1"/>
             </a:ext>
           </a:extLst>
         </p:spPr>
@@ -11828,7 +11716,7 @@
           </a:bodyPr>
           <a:lstStyle>
             <a:lvl1pPr>
-              <a:defRPr b="1" sz="1300">
+              <a:defRPr sz="1300" b="1">
                 <a:solidFill>
                   <a:srgbClr val="FFFFFF"/>
                 </a:solidFill>
@@ -11840,7 +11728,6 @@
             </a:lvl1pPr>
           </a:lstStyle>
           <a:p>
-            <a:pPr/>
             <a:r>
               <a:t>Build a simple dashboard</a:t>
             </a:r>
@@ -11866,7 +11753,7 @@
           </a:ln>
           <a:extLst>
             <a:ext uri="{C572A759-6A51-4108-AA02-DFA0A04FC94B}">
-              <ma14:wrappingTextBoxFlag xmlns:ma14="http://schemas.microsoft.com/office/mac/drawingml/2011/main" val="1"/>
+              <ma14:wrappingTextBoxFlag xmlns:ma14="http://schemas.microsoft.com/office/mac/drawingml/2011/main" xmlns:a14="http://schemas.microsoft.com/office/drawing/2010/main" xmlns:m="http://schemas.openxmlformats.org/officeDocument/2006/math" xmlns="" val="1"/>
             </a:ext>
           </a:extLst>
         </p:spPr>
@@ -11888,7 +11775,6 @@
             </a:lvl1pPr>
           </a:lstStyle>
           <a:p>
-            <a:pPr/>
             <a:r>
               <a:t>Allow users to enter login details and view risk scores.</a:t>
             </a:r>
@@ -11919,7 +11805,7 @@
           <a:bodyPr lIns="45719" rIns="45719"/>
           <a:lstStyle/>
           <a:p>
-            <a:pPr/>
+            <a:endParaRPr/>
           </a:p>
         </p:txBody>
       </p:sp>
@@ -11942,7 +11828,7 @@
           </a:ln>
           <a:extLst>
             <a:ext uri="{C572A759-6A51-4108-AA02-DFA0A04FC94B}">
-              <ma14:wrappingTextBoxFlag xmlns:ma14="http://schemas.microsoft.com/office/mac/drawingml/2011/main" val="1"/>
+              <ma14:wrappingTextBoxFlag xmlns:ma14="http://schemas.microsoft.com/office/mac/drawingml/2011/main" xmlns:a14="http://schemas.microsoft.com/office/drawing/2010/main" xmlns:m="http://schemas.openxmlformats.org/officeDocument/2006/math" xmlns="" val="1"/>
             </a:ext>
           </a:extLst>
         </p:spPr>
@@ -11964,7 +11850,6 @@
             </a:lvl1pPr>
           </a:lstStyle>
           <a:p>
-            <a:pPr/>
             <a:r>
               <a:t>Safe Login</a:t>
             </a:r>
@@ -11990,7 +11875,7 @@
           </a:ln>
           <a:extLst>
             <a:ext uri="{C572A759-6A51-4108-AA02-DFA0A04FC94B}">
-              <ma14:wrappingTextBoxFlag xmlns:ma14="http://schemas.microsoft.com/office/mac/drawingml/2011/main" val="1"/>
+              <ma14:wrappingTextBoxFlag xmlns:ma14="http://schemas.microsoft.com/office/mac/drawingml/2011/main" xmlns:a14="http://schemas.microsoft.com/office/drawing/2010/main" xmlns:m="http://schemas.openxmlformats.org/officeDocument/2006/math" xmlns="" val="1"/>
             </a:ext>
           </a:extLst>
         </p:spPr>
@@ -12012,7 +11897,6 @@
             </a:lvl1pPr>
           </a:lstStyle>
           <a:p>
-            <a:pPr/>
             <a:r>
               <a:t>Programming Project</a:t>
             </a:r>
@@ -12038,7 +11922,7 @@
           </a:ln>
           <a:extLst>
             <a:ext uri="{C572A759-6A51-4108-AA02-DFA0A04FC94B}">
-              <ma14:wrappingTextBoxFlag xmlns:ma14="http://schemas.microsoft.com/office/mac/drawingml/2011/main" val="1"/>
+              <ma14:wrappingTextBoxFlag xmlns:ma14="http://schemas.microsoft.com/office/mac/drawingml/2011/main" xmlns:a14="http://schemas.microsoft.com/office/drawing/2010/main" xmlns:m="http://schemas.openxmlformats.org/officeDocument/2006/math" xmlns="" val="1"/>
             </a:ext>
           </a:extLst>
         </p:spPr>
@@ -12060,7 +11944,6 @@
             </a:lvl1pPr>
           </a:lstStyle>
           <a:p>
-            <a:pPr/>
             <a:r>
               <a:t>7</a:t>
             </a:r>
@@ -12072,18 +11955,19 @@
   <p:clrMapOvr>
     <a:masterClrMapping/>
   </p:clrMapOvr>
-  <p:transition xmlns:p14="http://schemas.microsoft.com/office/powerpoint/2010/main" spd="med" advClick="1"/>
+  <p:transition spd="med"/>
 </p:sld>
 </file>
 
 <file path=ppt/slides/slide8.xml><?xml version="1.0" encoding="utf-8"?>
-<p:sld xmlns:a="http://schemas.openxmlformats.org/drawingml/2006/main" xmlns:r="http://schemas.openxmlformats.org/officeDocument/2006/relationships" xmlns:p="http://schemas.openxmlformats.org/presentationml/2006/main" xmlns:m="http://schemas.openxmlformats.org/officeDocument/2006/math" xmlns:a14="http://schemas.microsoft.com/office/drawing/2010/main" showMasterSp="1" showMasterPhAnim="1">
+<p:sld xmlns:a="http://schemas.openxmlformats.org/drawingml/2006/main" xmlns:r="http://schemas.openxmlformats.org/officeDocument/2006/relationships" xmlns:p="http://schemas.openxmlformats.org/presentationml/2006/main">
   <p:cSld>
     <p:bg>
       <p:bgPr>
         <a:solidFill>
           <a:srgbClr val="F3F6FA"/>
         </a:solidFill>
+        <a:effectLst/>
       </p:bgPr>
     </p:bg>
     <p:spTree>
@@ -12119,7 +12003,7 @@
           </a:ln>
           <a:extLst>
             <a:ext uri="{C572A759-6A51-4108-AA02-DFA0A04FC94B}">
-              <ma14:wrappingTextBoxFlag xmlns:ma14="http://schemas.microsoft.com/office/mac/drawingml/2011/main" val="1"/>
+              <ma14:wrappingTextBoxFlag xmlns:ma14="http://schemas.microsoft.com/office/mac/drawingml/2011/main" xmlns:a14="http://schemas.microsoft.com/office/drawing/2010/main" xmlns:m="http://schemas.openxmlformats.org/officeDocument/2006/math" xmlns="" val="1"/>
             </a:ext>
           </a:extLst>
         </p:spPr>
@@ -12129,7 +12013,7 @@
           </a:bodyPr>
           <a:lstStyle>
             <a:lvl1pPr>
-              <a:defRPr b="1" spc="100" sz="1100">
+              <a:defRPr sz="1100" b="1" spc="100">
                 <a:solidFill>
                   <a:srgbClr val="6B7789"/>
                 </a:solidFill>
@@ -12141,7 +12025,6 @@
             </a:lvl1pPr>
           </a:lstStyle>
           <a:p>
-            <a:pPr/>
             <a:r>
               <a:t>LOGIN THREAT DETECTION • MACHINE LEARNING PROJECT</a:t>
             </a:r>
@@ -12173,7 +12056,7 @@
           <a:bodyPr lIns="45719" rIns="45719"/>
           <a:lstStyle/>
           <a:p>
-            <a:pPr/>
+            <a:endParaRPr/>
           </a:p>
         </p:txBody>
       </p:sp>
@@ -12196,7 +12079,7 @@
           </a:ln>
           <a:extLst>
             <a:ext uri="{C572A759-6A51-4108-AA02-DFA0A04FC94B}">
-              <ma14:wrappingTextBoxFlag xmlns:ma14="http://schemas.microsoft.com/office/mac/drawingml/2011/main" val="1"/>
+              <ma14:wrappingTextBoxFlag xmlns:ma14="http://schemas.microsoft.com/office/mac/drawingml/2011/main" xmlns:a14="http://schemas.microsoft.com/office/drawing/2010/main" xmlns:m="http://schemas.openxmlformats.org/officeDocument/2006/math" xmlns="" val="1"/>
             </a:ext>
           </a:extLst>
         </p:spPr>
@@ -12206,7 +12089,7 @@
           </a:bodyPr>
           <a:lstStyle>
             <a:lvl1pPr>
-              <a:defRPr b="1" sz="3000">
+              <a:defRPr sz="3000" b="1">
                 <a:solidFill>
                   <a:srgbClr val="16233A"/>
                 </a:solidFill>
@@ -12218,7 +12101,6 @@
             </a:lvl1pPr>
           </a:lstStyle>
           <a:p>
-            <a:pPr/>
             <a:r>
               <a:t>Who Did What</a:t>
             </a:r>
@@ -12244,7 +12126,7 @@
           </a:ln>
           <a:extLst>
             <a:ext uri="{C572A759-6A51-4108-AA02-DFA0A04FC94B}">
-              <ma14:wrappingTextBoxFlag xmlns:ma14="http://schemas.microsoft.com/office/mac/drawingml/2011/main" val="1"/>
+              <ma14:wrappingTextBoxFlag xmlns:ma14="http://schemas.microsoft.com/office/mac/drawingml/2011/main" xmlns:a14="http://schemas.microsoft.com/office/drawing/2010/main" xmlns:m="http://schemas.openxmlformats.org/officeDocument/2006/math" xmlns="" val="1"/>
             </a:ext>
           </a:extLst>
         </p:spPr>
@@ -12266,7 +12148,6 @@
             </a:lvl1pPr>
           </a:lstStyle>
           <a:p>
-            <a:pPr/>
             <a:r>
               <a:t>Team roles and individual contributions.</a:t>
             </a:r>
@@ -12300,7 +12181,7 @@
           <a:bodyPr lIns="45719" rIns="45719"/>
           <a:lstStyle/>
           <a:p>
-            <a:pPr/>
+            <a:endParaRPr/>
           </a:p>
         </p:txBody>
       </p:sp>
@@ -12329,7 +12210,7 @@
           <a:bodyPr lIns="45719" rIns="45719"/>
           <a:lstStyle/>
           <a:p>
-            <a:pPr/>
+            <a:endParaRPr/>
           </a:p>
         </p:txBody>
       </p:sp>
@@ -12352,7 +12233,7 @@
           </a:ln>
           <a:extLst>
             <a:ext uri="{C572A759-6A51-4108-AA02-DFA0A04FC94B}">
-              <ma14:wrappingTextBoxFlag xmlns:ma14="http://schemas.microsoft.com/office/mac/drawingml/2011/main" val="1"/>
+              <ma14:wrappingTextBoxFlag xmlns:ma14="http://schemas.microsoft.com/office/mac/drawingml/2011/main" xmlns:a14="http://schemas.microsoft.com/office/drawing/2010/main" xmlns:m="http://schemas.openxmlformats.org/officeDocument/2006/math" xmlns="" val="1"/>
             </a:ext>
           </a:extLst>
         </p:spPr>
@@ -12362,7 +12243,7 @@
           </a:bodyPr>
           <a:lstStyle>
             <a:lvl1pPr algn="ctr">
-              <a:defRPr b="1" sz="1400">
+              <a:defRPr sz="1400" b="1">
                 <a:solidFill>
                   <a:srgbClr val="2ECC8F"/>
                 </a:solidFill>
@@ -12374,7 +12255,6 @@
             </a:lvl1pPr>
           </a:lstStyle>
           <a:p>
-            <a:pPr/>
             <a:r>
               <a:t>SV</a:t>
             </a:r>
@@ -12400,7 +12280,7 @@
           </a:ln>
           <a:extLst>
             <a:ext uri="{C572A759-6A51-4108-AA02-DFA0A04FC94B}">
-              <ma14:wrappingTextBoxFlag xmlns:ma14="http://schemas.microsoft.com/office/mac/drawingml/2011/main" val="1"/>
+              <ma14:wrappingTextBoxFlag xmlns:ma14="http://schemas.microsoft.com/office/mac/drawingml/2011/main" xmlns:a14="http://schemas.microsoft.com/office/drawing/2010/main" xmlns:m="http://schemas.openxmlformats.org/officeDocument/2006/math" xmlns="" val="1"/>
             </a:ext>
           </a:extLst>
         </p:spPr>
@@ -12410,7 +12290,7 @@
           </a:bodyPr>
           <a:lstStyle>
             <a:lvl1pPr>
-              <a:defRPr b="1" sz="1600">
+              <a:defRPr sz="1600" b="1">
                 <a:solidFill>
                   <a:srgbClr val="FFFFFF"/>
                 </a:solidFill>
@@ -12422,7 +12302,6 @@
             </a:lvl1pPr>
           </a:lstStyle>
           <a:p>
-            <a:pPr/>
             <a:r>
               <a:t>Sahas Vijayakumar</a:t>
             </a:r>
@@ -12454,7 +12333,7 @@
           <a:bodyPr lIns="45719" rIns="45719"/>
           <a:lstStyle/>
           <a:p>
-            <a:pPr/>
+            <a:endParaRPr/>
           </a:p>
         </p:txBody>
       </p:sp>
@@ -12483,7 +12362,7 @@
           <a:bodyPr lIns="45719" rIns="45719"/>
           <a:lstStyle/>
           <a:p>
-            <a:pPr/>
+            <a:endParaRPr/>
           </a:p>
         </p:txBody>
       </p:sp>
@@ -12506,7 +12385,7 @@
           </a:ln>
           <a:extLst>
             <a:ext uri="{C572A759-6A51-4108-AA02-DFA0A04FC94B}">
-              <ma14:wrappingTextBoxFlag xmlns:ma14="http://schemas.microsoft.com/office/mac/drawingml/2011/main" val="1"/>
+              <ma14:wrappingTextBoxFlag xmlns:ma14="http://schemas.microsoft.com/office/mac/drawingml/2011/main" xmlns:a14="http://schemas.microsoft.com/office/drawing/2010/main" xmlns:m="http://schemas.openxmlformats.org/officeDocument/2006/math" xmlns="" val="1"/>
             </a:ext>
           </a:extLst>
         </p:spPr>
@@ -12524,7 +12403,6 @@
             </a:lvl1pPr>
           </a:lstStyle>
           <a:p>
-            <a:pPr/>
             <a:r>
               <a:t>Fixed rare-label problem by switching prediction targets</a:t>
             </a:r>
@@ -12556,7 +12434,7 @@
           <a:bodyPr lIns="45719" rIns="45719"/>
           <a:lstStyle/>
           <a:p>
-            <a:pPr/>
+            <a:endParaRPr/>
           </a:p>
         </p:txBody>
       </p:sp>
@@ -12579,7 +12457,7 @@
           </a:ln>
           <a:extLst>
             <a:ext uri="{C572A759-6A51-4108-AA02-DFA0A04FC94B}">
-              <ma14:wrappingTextBoxFlag xmlns:ma14="http://schemas.microsoft.com/office/mac/drawingml/2011/main" val="1"/>
+              <ma14:wrappingTextBoxFlag xmlns:ma14="http://schemas.microsoft.com/office/mac/drawingml/2011/main" xmlns:a14="http://schemas.microsoft.com/office/drawing/2010/main" xmlns:m="http://schemas.openxmlformats.org/officeDocument/2006/math" xmlns="" val="1"/>
             </a:ext>
           </a:extLst>
         </p:spPr>
@@ -12597,7 +12475,6 @@
             </a:lvl1pPr>
           </a:lstStyle>
           <a:p>
-            <a:pPr/>
             <a:r>
               <a:t>Fixed data leakage, ASN encoding, and timestamp handling</a:t>
             </a:r>
@@ -12629,7 +12506,7 @@
           <a:bodyPr lIns="45719" rIns="45719"/>
           <a:lstStyle/>
           <a:p>
-            <a:pPr/>
+            <a:endParaRPr/>
           </a:p>
         </p:txBody>
       </p:sp>
@@ -12652,7 +12529,7 @@
           </a:ln>
           <a:extLst>
             <a:ext uri="{C572A759-6A51-4108-AA02-DFA0A04FC94B}">
-              <ma14:wrappingTextBoxFlag xmlns:ma14="http://schemas.microsoft.com/office/mac/drawingml/2011/main" val="1"/>
+              <ma14:wrappingTextBoxFlag xmlns:ma14="http://schemas.microsoft.com/office/mac/drawingml/2011/main" xmlns:a14="http://schemas.microsoft.com/office/drawing/2010/main" xmlns:m="http://schemas.openxmlformats.org/officeDocument/2006/math" xmlns="" val="1"/>
             </a:ext>
           </a:extLst>
         </p:spPr>
@@ -12670,7 +12547,6 @@
             </a:lvl1pPr>
           </a:lstStyle>
           <a:p>
-            <a:pPr/>
             <a:r>
               <a:t>Added feature importance and realistic accuracy testing</a:t>
             </a:r>
@@ -12702,7 +12578,7 @@
           <a:bodyPr lIns="45719" rIns="45719"/>
           <a:lstStyle/>
           <a:p>
-            <a:pPr/>
+            <a:endParaRPr/>
           </a:p>
         </p:txBody>
       </p:sp>
@@ -12725,7 +12601,7 @@
           </a:ln>
           <a:extLst>
             <a:ext uri="{C572A759-6A51-4108-AA02-DFA0A04FC94B}">
-              <ma14:wrappingTextBoxFlag xmlns:ma14="http://schemas.microsoft.com/office/mac/drawingml/2011/main" val="1"/>
+              <ma14:wrappingTextBoxFlag xmlns:ma14="http://schemas.microsoft.com/office/mac/drawingml/2011/main" xmlns:a14="http://schemas.microsoft.com/office/drawing/2010/main" xmlns:m="http://schemas.openxmlformats.org/officeDocument/2006/math" xmlns="" val="1"/>
             </a:ext>
           </a:extLst>
         </p:spPr>
@@ -12743,7 +12619,6 @@
             </a:lvl1pPr>
           </a:lstStyle>
           <a:p>
-            <a:pPr/>
             <a:r>
               <a:t>Organized the README and presentation content</a:t>
             </a:r>
@@ -12779,7 +12654,7 @@
           <a:bodyPr lIns="45719" rIns="45719"/>
           <a:lstStyle/>
           <a:p>
-            <a:pPr/>
+            <a:endParaRPr/>
           </a:p>
         </p:txBody>
       </p:sp>
@@ -12808,7 +12683,7 @@
           <a:bodyPr lIns="45719" rIns="45719"/>
           <a:lstStyle/>
           <a:p>
-            <a:pPr/>
+            <a:endParaRPr/>
           </a:p>
         </p:txBody>
       </p:sp>
@@ -12831,7 +12706,7 @@
           </a:ln>
           <a:extLst>
             <a:ext uri="{C572A759-6A51-4108-AA02-DFA0A04FC94B}">
-              <ma14:wrappingTextBoxFlag xmlns:ma14="http://schemas.microsoft.com/office/mac/drawingml/2011/main" val="1"/>
+              <ma14:wrappingTextBoxFlag xmlns:ma14="http://schemas.microsoft.com/office/mac/drawingml/2011/main" xmlns:a14="http://schemas.microsoft.com/office/drawing/2010/main" xmlns:m="http://schemas.openxmlformats.org/officeDocument/2006/math" xmlns="" val="1"/>
             </a:ext>
           </a:extLst>
         </p:spPr>
@@ -12841,7 +12716,7 @@
           </a:bodyPr>
           <a:lstStyle>
             <a:lvl1pPr algn="ctr">
-              <a:defRPr b="1" sz="1100">
+              <a:defRPr sz="1100" b="1">
                 <a:solidFill>
                   <a:srgbClr val="F45B69"/>
                 </a:solidFill>
@@ -12853,7 +12728,6 @@
             </a:lvl1pPr>
           </a:lstStyle>
           <a:p>
-            <a:pPr/>
             <a:r>
               <a:t>JJ</a:t>
             </a:r>
@@ -12879,7 +12753,7 @@
           </a:ln>
           <a:extLst>
             <a:ext uri="{C572A759-6A51-4108-AA02-DFA0A04FC94B}">
-              <ma14:wrappingTextBoxFlag xmlns:ma14="http://schemas.microsoft.com/office/mac/drawingml/2011/main" val="1"/>
+              <ma14:wrappingTextBoxFlag xmlns:ma14="http://schemas.microsoft.com/office/mac/drawingml/2011/main" xmlns:a14="http://schemas.microsoft.com/office/drawing/2010/main" xmlns:m="http://schemas.openxmlformats.org/officeDocument/2006/math" xmlns="" val="1"/>
             </a:ext>
           </a:extLst>
         </p:spPr>
@@ -12889,7 +12763,7 @@
           </a:bodyPr>
           <a:lstStyle>
             <a:lvl1pPr>
-              <a:defRPr b="1" sz="1300">
+              <a:defRPr sz="1300" b="1">
                 <a:solidFill>
                   <a:srgbClr val="16233A"/>
                 </a:solidFill>
@@ -12901,7 +12775,6 @@
             </a:lvl1pPr>
           </a:lstStyle>
           <a:p>
-            <a:pPr/>
             <a:r>
               <a:t>Julia Jeng</a:t>
             </a:r>
@@ -12927,7 +12800,7 @@
           </a:ln>
           <a:extLst>
             <a:ext uri="{C572A759-6A51-4108-AA02-DFA0A04FC94B}">
-              <ma14:wrappingTextBoxFlag xmlns:ma14="http://schemas.microsoft.com/office/mac/drawingml/2011/main" val="1"/>
+              <ma14:wrappingTextBoxFlag xmlns:ma14="http://schemas.microsoft.com/office/mac/drawingml/2011/main" xmlns:a14="http://schemas.microsoft.com/office/drawing/2010/main" xmlns:m="http://schemas.openxmlformats.org/officeDocument/2006/math" xmlns="" val="1"/>
             </a:ext>
           </a:extLst>
         </p:spPr>
@@ -12937,7 +12810,7 @@
           </a:bodyPr>
           <a:lstStyle>
             <a:lvl1pPr>
-              <a:defRPr i="1" sz="1000">
+              <a:defRPr sz="1000" i="1">
                 <a:solidFill>
                   <a:srgbClr val="6B7789"/>
                 </a:solidFill>
@@ -12949,7 +12822,6 @@
             </a:lvl1pPr>
           </a:lstStyle>
           <a:p>
-            <a:pPr/>
             <a:r>
               <a:t>Contributions to add</a:t>
             </a:r>
@@ -12985,7 +12857,7 @@
           <a:bodyPr lIns="45719" rIns="45719"/>
           <a:lstStyle/>
           <a:p>
-            <a:pPr/>
+            <a:endParaRPr/>
           </a:p>
         </p:txBody>
       </p:sp>
@@ -13014,7 +12886,7 @@
           <a:bodyPr lIns="45719" rIns="45719"/>
           <a:lstStyle/>
           <a:p>
-            <a:pPr/>
+            <a:endParaRPr/>
           </a:p>
         </p:txBody>
       </p:sp>
@@ -13037,7 +12909,7 @@
           </a:ln>
           <a:extLst>
             <a:ext uri="{C572A759-6A51-4108-AA02-DFA0A04FC94B}">
-              <ma14:wrappingTextBoxFlag xmlns:ma14="http://schemas.microsoft.com/office/mac/drawingml/2011/main" val="1"/>
+              <ma14:wrappingTextBoxFlag xmlns:ma14="http://schemas.microsoft.com/office/mac/drawingml/2011/main" xmlns:a14="http://schemas.microsoft.com/office/drawing/2010/main" xmlns:m="http://schemas.openxmlformats.org/officeDocument/2006/math" xmlns="" val="1"/>
             </a:ext>
           </a:extLst>
         </p:spPr>
@@ -13047,7 +12919,7 @@
           </a:bodyPr>
           <a:lstStyle>
             <a:lvl1pPr algn="ctr">
-              <a:defRPr b="1" sz="1100">
+              <a:defRPr sz="1100" b="1">
                 <a:solidFill>
                   <a:srgbClr val="F5A623"/>
                 </a:solidFill>
@@ -13059,7 +12931,6 @@
             </a:lvl1pPr>
           </a:lstStyle>
           <a:p>
-            <a:pPr/>
             <a:r>
               <a:t>AK</a:t>
             </a:r>
@@ -13085,7 +12956,7 @@
           </a:ln>
           <a:extLst>
             <a:ext uri="{C572A759-6A51-4108-AA02-DFA0A04FC94B}">
-              <ma14:wrappingTextBoxFlag xmlns:ma14="http://schemas.microsoft.com/office/mac/drawingml/2011/main" val="1"/>
+              <ma14:wrappingTextBoxFlag xmlns:ma14="http://schemas.microsoft.com/office/mac/drawingml/2011/main" xmlns:a14="http://schemas.microsoft.com/office/drawing/2010/main" xmlns:m="http://schemas.openxmlformats.org/officeDocument/2006/math" xmlns="" val="1"/>
             </a:ext>
           </a:extLst>
         </p:spPr>
@@ -13095,7 +12966,7 @@
           </a:bodyPr>
           <a:lstStyle>
             <a:lvl1pPr>
-              <a:defRPr b="1" sz="1300">
+              <a:defRPr sz="1300" b="1">
                 <a:solidFill>
                   <a:srgbClr val="16233A"/>
                 </a:solidFill>
@@ -13107,7 +12978,6 @@
             </a:lvl1pPr>
           </a:lstStyle>
           <a:p>
-            <a:pPr/>
             <a:r>
               <a:t>Aarush Kikkuru</a:t>
             </a:r>
@@ -13133,7 +13003,7 @@
           </a:ln>
           <a:extLst>
             <a:ext uri="{C572A759-6A51-4108-AA02-DFA0A04FC94B}">
-              <ma14:wrappingTextBoxFlag xmlns:ma14="http://schemas.microsoft.com/office/mac/drawingml/2011/main" val="1"/>
+              <ma14:wrappingTextBoxFlag xmlns:ma14="http://schemas.microsoft.com/office/mac/drawingml/2011/main" xmlns:a14="http://schemas.microsoft.com/office/drawing/2010/main" xmlns:m="http://schemas.openxmlformats.org/officeDocument/2006/math" xmlns="" val="1"/>
             </a:ext>
           </a:extLst>
         </p:spPr>
@@ -13143,7 +13013,7 @@
           </a:bodyPr>
           <a:lstStyle>
             <a:lvl1pPr>
-              <a:defRPr i="1" sz="1000">
+              <a:defRPr sz="1000" i="1">
                 <a:solidFill>
                   <a:srgbClr val="6B7789"/>
                 </a:solidFill>
@@ -13155,7 +13025,6 @@
             </a:lvl1pPr>
           </a:lstStyle>
           <a:p>
-            <a:pPr/>
             <a:r>
               <a:t>Contributions to add</a:t>
             </a:r>
@@ -13186,7 +13055,7 @@
           <a:bodyPr lIns="45719" rIns="45719"/>
           <a:lstStyle/>
           <a:p>
-            <a:pPr/>
+            <a:endParaRPr/>
           </a:p>
         </p:txBody>
       </p:sp>
@@ -13209,7 +13078,7 @@
           </a:ln>
           <a:extLst>
             <a:ext uri="{C572A759-6A51-4108-AA02-DFA0A04FC94B}">
-              <ma14:wrappingTextBoxFlag xmlns:ma14="http://schemas.microsoft.com/office/mac/drawingml/2011/main" val="1"/>
+              <ma14:wrappingTextBoxFlag xmlns:ma14="http://schemas.microsoft.com/office/mac/drawingml/2011/main" xmlns:a14="http://schemas.microsoft.com/office/drawing/2010/main" xmlns:m="http://schemas.openxmlformats.org/officeDocument/2006/math" xmlns="" val="1"/>
             </a:ext>
           </a:extLst>
         </p:spPr>
@@ -13231,7 +13100,6 @@
             </a:lvl1pPr>
           </a:lstStyle>
           <a:p>
-            <a:pPr/>
             <a:r>
               <a:t>Safe Login</a:t>
             </a:r>
@@ -13257,7 +13125,7 @@
           </a:ln>
           <a:extLst>
             <a:ext uri="{C572A759-6A51-4108-AA02-DFA0A04FC94B}">
-              <ma14:wrappingTextBoxFlag xmlns:ma14="http://schemas.microsoft.com/office/mac/drawingml/2011/main" val="1"/>
+              <ma14:wrappingTextBoxFlag xmlns:ma14="http://schemas.microsoft.com/office/mac/drawingml/2011/main" xmlns:a14="http://schemas.microsoft.com/office/drawing/2010/main" xmlns:m="http://schemas.openxmlformats.org/officeDocument/2006/math" xmlns="" val="1"/>
             </a:ext>
           </a:extLst>
         </p:spPr>
@@ -13279,7 +13147,6 @@
             </a:lvl1pPr>
           </a:lstStyle>
           <a:p>
-            <a:pPr/>
             <a:r>
               <a:t>Programming Project</a:t>
             </a:r>
@@ -13305,7 +13172,7 @@
           </a:ln>
           <a:extLst>
             <a:ext uri="{C572A759-6A51-4108-AA02-DFA0A04FC94B}">
-              <ma14:wrappingTextBoxFlag xmlns:ma14="http://schemas.microsoft.com/office/mac/drawingml/2011/main" val="1"/>
+              <ma14:wrappingTextBoxFlag xmlns:ma14="http://schemas.microsoft.com/office/mac/drawingml/2011/main" xmlns:a14="http://schemas.microsoft.com/office/drawing/2010/main" xmlns:m="http://schemas.openxmlformats.org/officeDocument/2006/math" xmlns="" val="1"/>
             </a:ext>
           </a:extLst>
         </p:spPr>
@@ -13327,7 +13194,6 @@
             </a:lvl1pPr>
           </a:lstStyle>
           <a:p>
-            <a:pPr/>
             <a:r>
               <a:t>8</a:t>
             </a:r>
@@ -13353,7 +13219,7 @@
           </a:ln>
           <a:extLst>
             <a:ext uri="{C572A759-6A51-4108-AA02-DFA0A04FC94B}">
-              <ma14:wrappingTextBoxFlag xmlns:ma14="http://schemas.microsoft.com/office/mac/drawingml/2011/main" val="1"/>
+              <ma14:wrappingTextBoxFlag xmlns:ma14="http://schemas.microsoft.com/office/mac/drawingml/2011/main" xmlns:a14="http://schemas.microsoft.com/office/drawing/2010/main" xmlns:m="http://schemas.openxmlformats.org/officeDocument/2006/math" xmlns="" val="1"/>
             </a:ext>
           </a:extLst>
         </p:spPr>
@@ -13371,7 +13237,6 @@
             </a:lvl1pPr>
           </a:lstStyle>
           <a:p>
-            <a:pPr/>
             <a:r>
               <a:t>Built the full ML training and prediction pipeline</a:t>
             </a:r>
@@ -13405,7 +13270,7 @@
           <a:bodyPr lIns="45719" rIns="45719"/>
           <a:lstStyle/>
           <a:p>
-            <a:pPr/>
+            <a:endParaRPr/>
           </a:p>
         </p:txBody>
       </p:sp>
@@ -13434,7 +13299,7 @@
           <a:bodyPr lIns="45719" rIns="45719"/>
           <a:lstStyle/>
           <a:p>
-            <a:pPr/>
+            <a:endParaRPr/>
           </a:p>
         </p:txBody>
       </p:sp>
@@ -13457,7 +13322,7 @@
           </a:ln>
           <a:extLst>
             <a:ext uri="{C572A759-6A51-4108-AA02-DFA0A04FC94B}">
-              <ma14:wrappingTextBoxFlag xmlns:ma14="http://schemas.microsoft.com/office/mac/drawingml/2011/main" val="1"/>
+              <ma14:wrappingTextBoxFlag xmlns:ma14="http://schemas.microsoft.com/office/mac/drawingml/2011/main" xmlns:a14="http://schemas.microsoft.com/office/drawing/2010/main" xmlns:m="http://schemas.openxmlformats.org/officeDocument/2006/math" xmlns="" val="1"/>
             </a:ext>
           </a:extLst>
         </p:spPr>
@@ -13467,7 +13332,7 @@
           </a:bodyPr>
           <a:lstStyle>
             <a:lvl1pPr algn="ctr">
-              <a:defRPr b="1" sz="1400">
+              <a:defRPr sz="1400" b="1">
                 <a:solidFill>
                   <a:srgbClr val="2ECC8F"/>
                 </a:solidFill>
@@ -13479,7 +13344,6 @@
             </a:lvl1pPr>
           </a:lstStyle>
           <a:p>
-            <a:pPr/>
             <a:r>
               <a:t>PD</a:t>
             </a:r>
@@ -13505,7 +13369,7 @@
           </a:ln>
           <a:extLst>
             <a:ext uri="{C572A759-6A51-4108-AA02-DFA0A04FC94B}">
-              <ma14:wrappingTextBoxFlag xmlns:ma14="http://schemas.microsoft.com/office/mac/drawingml/2011/main" val="1"/>
+              <ma14:wrappingTextBoxFlag xmlns:ma14="http://schemas.microsoft.com/office/mac/drawingml/2011/main" xmlns:a14="http://schemas.microsoft.com/office/drawing/2010/main" xmlns:m="http://schemas.openxmlformats.org/officeDocument/2006/math" xmlns="" val="1"/>
             </a:ext>
           </a:extLst>
         </p:spPr>
@@ -13515,7 +13379,7 @@
           </a:bodyPr>
           <a:lstStyle>
             <a:lvl1pPr>
-              <a:defRPr b="1" sz="1600">
+              <a:defRPr sz="1600" b="1">
                 <a:solidFill>
                   <a:srgbClr val="FFFFFF"/>
                 </a:solidFill>
@@ -13527,7 +13391,6 @@
             </a:lvl1pPr>
           </a:lstStyle>
           <a:p>
-            <a:pPr/>
             <a:r>
               <a:t>Pranav Das</a:t>
             </a:r>
@@ -13559,7 +13422,7 @@
           <a:bodyPr lIns="45719" rIns="45719"/>
           <a:lstStyle/>
           <a:p>
-            <a:pPr/>
+            <a:endParaRPr/>
           </a:p>
         </p:txBody>
       </p:sp>
@@ -13571,23 +13434,23 @@
         </p:nvSpPr>
         <p:spPr>
           <a:xfrm>
-            <a:off x="1012210" y="5187334"/>
-            <a:ext cx="1387716" cy="248306"/>
-          </a:xfrm>
-          <a:prstGeom prst="rect">
-            <a:avLst/>
-          </a:prstGeom>
-          <a:ln w="12700">
-            <a:miter lim="400000"/>
-          </a:ln>
-          <a:extLst>
-            <a:ext uri="{C572A759-6A51-4108-AA02-DFA0A04FC94B}">
-              <ma14:wrappingTextBoxFlag xmlns:ma14="http://schemas.microsoft.com/office/mac/drawingml/2011/main" val="1"/>
-            </a:ext>
-          </a:extLst>
-        </p:spPr>
-        <p:txBody>
-          <a:bodyPr lIns="45719" rIns="45719">
+            <a:off x="1012209" y="5187334"/>
+            <a:ext cx="1775595" cy="461665"/>
+          </a:xfrm>
+          <a:prstGeom prst="rect">
+            <a:avLst/>
+          </a:prstGeom>
+          <a:ln w="12700">
+            <a:miter lim="400000"/>
+          </a:ln>
+          <a:extLst>
+            <a:ext uri="{C572A759-6A51-4108-AA02-DFA0A04FC94B}">
+              <ma14:wrappingTextBoxFlag xmlns:ma14="http://schemas.microsoft.com/office/mac/drawingml/2011/main" xmlns:a14="http://schemas.microsoft.com/office/drawing/2010/main" xmlns:m="http://schemas.openxmlformats.org/officeDocument/2006/math" xmlns="" val="1"/>
+            </a:ext>
+          </a:extLst>
+        </p:spPr>
+        <p:txBody>
+          <a:bodyPr wrap="square" lIns="45719" rIns="45719">
             <a:spAutoFit/>
           </a:bodyPr>
           <a:lstStyle>
@@ -13600,10 +13463,180 @@
             </a:lvl1pPr>
           </a:lstStyle>
           <a:p>
-            <a:pPr/>
-            <a:r>
-              <a:t>Contributions to add</a:t>
-            </a:r>
+            <a:r>
+              <a:rPr lang="en-US" dirty="0"/>
+              <a:t>Wrote the code for the models and the dataset</a:t>
+            </a:r>
+          </a:p>
+        </p:txBody>
+      </p:sp>
+      <p:sp>
+        <p:nvSpPr>
+          <p:cNvPr id="3" name="Shape 9">
+            <a:extLst>
+              <a:ext uri="{FF2B5EF4-FFF2-40B4-BE49-F238E27FC236}">
+                <a16:creationId xmlns:a16="http://schemas.microsoft.com/office/drawing/2014/main" id="{E5B3FAED-21BC-17FB-3C4D-FA893C3307B7}"/>
+              </a:ext>
+            </a:extLst>
+          </p:cNvPr>
+          <p:cNvSpPr/>
+          <p:nvPr/>
+        </p:nvSpPr>
+        <p:spPr>
+          <a:xfrm>
+            <a:off x="772410" y="5752226"/>
+            <a:ext cx="118873" cy="118873"/>
+          </a:xfrm>
+          <a:prstGeom prst="ellipse">
+            <a:avLst/>
+          </a:prstGeom>
+          <a:solidFill>
+            <a:srgbClr val="2ECC8F"/>
+          </a:solidFill>
+          <a:ln w="12700">
+            <a:miter lim="400000"/>
+          </a:ln>
+        </p:spPr>
+        <p:txBody>
+          <a:bodyPr lIns="45719" rIns="45719"/>
+          <a:lstStyle/>
+          <a:p>
+            <a:endParaRPr/>
+          </a:p>
+        </p:txBody>
+      </p:sp>
+      <p:sp>
+        <p:nvSpPr>
+          <p:cNvPr id="5" name="Text 10">
+            <a:extLst>
+              <a:ext uri="{FF2B5EF4-FFF2-40B4-BE49-F238E27FC236}">
+                <a16:creationId xmlns:a16="http://schemas.microsoft.com/office/drawing/2014/main" id="{01F12165-EED9-447D-63DB-E1B3D9DB1E4E}"/>
+              </a:ext>
+            </a:extLst>
+          </p:cNvPr>
+          <p:cNvSpPr txBox="1"/>
+          <p:nvPr/>
+        </p:nvSpPr>
+        <p:spPr>
+          <a:xfrm>
+            <a:off x="979527" y="5675737"/>
+            <a:ext cx="2022897" cy="461665"/>
+          </a:xfrm>
+          <a:prstGeom prst="rect">
+            <a:avLst/>
+          </a:prstGeom>
+          <a:ln w="12700">
+            <a:miter lim="400000"/>
+          </a:ln>
+          <a:extLst>
+            <a:ext uri="{C572A759-6A51-4108-AA02-DFA0A04FC94B}">
+              <ma14:wrappingTextBoxFlag xmlns="" xmlns:m="http://schemas.openxmlformats.org/officeDocument/2006/math" xmlns:a14="http://schemas.microsoft.com/office/drawing/2010/main" xmlns:ma14="http://schemas.microsoft.com/office/mac/drawingml/2011/main" val="1"/>
+            </a:ext>
+          </a:extLst>
+        </p:spPr>
+        <p:txBody>
+          <a:bodyPr wrap="square" lIns="45719" rIns="45719">
+            <a:spAutoFit/>
+          </a:bodyPr>
+          <a:lstStyle>
+            <a:lvl1pPr algn="r">
+              <a:defRPr sz="1200">
+                <a:solidFill>
+                  <a:srgbClr val="FFFFFF"/>
+                </a:solidFill>
+              </a:defRPr>
+            </a:lvl1pPr>
+          </a:lstStyle>
+          <a:p>
+            <a:r>
+              <a:rPr lang="en-US" dirty="0"/>
+              <a:t>Made the initial draft of the presentation slides</a:t>
+            </a:r>
+          </a:p>
+        </p:txBody>
+      </p:sp>
+      <p:sp>
+        <p:nvSpPr>
+          <p:cNvPr id="7" name="Text 10">
+            <a:extLst>
+              <a:ext uri="{FF2B5EF4-FFF2-40B4-BE49-F238E27FC236}">
+                <a16:creationId xmlns:a16="http://schemas.microsoft.com/office/drawing/2014/main" id="{8C091EBD-71EA-8EDE-1483-D37CDE315113}"/>
+              </a:ext>
+            </a:extLst>
+          </p:cNvPr>
+          <p:cNvSpPr txBox="1"/>
+          <p:nvPr/>
+        </p:nvSpPr>
+        <p:spPr>
+          <a:xfrm>
+            <a:off x="971122" y="6137402"/>
+            <a:ext cx="2031302" cy="276999"/>
+          </a:xfrm>
+          <a:prstGeom prst="rect">
+            <a:avLst/>
+          </a:prstGeom>
+          <a:ln w="12700">
+            <a:miter lim="400000"/>
+          </a:ln>
+          <a:extLst>
+            <a:ext uri="{C572A759-6A51-4108-AA02-DFA0A04FC94B}">
+              <ma14:wrappingTextBoxFlag xmlns:ma14="http://schemas.microsoft.com/office/mac/drawingml/2011/main" xmlns:a14="http://schemas.microsoft.com/office/drawing/2010/main" xmlns:m="http://schemas.openxmlformats.org/officeDocument/2006/math" xmlns="" val="1"/>
+            </a:ext>
+          </a:extLst>
+        </p:spPr>
+        <p:txBody>
+          <a:bodyPr wrap="square" lIns="45719" rIns="45719">
+            <a:spAutoFit/>
+          </a:bodyPr>
+          <a:lstStyle>
+            <a:lvl1pPr algn="r">
+              <a:defRPr sz="1200">
+                <a:solidFill>
+                  <a:srgbClr val="FFFFFF"/>
+                </a:solidFill>
+              </a:defRPr>
+            </a:lvl1pPr>
+          </a:lstStyle>
+          <a:p>
+            <a:r>
+              <a:rPr lang="en-US" dirty="0"/>
+              <a:t>Proposed the project idea</a:t>
+            </a:r>
+          </a:p>
+        </p:txBody>
+      </p:sp>
+      <p:sp>
+        <p:nvSpPr>
+          <p:cNvPr id="9" name="Shape 9">
+            <a:extLst>
+              <a:ext uri="{FF2B5EF4-FFF2-40B4-BE49-F238E27FC236}">
+                <a16:creationId xmlns:a16="http://schemas.microsoft.com/office/drawing/2014/main" id="{0CBE37D8-C4C4-6A74-6C9E-22B9D18296A7}"/>
+              </a:ext>
+            </a:extLst>
+          </p:cNvPr>
+          <p:cNvSpPr/>
+          <p:nvPr/>
+        </p:nvSpPr>
+        <p:spPr>
+          <a:xfrm>
+            <a:off x="768693" y="6183408"/>
+            <a:ext cx="118873" cy="118873"/>
+          </a:xfrm>
+          <a:prstGeom prst="ellipse">
+            <a:avLst/>
+          </a:prstGeom>
+          <a:solidFill>
+            <a:srgbClr val="2ECC8F"/>
+          </a:solidFill>
+          <a:ln w="12700">
+            <a:miter lim="400000"/>
+          </a:ln>
+        </p:spPr>
+        <p:txBody>
+          <a:bodyPr lIns="45719" rIns="45719"/>
+          <a:lstStyle/>
+          <a:p>
+            <a:endParaRPr/>
           </a:p>
         </p:txBody>
       </p:sp>
@@ -13612,18 +13645,19 @@
   <p:clrMapOvr>
     <a:masterClrMapping/>
   </p:clrMapOvr>
-  <p:transition xmlns:p14="http://schemas.microsoft.com/office/powerpoint/2010/main" spd="med" advClick="1"/>
+  <p:transition spd="med"/>
 </p:sld>
 </file>
 
 <file path=ppt/slides/slide9.xml><?xml version="1.0" encoding="utf-8"?>
-<p:sld xmlns:a="http://schemas.openxmlformats.org/drawingml/2006/main" xmlns:r="http://schemas.openxmlformats.org/officeDocument/2006/relationships" xmlns:p="http://schemas.openxmlformats.org/presentationml/2006/main" xmlns:m="http://schemas.openxmlformats.org/officeDocument/2006/math" xmlns:a14="http://schemas.microsoft.com/office/drawing/2010/main" showMasterSp="1" showMasterPhAnim="1">
+<p:sld xmlns:a="http://schemas.openxmlformats.org/drawingml/2006/main" xmlns:r="http://schemas.openxmlformats.org/officeDocument/2006/relationships" xmlns:p="http://schemas.openxmlformats.org/presentationml/2006/main">
   <p:cSld>
     <p:bg>
       <p:bgPr>
         <a:solidFill>
           <a:srgbClr val="F3F6FA"/>
         </a:solidFill>
+        <a:effectLst/>
       </p:bgPr>
     </p:bg>
     <p:spTree>
@@ -13659,7 +13693,7 @@
           </a:ln>
           <a:extLst>
             <a:ext uri="{C572A759-6A51-4108-AA02-DFA0A04FC94B}">
-              <ma14:wrappingTextBoxFlag xmlns:ma14="http://schemas.microsoft.com/office/mac/drawingml/2011/main" val="1"/>
+              <ma14:wrappingTextBoxFlag xmlns:ma14="http://schemas.microsoft.com/office/mac/drawingml/2011/main" xmlns:a14="http://schemas.microsoft.com/office/drawing/2010/main" xmlns:m="http://schemas.openxmlformats.org/officeDocument/2006/math" xmlns="" val="1"/>
             </a:ext>
           </a:extLst>
         </p:spPr>
@@ -13669,7 +13703,7 @@
           </a:bodyPr>
           <a:lstStyle>
             <a:lvl1pPr>
-              <a:defRPr b="1" spc="100" sz="1100">
+              <a:defRPr sz="1100" b="1" spc="100">
                 <a:solidFill>
                   <a:srgbClr val="6B7789"/>
                 </a:solidFill>
@@ -13681,7 +13715,6 @@
             </a:lvl1pPr>
           </a:lstStyle>
           <a:p>
-            <a:pPr/>
             <a:r>
               <a:t>LOGIN THREAT DETECTION • MACHINE LEARNING PROJECT</a:t>
             </a:r>
@@ -13713,7 +13746,7 @@
           <a:bodyPr lIns="45719" rIns="45719"/>
           <a:lstStyle/>
           <a:p>
-            <a:pPr/>
+            <a:endParaRPr/>
           </a:p>
         </p:txBody>
       </p:sp>
@@ -13736,7 +13769,7 @@
           </a:ln>
           <a:extLst>
             <a:ext uri="{C572A759-6A51-4108-AA02-DFA0A04FC94B}">
-              <ma14:wrappingTextBoxFlag xmlns:ma14="http://schemas.microsoft.com/office/mac/drawingml/2011/main" val="1"/>
+              <ma14:wrappingTextBoxFlag xmlns:ma14="http://schemas.microsoft.com/office/mac/drawingml/2011/main" xmlns:a14="http://schemas.microsoft.com/office/drawing/2010/main" xmlns:m="http://schemas.openxmlformats.org/officeDocument/2006/math" xmlns="" val="1"/>
             </a:ext>
           </a:extLst>
         </p:spPr>
@@ -13746,7 +13779,7 @@
           </a:bodyPr>
           <a:lstStyle>
             <a:lvl1pPr>
-              <a:defRPr b="1" sz="3000">
+              <a:defRPr sz="3000" b="1">
                 <a:solidFill>
                   <a:srgbClr val="16233A"/>
                 </a:solidFill>
@@ -13758,7 +13791,6 @@
             </a:lvl1pPr>
           </a:lstStyle>
           <a:p>
-            <a:pPr/>
             <a:r>
               <a:t>Conclusion</a:t>
             </a:r>
@@ -13784,7 +13816,7 @@
           </a:ln>
           <a:extLst>
             <a:ext uri="{C572A759-6A51-4108-AA02-DFA0A04FC94B}">
-              <ma14:wrappingTextBoxFlag xmlns:ma14="http://schemas.microsoft.com/office/mac/drawingml/2011/main" val="1"/>
+              <ma14:wrappingTextBoxFlag xmlns:ma14="http://schemas.microsoft.com/office/mac/drawingml/2011/main" xmlns:a14="http://schemas.microsoft.com/office/drawing/2010/main" xmlns:m="http://schemas.openxmlformats.org/officeDocument/2006/math" xmlns="" val="1"/>
             </a:ext>
           </a:extLst>
         </p:spPr>
@@ -13806,7 +13838,6 @@
             </a:lvl1pPr>
           </a:lstStyle>
           <a:p>
-            <a:pPr/>
             <a:r>
               <a:t>A complete end-to-end machine learning prototype for suspicious login detection.</a:t>
             </a:r>
@@ -13840,7 +13871,7 @@
           <a:bodyPr lIns="45719" rIns="45719"/>
           <a:lstStyle/>
           <a:p>
-            <a:pPr/>
+            <a:endParaRPr/>
           </a:p>
         </p:txBody>
       </p:sp>
@@ -13871,7 +13902,7 @@
           <a:bodyPr lIns="45719" rIns="45719"/>
           <a:lstStyle/>
           <a:p>
-            <a:pPr/>
+            <a:endParaRPr/>
           </a:p>
         </p:txBody>
       </p:sp>
@@ -13894,7 +13925,7 @@
           </a:ln>
           <a:extLst>
             <a:ext uri="{C572A759-6A51-4108-AA02-DFA0A04FC94B}">
-              <ma14:wrappingTextBoxFlag xmlns:ma14="http://schemas.microsoft.com/office/mac/drawingml/2011/main" val="1"/>
+              <ma14:wrappingTextBoxFlag xmlns:ma14="http://schemas.microsoft.com/office/mac/drawingml/2011/main" xmlns:a14="http://schemas.microsoft.com/office/drawing/2010/main" xmlns:m="http://schemas.openxmlformats.org/officeDocument/2006/math" xmlns="" val="1"/>
             </a:ext>
           </a:extLst>
         </p:spPr>
@@ -13904,7 +13935,7 @@
           </a:bodyPr>
           <a:lstStyle>
             <a:lvl1pPr algn="ctr">
-              <a:defRPr b="1" sz="900">
+              <a:defRPr sz="900" b="1">
                 <a:solidFill>
                   <a:srgbClr val="2ECC8F"/>
                 </a:solidFill>
@@ -13916,7 +13947,6 @@
             </a:lvl1pPr>
           </a:lstStyle>
           <a:p>
-            <a:pPr/>
             <a:r>
               <a:t>KEY TAKEAWAY</a:t>
             </a:r>
@@ -13942,7 +13972,7 @@
           </a:ln>
           <a:extLst>
             <a:ext uri="{C572A759-6A51-4108-AA02-DFA0A04FC94B}">
-              <ma14:wrappingTextBoxFlag xmlns:ma14="http://schemas.microsoft.com/office/mac/drawingml/2011/main" val="1"/>
+              <ma14:wrappingTextBoxFlag xmlns:ma14="http://schemas.microsoft.com/office/mac/drawingml/2011/main" xmlns:a14="http://schemas.microsoft.com/office/drawing/2010/main" xmlns:m="http://schemas.openxmlformats.org/officeDocument/2006/math" xmlns="" val="1"/>
             </a:ext>
           </a:extLst>
         </p:spPr>
@@ -13964,7 +13994,6 @@
             </a:lvl1pPr>
           </a:lstStyle>
           <a:p>
-            <a:pPr/>
             <a:r>
               <a:t>The model successfully detects most attack-IP logins by combining contextual login signals.</a:t>
             </a:r>
@@ -13996,7 +14025,7 @@
           <a:bodyPr lIns="45719" rIns="45719"/>
           <a:lstStyle/>
           <a:p>
-            <a:pPr/>
+            <a:endParaRPr/>
           </a:p>
         </p:txBody>
       </p:sp>
@@ -14019,7 +14048,7 @@
           </a:ln>
           <a:extLst>
             <a:ext uri="{C572A759-6A51-4108-AA02-DFA0A04FC94B}">
-              <ma14:wrappingTextBoxFlag xmlns:ma14="http://schemas.microsoft.com/office/mac/drawingml/2011/main" val="1"/>
+              <ma14:wrappingTextBoxFlag xmlns:ma14="http://schemas.microsoft.com/office/mac/drawingml/2011/main" xmlns:a14="http://schemas.microsoft.com/office/drawing/2010/main" xmlns:m="http://schemas.openxmlformats.org/officeDocument/2006/math" xmlns="" val="1"/>
             </a:ext>
           </a:extLst>
         </p:spPr>
@@ -14029,7 +14058,7 @@
           </a:bodyPr>
           <a:lstStyle>
             <a:lvl1pPr>
-              <a:defRPr b="1" sz="1200">
+              <a:defRPr sz="1200" b="1">
                 <a:solidFill>
                   <a:srgbClr val="FFFFFF"/>
                 </a:solidFill>
@@ -14041,7 +14070,6 @@
             </a:lvl1pPr>
           </a:lstStyle>
           <a:p>
-            <a:pPr/>
             <a:r>
               <a:t>87.33% recall</a:t>
             </a:r>
@@ -14067,7 +14095,7 @@
           </a:ln>
           <a:extLst>
             <a:ext uri="{C572A759-6A51-4108-AA02-DFA0A04FC94B}">
-              <ma14:wrappingTextBoxFlag xmlns:ma14="http://schemas.microsoft.com/office/mac/drawingml/2011/main" val="1"/>
+              <ma14:wrappingTextBoxFlag xmlns:ma14="http://schemas.microsoft.com/office/mac/drawingml/2011/main" xmlns:a14="http://schemas.microsoft.com/office/drawing/2010/main" xmlns:m="http://schemas.openxmlformats.org/officeDocument/2006/math" xmlns="" val="1"/>
             </a:ext>
           </a:extLst>
         </p:spPr>
@@ -14089,7 +14117,6 @@
             </a:lvl1pPr>
           </a:lstStyle>
           <a:p>
-            <a:pPr/>
             <a:r>
               <a:t>Most suspicious examples were detected.</a:t>
             </a:r>
@@ -14121,7 +14148,7 @@
           <a:bodyPr lIns="45719" rIns="45719"/>
           <a:lstStyle/>
           <a:p>
-            <a:pPr/>
+            <a:endParaRPr/>
           </a:p>
         </p:txBody>
       </p:sp>
@@ -14144,7 +14171,7 @@
           </a:ln>
           <a:extLst>
             <a:ext uri="{C572A759-6A51-4108-AA02-DFA0A04FC94B}">
-              <ma14:wrappingTextBoxFlag xmlns:ma14="http://schemas.microsoft.com/office/mac/drawingml/2011/main" val="1"/>
+              <ma14:wrappingTextBoxFlag xmlns:ma14="http://schemas.microsoft.com/office/mac/drawingml/2011/main" xmlns:a14="http://schemas.microsoft.com/office/drawing/2010/main" xmlns:m="http://schemas.openxmlformats.org/officeDocument/2006/math" xmlns="" val="1"/>
             </a:ext>
           </a:extLst>
         </p:spPr>
@@ -14154,7 +14181,7 @@
           </a:bodyPr>
           <a:lstStyle>
             <a:lvl1pPr>
-              <a:defRPr b="1" sz="1200">
+              <a:defRPr sz="1200" b="1">
                 <a:solidFill>
                   <a:srgbClr val="FFFFFF"/>
                 </a:solidFill>
@@ -14166,7 +14193,6 @@
             </a:lvl1pPr>
           </a:lstStyle>
           <a:p>
-            <a:pPr/>
             <a:r>
               <a:t>Full Python pipeline</a:t>
             </a:r>
@@ -14192,7 +14218,7 @@
           </a:ln>
           <a:extLst>
             <a:ext uri="{C572A759-6A51-4108-AA02-DFA0A04FC94B}">
-              <ma14:wrappingTextBoxFlag xmlns:ma14="http://schemas.microsoft.com/office/mac/drawingml/2011/main" val="1"/>
+              <ma14:wrappingTextBoxFlag xmlns:ma14="http://schemas.microsoft.com/office/mac/drawingml/2011/main" xmlns:a14="http://schemas.microsoft.com/office/drawing/2010/main" xmlns:m="http://schemas.openxmlformats.org/officeDocument/2006/math" xmlns="" val="1"/>
             </a:ext>
           </a:extLst>
         </p:spPr>
@@ -14214,7 +14240,6 @@
             </a:lvl1pPr>
           </a:lstStyle>
           <a:p>
-            <a:pPr/>
             <a:r>
               <a:t>Download, preprocess, balance, train, evaluate, and predict.</a:t>
             </a:r>
@@ -14246,7 +14271,7 @@
           <a:bodyPr lIns="45719" rIns="45719"/>
           <a:lstStyle/>
           <a:p>
-            <a:pPr/>
+            <a:endParaRPr/>
           </a:p>
         </p:txBody>
       </p:sp>
@@ -14269,7 +14294,7 @@
           </a:ln>
           <a:extLst>
             <a:ext uri="{C572A759-6A51-4108-AA02-DFA0A04FC94B}">
-              <ma14:wrappingTextBoxFlag xmlns:ma14="http://schemas.microsoft.com/office/mac/drawingml/2011/main" val="1"/>
+              <ma14:wrappingTextBoxFlag xmlns:ma14="http://schemas.microsoft.com/office/mac/drawingml/2011/main" xmlns:a14="http://schemas.microsoft.com/office/drawing/2010/main" xmlns:m="http://schemas.openxmlformats.org/officeDocument/2006/math" xmlns="" val="1"/>
             </a:ext>
           </a:extLst>
         </p:spPr>
@@ -14279,7 +14304,7 @@
           </a:bodyPr>
           <a:lstStyle>
             <a:lvl1pPr>
-              <a:defRPr b="1" sz="1200">
+              <a:defRPr sz="1200" b="1">
                 <a:solidFill>
                   <a:srgbClr val="FFFFFF"/>
                 </a:solidFill>
@@ -14291,7 +14316,6 @@
             </a:lvl1pPr>
           </a:lstStyle>
           <a:p>
-            <a:pPr/>
             <a:r>
               <a:t>Honest limitations</a:t>
             </a:r>
@@ -14317,7 +14341,7 @@
           </a:ln>
           <a:extLst>
             <a:ext uri="{C572A759-6A51-4108-AA02-DFA0A04FC94B}">
-              <ma14:wrappingTextBoxFlag xmlns:ma14="http://schemas.microsoft.com/office/mac/drawingml/2011/main" val="1"/>
+              <ma14:wrappingTextBoxFlag xmlns:ma14="http://schemas.microsoft.com/office/mac/drawingml/2011/main" xmlns:a14="http://schemas.microsoft.com/office/drawing/2010/main" xmlns:m="http://schemas.openxmlformats.org/officeDocument/2006/math" xmlns="" val="1"/>
             </a:ext>
           </a:extLst>
         </p:spPr>
@@ -14339,7 +14363,6 @@
             </a:lvl1pPr>
           </a:lstStyle>
           <a:p>
-            <a:pPr/>
             <a:r>
               <a:t>Results are useful, but not production-ready.</a:t>
             </a:r>
@@ -14375,7 +14398,7 @@
           <a:bodyPr lIns="45719" rIns="45719"/>
           <a:lstStyle/>
           <a:p>
-            <a:pPr/>
+            <a:endParaRPr/>
           </a:p>
         </p:txBody>
       </p:sp>
@@ -14398,7 +14421,7 @@
           </a:ln>
           <a:extLst>
             <a:ext uri="{C572A759-6A51-4108-AA02-DFA0A04FC94B}">
-              <ma14:wrappingTextBoxFlag xmlns:ma14="http://schemas.microsoft.com/office/mac/drawingml/2011/main" val="1"/>
+              <ma14:wrappingTextBoxFlag xmlns:ma14="http://schemas.microsoft.com/office/mac/drawingml/2011/main" xmlns:a14="http://schemas.microsoft.com/office/drawing/2010/main" xmlns:m="http://schemas.openxmlformats.org/officeDocument/2006/math" xmlns="" val="1"/>
             </a:ext>
           </a:extLst>
         </p:spPr>
@@ -14408,7 +14431,7 @@
           </a:bodyPr>
           <a:lstStyle>
             <a:lvl1pPr>
-              <a:defRPr b="1" sz="1500">
+              <a:defRPr sz="1500" b="1">
                 <a:solidFill>
                   <a:srgbClr val="16233A"/>
                 </a:solidFill>
@@ -14420,7 +14443,6 @@
             </a:lvl1pPr>
           </a:lstStyle>
           <a:p>
-            <a:pPr/>
             <a:r>
               <a:t>Sources</a:t>
             </a:r>
@@ -14446,7 +14468,7 @@
           </a:ln>
           <a:extLst>
             <a:ext uri="{C572A759-6A51-4108-AA02-DFA0A04FC94B}">
-              <ma14:wrappingTextBoxFlag xmlns:ma14="http://schemas.microsoft.com/office/mac/drawingml/2011/main" val="1"/>
+              <ma14:wrappingTextBoxFlag xmlns:ma14="http://schemas.microsoft.com/office/mac/drawingml/2011/main" xmlns:a14="http://schemas.microsoft.com/office/drawing/2010/main" xmlns:m="http://schemas.openxmlformats.org/officeDocument/2006/math" xmlns="" val="1"/>
             </a:ext>
           </a:extLst>
         </p:spPr>
@@ -14456,7 +14478,7 @@
           </a:bodyPr>
           <a:lstStyle>
             <a:lvl1pPr>
-              <a:defRPr b="1" sz="1200">
+              <a:defRPr sz="1200" b="1">
                 <a:solidFill>
                   <a:srgbClr val="2ECC8F"/>
                 </a:solidFill>
@@ -14468,7 +14490,6 @@
             </a:lvl1pPr>
           </a:lstStyle>
           <a:p>
-            <a:pPr/>
             <a:r>
               <a:t>1</a:t>
             </a:r>
@@ -14494,7 +14515,7 @@
           </a:ln>
           <a:extLst>
             <a:ext uri="{C572A759-6A51-4108-AA02-DFA0A04FC94B}">
-              <ma14:wrappingTextBoxFlag xmlns:ma14="http://schemas.microsoft.com/office/mac/drawingml/2011/main" val="1"/>
+              <ma14:wrappingTextBoxFlag xmlns:ma14="http://schemas.microsoft.com/office/mac/drawingml/2011/main" xmlns:a14="http://schemas.microsoft.com/office/drawing/2010/main" xmlns:m="http://schemas.openxmlformats.org/officeDocument/2006/math" xmlns="" val="1"/>
             </a:ext>
           </a:extLst>
         </p:spPr>
@@ -14504,7 +14525,7 @@
           </a:bodyPr>
           <a:lstStyle>
             <a:lvl1pPr>
-              <a:defRPr b="1" sz="1200">
+              <a:defRPr sz="1200" b="1">
                 <a:solidFill>
                   <a:srgbClr val="16233A"/>
                 </a:solidFill>
@@ -14516,7 +14537,6 @@
             </a:lvl1pPr>
           </a:lstStyle>
           <a:p>
-            <a:pPr/>
             <a:r>
               <a:t>RBA Dataset</a:t>
             </a:r>
@@ -14542,7 +14562,7 @@
           </a:ln>
           <a:extLst>
             <a:ext uri="{C572A759-6A51-4108-AA02-DFA0A04FC94B}">
-              <ma14:wrappingTextBoxFlag xmlns:ma14="http://schemas.microsoft.com/office/mac/drawingml/2011/main" val="1"/>
+              <ma14:wrappingTextBoxFlag xmlns:ma14="http://schemas.microsoft.com/office/mac/drawingml/2011/main" xmlns:a14="http://schemas.microsoft.com/office/drawing/2010/main" xmlns:m="http://schemas.openxmlformats.org/officeDocument/2006/math" xmlns="" val="1"/>
             </a:ext>
           </a:extLst>
         </p:spPr>
@@ -14564,7 +14584,6 @@
             </a:lvl1pPr>
           </a:lstStyle>
           <a:p>
-            <a:pPr/>
             <a:r>
               <a:t>Zenodo DOI 10.5281/zenodo.6782156</a:t>
             </a:r>
@@ -14590,7 +14609,7 @@
           </a:ln>
           <a:extLst>
             <a:ext uri="{C572A759-6A51-4108-AA02-DFA0A04FC94B}">
-              <ma14:wrappingTextBoxFlag xmlns:ma14="http://schemas.microsoft.com/office/mac/drawingml/2011/main" val="1"/>
+              <ma14:wrappingTextBoxFlag xmlns:ma14="http://schemas.microsoft.com/office/mac/drawingml/2011/main" xmlns:a14="http://schemas.microsoft.com/office/drawing/2010/main" xmlns:m="http://schemas.openxmlformats.org/officeDocument/2006/math" xmlns="" val="1"/>
             </a:ext>
           </a:extLst>
         </p:spPr>
@@ -14600,7 +14619,7 @@
           </a:bodyPr>
           <a:lstStyle>
             <a:lvl1pPr>
-              <a:defRPr b="1" sz="1200">
+              <a:defRPr sz="1200" b="1">
                 <a:solidFill>
                   <a:srgbClr val="2ECC8F"/>
                 </a:solidFill>
@@ -14612,7 +14631,6 @@
             </a:lvl1pPr>
           </a:lstStyle>
           <a:p>
-            <a:pPr/>
             <a:r>
               <a:t>2</a:t>
             </a:r>
@@ -14638,7 +14656,7 @@
           </a:ln>
           <a:extLst>
             <a:ext uri="{C572A759-6A51-4108-AA02-DFA0A04FC94B}">
-              <ma14:wrappingTextBoxFlag xmlns:ma14="http://schemas.microsoft.com/office/mac/drawingml/2011/main" val="1"/>
+              <ma14:wrappingTextBoxFlag xmlns:ma14="http://schemas.microsoft.com/office/mac/drawingml/2011/main" xmlns:a14="http://schemas.microsoft.com/office/drawing/2010/main" xmlns:m="http://schemas.openxmlformats.org/officeDocument/2006/math" xmlns="" val="1"/>
             </a:ext>
           </a:extLst>
         </p:spPr>
@@ -14648,7 +14666,7 @@
           </a:bodyPr>
           <a:lstStyle>
             <a:lvl1pPr>
-              <a:defRPr b="1" sz="1200">
+              <a:defRPr sz="1200" b="1">
                 <a:solidFill>
                   <a:srgbClr val="16233A"/>
                 </a:solidFill>
@@ -14660,7 +14678,6 @@
             </a:lvl1pPr>
           </a:lstStyle>
           <a:p>
-            <a:pPr/>
             <a:r>
               <a:t>Dataset paper</a:t>
             </a:r>
@@ -14686,7 +14703,7 @@
           </a:ln>
           <a:extLst>
             <a:ext uri="{C572A759-6A51-4108-AA02-DFA0A04FC94B}">
-              <ma14:wrappingTextBoxFlag xmlns:ma14="http://schemas.microsoft.com/office/mac/drawingml/2011/main" val="1"/>
+              <ma14:wrappingTextBoxFlag xmlns:ma14="http://schemas.microsoft.com/office/mac/drawingml/2011/main" xmlns:a14="http://schemas.microsoft.com/office/drawing/2010/main" xmlns:m="http://schemas.openxmlformats.org/officeDocument/2006/math" xmlns="" val="1"/>
             </a:ext>
           </a:extLst>
         </p:spPr>
@@ -14708,7 +14725,6 @@
             </a:lvl1pPr>
           </a:lstStyle>
           <a:p>
-            <a:pPr/>
             <a:r>
               <a:t>Wiefling et al., ACM TOPS (2022), DOI 10.1145/3546069</a:t>
             </a:r>
@@ -14734,7 +14750,7 @@
           </a:ln>
           <a:extLst>
             <a:ext uri="{C572A759-6A51-4108-AA02-DFA0A04FC94B}">
-              <ma14:wrappingTextBoxFlag xmlns:ma14="http://schemas.microsoft.com/office/mac/drawingml/2011/main" val="1"/>
+              <ma14:wrappingTextBoxFlag xmlns:ma14="http://schemas.microsoft.com/office/mac/drawingml/2011/main" xmlns:a14="http://schemas.microsoft.com/office/drawing/2010/main" xmlns:m="http://schemas.openxmlformats.org/officeDocument/2006/math" xmlns="" val="1"/>
             </a:ext>
           </a:extLst>
         </p:spPr>
@@ -14744,7 +14760,7 @@
           </a:bodyPr>
           <a:lstStyle>
             <a:lvl1pPr>
-              <a:defRPr b="1" sz="1200">
+              <a:defRPr sz="1200" b="1">
                 <a:solidFill>
                   <a:srgbClr val="2ECC8F"/>
                 </a:solidFill>
@@ -14756,7 +14772,6 @@
             </a:lvl1pPr>
           </a:lstStyle>
           <a:p>
-            <a:pPr/>
             <a:r>
               <a:t>3</a:t>
             </a:r>
@@ -14782,7 +14797,7 @@
           </a:ln>
           <a:extLst>
             <a:ext uri="{C572A759-6A51-4108-AA02-DFA0A04FC94B}">
-              <ma14:wrappingTextBoxFlag xmlns:ma14="http://schemas.microsoft.com/office/mac/drawingml/2011/main" val="1"/>
+              <ma14:wrappingTextBoxFlag xmlns:ma14="http://schemas.microsoft.com/office/mac/drawingml/2011/main" xmlns:a14="http://schemas.microsoft.com/office/drawing/2010/main" xmlns:m="http://schemas.openxmlformats.org/officeDocument/2006/math" xmlns="" val="1"/>
             </a:ext>
           </a:extLst>
         </p:spPr>
@@ -14792,7 +14807,7 @@
           </a:bodyPr>
           <a:lstStyle>
             <a:lvl1pPr>
-              <a:defRPr b="1" sz="1200">
+              <a:defRPr sz="1200" b="1">
                 <a:solidFill>
                   <a:srgbClr val="16233A"/>
                 </a:solidFill>
@@ -14804,7 +14819,6 @@
             </a:lvl1pPr>
           </a:lstStyle>
           <a:p>
-            <a:pPr/>
             <a:r>
               <a:t>Random Forest</a:t>
             </a:r>
@@ -14830,7 +14844,7 @@
           </a:ln>
           <a:extLst>
             <a:ext uri="{C572A759-6A51-4108-AA02-DFA0A04FC94B}">
-              <ma14:wrappingTextBoxFlag xmlns:ma14="http://schemas.microsoft.com/office/mac/drawingml/2011/main" val="1"/>
+              <ma14:wrappingTextBoxFlag xmlns:ma14="http://schemas.microsoft.com/office/mac/drawingml/2011/main" xmlns:a14="http://schemas.microsoft.com/office/drawing/2010/main" xmlns:m="http://schemas.openxmlformats.org/officeDocument/2006/math" xmlns="" val="1"/>
             </a:ext>
           </a:extLst>
         </p:spPr>
@@ -14852,7 +14866,6 @@
             </a:lvl1pPr>
           </a:lstStyle>
           <a:p>
-            <a:pPr/>
             <a:r>
               <a:t>scikit-learn RandomForestClassifier documentation</a:t>
             </a:r>
@@ -14878,7 +14891,7 @@
           </a:ln>
           <a:extLst>
             <a:ext uri="{C572A759-6A51-4108-AA02-DFA0A04FC94B}">
-              <ma14:wrappingTextBoxFlag xmlns:ma14="http://schemas.microsoft.com/office/mac/drawingml/2011/main" val="1"/>
+              <ma14:wrappingTextBoxFlag xmlns:ma14="http://schemas.microsoft.com/office/mac/drawingml/2011/main" xmlns:a14="http://schemas.microsoft.com/office/drawing/2010/main" xmlns:m="http://schemas.openxmlformats.org/officeDocument/2006/math" xmlns="" val="1"/>
             </a:ext>
           </a:extLst>
         </p:spPr>
@@ -14888,7 +14901,7 @@
           </a:bodyPr>
           <a:lstStyle>
             <a:lvl1pPr>
-              <a:defRPr b="1" sz="1200">
+              <a:defRPr sz="1200" b="1">
                 <a:solidFill>
                   <a:srgbClr val="2ECC8F"/>
                 </a:solidFill>
@@ -14900,7 +14913,6 @@
             </a:lvl1pPr>
           </a:lstStyle>
           <a:p>
-            <a:pPr/>
             <a:r>
               <a:t>4</a:t>
             </a:r>
@@ -14926,7 +14938,7 @@
           </a:ln>
           <a:extLst>
             <a:ext uri="{C572A759-6A51-4108-AA02-DFA0A04FC94B}">
-              <ma14:wrappingTextBoxFlag xmlns:ma14="http://schemas.microsoft.com/office/mac/drawingml/2011/main" val="1"/>
+              <ma14:wrappingTextBoxFlag xmlns:ma14="http://schemas.microsoft.com/office/mac/drawingml/2011/main" xmlns:a14="http://schemas.microsoft.com/office/drawing/2010/main" xmlns:m="http://schemas.openxmlformats.org/officeDocument/2006/math" xmlns="" val="1"/>
             </a:ext>
           </a:extLst>
         </p:spPr>
@@ -14936,7 +14948,7 @@
           </a:bodyPr>
           <a:lstStyle>
             <a:lvl1pPr>
-              <a:defRPr b="1" sz="1200">
+              <a:defRPr sz="1200" b="1">
                 <a:solidFill>
                   <a:srgbClr val="16233A"/>
                 </a:solidFill>
@@ -14948,7 +14960,6 @@
             </a:lvl1pPr>
           </a:lstStyle>
           <a:p>
-            <a:pPr/>
             <a:r>
               <a:t>Metrics</a:t>
             </a:r>
@@ -14974,7 +14985,7 @@
           </a:ln>
           <a:extLst>
             <a:ext uri="{C572A759-6A51-4108-AA02-DFA0A04FC94B}">
-              <ma14:wrappingTextBoxFlag xmlns:ma14="http://schemas.microsoft.com/office/mac/drawingml/2011/main" val="1"/>
+              <ma14:wrappingTextBoxFlag xmlns:ma14="http://schemas.microsoft.com/office/mac/drawingml/2011/main" xmlns:a14="http://schemas.microsoft.com/office/drawing/2010/main" xmlns:m="http://schemas.openxmlformats.org/officeDocument/2006/math" xmlns="" val="1"/>
             </a:ext>
           </a:extLst>
         </p:spPr>
@@ -14996,7 +15007,6 @@
             </a:lvl1pPr>
           </a:lstStyle>
           <a:p>
-            <a:pPr/>
             <a:r>
               <a:t>scikit-learn precision, recall, F1, and PR-curve documentation</a:t>
             </a:r>
@@ -15030,7 +15040,7 @@
           <a:bodyPr lIns="45719" rIns="45719"/>
           <a:lstStyle/>
           <a:p>
-            <a:pPr/>
+            <a:endParaRPr/>
           </a:p>
         </p:txBody>
       </p:sp>
@@ -15053,7 +15063,7 @@
           </a:ln>
           <a:extLst>
             <a:ext uri="{C572A759-6A51-4108-AA02-DFA0A04FC94B}">
-              <ma14:wrappingTextBoxFlag xmlns:ma14="http://schemas.microsoft.com/office/mac/drawingml/2011/main" val="1"/>
+              <ma14:wrappingTextBoxFlag xmlns:ma14="http://schemas.microsoft.com/office/mac/drawingml/2011/main" xmlns:a14="http://schemas.microsoft.com/office/drawing/2010/main" xmlns:m="http://schemas.openxmlformats.org/officeDocument/2006/math" xmlns="" val="1"/>
             </a:ext>
           </a:extLst>
         </p:spPr>
@@ -15063,7 +15073,7 @@
           </a:bodyPr>
           <a:lstStyle>
             <a:lvl1pPr algn="ctr">
-              <a:defRPr b="1" sz="1200">
+              <a:defRPr sz="1200" b="1">
                 <a:solidFill>
                   <a:srgbClr val="2ECC8F"/>
                 </a:solidFill>
@@ -15075,7 +15085,6 @@
             </a:lvl1pPr>
           </a:lstStyle>
           <a:p>
-            <a:pPr/>
             <a:r>
               <a:t>Questions?</a:t>
             </a:r>
@@ -15106,7 +15115,7 @@
           <a:bodyPr lIns="45719" rIns="45719"/>
           <a:lstStyle/>
           <a:p>
-            <a:pPr/>
+            <a:endParaRPr/>
           </a:p>
         </p:txBody>
       </p:sp>
@@ -15129,7 +15138,7 @@
           </a:ln>
           <a:extLst>
             <a:ext uri="{C572A759-6A51-4108-AA02-DFA0A04FC94B}">
-              <ma14:wrappingTextBoxFlag xmlns:ma14="http://schemas.microsoft.com/office/mac/drawingml/2011/main" val="1"/>
+              <ma14:wrappingTextBoxFlag xmlns:ma14="http://schemas.microsoft.com/office/mac/drawingml/2011/main" xmlns:a14="http://schemas.microsoft.com/office/drawing/2010/main" xmlns:m="http://schemas.openxmlformats.org/officeDocument/2006/math" xmlns="" val="1"/>
             </a:ext>
           </a:extLst>
         </p:spPr>
@@ -15151,7 +15160,6 @@
             </a:lvl1pPr>
           </a:lstStyle>
           <a:p>
-            <a:pPr/>
             <a:r>
               <a:t>Safe Login</a:t>
             </a:r>
@@ -15177,7 +15185,7 @@
           </a:ln>
           <a:extLst>
             <a:ext uri="{C572A759-6A51-4108-AA02-DFA0A04FC94B}">
-              <ma14:wrappingTextBoxFlag xmlns:ma14="http://schemas.microsoft.com/office/mac/drawingml/2011/main" val="1"/>
+              <ma14:wrappingTextBoxFlag xmlns:ma14="http://schemas.microsoft.com/office/mac/drawingml/2011/main" xmlns:a14="http://schemas.microsoft.com/office/drawing/2010/main" xmlns:m="http://schemas.openxmlformats.org/officeDocument/2006/math" xmlns="" val="1"/>
             </a:ext>
           </a:extLst>
         </p:spPr>
@@ -15199,7 +15207,6 @@
             </a:lvl1pPr>
           </a:lstStyle>
           <a:p>
-            <a:pPr/>
             <a:r>
               <a:t>Programming Project</a:t>
             </a:r>
@@ -15225,7 +15232,7 @@
           </a:ln>
           <a:extLst>
             <a:ext uri="{C572A759-6A51-4108-AA02-DFA0A04FC94B}">
-              <ma14:wrappingTextBoxFlag xmlns:ma14="http://schemas.microsoft.com/office/mac/drawingml/2011/main" val="1"/>
+              <ma14:wrappingTextBoxFlag xmlns:ma14="http://schemas.microsoft.com/office/mac/drawingml/2011/main" xmlns:a14="http://schemas.microsoft.com/office/drawing/2010/main" xmlns:m="http://schemas.openxmlformats.org/officeDocument/2006/math" xmlns="" val="1"/>
             </a:ext>
           </a:extLst>
         </p:spPr>
@@ -15247,7 +15254,6 @@
             </a:lvl1pPr>
           </a:lstStyle>
           <a:p>
-            <a:pPr/>
             <a:r>
               <a:t>9</a:t>
             </a:r>
@@ -15259,12 +15265,12 @@
   <p:clrMapOvr>
     <a:masterClrMapping/>
   </p:clrMapOvr>
-  <p:transition xmlns:p14="http://schemas.microsoft.com/office/powerpoint/2010/main" spd="med" advClick="1"/>
+  <p:transition spd="med"/>
 </p:sld>
 </file>
 
 <file path=ppt/theme/theme1.xml><?xml version="1.0" encoding="utf-8"?>
-<a:theme xmlns:a="http://schemas.openxmlformats.org/drawingml/2006/main" xmlns:r="http://schemas.openxmlformats.org/officeDocument/2006/relationships" name="Office Theme">
+<a:theme xmlns:a="http://schemas.openxmlformats.org/drawingml/2006/main" name="Office Theme">
   <a:themeElements>
     <a:clrScheme name="Office Theme">
       <a:dk1>
@@ -15466,7 +15472,7 @@
         <a:effectLst/>
         <a:sp3d/>
       </a:spPr>
-      <a:bodyPr rot="0" spcFirstLastPara="1" vertOverflow="overflow" horzOverflow="overflow" vert="horz" wrap="square" lIns="45719" tIns="45719" rIns="45719" bIns="45719" numCol="1" spcCol="38100" rtlCol="0" anchor="ctr" upright="0">
+      <a:bodyPr rot="0" spcFirstLastPara="1" vertOverflow="overflow" horzOverflow="overflow" vert="horz" wrap="square" lIns="45719" tIns="45719" rIns="45719" bIns="45719" numCol="1" spcCol="38100" rtlCol="0" anchor="ctr">
         <a:spAutoFit/>
       </a:bodyPr>
       <a:lstStyle>
@@ -15485,7 +15491,7 @@
           <a:buFontTx/>
           <a:buNone/>
           <a:tabLst/>
-          <a:defRPr b="0" baseline="0" cap="none" i="0" spc="0" strike="noStrike" sz="1800" u="none" kumimoji="0" normalizeH="0">
+          <a:defRPr kumimoji="0" sz="1800" b="0" i="0" u="none" strike="noStrike" cap="none" spc="0" normalizeH="0" baseline="0">
             <a:ln>
               <a:noFill/>
             </a:ln>
@@ -15515,7 +15521,7 @@
           <a:buFontTx/>
           <a:buNone/>
           <a:tabLst/>
-          <a:defRPr b="0" baseline="0" cap="none" i="0" spc="0" strike="noStrike" sz="1800" u="none" kumimoji="0" normalizeH="0">
+          <a:defRPr kumimoji="0" sz="1800" b="0" i="0" u="none" strike="noStrike" cap="none" spc="0" normalizeH="0" baseline="0">
             <a:ln>
               <a:noFill/>
             </a:ln>
@@ -15541,7 +15547,7 @@
           <a:buFontTx/>
           <a:buNone/>
           <a:tabLst/>
-          <a:defRPr b="0" baseline="0" cap="none" i="0" spc="0" strike="noStrike" sz="1800" u="none" kumimoji="0" normalizeH="0">
+          <a:defRPr kumimoji="0" sz="1800" b="0" i="0" u="none" strike="noStrike" cap="none" spc="0" normalizeH="0" baseline="0">
             <a:ln>
               <a:noFill/>
             </a:ln>
@@ -15567,7 +15573,7 @@
           <a:buFontTx/>
           <a:buNone/>
           <a:tabLst/>
-          <a:defRPr b="0" baseline="0" cap="none" i="0" spc="0" strike="noStrike" sz="1800" u="none" kumimoji="0" normalizeH="0">
+          <a:defRPr kumimoji="0" sz="1800" b="0" i="0" u="none" strike="noStrike" cap="none" spc="0" normalizeH="0" baseline="0">
             <a:ln>
               <a:noFill/>
             </a:ln>
@@ -15593,7 +15599,7 @@
           <a:buFontTx/>
           <a:buNone/>
           <a:tabLst/>
-          <a:defRPr b="0" baseline="0" cap="none" i="0" spc="0" strike="noStrike" sz="1800" u="none" kumimoji="0" normalizeH="0">
+          <a:defRPr kumimoji="0" sz="1800" b="0" i="0" u="none" strike="noStrike" cap="none" spc="0" normalizeH="0" baseline="0">
             <a:ln>
               <a:noFill/>
             </a:ln>
@@ -15619,7 +15625,7 @@
           <a:buFontTx/>
           <a:buNone/>
           <a:tabLst/>
-          <a:defRPr b="0" baseline="0" cap="none" i="0" spc="0" strike="noStrike" sz="1800" u="none" kumimoji="0" normalizeH="0">
+          <a:defRPr kumimoji="0" sz="1800" b="0" i="0" u="none" strike="noStrike" cap="none" spc="0" normalizeH="0" baseline="0">
             <a:ln>
               <a:noFill/>
             </a:ln>
@@ -15645,7 +15651,7 @@
           <a:buFontTx/>
           <a:buNone/>
           <a:tabLst/>
-          <a:defRPr b="0" baseline="0" cap="none" i="0" spc="0" strike="noStrike" sz="1800" u="none" kumimoji="0" normalizeH="0">
+          <a:defRPr kumimoji="0" sz="1800" b="0" i="0" u="none" strike="noStrike" cap="none" spc="0" normalizeH="0" baseline="0">
             <a:ln>
               <a:noFill/>
             </a:ln>
@@ -15671,7 +15677,7 @@
           <a:buFontTx/>
           <a:buNone/>
           <a:tabLst/>
-          <a:defRPr b="0" baseline="0" cap="none" i="0" spc="0" strike="noStrike" sz="1800" u="none" kumimoji="0" normalizeH="0">
+          <a:defRPr kumimoji="0" sz="1800" b="0" i="0" u="none" strike="noStrike" cap="none" spc="0" normalizeH="0" baseline="0">
             <a:ln>
               <a:noFill/>
             </a:ln>
@@ -15697,7 +15703,7 @@
           <a:buFontTx/>
           <a:buNone/>
           <a:tabLst/>
-          <a:defRPr b="0" baseline="0" cap="none" i="0" spc="0" strike="noStrike" sz="1800" u="none" kumimoji="0" normalizeH="0">
+          <a:defRPr kumimoji="0" sz="1800" b="0" i="0" u="none" strike="noStrike" cap="none" spc="0" normalizeH="0" baseline="0">
             <a:ln>
               <a:noFill/>
             </a:ln>
@@ -15723,7 +15729,7 @@
           <a:buFontTx/>
           <a:buNone/>
           <a:tabLst/>
-          <a:defRPr b="0" baseline="0" cap="none" i="0" spc="0" strike="noStrike" sz="1800" u="none" kumimoji="0" normalizeH="0">
+          <a:defRPr kumimoji="0" sz="1800" b="0" i="0" u="none" strike="noStrike" cap="none" spc="0" normalizeH="0" baseline="0">
             <a:ln>
               <a:noFill/>
             </a:ln>
@@ -15736,9 +15742,15 @@
         </a:lvl9pPr>
       </a:lstStyle>
       <a:style>
-        <a:lnRef idx="0"/>
-        <a:fillRef idx="0"/>
-        <a:effectRef idx="0"/>
+        <a:lnRef idx="0">
+          <a:scrgbClr r="0" g="0" b="0"/>
+        </a:lnRef>
+        <a:fillRef idx="0">
+          <a:scrgbClr r="0" g="0" b="0"/>
+        </a:fillRef>
+        <a:effectRef idx="0">
+          <a:scrgbClr r="0" g="0" b="0"/>
+        </a:effectRef>
         <a:fontRef idx="none"/>
       </a:style>
     </a:spDef>
@@ -15755,7 +15767,7 @@
         <a:effectLst/>
         <a:sp3d/>
       </a:spPr>
-      <a:bodyPr rot="0" spcFirstLastPara="1" vertOverflow="overflow" horzOverflow="overflow" vert="horz" wrap="square" lIns="91439" tIns="45719" rIns="91439" bIns="45719" numCol="1" spcCol="38100" rtlCol="0" anchor="t" upright="0">
+      <a:bodyPr rot="0" spcFirstLastPara="1" vertOverflow="overflow" horzOverflow="overflow" vert="horz" wrap="square" lIns="91439" tIns="45719" rIns="91439" bIns="45719" numCol="1" spcCol="38100" rtlCol="0" anchor="t">
         <a:noAutofit/>
       </a:bodyPr>
       <a:lstStyle>
@@ -15774,7 +15786,7 @@
           <a:buFontTx/>
           <a:buNone/>
           <a:tabLst/>
-          <a:defRPr b="0" baseline="0" cap="none" i="0" spc="0" strike="noStrike" sz="1800" u="none" kumimoji="0" normalizeH="0">
+          <a:defRPr kumimoji="0" sz="1800" b="0" i="0" u="none" strike="noStrike" cap="none" spc="0" normalizeH="0" baseline="0">
             <a:ln>
               <a:noFill/>
             </a:ln>
@@ -15800,7 +15812,7 @@
           <a:buFontTx/>
           <a:buNone/>
           <a:tabLst/>
-          <a:defRPr b="0" baseline="0" cap="none" i="0" spc="0" strike="noStrike" sz="1800" u="none" kumimoji="0" normalizeH="0">
+          <a:defRPr kumimoji="0" sz="1800" b="0" i="0" u="none" strike="noStrike" cap="none" spc="0" normalizeH="0" baseline="0">
             <a:ln>
               <a:noFill/>
             </a:ln>
@@ -15826,7 +15838,7 @@
           <a:buFontTx/>
           <a:buNone/>
           <a:tabLst/>
-          <a:defRPr b="0" baseline="0" cap="none" i="0" spc="0" strike="noStrike" sz="1800" u="none" kumimoji="0" normalizeH="0">
+          <a:defRPr kumimoji="0" sz="1800" b="0" i="0" u="none" strike="noStrike" cap="none" spc="0" normalizeH="0" baseline="0">
             <a:ln>
               <a:noFill/>
             </a:ln>
@@ -15852,7 +15864,7 @@
           <a:buFontTx/>
           <a:buNone/>
           <a:tabLst/>
-          <a:defRPr b="0" baseline="0" cap="none" i="0" spc="0" strike="noStrike" sz="1800" u="none" kumimoji="0" normalizeH="0">
+          <a:defRPr kumimoji="0" sz="1800" b="0" i="0" u="none" strike="noStrike" cap="none" spc="0" normalizeH="0" baseline="0">
             <a:ln>
               <a:noFill/>
             </a:ln>
@@ -15878,7 +15890,7 @@
           <a:buFontTx/>
           <a:buNone/>
           <a:tabLst/>
-          <a:defRPr b="0" baseline="0" cap="none" i="0" spc="0" strike="noStrike" sz="1800" u="none" kumimoji="0" normalizeH="0">
+          <a:defRPr kumimoji="0" sz="1800" b="0" i="0" u="none" strike="noStrike" cap="none" spc="0" normalizeH="0" baseline="0">
             <a:ln>
               <a:noFill/>
             </a:ln>
@@ -15904,7 +15916,7 @@
           <a:buFontTx/>
           <a:buNone/>
           <a:tabLst/>
-          <a:defRPr b="0" baseline="0" cap="none" i="0" spc="0" strike="noStrike" sz="1800" u="none" kumimoji="0" normalizeH="0">
+          <a:defRPr kumimoji="0" sz="1800" b="0" i="0" u="none" strike="noStrike" cap="none" spc="0" normalizeH="0" baseline="0">
             <a:ln>
               <a:noFill/>
             </a:ln>
@@ -15930,7 +15942,7 @@
           <a:buFontTx/>
           <a:buNone/>
           <a:tabLst/>
-          <a:defRPr b="0" baseline="0" cap="none" i="0" spc="0" strike="noStrike" sz="1800" u="none" kumimoji="0" normalizeH="0">
+          <a:defRPr kumimoji="0" sz="1800" b="0" i="0" u="none" strike="noStrike" cap="none" spc="0" normalizeH="0" baseline="0">
             <a:ln>
               <a:noFill/>
             </a:ln>
@@ -15956,7 +15968,7 @@
           <a:buFontTx/>
           <a:buNone/>
           <a:tabLst/>
-          <a:defRPr b="0" baseline="0" cap="none" i="0" spc="0" strike="noStrike" sz="1800" u="none" kumimoji="0" normalizeH="0">
+          <a:defRPr kumimoji="0" sz="1800" b="0" i="0" u="none" strike="noStrike" cap="none" spc="0" normalizeH="0" baseline="0">
             <a:ln>
               <a:noFill/>
             </a:ln>
@@ -15982,7 +15994,7 @@
           <a:buFontTx/>
           <a:buNone/>
           <a:tabLst/>
-          <a:defRPr b="0" baseline="0" cap="none" i="0" spc="0" strike="noStrike" sz="1800" u="none" kumimoji="0" normalizeH="0">
+          <a:defRPr kumimoji="0" sz="1800" b="0" i="0" u="none" strike="noStrike" cap="none" spc="0" normalizeH="0" baseline="0">
             <a:ln>
               <a:noFill/>
             </a:ln>
@@ -16008,7 +16020,7 @@
           <a:buFontTx/>
           <a:buNone/>
           <a:tabLst/>
-          <a:defRPr b="0" baseline="0" cap="none" i="0" spc="0" strike="noStrike" sz="1800" u="none" kumimoji="0" normalizeH="0">
+          <a:defRPr kumimoji="0" sz="1800" b="0" i="0" u="none" strike="noStrike" cap="none" spc="0" normalizeH="0" baseline="0">
             <a:ln>
               <a:noFill/>
             </a:ln>
@@ -16021,9 +16033,15 @@
         </a:lvl9pPr>
       </a:lstStyle>
       <a:style>
-        <a:lnRef idx="0"/>
-        <a:fillRef idx="0"/>
-        <a:effectRef idx="0"/>
+        <a:lnRef idx="0">
+          <a:scrgbClr r="0" g="0" b="0"/>
+        </a:lnRef>
+        <a:fillRef idx="0">
+          <a:scrgbClr r="0" g="0" b="0"/>
+        </a:fillRef>
+        <a:effectRef idx="0">
+          <a:scrgbClr r="0" g="0" b="0"/>
+        </a:effectRef>
         <a:fontRef idx="none"/>
       </a:style>
     </a:lnDef>
@@ -16037,7 +16055,7 @@
         <a:effectLst/>
         <a:sp3d/>
       </a:spPr>
-      <a:bodyPr rot="0" spcFirstLastPara="1" vertOverflow="overflow" horzOverflow="overflow" vert="horz" wrap="square" lIns="45719" tIns="45719" rIns="45719" bIns="45719" numCol="1" spcCol="38100" rtlCol="0" anchor="t" upright="0">
+      <a:bodyPr rot="0" spcFirstLastPara="1" vertOverflow="overflow" horzOverflow="overflow" vert="horz" wrap="square" lIns="45719" tIns="45719" rIns="45719" bIns="45719" numCol="1" spcCol="38100" rtlCol="0" anchor="t">
         <a:spAutoFit/>
       </a:bodyPr>
       <a:lstStyle>
@@ -16056,7 +16074,7 @@
           <a:buFontTx/>
           <a:buNone/>
           <a:tabLst/>
-          <a:defRPr b="0" baseline="0" cap="none" i="0" spc="0" strike="noStrike" sz="1800" u="none" kumimoji="0" normalizeH="0">
+          <a:defRPr kumimoji="0" sz="1800" b="0" i="0" u="none" strike="noStrike" cap="none" spc="0" normalizeH="0" baseline="0">
             <a:ln>
               <a:noFill/>
             </a:ln>
@@ -16086,7 +16104,7 @@
           <a:buFontTx/>
           <a:buNone/>
           <a:tabLst/>
-          <a:defRPr b="0" baseline="0" cap="none" i="0" spc="0" strike="noStrike" sz="1800" u="none" kumimoji="0" normalizeH="0">
+          <a:defRPr kumimoji="0" sz="1800" b="0" i="0" u="none" strike="noStrike" cap="none" spc="0" normalizeH="0" baseline="0">
             <a:ln>
               <a:noFill/>
             </a:ln>
@@ -16112,7 +16130,7 @@
           <a:buFontTx/>
           <a:buNone/>
           <a:tabLst/>
-          <a:defRPr b="0" baseline="0" cap="none" i="0" spc="0" strike="noStrike" sz="1800" u="none" kumimoji="0" normalizeH="0">
+          <a:defRPr kumimoji="0" sz="1800" b="0" i="0" u="none" strike="noStrike" cap="none" spc="0" normalizeH="0" baseline="0">
             <a:ln>
               <a:noFill/>
             </a:ln>
@@ -16138,7 +16156,7 @@
           <a:buFontTx/>
           <a:buNone/>
           <a:tabLst/>
-          <a:defRPr b="0" baseline="0" cap="none" i="0" spc="0" strike="noStrike" sz="1800" u="none" kumimoji="0" normalizeH="0">
+          <a:defRPr kumimoji="0" sz="1800" b="0" i="0" u="none" strike="noStrike" cap="none" spc="0" normalizeH="0" baseline="0">
             <a:ln>
               <a:noFill/>
             </a:ln>
@@ -16164,7 +16182,7 @@
           <a:buFontTx/>
           <a:buNone/>
           <a:tabLst/>
-          <a:defRPr b="0" baseline="0" cap="none" i="0" spc="0" strike="noStrike" sz="1800" u="none" kumimoji="0" normalizeH="0">
+          <a:defRPr kumimoji="0" sz="1800" b="0" i="0" u="none" strike="noStrike" cap="none" spc="0" normalizeH="0" baseline="0">
             <a:ln>
               <a:noFill/>
             </a:ln>
@@ -16190,7 +16208,7 @@
           <a:buFontTx/>
           <a:buNone/>
           <a:tabLst/>
-          <a:defRPr b="0" baseline="0" cap="none" i="0" spc="0" strike="noStrike" sz="1800" u="none" kumimoji="0" normalizeH="0">
+          <a:defRPr kumimoji="0" sz="1800" b="0" i="0" u="none" strike="noStrike" cap="none" spc="0" normalizeH="0" baseline="0">
             <a:ln>
               <a:noFill/>
             </a:ln>
@@ -16216,7 +16234,7 @@
           <a:buFontTx/>
           <a:buNone/>
           <a:tabLst/>
-          <a:defRPr b="0" baseline="0" cap="none" i="0" spc="0" strike="noStrike" sz="1800" u="none" kumimoji="0" normalizeH="0">
+          <a:defRPr kumimoji="0" sz="1800" b="0" i="0" u="none" strike="noStrike" cap="none" spc="0" normalizeH="0" baseline="0">
             <a:ln>
               <a:noFill/>
             </a:ln>
@@ -16242,7 +16260,7 @@
           <a:buFontTx/>
           <a:buNone/>
           <a:tabLst/>
-          <a:defRPr b="0" baseline="0" cap="none" i="0" spc="0" strike="noStrike" sz="1800" u="none" kumimoji="0" normalizeH="0">
+          <a:defRPr kumimoji="0" sz="1800" b="0" i="0" u="none" strike="noStrike" cap="none" spc="0" normalizeH="0" baseline="0">
             <a:ln>
               <a:noFill/>
             </a:ln>
@@ -16268,7 +16286,7 @@
           <a:buFontTx/>
           <a:buNone/>
           <a:tabLst/>
-          <a:defRPr b="0" baseline="0" cap="none" i="0" spc="0" strike="noStrike" sz="1800" u="none" kumimoji="0" normalizeH="0">
+          <a:defRPr kumimoji="0" sz="1800" b="0" i="0" u="none" strike="noStrike" cap="none" spc="0" normalizeH="0" baseline="0">
             <a:ln>
               <a:noFill/>
             </a:ln>
@@ -16294,7 +16312,7 @@
           <a:buFontTx/>
           <a:buNone/>
           <a:tabLst/>
-          <a:defRPr b="0" baseline="0" cap="none" i="0" spc="0" strike="noStrike" sz="1800" u="none" kumimoji="0" normalizeH="0">
+          <a:defRPr kumimoji="0" sz="1800" b="0" i="0" u="none" strike="noStrike" cap="none" spc="0" normalizeH="0" baseline="0">
             <a:ln>
               <a:noFill/>
             </a:ln>
@@ -16307,18 +16325,25 @@
         </a:lvl9pPr>
       </a:lstStyle>
       <a:style>
-        <a:lnRef idx="0"/>
-        <a:fillRef idx="0"/>
-        <a:effectRef idx="0"/>
+        <a:lnRef idx="0">
+          <a:scrgbClr r="0" g="0" b="0"/>
+        </a:lnRef>
+        <a:fillRef idx="0">
+          <a:scrgbClr r="0" g="0" b="0"/>
+        </a:fillRef>
+        <a:effectRef idx="0">
+          <a:scrgbClr r="0" g="0" b="0"/>
+        </a:effectRef>
         <a:fontRef idx="none"/>
       </a:style>
     </a:txDef>
   </a:objectDefaults>
+  <a:extraClrSchemeLst/>
 </a:theme>
 </file>
 
 <file path=ppt/theme/theme2.xml><?xml version="1.0" encoding="utf-8"?>
-<a:theme xmlns:a="http://schemas.openxmlformats.org/drawingml/2006/main" xmlns:r="http://schemas.openxmlformats.org/officeDocument/2006/relationships" name="Office Theme">
+<a:theme xmlns:a="http://schemas.openxmlformats.org/drawingml/2006/main" name="Office Theme">
   <a:themeElements>
     <a:clrScheme name="Office Theme">
       <a:dk1>
@@ -16520,7 +16545,7 @@
         <a:effectLst/>
         <a:sp3d/>
       </a:spPr>
-      <a:bodyPr rot="0" spcFirstLastPara="1" vertOverflow="overflow" horzOverflow="overflow" vert="horz" wrap="square" lIns="45719" tIns="45719" rIns="45719" bIns="45719" numCol="1" spcCol="38100" rtlCol="0" anchor="ctr" upright="0">
+      <a:bodyPr rot="0" spcFirstLastPara="1" vertOverflow="overflow" horzOverflow="overflow" vert="horz" wrap="square" lIns="45719" tIns="45719" rIns="45719" bIns="45719" numCol="1" spcCol="38100" rtlCol="0" anchor="ctr">
         <a:spAutoFit/>
       </a:bodyPr>
       <a:lstStyle>
@@ -16539,7 +16564,7 @@
           <a:buFontTx/>
           <a:buNone/>
           <a:tabLst/>
-          <a:defRPr b="0" baseline="0" cap="none" i="0" spc="0" strike="noStrike" sz="1800" u="none" kumimoji="0" normalizeH="0">
+          <a:defRPr kumimoji="0" sz="1800" b="0" i="0" u="none" strike="noStrike" cap="none" spc="0" normalizeH="0" baseline="0">
             <a:ln>
               <a:noFill/>
             </a:ln>
@@ -16569,7 +16594,7 @@
           <a:buFontTx/>
           <a:buNone/>
           <a:tabLst/>
-          <a:defRPr b="0" baseline="0" cap="none" i="0" spc="0" strike="noStrike" sz="1800" u="none" kumimoji="0" normalizeH="0">
+          <a:defRPr kumimoji="0" sz="1800" b="0" i="0" u="none" strike="noStrike" cap="none" spc="0" normalizeH="0" baseline="0">
             <a:ln>
               <a:noFill/>
             </a:ln>
@@ -16595,7 +16620,7 @@
           <a:buFontTx/>
           <a:buNone/>
           <a:tabLst/>
-          <a:defRPr b="0" baseline="0" cap="none" i="0" spc="0" strike="noStrike" sz="1800" u="none" kumimoji="0" normalizeH="0">
+          <a:defRPr kumimoji="0" sz="1800" b="0" i="0" u="none" strike="noStrike" cap="none" spc="0" normalizeH="0" baseline="0">
             <a:ln>
               <a:noFill/>
             </a:ln>
@@ -16621,7 +16646,7 @@
           <a:buFontTx/>
           <a:buNone/>
           <a:tabLst/>
-          <a:defRPr b="0" baseline="0" cap="none" i="0" spc="0" strike="noStrike" sz="1800" u="none" kumimoji="0" normalizeH="0">
+          <a:defRPr kumimoji="0" sz="1800" b="0" i="0" u="none" strike="noStrike" cap="none" spc="0" normalizeH="0" baseline="0">
             <a:ln>
               <a:noFill/>
             </a:ln>
@@ -16647,7 +16672,7 @@
           <a:buFontTx/>
           <a:buNone/>
           <a:tabLst/>
-          <a:defRPr b="0" baseline="0" cap="none" i="0" spc="0" strike="noStrike" sz="1800" u="none" kumimoji="0" normalizeH="0">
+          <a:defRPr kumimoji="0" sz="1800" b="0" i="0" u="none" strike="noStrike" cap="none" spc="0" normalizeH="0" baseline="0">
             <a:ln>
               <a:noFill/>
             </a:ln>
@@ -16673,7 +16698,7 @@
           <a:buFontTx/>
           <a:buNone/>
           <a:tabLst/>
-          <a:defRPr b="0" baseline="0" cap="none" i="0" spc="0" strike="noStrike" sz="1800" u="none" kumimoji="0" normalizeH="0">
+          <a:defRPr kumimoji="0" sz="1800" b="0" i="0" u="none" strike="noStrike" cap="none" spc="0" normalizeH="0" baseline="0">
             <a:ln>
               <a:noFill/>
             </a:ln>
@@ -16699,7 +16724,7 @@
           <a:buFontTx/>
           <a:buNone/>
           <a:tabLst/>
-          <a:defRPr b="0" baseline="0" cap="none" i="0" spc="0" strike="noStrike" sz="1800" u="none" kumimoji="0" normalizeH="0">
+          <a:defRPr kumimoji="0" sz="1800" b="0" i="0" u="none" strike="noStrike" cap="none" spc="0" normalizeH="0" baseline="0">
             <a:ln>
               <a:noFill/>
             </a:ln>
@@ -16725,7 +16750,7 @@
           <a:buFontTx/>
           <a:buNone/>
           <a:tabLst/>
-          <a:defRPr b="0" baseline="0" cap="none" i="0" spc="0" strike="noStrike" sz="1800" u="none" kumimoji="0" normalizeH="0">
+          <a:defRPr kumimoji="0" sz="1800" b="0" i="0" u="none" strike="noStrike" cap="none" spc="0" normalizeH="0" baseline="0">
             <a:ln>
               <a:noFill/>
             </a:ln>
@@ -16751,7 +16776,7 @@
           <a:buFontTx/>
           <a:buNone/>
           <a:tabLst/>
-          <a:defRPr b="0" baseline="0" cap="none" i="0" spc="0" strike="noStrike" sz="1800" u="none" kumimoji="0" normalizeH="0">
+          <a:defRPr kumimoji="0" sz="1800" b="0" i="0" u="none" strike="noStrike" cap="none" spc="0" normalizeH="0" baseline="0">
             <a:ln>
               <a:noFill/>
             </a:ln>
@@ -16777,7 +16802,7 @@
           <a:buFontTx/>
           <a:buNone/>
           <a:tabLst/>
-          <a:defRPr b="0" baseline="0" cap="none" i="0" spc="0" strike="noStrike" sz="1800" u="none" kumimoji="0" normalizeH="0">
+          <a:defRPr kumimoji="0" sz="1800" b="0" i="0" u="none" strike="noStrike" cap="none" spc="0" normalizeH="0" baseline="0">
             <a:ln>
               <a:noFill/>
             </a:ln>
@@ -16790,9 +16815,15 @@
         </a:lvl9pPr>
       </a:lstStyle>
       <a:style>
-        <a:lnRef idx="0"/>
-        <a:fillRef idx="0"/>
-        <a:effectRef idx="0"/>
+        <a:lnRef idx="0">
+          <a:scrgbClr r="0" g="0" b="0"/>
+        </a:lnRef>
+        <a:fillRef idx="0">
+          <a:scrgbClr r="0" g="0" b="0"/>
+        </a:fillRef>
+        <a:effectRef idx="0">
+          <a:scrgbClr r="0" g="0" b="0"/>
+        </a:effectRef>
         <a:fontRef idx="none"/>
       </a:style>
     </a:spDef>
@@ -16809,7 +16840,7 @@
         <a:effectLst/>
         <a:sp3d/>
       </a:spPr>
-      <a:bodyPr rot="0" spcFirstLastPara="1" vertOverflow="overflow" horzOverflow="overflow" vert="horz" wrap="square" lIns="91439" tIns="45719" rIns="91439" bIns="45719" numCol="1" spcCol="38100" rtlCol="0" anchor="t" upright="0">
+      <a:bodyPr rot="0" spcFirstLastPara="1" vertOverflow="overflow" horzOverflow="overflow" vert="horz" wrap="square" lIns="91439" tIns="45719" rIns="91439" bIns="45719" numCol="1" spcCol="38100" rtlCol="0" anchor="t">
         <a:noAutofit/>
       </a:bodyPr>
       <a:lstStyle>
@@ -16828,7 +16859,7 @@
           <a:buFontTx/>
           <a:buNone/>
           <a:tabLst/>
-          <a:defRPr b="0" baseline="0" cap="none" i="0" spc="0" strike="noStrike" sz="1800" u="none" kumimoji="0" normalizeH="0">
+          <a:defRPr kumimoji="0" sz="1800" b="0" i="0" u="none" strike="noStrike" cap="none" spc="0" normalizeH="0" baseline="0">
             <a:ln>
               <a:noFill/>
             </a:ln>
@@ -16854,7 +16885,7 @@
           <a:buFontTx/>
           <a:buNone/>
           <a:tabLst/>
-          <a:defRPr b="0" baseline="0" cap="none" i="0" spc="0" strike="noStrike" sz="1800" u="none" kumimoji="0" normalizeH="0">
+          <a:defRPr kumimoji="0" sz="1800" b="0" i="0" u="none" strike="noStrike" cap="none" spc="0" normalizeH="0" baseline="0">
             <a:ln>
               <a:noFill/>
             </a:ln>
@@ -16880,7 +16911,7 @@
           <a:buFontTx/>
           <a:buNone/>
           <a:tabLst/>
-          <a:defRPr b="0" baseline="0" cap="none" i="0" spc="0" strike="noStrike" sz="1800" u="none" kumimoji="0" normalizeH="0">
+          <a:defRPr kumimoji="0" sz="1800" b="0" i="0" u="none" strike="noStrike" cap="none" spc="0" normalizeH="0" baseline="0">
             <a:ln>
               <a:noFill/>
             </a:ln>
@@ -16906,7 +16937,7 @@
           <a:buFontTx/>
           <a:buNone/>
           <a:tabLst/>
-          <a:defRPr b="0" baseline="0" cap="none" i="0" spc="0" strike="noStrike" sz="1800" u="none" kumimoji="0" normalizeH="0">
+          <a:defRPr kumimoji="0" sz="1800" b="0" i="0" u="none" strike="noStrike" cap="none" spc="0" normalizeH="0" baseline="0">
             <a:ln>
               <a:noFill/>
             </a:ln>
@@ -16932,7 +16963,7 @@
           <a:buFontTx/>
           <a:buNone/>
           <a:tabLst/>
-          <a:defRPr b="0" baseline="0" cap="none" i="0" spc="0" strike="noStrike" sz="1800" u="none" kumimoji="0" normalizeH="0">
+          <a:defRPr kumimoji="0" sz="1800" b="0" i="0" u="none" strike="noStrike" cap="none" spc="0" normalizeH="0" baseline="0">
             <a:ln>
               <a:noFill/>
             </a:ln>
@@ -16958,7 +16989,7 @@
           <a:buFontTx/>
           <a:buNone/>
           <a:tabLst/>
-          <a:defRPr b="0" baseline="0" cap="none" i="0" spc="0" strike="noStrike" sz="1800" u="none" kumimoji="0" normalizeH="0">
+          <a:defRPr kumimoji="0" sz="1800" b="0" i="0" u="none" strike="noStrike" cap="none" spc="0" normalizeH="0" baseline="0">
             <a:ln>
               <a:noFill/>
             </a:ln>
@@ -16984,7 +17015,7 @@
           <a:buFontTx/>
           <a:buNone/>
           <a:tabLst/>
-          <a:defRPr b="0" baseline="0" cap="none" i="0" spc="0" strike="noStrike" sz="1800" u="none" kumimoji="0" normalizeH="0">
+          <a:defRPr kumimoji="0" sz="1800" b="0" i="0" u="none" strike="noStrike" cap="none" spc="0" normalizeH="0" baseline="0">
             <a:ln>
               <a:noFill/>
             </a:ln>
@@ -17010,7 +17041,7 @@
           <a:buFontTx/>
           <a:buNone/>
           <a:tabLst/>
-          <a:defRPr b="0" baseline="0" cap="none" i="0" spc="0" strike="noStrike" sz="1800" u="none" kumimoji="0" normalizeH="0">
+          <a:defRPr kumimoji="0" sz="1800" b="0" i="0" u="none" strike="noStrike" cap="none" spc="0" normalizeH="0" baseline="0">
             <a:ln>
               <a:noFill/>
             </a:ln>
@@ -17036,7 +17067,7 @@
           <a:buFontTx/>
           <a:buNone/>
           <a:tabLst/>
-          <a:defRPr b="0" baseline="0" cap="none" i="0" spc="0" strike="noStrike" sz="1800" u="none" kumimoji="0" normalizeH="0">
+          <a:defRPr kumimoji="0" sz="1800" b="0" i="0" u="none" strike="noStrike" cap="none" spc="0" normalizeH="0" baseline="0">
             <a:ln>
               <a:noFill/>
             </a:ln>
@@ -17062,7 +17093,7 @@
           <a:buFontTx/>
           <a:buNone/>
           <a:tabLst/>
-          <a:defRPr b="0" baseline="0" cap="none" i="0" spc="0" strike="noStrike" sz="1800" u="none" kumimoji="0" normalizeH="0">
+          <a:defRPr kumimoji="0" sz="1800" b="0" i="0" u="none" strike="noStrike" cap="none" spc="0" normalizeH="0" baseline="0">
             <a:ln>
               <a:noFill/>
             </a:ln>
@@ -17075,9 +17106,15 @@
         </a:lvl9pPr>
       </a:lstStyle>
       <a:style>
-        <a:lnRef idx="0"/>
-        <a:fillRef idx="0"/>
-        <a:effectRef idx="0"/>
+        <a:lnRef idx="0">
+          <a:scrgbClr r="0" g="0" b="0"/>
+        </a:lnRef>
+        <a:fillRef idx="0">
+          <a:scrgbClr r="0" g="0" b="0"/>
+        </a:fillRef>
+        <a:effectRef idx="0">
+          <a:scrgbClr r="0" g="0" b="0"/>
+        </a:effectRef>
         <a:fontRef idx="none"/>
       </a:style>
     </a:lnDef>
@@ -17091,7 +17128,7 @@
         <a:effectLst/>
         <a:sp3d/>
       </a:spPr>
-      <a:bodyPr rot="0" spcFirstLastPara="1" vertOverflow="overflow" horzOverflow="overflow" vert="horz" wrap="square" lIns="45719" tIns="45719" rIns="45719" bIns="45719" numCol="1" spcCol="38100" rtlCol="0" anchor="t" upright="0">
+      <a:bodyPr rot="0" spcFirstLastPara="1" vertOverflow="overflow" horzOverflow="overflow" vert="horz" wrap="square" lIns="45719" tIns="45719" rIns="45719" bIns="45719" numCol="1" spcCol="38100" rtlCol="0" anchor="t">
         <a:spAutoFit/>
       </a:bodyPr>
       <a:lstStyle>
@@ -17110,7 +17147,7 @@
           <a:buFontTx/>
           <a:buNone/>
           <a:tabLst/>
-          <a:defRPr b="0" baseline="0" cap="none" i="0" spc="0" strike="noStrike" sz="1800" u="none" kumimoji="0" normalizeH="0">
+          <a:defRPr kumimoji="0" sz="1800" b="0" i="0" u="none" strike="noStrike" cap="none" spc="0" normalizeH="0" baseline="0">
             <a:ln>
               <a:noFill/>
             </a:ln>
@@ -17140,7 +17177,7 @@
           <a:buFontTx/>
           <a:buNone/>
           <a:tabLst/>
-          <a:defRPr b="0" baseline="0" cap="none" i="0" spc="0" strike="noStrike" sz="1800" u="none" kumimoji="0" normalizeH="0">
+          <a:defRPr kumimoji="0" sz="1800" b="0" i="0" u="none" strike="noStrike" cap="none" spc="0" normalizeH="0" baseline="0">
             <a:ln>
               <a:noFill/>
             </a:ln>
@@ -17166,7 +17203,7 @@
           <a:buFontTx/>
           <a:buNone/>
           <a:tabLst/>
-          <a:defRPr b="0" baseline="0" cap="none" i="0" spc="0" strike="noStrike" sz="1800" u="none" kumimoji="0" normalizeH="0">
+          <a:defRPr kumimoji="0" sz="1800" b="0" i="0" u="none" strike="noStrike" cap="none" spc="0" normalizeH="0" baseline="0">
             <a:ln>
               <a:noFill/>
             </a:ln>
@@ -17192,7 +17229,7 @@
           <a:buFontTx/>
           <a:buNone/>
           <a:tabLst/>
-          <a:defRPr b="0" baseline="0" cap="none" i="0" spc="0" strike="noStrike" sz="1800" u="none" kumimoji="0" normalizeH="0">
+          <a:defRPr kumimoji="0" sz="1800" b="0" i="0" u="none" strike="noStrike" cap="none" spc="0" normalizeH="0" baseline="0">
             <a:ln>
               <a:noFill/>
             </a:ln>
@@ -17218,7 +17255,7 @@
           <a:buFontTx/>
           <a:buNone/>
           <a:tabLst/>
-          <a:defRPr b="0" baseline="0" cap="none" i="0" spc="0" strike="noStrike" sz="1800" u="none" kumimoji="0" normalizeH="0">
+          <a:defRPr kumimoji="0" sz="1800" b="0" i="0" u="none" strike="noStrike" cap="none" spc="0" normalizeH="0" baseline="0">
             <a:ln>
               <a:noFill/>
             </a:ln>
@@ -17244,7 +17281,7 @@
           <a:buFontTx/>
           <a:buNone/>
           <a:tabLst/>
-          <a:defRPr b="0" baseline="0" cap="none" i="0" spc="0" strike="noStrike" sz="1800" u="none" kumimoji="0" normalizeH="0">
+          <a:defRPr kumimoji="0" sz="1800" b="0" i="0" u="none" strike="noStrike" cap="none" spc="0" normalizeH="0" baseline="0">
             <a:ln>
               <a:noFill/>
             </a:ln>
@@ -17270,7 +17307,7 @@
           <a:buFontTx/>
           <a:buNone/>
           <a:tabLst/>
-          <a:defRPr b="0" baseline="0" cap="none" i="0" spc="0" strike="noStrike" sz="1800" u="none" kumimoji="0" normalizeH="0">
+          <a:defRPr kumimoji="0" sz="1800" b="0" i="0" u="none" strike="noStrike" cap="none" spc="0" normalizeH="0" baseline="0">
             <a:ln>
               <a:noFill/>
             </a:ln>
@@ -17296,7 +17333,7 @@
           <a:buFontTx/>
           <a:buNone/>
           <a:tabLst/>
-          <a:defRPr b="0" baseline="0" cap="none" i="0" spc="0" strike="noStrike" sz="1800" u="none" kumimoji="0" normalizeH="0">
+          <a:defRPr kumimoji="0" sz="1800" b="0" i="0" u="none" strike="noStrike" cap="none" spc="0" normalizeH="0" baseline="0">
             <a:ln>
               <a:noFill/>
             </a:ln>
@@ -17322,7 +17359,7 @@
           <a:buFontTx/>
           <a:buNone/>
           <a:tabLst/>
-          <a:defRPr b="0" baseline="0" cap="none" i="0" spc="0" strike="noStrike" sz="1800" u="none" kumimoji="0" normalizeH="0">
+          <a:defRPr kumimoji="0" sz="1800" b="0" i="0" u="none" strike="noStrike" cap="none" spc="0" normalizeH="0" baseline="0">
             <a:ln>
               <a:noFill/>
             </a:ln>
@@ -17348,7 +17385,7 @@
           <a:buFontTx/>
           <a:buNone/>
           <a:tabLst/>
-          <a:defRPr b="0" baseline="0" cap="none" i="0" spc="0" strike="noStrike" sz="1800" u="none" kumimoji="0" normalizeH="0">
+          <a:defRPr kumimoji="0" sz="1800" b="0" i="0" u="none" strike="noStrike" cap="none" spc="0" normalizeH="0" baseline="0">
             <a:ln>
               <a:noFill/>
             </a:ln>
@@ -17361,12 +17398,19 @@
         </a:lvl9pPr>
       </a:lstStyle>
       <a:style>
-        <a:lnRef idx="0"/>
-        <a:fillRef idx="0"/>
-        <a:effectRef idx="0"/>
+        <a:lnRef idx="0">
+          <a:scrgbClr r="0" g="0" b="0"/>
+        </a:lnRef>
+        <a:fillRef idx="0">
+          <a:scrgbClr r="0" g="0" b="0"/>
+        </a:fillRef>
+        <a:effectRef idx="0">
+          <a:scrgbClr r="0" g="0" b="0"/>
+        </a:effectRef>
         <a:fontRef idx="none"/>
       </a:style>
     </a:txDef>
   </a:objectDefaults>
+  <a:extraClrSchemeLst/>
 </a:theme>
 </file>
--- a/Login Threat Detection Project Presentation.pptx
+++ b/Login Threat Detection Project Presentation.pptx
@@ -318,6 +318,11 @@
       </a:defRPr>
     </a:lvl9pPr>
   </p:defaultTextStyle>
+  <p:extLst>
+    <p:ext uri="{EFAFB233-063F-42B5-8137-9DF3F51BA10A}">
+      <p15:sldGuideLst xmlns:p15="http://schemas.microsoft.com/office/powerpoint/2012/main"/>
+    </p:ext>
+  </p:extLst>
 </p:presentation>
 </file>
 
@@ -577,7 +582,7 @@
           </a:ln>
           <a:extLst>
             <a:ext uri="{C572A759-6A51-4108-AA02-DFA0A04FC94B}">
-              <ma14:wrappingTextBoxFlag xmlns:ma14="http://schemas.microsoft.com/office/mac/drawingml/2011/main" xmlns:a14="http://schemas.microsoft.com/office/drawing/2010/main" xmlns:m="http://schemas.openxmlformats.org/officeDocument/2006/math" xmlns="" val="1"/>
+              <ma14:wrappingTextBoxFlag xmlns="" xmlns:m="http://schemas.openxmlformats.org/officeDocument/2006/math" xmlns:a14="http://schemas.microsoft.com/office/drawing/2010/main" xmlns:ma14="http://schemas.microsoft.com/office/mac/drawingml/2011/main" val="1"/>
             </a:ext>
           </a:extLst>
         </p:spPr>
@@ -614,7 +619,7 @@
           </a:ln>
           <a:extLst>
             <a:ext uri="{C572A759-6A51-4108-AA02-DFA0A04FC94B}">
-              <ma14:wrappingTextBoxFlag xmlns:ma14="http://schemas.microsoft.com/office/mac/drawingml/2011/main" xmlns:a14="http://schemas.microsoft.com/office/drawing/2010/main" xmlns:m="http://schemas.openxmlformats.org/officeDocument/2006/math" xmlns="" val="1"/>
+              <ma14:wrappingTextBoxFlag xmlns="" xmlns:m="http://schemas.openxmlformats.org/officeDocument/2006/math" xmlns:a14="http://schemas.microsoft.com/office/drawing/2010/main" xmlns:ma14="http://schemas.microsoft.com/office/mac/drawingml/2011/main" val="1"/>
             </a:ext>
           </a:extLst>
         </p:spPr>
@@ -1513,7 +1518,7 @@
           </a:ln>
           <a:extLst>
             <a:ext uri="{C572A759-6A51-4108-AA02-DFA0A04FC94B}">
-              <ma14:wrappingTextBoxFlag xmlns:ma14="http://schemas.microsoft.com/office/mac/drawingml/2011/main" xmlns:a14="http://schemas.microsoft.com/office/drawing/2010/main" xmlns:m="http://schemas.openxmlformats.org/officeDocument/2006/math" xmlns="" val="1"/>
+              <ma14:wrappingTextBoxFlag xmlns="" xmlns:m="http://schemas.openxmlformats.org/officeDocument/2006/math" xmlns:a14="http://schemas.microsoft.com/office/drawing/2010/main" xmlns:ma14="http://schemas.microsoft.com/office/mac/drawingml/2011/main" val="1"/>
             </a:ext>
           </a:extLst>
         </p:spPr>
@@ -1574,7 +1579,7 @@
           </a:ln>
           <a:extLst>
             <a:ext uri="{C572A759-6A51-4108-AA02-DFA0A04FC94B}">
-              <ma14:wrappingTextBoxFlag xmlns:ma14="http://schemas.microsoft.com/office/mac/drawingml/2011/main" xmlns:a14="http://schemas.microsoft.com/office/drawing/2010/main" xmlns:m="http://schemas.openxmlformats.org/officeDocument/2006/math" xmlns="" val="1"/>
+              <ma14:wrappingTextBoxFlag xmlns="" xmlns:m="http://schemas.openxmlformats.org/officeDocument/2006/math" xmlns:a14="http://schemas.microsoft.com/office/drawing/2010/main" xmlns:ma14="http://schemas.microsoft.com/office/mac/drawingml/2011/main" val="1"/>
             </a:ext>
           </a:extLst>
         </p:spPr>
@@ -1621,7 +1626,7 @@
           </a:ln>
           <a:extLst>
             <a:ext uri="{C572A759-6A51-4108-AA02-DFA0A04FC94B}">
-              <ma14:wrappingTextBoxFlag xmlns:ma14="http://schemas.microsoft.com/office/mac/drawingml/2011/main" xmlns:a14="http://schemas.microsoft.com/office/drawing/2010/main" xmlns:m="http://schemas.openxmlformats.org/officeDocument/2006/math" xmlns="" val="1"/>
+              <ma14:wrappingTextBoxFlag xmlns="" xmlns:m="http://schemas.openxmlformats.org/officeDocument/2006/math" xmlns:a14="http://schemas.microsoft.com/office/drawing/2010/main" xmlns:ma14="http://schemas.microsoft.com/office/mac/drawingml/2011/main" val="1"/>
             </a:ext>
           </a:extLst>
         </p:spPr>
@@ -1683,7 +1688,7 @@
           </a:ln>
           <a:extLst>
             <a:ext uri="{C572A759-6A51-4108-AA02-DFA0A04FC94B}">
-              <ma14:wrappingTextBoxFlag xmlns:ma14="http://schemas.microsoft.com/office/mac/drawingml/2011/main" xmlns:a14="http://schemas.microsoft.com/office/drawing/2010/main" xmlns:m="http://schemas.openxmlformats.org/officeDocument/2006/math" xmlns="" val="1"/>
+              <ma14:wrappingTextBoxFlag xmlns="" xmlns:m="http://schemas.openxmlformats.org/officeDocument/2006/math" xmlns:a14="http://schemas.microsoft.com/office/drawing/2010/main" xmlns:ma14="http://schemas.microsoft.com/office/mac/drawingml/2011/main" val="1"/>
             </a:ext>
           </a:extLst>
         </p:spPr>
@@ -1763,7 +1768,7 @@
           </a:ln>
           <a:extLst>
             <a:ext uri="{C572A759-6A51-4108-AA02-DFA0A04FC94B}">
-              <ma14:wrappingTextBoxFlag xmlns:ma14="http://schemas.microsoft.com/office/mac/drawingml/2011/main" xmlns:a14="http://schemas.microsoft.com/office/drawing/2010/main" xmlns:m="http://schemas.openxmlformats.org/officeDocument/2006/math" xmlns="" val="1"/>
+              <ma14:wrappingTextBoxFlag xmlns="" xmlns:m="http://schemas.openxmlformats.org/officeDocument/2006/math" xmlns:a14="http://schemas.microsoft.com/office/drawing/2010/main" xmlns:ma14="http://schemas.microsoft.com/office/mac/drawingml/2011/main" val="1"/>
             </a:ext>
           </a:extLst>
         </p:spPr>
@@ -1843,7 +1848,7 @@
           </a:ln>
           <a:extLst>
             <a:ext uri="{C572A759-6A51-4108-AA02-DFA0A04FC94B}">
-              <ma14:wrappingTextBoxFlag xmlns:ma14="http://schemas.microsoft.com/office/mac/drawingml/2011/main" xmlns:a14="http://schemas.microsoft.com/office/drawing/2010/main" xmlns:m="http://schemas.openxmlformats.org/officeDocument/2006/math" xmlns="" val="1"/>
+              <ma14:wrappingTextBoxFlag xmlns="" xmlns:m="http://schemas.openxmlformats.org/officeDocument/2006/math" xmlns:a14="http://schemas.microsoft.com/office/drawing/2010/main" xmlns:ma14="http://schemas.microsoft.com/office/mac/drawingml/2011/main" val="1"/>
             </a:ext>
           </a:extLst>
         </p:spPr>
@@ -1923,7 +1928,7 @@
           </a:ln>
           <a:extLst>
             <a:ext uri="{C572A759-6A51-4108-AA02-DFA0A04FC94B}">
-              <ma14:wrappingTextBoxFlag xmlns:ma14="http://schemas.microsoft.com/office/mac/drawingml/2011/main" xmlns:a14="http://schemas.microsoft.com/office/drawing/2010/main" xmlns:m="http://schemas.openxmlformats.org/officeDocument/2006/math" xmlns="" val="1"/>
+              <ma14:wrappingTextBoxFlag xmlns="" xmlns:m="http://schemas.openxmlformats.org/officeDocument/2006/math" xmlns:a14="http://schemas.microsoft.com/office/drawing/2010/main" xmlns:ma14="http://schemas.microsoft.com/office/mac/drawingml/2011/main" val="1"/>
             </a:ext>
           </a:extLst>
         </p:spPr>
@@ -1970,7 +1975,7 @@
           </a:ln>
           <a:extLst>
             <a:ext uri="{C572A759-6A51-4108-AA02-DFA0A04FC94B}">
-              <ma14:wrappingTextBoxFlag xmlns:ma14="http://schemas.microsoft.com/office/mac/drawingml/2011/main" xmlns:a14="http://schemas.microsoft.com/office/drawing/2010/main" xmlns:m="http://schemas.openxmlformats.org/officeDocument/2006/math" xmlns="" val="1"/>
+              <ma14:wrappingTextBoxFlag xmlns="" xmlns:m="http://schemas.openxmlformats.org/officeDocument/2006/math" xmlns:a14="http://schemas.microsoft.com/office/drawing/2010/main" xmlns:ma14="http://schemas.microsoft.com/office/mac/drawingml/2011/main" val="1"/>
             </a:ext>
           </a:extLst>
         </p:spPr>
@@ -2017,7 +2022,7 @@
           </a:ln>
           <a:extLst>
             <a:ext uri="{C572A759-6A51-4108-AA02-DFA0A04FC94B}">
-              <ma14:wrappingTextBoxFlag xmlns:ma14="http://schemas.microsoft.com/office/mac/drawingml/2011/main" xmlns:a14="http://schemas.microsoft.com/office/drawing/2010/main" xmlns:m="http://schemas.openxmlformats.org/officeDocument/2006/math" xmlns="" val="1"/>
+              <ma14:wrappingTextBoxFlag xmlns="" xmlns:m="http://schemas.openxmlformats.org/officeDocument/2006/math" xmlns:a14="http://schemas.microsoft.com/office/drawing/2010/main" xmlns:ma14="http://schemas.microsoft.com/office/mac/drawingml/2011/main" val="1"/>
             </a:ext>
           </a:extLst>
         </p:spPr>
@@ -2098,7 +2103,7 @@
           </a:ln>
           <a:extLst>
             <a:ext uri="{C572A759-6A51-4108-AA02-DFA0A04FC94B}">
-              <ma14:wrappingTextBoxFlag xmlns:ma14="http://schemas.microsoft.com/office/mac/drawingml/2011/main" xmlns:a14="http://schemas.microsoft.com/office/drawing/2010/main" xmlns:m="http://schemas.openxmlformats.org/officeDocument/2006/math" xmlns="" val="1"/>
+              <ma14:wrappingTextBoxFlag xmlns="" xmlns:m="http://schemas.openxmlformats.org/officeDocument/2006/math" xmlns:a14="http://schemas.microsoft.com/office/drawing/2010/main" xmlns:ma14="http://schemas.microsoft.com/office/mac/drawingml/2011/main" val="1"/>
             </a:ext>
           </a:extLst>
         </p:spPr>
@@ -2174,7 +2179,7 @@
           </a:ln>
           <a:extLst>
             <a:ext uri="{C572A759-6A51-4108-AA02-DFA0A04FC94B}">
-              <ma14:wrappingTextBoxFlag xmlns:ma14="http://schemas.microsoft.com/office/mac/drawingml/2011/main" xmlns:a14="http://schemas.microsoft.com/office/drawing/2010/main" xmlns:m="http://schemas.openxmlformats.org/officeDocument/2006/math" xmlns="" val="1"/>
+              <ma14:wrappingTextBoxFlag xmlns="" xmlns:m="http://schemas.openxmlformats.org/officeDocument/2006/math" xmlns:a14="http://schemas.microsoft.com/office/drawing/2010/main" xmlns:ma14="http://schemas.microsoft.com/office/mac/drawingml/2011/main" val="1"/>
             </a:ext>
           </a:extLst>
         </p:spPr>
@@ -2221,7 +2226,7 @@
           </a:ln>
           <a:extLst>
             <a:ext uri="{C572A759-6A51-4108-AA02-DFA0A04FC94B}">
-              <ma14:wrappingTextBoxFlag xmlns:ma14="http://schemas.microsoft.com/office/mac/drawingml/2011/main" xmlns:a14="http://schemas.microsoft.com/office/drawing/2010/main" xmlns:m="http://schemas.openxmlformats.org/officeDocument/2006/math" xmlns="" val="1"/>
+              <ma14:wrappingTextBoxFlag xmlns="" xmlns:m="http://schemas.openxmlformats.org/officeDocument/2006/math" xmlns:a14="http://schemas.microsoft.com/office/drawing/2010/main" xmlns:ma14="http://schemas.microsoft.com/office/mac/drawingml/2011/main" val="1"/>
             </a:ext>
           </a:extLst>
         </p:spPr>
@@ -2337,7 +2342,7 @@
           </a:ln>
           <a:extLst>
             <a:ext uri="{C572A759-6A51-4108-AA02-DFA0A04FC94B}">
-              <ma14:wrappingTextBoxFlag xmlns:ma14="http://schemas.microsoft.com/office/mac/drawingml/2011/main" xmlns:a14="http://schemas.microsoft.com/office/drawing/2010/main" xmlns:m="http://schemas.openxmlformats.org/officeDocument/2006/math" xmlns="" val="1"/>
+              <ma14:wrappingTextBoxFlag xmlns="" xmlns:m="http://schemas.openxmlformats.org/officeDocument/2006/math" xmlns:a14="http://schemas.microsoft.com/office/drawing/2010/main" xmlns:ma14="http://schemas.microsoft.com/office/mac/drawingml/2011/main" val="1"/>
             </a:ext>
           </a:extLst>
         </p:spPr>
@@ -2384,7 +2389,7 @@
           </a:ln>
           <a:extLst>
             <a:ext uri="{C572A759-6A51-4108-AA02-DFA0A04FC94B}">
-              <ma14:wrappingTextBoxFlag xmlns:ma14="http://schemas.microsoft.com/office/mac/drawingml/2011/main" xmlns:a14="http://schemas.microsoft.com/office/drawing/2010/main" xmlns:m="http://schemas.openxmlformats.org/officeDocument/2006/math" xmlns="" val="1"/>
+              <ma14:wrappingTextBoxFlag xmlns="" xmlns:m="http://schemas.openxmlformats.org/officeDocument/2006/math" xmlns:a14="http://schemas.microsoft.com/office/drawing/2010/main" xmlns:ma14="http://schemas.microsoft.com/office/mac/drawingml/2011/main" val="1"/>
             </a:ext>
           </a:extLst>
         </p:spPr>
@@ -2431,7 +2436,7 @@
           </a:ln>
           <a:extLst>
             <a:ext uri="{C572A759-6A51-4108-AA02-DFA0A04FC94B}">
-              <ma14:wrappingTextBoxFlag xmlns:ma14="http://schemas.microsoft.com/office/mac/drawingml/2011/main" xmlns:a14="http://schemas.microsoft.com/office/drawing/2010/main" xmlns:m="http://schemas.openxmlformats.org/officeDocument/2006/math" xmlns="" val="1"/>
+              <ma14:wrappingTextBoxFlag xmlns="" xmlns:m="http://schemas.openxmlformats.org/officeDocument/2006/math" xmlns:a14="http://schemas.microsoft.com/office/drawing/2010/main" xmlns:ma14="http://schemas.microsoft.com/office/mac/drawingml/2011/main" val="1"/>
             </a:ext>
           </a:extLst>
         </p:spPr>
@@ -2547,7 +2552,7 @@
           </a:ln>
           <a:extLst>
             <a:ext uri="{C572A759-6A51-4108-AA02-DFA0A04FC94B}">
-              <ma14:wrappingTextBoxFlag xmlns:ma14="http://schemas.microsoft.com/office/mac/drawingml/2011/main" xmlns:a14="http://schemas.microsoft.com/office/drawing/2010/main" xmlns:m="http://schemas.openxmlformats.org/officeDocument/2006/math" xmlns="" val="1"/>
+              <ma14:wrappingTextBoxFlag xmlns="" xmlns:m="http://schemas.openxmlformats.org/officeDocument/2006/math" xmlns:a14="http://schemas.microsoft.com/office/drawing/2010/main" xmlns:ma14="http://schemas.microsoft.com/office/mac/drawingml/2011/main" val="1"/>
             </a:ext>
           </a:extLst>
         </p:spPr>
@@ -2594,7 +2599,7 @@
           </a:ln>
           <a:extLst>
             <a:ext uri="{C572A759-6A51-4108-AA02-DFA0A04FC94B}">
-              <ma14:wrappingTextBoxFlag xmlns:ma14="http://schemas.microsoft.com/office/mac/drawingml/2011/main" xmlns:a14="http://schemas.microsoft.com/office/drawing/2010/main" xmlns:m="http://schemas.openxmlformats.org/officeDocument/2006/math" xmlns="" val="1"/>
+              <ma14:wrappingTextBoxFlag xmlns="" xmlns:m="http://schemas.openxmlformats.org/officeDocument/2006/math" xmlns:a14="http://schemas.microsoft.com/office/drawing/2010/main" xmlns:ma14="http://schemas.microsoft.com/office/mac/drawingml/2011/main" val="1"/>
             </a:ext>
           </a:extLst>
         </p:spPr>
@@ -2641,7 +2646,7 @@
           </a:ln>
           <a:extLst>
             <a:ext uri="{C572A759-6A51-4108-AA02-DFA0A04FC94B}">
-              <ma14:wrappingTextBoxFlag xmlns:ma14="http://schemas.microsoft.com/office/mac/drawingml/2011/main" xmlns:a14="http://schemas.microsoft.com/office/drawing/2010/main" xmlns:m="http://schemas.openxmlformats.org/officeDocument/2006/math" xmlns="" val="1"/>
+              <ma14:wrappingTextBoxFlag xmlns="" xmlns:m="http://schemas.openxmlformats.org/officeDocument/2006/math" xmlns:a14="http://schemas.microsoft.com/office/drawing/2010/main" xmlns:ma14="http://schemas.microsoft.com/office/mac/drawingml/2011/main" val="1"/>
             </a:ext>
           </a:extLst>
         </p:spPr>
@@ -2757,7 +2762,7 @@
           </a:ln>
           <a:extLst>
             <a:ext uri="{C572A759-6A51-4108-AA02-DFA0A04FC94B}">
-              <ma14:wrappingTextBoxFlag xmlns:ma14="http://schemas.microsoft.com/office/mac/drawingml/2011/main" xmlns:a14="http://schemas.microsoft.com/office/drawing/2010/main" xmlns:m="http://schemas.openxmlformats.org/officeDocument/2006/math" xmlns="" val="1"/>
+              <ma14:wrappingTextBoxFlag xmlns="" xmlns:m="http://schemas.openxmlformats.org/officeDocument/2006/math" xmlns:a14="http://schemas.microsoft.com/office/drawing/2010/main" xmlns:ma14="http://schemas.microsoft.com/office/mac/drawingml/2011/main" val="1"/>
             </a:ext>
           </a:extLst>
         </p:spPr>
@@ -2804,7 +2809,7 @@
           </a:ln>
           <a:extLst>
             <a:ext uri="{C572A759-6A51-4108-AA02-DFA0A04FC94B}">
-              <ma14:wrappingTextBoxFlag xmlns:ma14="http://schemas.microsoft.com/office/mac/drawingml/2011/main" xmlns:a14="http://schemas.microsoft.com/office/drawing/2010/main" xmlns:m="http://schemas.openxmlformats.org/officeDocument/2006/math" xmlns="" val="1"/>
+              <ma14:wrappingTextBoxFlag xmlns="" xmlns:m="http://schemas.openxmlformats.org/officeDocument/2006/math" xmlns:a14="http://schemas.microsoft.com/office/drawing/2010/main" xmlns:ma14="http://schemas.microsoft.com/office/mac/drawingml/2011/main" val="1"/>
             </a:ext>
           </a:extLst>
         </p:spPr>
@@ -2851,7 +2856,7 @@
           </a:ln>
           <a:extLst>
             <a:ext uri="{C572A759-6A51-4108-AA02-DFA0A04FC94B}">
-              <ma14:wrappingTextBoxFlag xmlns:ma14="http://schemas.microsoft.com/office/mac/drawingml/2011/main" xmlns:a14="http://schemas.microsoft.com/office/drawing/2010/main" xmlns:m="http://schemas.openxmlformats.org/officeDocument/2006/math" xmlns="" val="1"/>
+              <ma14:wrappingTextBoxFlag xmlns="" xmlns:m="http://schemas.openxmlformats.org/officeDocument/2006/math" xmlns:a14="http://schemas.microsoft.com/office/drawing/2010/main" xmlns:ma14="http://schemas.microsoft.com/office/mac/drawingml/2011/main" val="1"/>
             </a:ext>
           </a:extLst>
         </p:spPr>
@@ -2929,7 +2934,7 @@
           </a:ln>
           <a:extLst>
             <a:ext uri="{C572A759-6A51-4108-AA02-DFA0A04FC94B}">
-              <ma14:wrappingTextBoxFlag xmlns:ma14="http://schemas.microsoft.com/office/mac/drawingml/2011/main" xmlns:a14="http://schemas.microsoft.com/office/drawing/2010/main" xmlns:m="http://schemas.openxmlformats.org/officeDocument/2006/math" xmlns="" val="1"/>
+              <ma14:wrappingTextBoxFlag xmlns="" xmlns:m="http://schemas.openxmlformats.org/officeDocument/2006/math" xmlns:a14="http://schemas.microsoft.com/office/drawing/2010/main" xmlns:ma14="http://schemas.microsoft.com/office/mac/drawingml/2011/main" val="1"/>
             </a:ext>
           </a:extLst>
         </p:spPr>
@@ -2976,7 +2981,7 @@
           </a:ln>
           <a:extLst>
             <a:ext uri="{C572A759-6A51-4108-AA02-DFA0A04FC94B}">
-              <ma14:wrappingTextBoxFlag xmlns:ma14="http://schemas.microsoft.com/office/mac/drawingml/2011/main" xmlns:a14="http://schemas.microsoft.com/office/drawing/2010/main" xmlns:m="http://schemas.openxmlformats.org/officeDocument/2006/math" xmlns="" val="1"/>
+              <ma14:wrappingTextBoxFlag xmlns="" xmlns:m="http://schemas.openxmlformats.org/officeDocument/2006/math" xmlns:a14="http://schemas.microsoft.com/office/drawing/2010/main" xmlns:ma14="http://schemas.microsoft.com/office/mac/drawingml/2011/main" val="1"/>
             </a:ext>
           </a:extLst>
         </p:spPr>
@@ -3051,7 +3056,7 @@
           </a:ln>
           <a:extLst>
             <a:ext uri="{C572A759-6A51-4108-AA02-DFA0A04FC94B}">
-              <ma14:wrappingTextBoxFlag xmlns:ma14="http://schemas.microsoft.com/office/mac/drawingml/2011/main" xmlns:a14="http://schemas.microsoft.com/office/drawing/2010/main" xmlns:m="http://schemas.openxmlformats.org/officeDocument/2006/math" xmlns="" val="1"/>
+              <ma14:wrappingTextBoxFlag xmlns="" xmlns:m="http://schemas.openxmlformats.org/officeDocument/2006/math" xmlns:a14="http://schemas.microsoft.com/office/drawing/2010/main" xmlns:ma14="http://schemas.microsoft.com/office/mac/drawingml/2011/main" val="1"/>
             </a:ext>
           </a:extLst>
         </p:spPr>
@@ -3098,7 +3103,7 @@
           </a:ln>
           <a:extLst>
             <a:ext uri="{C572A759-6A51-4108-AA02-DFA0A04FC94B}">
-              <ma14:wrappingTextBoxFlag xmlns:ma14="http://schemas.microsoft.com/office/mac/drawingml/2011/main" xmlns:a14="http://schemas.microsoft.com/office/drawing/2010/main" xmlns:m="http://schemas.openxmlformats.org/officeDocument/2006/math" xmlns="" val="1"/>
+              <ma14:wrappingTextBoxFlag xmlns="" xmlns:m="http://schemas.openxmlformats.org/officeDocument/2006/math" xmlns:a14="http://schemas.microsoft.com/office/drawing/2010/main" xmlns:ma14="http://schemas.microsoft.com/office/mac/drawingml/2011/main" val="1"/>
             </a:ext>
           </a:extLst>
         </p:spPr>
@@ -3145,7 +3150,7 @@
           </a:ln>
           <a:extLst>
             <a:ext uri="{C572A759-6A51-4108-AA02-DFA0A04FC94B}">
-              <ma14:wrappingTextBoxFlag xmlns:ma14="http://schemas.microsoft.com/office/mac/drawingml/2011/main" xmlns:a14="http://schemas.microsoft.com/office/drawing/2010/main" xmlns:m="http://schemas.openxmlformats.org/officeDocument/2006/math" xmlns="" val="1"/>
+              <ma14:wrappingTextBoxFlag xmlns="" xmlns:m="http://schemas.openxmlformats.org/officeDocument/2006/math" xmlns:a14="http://schemas.microsoft.com/office/drawing/2010/main" xmlns:ma14="http://schemas.microsoft.com/office/mac/drawingml/2011/main" val="1"/>
             </a:ext>
           </a:extLst>
         </p:spPr>
@@ -3226,7 +3231,7 @@
           </a:ln>
           <a:extLst>
             <a:ext uri="{C572A759-6A51-4108-AA02-DFA0A04FC94B}">
-              <ma14:wrappingTextBoxFlag xmlns:ma14="http://schemas.microsoft.com/office/mac/drawingml/2011/main" xmlns:a14="http://schemas.microsoft.com/office/drawing/2010/main" xmlns:m="http://schemas.openxmlformats.org/officeDocument/2006/math" xmlns="" val="1"/>
+              <ma14:wrappingTextBoxFlag xmlns="" xmlns:m="http://schemas.openxmlformats.org/officeDocument/2006/math" xmlns:a14="http://schemas.microsoft.com/office/drawing/2010/main" xmlns:ma14="http://schemas.microsoft.com/office/mac/drawingml/2011/main" val="1"/>
             </a:ext>
           </a:extLst>
         </p:spPr>
@@ -3302,7 +3307,7 @@
           </a:ln>
           <a:extLst>
             <a:ext uri="{C572A759-6A51-4108-AA02-DFA0A04FC94B}">
-              <ma14:wrappingTextBoxFlag xmlns:ma14="http://schemas.microsoft.com/office/mac/drawingml/2011/main" xmlns:a14="http://schemas.microsoft.com/office/drawing/2010/main" xmlns:m="http://schemas.openxmlformats.org/officeDocument/2006/math" xmlns="" val="1"/>
+              <ma14:wrappingTextBoxFlag xmlns="" xmlns:m="http://schemas.openxmlformats.org/officeDocument/2006/math" xmlns:a14="http://schemas.microsoft.com/office/drawing/2010/main" xmlns:ma14="http://schemas.microsoft.com/office/mac/drawingml/2011/main" val="1"/>
             </a:ext>
           </a:extLst>
         </p:spPr>
@@ -3349,7 +3354,7 @@
           </a:ln>
           <a:extLst>
             <a:ext uri="{C572A759-6A51-4108-AA02-DFA0A04FC94B}">
-              <ma14:wrappingTextBoxFlag xmlns:ma14="http://schemas.microsoft.com/office/mac/drawingml/2011/main" xmlns:a14="http://schemas.microsoft.com/office/drawing/2010/main" xmlns:m="http://schemas.openxmlformats.org/officeDocument/2006/math" xmlns="" val="1"/>
+              <ma14:wrappingTextBoxFlag xmlns="" xmlns:m="http://schemas.openxmlformats.org/officeDocument/2006/math" xmlns:a14="http://schemas.microsoft.com/office/drawing/2010/main" xmlns:ma14="http://schemas.microsoft.com/office/mac/drawingml/2011/main" val="1"/>
             </a:ext>
           </a:extLst>
         </p:spPr>
@@ -3396,7 +3401,7 @@
           </a:ln>
           <a:extLst>
             <a:ext uri="{C572A759-6A51-4108-AA02-DFA0A04FC94B}">
-              <ma14:wrappingTextBoxFlag xmlns:ma14="http://schemas.microsoft.com/office/mac/drawingml/2011/main" xmlns:a14="http://schemas.microsoft.com/office/drawing/2010/main" xmlns:m="http://schemas.openxmlformats.org/officeDocument/2006/math" xmlns="" val="1"/>
+              <ma14:wrappingTextBoxFlag xmlns="" xmlns:m="http://schemas.openxmlformats.org/officeDocument/2006/math" xmlns:a14="http://schemas.microsoft.com/office/drawing/2010/main" xmlns:ma14="http://schemas.microsoft.com/office/mac/drawingml/2011/main" val="1"/>
             </a:ext>
           </a:extLst>
         </p:spPr>
@@ -3507,7 +3512,7 @@
           </a:ln>
           <a:extLst>
             <a:ext uri="{C572A759-6A51-4108-AA02-DFA0A04FC94B}">
-              <ma14:wrappingTextBoxFlag xmlns:ma14="http://schemas.microsoft.com/office/mac/drawingml/2011/main" xmlns:a14="http://schemas.microsoft.com/office/drawing/2010/main" xmlns:m="http://schemas.openxmlformats.org/officeDocument/2006/math" xmlns="" val="1"/>
+              <ma14:wrappingTextBoxFlag xmlns="" xmlns:m="http://schemas.openxmlformats.org/officeDocument/2006/math" xmlns:a14="http://schemas.microsoft.com/office/drawing/2010/main" xmlns:ma14="http://schemas.microsoft.com/office/mac/drawingml/2011/main" val="1"/>
             </a:ext>
           </a:extLst>
         </p:spPr>
@@ -3565,7 +3570,7 @@
           </a:ln>
           <a:extLst>
             <a:ext uri="{C572A759-6A51-4108-AA02-DFA0A04FC94B}">
-              <ma14:wrappingTextBoxFlag xmlns:ma14="http://schemas.microsoft.com/office/mac/drawingml/2011/main" xmlns:a14="http://schemas.microsoft.com/office/drawing/2010/main" xmlns:m="http://schemas.openxmlformats.org/officeDocument/2006/math" xmlns="" val="1"/>
+              <ma14:wrappingTextBoxFlag xmlns="" xmlns:m="http://schemas.openxmlformats.org/officeDocument/2006/math" xmlns:a14="http://schemas.microsoft.com/office/drawing/2010/main" xmlns:ma14="http://schemas.microsoft.com/office/mac/drawingml/2011/main" val="1"/>
             </a:ext>
           </a:extLst>
         </p:spPr>
@@ -3643,7 +3648,7 @@
           </a:ln>
           <a:extLst>
             <a:ext uri="{C572A759-6A51-4108-AA02-DFA0A04FC94B}">
-              <ma14:wrappingTextBoxFlag xmlns:ma14="http://schemas.microsoft.com/office/mac/drawingml/2011/main" xmlns:a14="http://schemas.microsoft.com/office/drawing/2010/main" xmlns:m="http://schemas.openxmlformats.org/officeDocument/2006/math" xmlns="" val="1"/>
+              <ma14:wrappingTextBoxFlag xmlns="" xmlns:m="http://schemas.openxmlformats.org/officeDocument/2006/math" xmlns:a14="http://schemas.microsoft.com/office/drawing/2010/main" xmlns:ma14="http://schemas.microsoft.com/office/mac/drawingml/2011/main" val="1"/>
             </a:ext>
           </a:extLst>
         </p:spPr>
@@ -3701,7 +3706,7 @@
           </a:ln>
           <a:extLst>
             <a:ext uri="{C572A759-6A51-4108-AA02-DFA0A04FC94B}">
-              <ma14:wrappingTextBoxFlag xmlns:ma14="http://schemas.microsoft.com/office/mac/drawingml/2011/main" xmlns:a14="http://schemas.microsoft.com/office/drawing/2010/main" xmlns:m="http://schemas.openxmlformats.org/officeDocument/2006/math" xmlns="" val="1"/>
+              <ma14:wrappingTextBoxFlag xmlns="" xmlns:m="http://schemas.openxmlformats.org/officeDocument/2006/math" xmlns:a14="http://schemas.microsoft.com/office/drawing/2010/main" xmlns:ma14="http://schemas.microsoft.com/office/mac/drawingml/2011/main" val="1"/>
             </a:ext>
           </a:extLst>
         </p:spPr>
@@ -3779,7 +3784,7 @@
           </a:ln>
           <a:extLst>
             <a:ext uri="{C572A759-6A51-4108-AA02-DFA0A04FC94B}">
-              <ma14:wrappingTextBoxFlag xmlns:ma14="http://schemas.microsoft.com/office/mac/drawingml/2011/main" xmlns:a14="http://schemas.microsoft.com/office/drawing/2010/main" xmlns:m="http://schemas.openxmlformats.org/officeDocument/2006/math" xmlns="" val="1"/>
+              <ma14:wrappingTextBoxFlag xmlns="" xmlns:m="http://schemas.openxmlformats.org/officeDocument/2006/math" xmlns:a14="http://schemas.microsoft.com/office/drawing/2010/main" xmlns:ma14="http://schemas.microsoft.com/office/mac/drawingml/2011/main" val="1"/>
             </a:ext>
           </a:extLst>
         </p:spPr>
@@ -3837,7 +3842,7 @@
           </a:ln>
           <a:extLst>
             <a:ext uri="{C572A759-6A51-4108-AA02-DFA0A04FC94B}">
-              <ma14:wrappingTextBoxFlag xmlns:ma14="http://schemas.microsoft.com/office/mac/drawingml/2011/main" xmlns:a14="http://schemas.microsoft.com/office/drawing/2010/main" xmlns:m="http://schemas.openxmlformats.org/officeDocument/2006/math" xmlns="" val="1"/>
+              <ma14:wrappingTextBoxFlag xmlns="" xmlns:m="http://schemas.openxmlformats.org/officeDocument/2006/math" xmlns:a14="http://schemas.microsoft.com/office/drawing/2010/main" xmlns:ma14="http://schemas.microsoft.com/office/mac/drawingml/2011/main" val="1"/>
             </a:ext>
           </a:extLst>
         </p:spPr>
@@ -3884,7 +3889,7 @@
           </a:ln>
           <a:extLst>
             <a:ext uri="{C572A759-6A51-4108-AA02-DFA0A04FC94B}">
-              <ma14:wrappingTextBoxFlag xmlns:ma14="http://schemas.microsoft.com/office/mac/drawingml/2011/main" xmlns:a14="http://schemas.microsoft.com/office/drawing/2010/main" xmlns:m="http://schemas.openxmlformats.org/officeDocument/2006/math" xmlns="" val="1"/>
+              <ma14:wrappingTextBoxFlag xmlns="" xmlns:m="http://schemas.openxmlformats.org/officeDocument/2006/math" xmlns:a14="http://schemas.microsoft.com/office/drawing/2010/main" xmlns:ma14="http://schemas.microsoft.com/office/mac/drawingml/2011/main" val="1"/>
             </a:ext>
           </a:extLst>
         </p:spPr>
@@ -3931,7 +3936,7 @@
           </a:ln>
           <a:extLst>
             <a:ext uri="{C572A759-6A51-4108-AA02-DFA0A04FC94B}">
-              <ma14:wrappingTextBoxFlag xmlns:ma14="http://schemas.microsoft.com/office/mac/drawingml/2011/main" xmlns:a14="http://schemas.microsoft.com/office/drawing/2010/main" xmlns:m="http://schemas.openxmlformats.org/officeDocument/2006/math" xmlns="" val="1"/>
+              <ma14:wrappingTextBoxFlag xmlns="" xmlns:m="http://schemas.openxmlformats.org/officeDocument/2006/math" xmlns:a14="http://schemas.microsoft.com/office/drawing/2010/main" xmlns:ma14="http://schemas.microsoft.com/office/mac/drawingml/2011/main" val="1"/>
             </a:ext>
           </a:extLst>
         </p:spPr>
@@ -3992,7 +3997,7 @@
           </a:ln>
           <a:extLst>
             <a:ext uri="{C572A759-6A51-4108-AA02-DFA0A04FC94B}">
-              <ma14:wrappingTextBoxFlag xmlns:ma14="http://schemas.microsoft.com/office/mac/drawingml/2011/main" xmlns:a14="http://schemas.microsoft.com/office/drawing/2010/main" xmlns:m="http://schemas.openxmlformats.org/officeDocument/2006/math" xmlns="" val="1"/>
+              <ma14:wrappingTextBoxFlag xmlns="" xmlns:m="http://schemas.openxmlformats.org/officeDocument/2006/math" xmlns:a14="http://schemas.microsoft.com/office/drawing/2010/main" xmlns:ma14="http://schemas.microsoft.com/office/mac/drawingml/2011/main" val="1"/>
             </a:ext>
           </a:extLst>
         </p:spPr>
@@ -4099,7 +4104,7 @@
           </a:ln>
           <a:extLst>
             <a:ext uri="{C572A759-6A51-4108-AA02-DFA0A04FC94B}">
-              <ma14:wrappingTextBoxFlag xmlns:ma14="http://schemas.microsoft.com/office/mac/drawingml/2011/main" xmlns:a14="http://schemas.microsoft.com/office/drawing/2010/main" xmlns:m="http://schemas.openxmlformats.org/officeDocument/2006/math" xmlns="" val="1"/>
+              <ma14:wrappingTextBoxFlag xmlns="" xmlns:m="http://schemas.openxmlformats.org/officeDocument/2006/math" xmlns:a14="http://schemas.microsoft.com/office/drawing/2010/main" xmlns:ma14="http://schemas.microsoft.com/office/mac/drawingml/2011/main" val="1"/>
             </a:ext>
           </a:extLst>
         </p:spPr>
@@ -4157,7 +4162,7 @@
           </a:ln>
           <a:extLst>
             <a:ext uri="{C572A759-6A51-4108-AA02-DFA0A04FC94B}">
-              <ma14:wrappingTextBoxFlag xmlns:ma14="http://schemas.microsoft.com/office/mac/drawingml/2011/main" xmlns:a14="http://schemas.microsoft.com/office/drawing/2010/main" xmlns:m="http://schemas.openxmlformats.org/officeDocument/2006/math" xmlns="" val="1"/>
+              <ma14:wrappingTextBoxFlag xmlns="" xmlns:m="http://schemas.openxmlformats.org/officeDocument/2006/math" xmlns:a14="http://schemas.microsoft.com/office/drawing/2010/main" xmlns:ma14="http://schemas.microsoft.com/office/mac/drawingml/2011/main" val="1"/>
             </a:ext>
           </a:extLst>
         </p:spPr>
@@ -4204,7 +4209,7 @@
           </a:ln>
           <a:extLst>
             <a:ext uri="{C572A759-6A51-4108-AA02-DFA0A04FC94B}">
-              <ma14:wrappingTextBoxFlag xmlns:ma14="http://schemas.microsoft.com/office/mac/drawingml/2011/main" xmlns:a14="http://schemas.microsoft.com/office/drawing/2010/main" xmlns:m="http://schemas.openxmlformats.org/officeDocument/2006/math" xmlns="" val="1"/>
+              <ma14:wrappingTextBoxFlag xmlns="" xmlns:m="http://schemas.openxmlformats.org/officeDocument/2006/math" xmlns:a14="http://schemas.microsoft.com/office/drawing/2010/main" xmlns:ma14="http://schemas.microsoft.com/office/mac/drawingml/2011/main" val="1"/>
             </a:ext>
           </a:extLst>
         </p:spPr>
@@ -4251,7 +4256,7 @@
           </a:ln>
           <a:extLst>
             <a:ext uri="{C572A759-6A51-4108-AA02-DFA0A04FC94B}">
-              <ma14:wrappingTextBoxFlag xmlns:ma14="http://schemas.microsoft.com/office/mac/drawingml/2011/main" xmlns:a14="http://schemas.microsoft.com/office/drawing/2010/main" xmlns:m="http://schemas.openxmlformats.org/officeDocument/2006/math" xmlns="" val="1"/>
+              <ma14:wrappingTextBoxFlag xmlns="" xmlns:m="http://schemas.openxmlformats.org/officeDocument/2006/math" xmlns:a14="http://schemas.microsoft.com/office/drawing/2010/main" xmlns:ma14="http://schemas.microsoft.com/office/mac/drawingml/2011/main" val="1"/>
             </a:ext>
           </a:extLst>
         </p:spPr>
@@ -4312,7 +4317,7 @@
           </a:ln>
           <a:extLst>
             <a:ext uri="{C572A759-6A51-4108-AA02-DFA0A04FC94B}">
-              <ma14:wrappingTextBoxFlag xmlns:ma14="http://schemas.microsoft.com/office/mac/drawingml/2011/main" xmlns:a14="http://schemas.microsoft.com/office/drawing/2010/main" xmlns:m="http://schemas.openxmlformats.org/officeDocument/2006/math" xmlns="" val="1"/>
+              <ma14:wrappingTextBoxFlag xmlns="" xmlns:m="http://schemas.openxmlformats.org/officeDocument/2006/math" xmlns:a14="http://schemas.microsoft.com/office/drawing/2010/main" xmlns:ma14="http://schemas.microsoft.com/office/mac/drawingml/2011/main" val="1"/>
             </a:ext>
           </a:extLst>
         </p:spPr>
@@ -4419,7 +4424,7 @@
           </a:ln>
           <a:extLst>
             <a:ext uri="{C572A759-6A51-4108-AA02-DFA0A04FC94B}">
-              <ma14:wrappingTextBoxFlag xmlns:ma14="http://schemas.microsoft.com/office/mac/drawingml/2011/main" xmlns:a14="http://schemas.microsoft.com/office/drawing/2010/main" xmlns:m="http://schemas.openxmlformats.org/officeDocument/2006/math" xmlns="" val="1"/>
+              <ma14:wrappingTextBoxFlag xmlns="" xmlns:m="http://schemas.openxmlformats.org/officeDocument/2006/math" xmlns:a14="http://schemas.microsoft.com/office/drawing/2010/main" xmlns:ma14="http://schemas.microsoft.com/office/mac/drawingml/2011/main" val="1"/>
             </a:ext>
           </a:extLst>
         </p:spPr>
@@ -4480,7 +4485,7 @@
           </a:ln>
           <a:extLst>
             <a:ext uri="{C572A759-6A51-4108-AA02-DFA0A04FC94B}">
-              <ma14:wrappingTextBoxFlag xmlns:ma14="http://schemas.microsoft.com/office/mac/drawingml/2011/main" xmlns:a14="http://schemas.microsoft.com/office/drawing/2010/main" xmlns:m="http://schemas.openxmlformats.org/officeDocument/2006/math" xmlns="" val="1"/>
+              <ma14:wrappingTextBoxFlag xmlns="" xmlns:m="http://schemas.openxmlformats.org/officeDocument/2006/math" xmlns:a14="http://schemas.microsoft.com/office/drawing/2010/main" xmlns:ma14="http://schemas.microsoft.com/office/mac/drawingml/2011/main" val="1"/>
             </a:ext>
           </a:extLst>
         </p:spPr>
@@ -4587,7 +4592,7 @@
           </a:ln>
           <a:extLst>
             <a:ext uri="{C572A759-6A51-4108-AA02-DFA0A04FC94B}">
-              <ma14:wrappingTextBoxFlag xmlns:ma14="http://schemas.microsoft.com/office/mac/drawingml/2011/main" xmlns:a14="http://schemas.microsoft.com/office/drawing/2010/main" xmlns:m="http://schemas.openxmlformats.org/officeDocument/2006/math" xmlns="" val="1"/>
+              <ma14:wrappingTextBoxFlag xmlns="" xmlns:m="http://schemas.openxmlformats.org/officeDocument/2006/math" xmlns:a14="http://schemas.microsoft.com/office/drawing/2010/main" xmlns:ma14="http://schemas.microsoft.com/office/mac/drawingml/2011/main" val="1"/>
             </a:ext>
           </a:extLst>
         </p:spPr>
@@ -4630,7 +4635,7 @@
           </a:ln>
           <a:extLst>
             <a:ext uri="{C572A759-6A51-4108-AA02-DFA0A04FC94B}">
-              <ma14:wrappingTextBoxFlag xmlns:ma14="http://schemas.microsoft.com/office/mac/drawingml/2011/main" xmlns:a14="http://schemas.microsoft.com/office/drawing/2010/main" xmlns:m="http://schemas.openxmlformats.org/officeDocument/2006/math" xmlns="" val="1"/>
+              <ma14:wrappingTextBoxFlag xmlns="" xmlns:m="http://schemas.openxmlformats.org/officeDocument/2006/math" xmlns:a14="http://schemas.microsoft.com/office/drawing/2010/main" xmlns:ma14="http://schemas.microsoft.com/office/mac/drawingml/2011/main" val="1"/>
             </a:ext>
           </a:extLst>
         </p:spPr>
@@ -4677,7 +4682,7 @@
           </a:ln>
           <a:extLst>
             <a:ext uri="{C572A759-6A51-4108-AA02-DFA0A04FC94B}">
-              <ma14:wrappingTextBoxFlag xmlns:ma14="http://schemas.microsoft.com/office/mac/drawingml/2011/main" xmlns:a14="http://schemas.microsoft.com/office/drawing/2010/main" xmlns:m="http://schemas.openxmlformats.org/officeDocument/2006/math" xmlns="" val="1"/>
+              <ma14:wrappingTextBoxFlag xmlns="" xmlns:m="http://schemas.openxmlformats.org/officeDocument/2006/math" xmlns:a14="http://schemas.microsoft.com/office/drawing/2010/main" xmlns:ma14="http://schemas.microsoft.com/office/mac/drawingml/2011/main" val="1"/>
             </a:ext>
           </a:extLst>
         </p:spPr>
@@ -4752,7 +4757,7 @@
           </a:ln>
           <a:extLst>
             <a:ext uri="{C572A759-6A51-4108-AA02-DFA0A04FC94B}">
-              <ma14:wrappingTextBoxFlag xmlns:ma14="http://schemas.microsoft.com/office/mac/drawingml/2011/main" xmlns:a14="http://schemas.microsoft.com/office/drawing/2010/main" xmlns:m="http://schemas.openxmlformats.org/officeDocument/2006/math" xmlns="" val="1"/>
+              <ma14:wrappingTextBoxFlag xmlns="" xmlns:m="http://schemas.openxmlformats.org/officeDocument/2006/math" xmlns:a14="http://schemas.microsoft.com/office/drawing/2010/main" xmlns:ma14="http://schemas.microsoft.com/office/mac/drawingml/2011/main" val="1"/>
             </a:ext>
           </a:extLst>
         </p:spPr>
@@ -4799,7 +4804,7 @@
           </a:ln>
           <a:extLst>
             <a:ext uri="{C572A759-6A51-4108-AA02-DFA0A04FC94B}">
-              <ma14:wrappingTextBoxFlag xmlns:ma14="http://schemas.microsoft.com/office/mac/drawingml/2011/main" xmlns:a14="http://schemas.microsoft.com/office/drawing/2010/main" xmlns:m="http://schemas.openxmlformats.org/officeDocument/2006/math" xmlns="" val="1"/>
+              <ma14:wrappingTextBoxFlag xmlns="" xmlns:m="http://schemas.openxmlformats.org/officeDocument/2006/math" xmlns:a14="http://schemas.microsoft.com/office/drawing/2010/main" xmlns:ma14="http://schemas.microsoft.com/office/mac/drawingml/2011/main" val="1"/>
             </a:ext>
           </a:extLst>
         </p:spPr>
@@ -4846,7 +4851,7 @@
           </a:ln>
           <a:extLst>
             <a:ext uri="{C572A759-6A51-4108-AA02-DFA0A04FC94B}">
-              <ma14:wrappingTextBoxFlag xmlns:ma14="http://schemas.microsoft.com/office/mac/drawingml/2011/main" xmlns:a14="http://schemas.microsoft.com/office/drawing/2010/main" xmlns:m="http://schemas.openxmlformats.org/officeDocument/2006/math" xmlns="" val="1"/>
+              <ma14:wrappingTextBoxFlag xmlns="" xmlns:m="http://schemas.openxmlformats.org/officeDocument/2006/math" xmlns:a14="http://schemas.microsoft.com/office/drawing/2010/main" xmlns:ma14="http://schemas.microsoft.com/office/mac/drawingml/2011/main" val="1"/>
             </a:ext>
           </a:extLst>
         </p:spPr>
@@ -4927,7 +4932,7 @@
           </a:ln>
           <a:extLst>
             <a:ext uri="{C572A759-6A51-4108-AA02-DFA0A04FC94B}">
-              <ma14:wrappingTextBoxFlag xmlns:ma14="http://schemas.microsoft.com/office/mac/drawingml/2011/main" xmlns:a14="http://schemas.microsoft.com/office/drawing/2010/main" xmlns:m="http://schemas.openxmlformats.org/officeDocument/2006/math" xmlns="" val="1"/>
+              <ma14:wrappingTextBoxFlag xmlns="" xmlns:m="http://schemas.openxmlformats.org/officeDocument/2006/math" xmlns:a14="http://schemas.microsoft.com/office/drawing/2010/main" xmlns:ma14="http://schemas.microsoft.com/office/mac/drawingml/2011/main" val="1"/>
             </a:ext>
           </a:extLst>
         </p:spPr>
@@ -5003,7 +5008,7 @@
           </a:ln>
           <a:extLst>
             <a:ext uri="{C572A759-6A51-4108-AA02-DFA0A04FC94B}">
-              <ma14:wrappingTextBoxFlag xmlns:ma14="http://schemas.microsoft.com/office/mac/drawingml/2011/main" xmlns:a14="http://schemas.microsoft.com/office/drawing/2010/main" xmlns:m="http://schemas.openxmlformats.org/officeDocument/2006/math" xmlns="" val="1"/>
+              <ma14:wrappingTextBoxFlag xmlns="" xmlns:m="http://schemas.openxmlformats.org/officeDocument/2006/math" xmlns:a14="http://schemas.microsoft.com/office/drawing/2010/main" xmlns:ma14="http://schemas.microsoft.com/office/mac/drawingml/2011/main" val="1"/>
             </a:ext>
           </a:extLst>
         </p:spPr>
@@ -5050,7 +5055,7 @@
           </a:ln>
           <a:extLst>
             <a:ext uri="{C572A759-6A51-4108-AA02-DFA0A04FC94B}">
-              <ma14:wrappingTextBoxFlag xmlns:ma14="http://schemas.microsoft.com/office/mac/drawingml/2011/main" xmlns:a14="http://schemas.microsoft.com/office/drawing/2010/main" xmlns:m="http://schemas.openxmlformats.org/officeDocument/2006/math" xmlns="" val="1"/>
+              <ma14:wrappingTextBoxFlag xmlns="" xmlns:m="http://schemas.openxmlformats.org/officeDocument/2006/math" xmlns:a14="http://schemas.microsoft.com/office/drawing/2010/main" xmlns:ma14="http://schemas.microsoft.com/office/mac/drawingml/2011/main" val="1"/>
             </a:ext>
           </a:extLst>
         </p:spPr>
@@ -5159,7 +5164,7 @@
           </a:ln>
           <a:extLst>
             <a:ext uri="{C572A759-6A51-4108-AA02-DFA0A04FC94B}">
-              <ma14:wrappingTextBoxFlag xmlns:ma14="http://schemas.microsoft.com/office/mac/drawingml/2011/main" xmlns:a14="http://schemas.microsoft.com/office/drawing/2010/main" xmlns:m="http://schemas.openxmlformats.org/officeDocument/2006/math" xmlns="" val="1"/>
+              <ma14:wrappingTextBoxFlag xmlns="" xmlns:m="http://schemas.openxmlformats.org/officeDocument/2006/math" xmlns:a14="http://schemas.microsoft.com/office/drawing/2010/main" xmlns:ma14="http://schemas.microsoft.com/office/mac/drawingml/2011/main" val="1"/>
             </a:ext>
           </a:extLst>
         </p:spPr>
@@ -5206,7 +5211,7 @@
           </a:ln>
           <a:extLst>
             <a:ext uri="{C572A759-6A51-4108-AA02-DFA0A04FC94B}">
-              <ma14:wrappingTextBoxFlag xmlns:ma14="http://schemas.microsoft.com/office/mac/drawingml/2011/main" xmlns:a14="http://schemas.microsoft.com/office/drawing/2010/main" xmlns:m="http://schemas.openxmlformats.org/officeDocument/2006/math" xmlns="" val="1"/>
+              <ma14:wrappingTextBoxFlag xmlns="" xmlns:m="http://schemas.openxmlformats.org/officeDocument/2006/math" xmlns:a14="http://schemas.microsoft.com/office/drawing/2010/main" xmlns:ma14="http://schemas.microsoft.com/office/mac/drawingml/2011/main" val="1"/>
             </a:ext>
           </a:extLst>
         </p:spPr>
@@ -5315,7 +5320,7 @@
           </a:ln>
           <a:extLst>
             <a:ext uri="{C572A759-6A51-4108-AA02-DFA0A04FC94B}">
-              <ma14:wrappingTextBoxFlag xmlns:ma14="http://schemas.microsoft.com/office/mac/drawingml/2011/main" xmlns:a14="http://schemas.microsoft.com/office/drawing/2010/main" xmlns:m="http://schemas.openxmlformats.org/officeDocument/2006/math" xmlns="" val="1"/>
+              <ma14:wrappingTextBoxFlag xmlns="" xmlns:m="http://schemas.openxmlformats.org/officeDocument/2006/math" xmlns:a14="http://schemas.microsoft.com/office/drawing/2010/main" xmlns:ma14="http://schemas.microsoft.com/office/mac/drawingml/2011/main" val="1"/>
             </a:ext>
           </a:extLst>
         </p:spPr>
@@ -5362,7 +5367,7 @@
           </a:ln>
           <a:extLst>
             <a:ext uri="{C572A759-6A51-4108-AA02-DFA0A04FC94B}">
-              <ma14:wrappingTextBoxFlag xmlns:ma14="http://schemas.microsoft.com/office/mac/drawingml/2011/main" xmlns:a14="http://schemas.microsoft.com/office/drawing/2010/main" xmlns:m="http://schemas.openxmlformats.org/officeDocument/2006/math" xmlns="" val="1"/>
+              <ma14:wrappingTextBoxFlag xmlns="" xmlns:m="http://schemas.openxmlformats.org/officeDocument/2006/math" xmlns:a14="http://schemas.microsoft.com/office/drawing/2010/main" xmlns:ma14="http://schemas.microsoft.com/office/mac/drawingml/2011/main" val="1"/>
             </a:ext>
           </a:extLst>
         </p:spPr>
@@ -5471,7 +5476,7 @@
           </a:ln>
           <a:extLst>
             <a:ext uri="{C572A759-6A51-4108-AA02-DFA0A04FC94B}">
-              <ma14:wrappingTextBoxFlag xmlns:ma14="http://schemas.microsoft.com/office/mac/drawingml/2011/main" xmlns:a14="http://schemas.microsoft.com/office/drawing/2010/main" xmlns:m="http://schemas.openxmlformats.org/officeDocument/2006/math" xmlns="" val="1"/>
+              <ma14:wrappingTextBoxFlag xmlns="" xmlns:m="http://schemas.openxmlformats.org/officeDocument/2006/math" xmlns:a14="http://schemas.microsoft.com/office/drawing/2010/main" xmlns:ma14="http://schemas.microsoft.com/office/mac/drawingml/2011/main" val="1"/>
             </a:ext>
           </a:extLst>
         </p:spPr>
@@ -5518,7 +5523,7 @@
           </a:ln>
           <a:extLst>
             <a:ext uri="{C572A759-6A51-4108-AA02-DFA0A04FC94B}">
-              <ma14:wrappingTextBoxFlag xmlns:ma14="http://schemas.microsoft.com/office/mac/drawingml/2011/main" xmlns:a14="http://schemas.microsoft.com/office/drawing/2010/main" xmlns:m="http://schemas.openxmlformats.org/officeDocument/2006/math" xmlns="" val="1"/>
+              <ma14:wrappingTextBoxFlag xmlns="" xmlns:m="http://schemas.openxmlformats.org/officeDocument/2006/math" xmlns:a14="http://schemas.microsoft.com/office/drawing/2010/main" xmlns:ma14="http://schemas.microsoft.com/office/mac/drawingml/2011/main" val="1"/>
             </a:ext>
           </a:extLst>
         </p:spPr>
@@ -5627,7 +5632,7 @@
           </a:ln>
           <a:extLst>
             <a:ext uri="{C572A759-6A51-4108-AA02-DFA0A04FC94B}">
-              <ma14:wrappingTextBoxFlag xmlns:ma14="http://schemas.microsoft.com/office/mac/drawingml/2011/main" xmlns:a14="http://schemas.microsoft.com/office/drawing/2010/main" xmlns:m="http://schemas.openxmlformats.org/officeDocument/2006/math" xmlns="" val="1"/>
+              <ma14:wrappingTextBoxFlag xmlns="" xmlns:m="http://schemas.openxmlformats.org/officeDocument/2006/math" xmlns:a14="http://schemas.microsoft.com/office/drawing/2010/main" xmlns:ma14="http://schemas.microsoft.com/office/mac/drawingml/2011/main" val="1"/>
             </a:ext>
           </a:extLst>
         </p:spPr>
@@ -5674,7 +5679,7 @@
           </a:ln>
           <a:extLst>
             <a:ext uri="{C572A759-6A51-4108-AA02-DFA0A04FC94B}">
-              <ma14:wrappingTextBoxFlag xmlns:ma14="http://schemas.microsoft.com/office/mac/drawingml/2011/main" xmlns:a14="http://schemas.microsoft.com/office/drawing/2010/main" xmlns:m="http://schemas.openxmlformats.org/officeDocument/2006/math" xmlns="" val="1"/>
+              <ma14:wrappingTextBoxFlag xmlns="" xmlns:m="http://schemas.openxmlformats.org/officeDocument/2006/math" xmlns:a14="http://schemas.microsoft.com/office/drawing/2010/main" xmlns:ma14="http://schemas.microsoft.com/office/mac/drawingml/2011/main" val="1"/>
             </a:ext>
           </a:extLst>
         </p:spPr>
@@ -5721,7 +5726,7 @@
           </a:ln>
           <a:extLst>
             <a:ext uri="{C572A759-6A51-4108-AA02-DFA0A04FC94B}">
-              <ma14:wrappingTextBoxFlag xmlns:ma14="http://schemas.microsoft.com/office/mac/drawingml/2011/main" xmlns:a14="http://schemas.microsoft.com/office/drawing/2010/main" xmlns:m="http://schemas.openxmlformats.org/officeDocument/2006/math" xmlns="" val="1"/>
+              <ma14:wrappingTextBoxFlag xmlns="" xmlns:m="http://schemas.openxmlformats.org/officeDocument/2006/math" xmlns:a14="http://schemas.microsoft.com/office/drawing/2010/main" xmlns:ma14="http://schemas.microsoft.com/office/mac/drawingml/2011/main" val="1"/>
             </a:ext>
           </a:extLst>
         </p:spPr>
@@ -5768,7 +5773,7 @@
           </a:ln>
           <a:extLst>
             <a:ext uri="{C572A759-6A51-4108-AA02-DFA0A04FC94B}">
-              <ma14:wrappingTextBoxFlag xmlns:ma14="http://schemas.microsoft.com/office/mac/drawingml/2011/main" xmlns:a14="http://schemas.microsoft.com/office/drawing/2010/main" xmlns:m="http://schemas.openxmlformats.org/officeDocument/2006/math" xmlns="" val="1"/>
+              <ma14:wrappingTextBoxFlag xmlns="" xmlns:m="http://schemas.openxmlformats.org/officeDocument/2006/math" xmlns:a14="http://schemas.microsoft.com/office/drawing/2010/main" xmlns:ma14="http://schemas.microsoft.com/office/mac/drawingml/2011/main" val="1"/>
             </a:ext>
           </a:extLst>
         </p:spPr>
@@ -5844,7 +5849,7 @@
           </a:ln>
           <a:extLst>
             <a:ext uri="{C572A759-6A51-4108-AA02-DFA0A04FC94B}">
-              <ma14:wrappingTextBoxFlag xmlns:ma14="http://schemas.microsoft.com/office/mac/drawingml/2011/main" xmlns:a14="http://schemas.microsoft.com/office/drawing/2010/main" xmlns:m="http://schemas.openxmlformats.org/officeDocument/2006/math" xmlns="" val="1"/>
+              <ma14:wrappingTextBoxFlag xmlns="" xmlns:m="http://schemas.openxmlformats.org/officeDocument/2006/math" xmlns:a14="http://schemas.microsoft.com/office/drawing/2010/main" xmlns:ma14="http://schemas.microsoft.com/office/mac/drawingml/2011/main" val="1"/>
             </a:ext>
           </a:extLst>
         </p:spPr>
@@ -5891,7 +5896,7 @@
           </a:ln>
           <a:extLst>
             <a:ext uri="{C572A759-6A51-4108-AA02-DFA0A04FC94B}">
-              <ma14:wrappingTextBoxFlag xmlns:ma14="http://schemas.microsoft.com/office/mac/drawingml/2011/main" xmlns:a14="http://schemas.microsoft.com/office/drawing/2010/main" xmlns:m="http://schemas.openxmlformats.org/officeDocument/2006/math" xmlns="" val="1"/>
+              <ma14:wrappingTextBoxFlag xmlns="" xmlns:m="http://schemas.openxmlformats.org/officeDocument/2006/math" xmlns:a14="http://schemas.microsoft.com/office/drawing/2010/main" xmlns:ma14="http://schemas.microsoft.com/office/mac/drawingml/2011/main" val="1"/>
             </a:ext>
           </a:extLst>
         </p:spPr>
@@ -5953,7 +5958,7 @@
           </a:ln>
           <a:extLst>
             <a:ext uri="{C572A759-6A51-4108-AA02-DFA0A04FC94B}">
-              <ma14:wrappingTextBoxFlag xmlns:ma14="http://schemas.microsoft.com/office/mac/drawingml/2011/main" xmlns:a14="http://schemas.microsoft.com/office/drawing/2010/main" xmlns:m="http://schemas.openxmlformats.org/officeDocument/2006/math" xmlns="" val="1"/>
+              <ma14:wrappingTextBoxFlag xmlns="" xmlns:m="http://schemas.openxmlformats.org/officeDocument/2006/math" xmlns:a14="http://schemas.microsoft.com/office/drawing/2010/main" xmlns:ma14="http://schemas.microsoft.com/office/mac/drawingml/2011/main" val="1"/>
             </a:ext>
           </a:extLst>
         </p:spPr>
@@ -6025,7 +6030,7 @@
           </a:ln>
           <a:extLst>
             <a:ext uri="{C572A759-6A51-4108-AA02-DFA0A04FC94B}">
-              <ma14:wrappingTextBoxFlag xmlns:ma14="http://schemas.microsoft.com/office/mac/drawingml/2011/main" xmlns:a14="http://schemas.microsoft.com/office/drawing/2010/main" xmlns:m="http://schemas.openxmlformats.org/officeDocument/2006/math" xmlns="" val="1"/>
+              <ma14:wrappingTextBoxFlag xmlns="" xmlns:m="http://schemas.openxmlformats.org/officeDocument/2006/math" xmlns:a14="http://schemas.microsoft.com/office/drawing/2010/main" xmlns:ma14="http://schemas.microsoft.com/office/mac/drawingml/2011/main" val="1"/>
             </a:ext>
           </a:extLst>
         </p:spPr>
@@ -6072,7 +6077,7 @@
           </a:ln>
           <a:extLst>
             <a:ext uri="{C572A759-6A51-4108-AA02-DFA0A04FC94B}">
-              <ma14:wrappingTextBoxFlag xmlns:ma14="http://schemas.microsoft.com/office/mac/drawingml/2011/main" xmlns:a14="http://schemas.microsoft.com/office/drawing/2010/main" xmlns:m="http://schemas.openxmlformats.org/officeDocument/2006/math" xmlns="" val="1"/>
+              <ma14:wrappingTextBoxFlag xmlns="" xmlns:m="http://schemas.openxmlformats.org/officeDocument/2006/math" xmlns:a14="http://schemas.microsoft.com/office/drawing/2010/main" xmlns:ma14="http://schemas.microsoft.com/office/mac/drawingml/2011/main" val="1"/>
             </a:ext>
           </a:extLst>
         </p:spPr>
@@ -6134,7 +6139,7 @@
           </a:ln>
           <a:extLst>
             <a:ext uri="{C572A759-6A51-4108-AA02-DFA0A04FC94B}">
-              <ma14:wrappingTextBoxFlag xmlns:ma14="http://schemas.microsoft.com/office/mac/drawingml/2011/main" xmlns:a14="http://schemas.microsoft.com/office/drawing/2010/main" xmlns:m="http://schemas.openxmlformats.org/officeDocument/2006/math" xmlns="" val="1"/>
+              <ma14:wrappingTextBoxFlag xmlns="" xmlns:m="http://schemas.openxmlformats.org/officeDocument/2006/math" xmlns:a14="http://schemas.microsoft.com/office/drawing/2010/main" xmlns:ma14="http://schemas.microsoft.com/office/mac/drawingml/2011/main" val="1"/>
             </a:ext>
           </a:extLst>
         </p:spPr>
@@ -6206,7 +6211,7 @@
           </a:ln>
           <a:extLst>
             <a:ext uri="{C572A759-6A51-4108-AA02-DFA0A04FC94B}">
-              <ma14:wrappingTextBoxFlag xmlns:ma14="http://schemas.microsoft.com/office/mac/drawingml/2011/main" xmlns:a14="http://schemas.microsoft.com/office/drawing/2010/main" xmlns:m="http://schemas.openxmlformats.org/officeDocument/2006/math" xmlns="" val="1"/>
+              <ma14:wrappingTextBoxFlag xmlns="" xmlns:m="http://schemas.openxmlformats.org/officeDocument/2006/math" xmlns:a14="http://schemas.microsoft.com/office/drawing/2010/main" xmlns:ma14="http://schemas.microsoft.com/office/mac/drawingml/2011/main" val="1"/>
             </a:ext>
           </a:extLst>
         </p:spPr>
@@ -6253,7 +6258,7 @@
           </a:ln>
           <a:extLst>
             <a:ext uri="{C572A759-6A51-4108-AA02-DFA0A04FC94B}">
-              <ma14:wrappingTextBoxFlag xmlns:ma14="http://schemas.microsoft.com/office/mac/drawingml/2011/main" xmlns:a14="http://schemas.microsoft.com/office/drawing/2010/main" xmlns:m="http://schemas.openxmlformats.org/officeDocument/2006/math" xmlns="" val="1"/>
+              <ma14:wrappingTextBoxFlag xmlns="" xmlns:m="http://schemas.openxmlformats.org/officeDocument/2006/math" xmlns:a14="http://schemas.microsoft.com/office/drawing/2010/main" xmlns:ma14="http://schemas.microsoft.com/office/mac/drawingml/2011/main" val="1"/>
             </a:ext>
           </a:extLst>
         </p:spPr>
@@ -6315,7 +6320,7 @@
           </a:ln>
           <a:extLst>
             <a:ext uri="{C572A759-6A51-4108-AA02-DFA0A04FC94B}">
-              <ma14:wrappingTextBoxFlag xmlns:ma14="http://schemas.microsoft.com/office/mac/drawingml/2011/main" xmlns:a14="http://schemas.microsoft.com/office/drawing/2010/main" xmlns:m="http://schemas.openxmlformats.org/officeDocument/2006/math" xmlns="" val="1"/>
+              <ma14:wrappingTextBoxFlag xmlns="" xmlns:m="http://schemas.openxmlformats.org/officeDocument/2006/math" xmlns:a14="http://schemas.microsoft.com/office/drawing/2010/main" xmlns:ma14="http://schemas.microsoft.com/office/mac/drawingml/2011/main" val="1"/>
             </a:ext>
           </a:extLst>
         </p:spPr>
@@ -6387,7 +6392,7 @@
           </a:ln>
           <a:extLst>
             <a:ext uri="{C572A759-6A51-4108-AA02-DFA0A04FC94B}">
-              <ma14:wrappingTextBoxFlag xmlns:ma14="http://schemas.microsoft.com/office/mac/drawingml/2011/main" xmlns:a14="http://schemas.microsoft.com/office/drawing/2010/main" xmlns:m="http://schemas.openxmlformats.org/officeDocument/2006/math" xmlns="" val="1"/>
+              <ma14:wrappingTextBoxFlag xmlns="" xmlns:m="http://schemas.openxmlformats.org/officeDocument/2006/math" xmlns:a14="http://schemas.microsoft.com/office/drawing/2010/main" xmlns:ma14="http://schemas.microsoft.com/office/mac/drawingml/2011/main" val="1"/>
             </a:ext>
           </a:extLst>
         </p:spPr>
@@ -6434,7 +6439,7 @@
           </a:ln>
           <a:extLst>
             <a:ext uri="{C572A759-6A51-4108-AA02-DFA0A04FC94B}">
-              <ma14:wrappingTextBoxFlag xmlns:ma14="http://schemas.microsoft.com/office/mac/drawingml/2011/main" xmlns:a14="http://schemas.microsoft.com/office/drawing/2010/main" xmlns:m="http://schemas.openxmlformats.org/officeDocument/2006/math" xmlns="" val="1"/>
+              <ma14:wrappingTextBoxFlag xmlns="" xmlns:m="http://schemas.openxmlformats.org/officeDocument/2006/math" xmlns:a14="http://schemas.microsoft.com/office/drawing/2010/main" xmlns:ma14="http://schemas.microsoft.com/office/mac/drawingml/2011/main" val="1"/>
             </a:ext>
           </a:extLst>
         </p:spPr>
@@ -6496,7 +6501,7 @@
           </a:ln>
           <a:extLst>
             <a:ext uri="{C572A759-6A51-4108-AA02-DFA0A04FC94B}">
-              <ma14:wrappingTextBoxFlag xmlns:ma14="http://schemas.microsoft.com/office/mac/drawingml/2011/main" xmlns:a14="http://schemas.microsoft.com/office/drawing/2010/main" xmlns:m="http://schemas.openxmlformats.org/officeDocument/2006/math" xmlns="" val="1"/>
+              <ma14:wrappingTextBoxFlag xmlns="" xmlns:m="http://schemas.openxmlformats.org/officeDocument/2006/math" xmlns:a14="http://schemas.microsoft.com/office/drawing/2010/main" xmlns:ma14="http://schemas.microsoft.com/office/mac/drawingml/2011/main" val="1"/>
             </a:ext>
           </a:extLst>
         </p:spPr>
@@ -6568,7 +6573,7 @@
           </a:ln>
           <a:extLst>
             <a:ext uri="{C572A759-6A51-4108-AA02-DFA0A04FC94B}">
-              <ma14:wrappingTextBoxFlag xmlns:ma14="http://schemas.microsoft.com/office/mac/drawingml/2011/main" xmlns:a14="http://schemas.microsoft.com/office/drawing/2010/main" xmlns:m="http://schemas.openxmlformats.org/officeDocument/2006/math" xmlns="" val="1"/>
+              <ma14:wrappingTextBoxFlag xmlns="" xmlns:m="http://schemas.openxmlformats.org/officeDocument/2006/math" xmlns:a14="http://schemas.microsoft.com/office/drawing/2010/main" xmlns:ma14="http://schemas.microsoft.com/office/mac/drawingml/2011/main" val="1"/>
             </a:ext>
           </a:extLst>
         </p:spPr>
@@ -6615,7 +6620,7 @@
           </a:ln>
           <a:extLst>
             <a:ext uri="{C572A759-6A51-4108-AA02-DFA0A04FC94B}">
-              <ma14:wrappingTextBoxFlag xmlns:ma14="http://schemas.microsoft.com/office/mac/drawingml/2011/main" xmlns:a14="http://schemas.microsoft.com/office/drawing/2010/main" xmlns:m="http://schemas.openxmlformats.org/officeDocument/2006/math" xmlns="" val="1"/>
+              <ma14:wrappingTextBoxFlag xmlns="" xmlns:m="http://schemas.openxmlformats.org/officeDocument/2006/math" xmlns:a14="http://schemas.microsoft.com/office/drawing/2010/main" xmlns:ma14="http://schemas.microsoft.com/office/mac/drawingml/2011/main" val="1"/>
             </a:ext>
           </a:extLst>
         </p:spPr>
@@ -6677,7 +6682,7 @@
           </a:ln>
           <a:extLst>
             <a:ext uri="{C572A759-6A51-4108-AA02-DFA0A04FC94B}">
-              <ma14:wrappingTextBoxFlag xmlns:ma14="http://schemas.microsoft.com/office/mac/drawingml/2011/main" xmlns:a14="http://schemas.microsoft.com/office/drawing/2010/main" xmlns:m="http://schemas.openxmlformats.org/officeDocument/2006/math" xmlns="" val="1"/>
+              <ma14:wrappingTextBoxFlag xmlns="" xmlns:m="http://schemas.openxmlformats.org/officeDocument/2006/math" xmlns:a14="http://schemas.microsoft.com/office/drawing/2010/main" xmlns:ma14="http://schemas.microsoft.com/office/mac/drawingml/2011/main" val="1"/>
             </a:ext>
           </a:extLst>
         </p:spPr>
@@ -6749,7 +6754,7 @@
           </a:ln>
           <a:extLst>
             <a:ext uri="{C572A759-6A51-4108-AA02-DFA0A04FC94B}">
-              <ma14:wrappingTextBoxFlag xmlns:ma14="http://schemas.microsoft.com/office/mac/drawingml/2011/main" xmlns:a14="http://schemas.microsoft.com/office/drawing/2010/main" xmlns:m="http://schemas.openxmlformats.org/officeDocument/2006/math" xmlns="" val="1"/>
+              <ma14:wrappingTextBoxFlag xmlns="" xmlns:m="http://schemas.openxmlformats.org/officeDocument/2006/math" xmlns:a14="http://schemas.microsoft.com/office/drawing/2010/main" xmlns:ma14="http://schemas.microsoft.com/office/mac/drawingml/2011/main" val="1"/>
             </a:ext>
           </a:extLst>
         </p:spPr>
@@ -6796,7 +6801,7 @@
           </a:ln>
           <a:extLst>
             <a:ext uri="{C572A759-6A51-4108-AA02-DFA0A04FC94B}">
-              <ma14:wrappingTextBoxFlag xmlns:ma14="http://schemas.microsoft.com/office/mac/drawingml/2011/main" xmlns:a14="http://schemas.microsoft.com/office/drawing/2010/main" xmlns:m="http://schemas.openxmlformats.org/officeDocument/2006/math" xmlns="" val="1"/>
+              <ma14:wrappingTextBoxFlag xmlns="" xmlns:m="http://schemas.openxmlformats.org/officeDocument/2006/math" xmlns:a14="http://schemas.microsoft.com/office/drawing/2010/main" xmlns:ma14="http://schemas.microsoft.com/office/mac/drawingml/2011/main" val="1"/>
             </a:ext>
           </a:extLst>
         </p:spPr>
@@ -6889,7 +6894,7 @@
           </a:ln>
           <a:extLst>
             <a:ext uri="{C572A759-6A51-4108-AA02-DFA0A04FC94B}">
-              <ma14:wrappingTextBoxFlag xmlns:ma14="http://schemas.microsoft.com/office/mac/drawingml/2011/main" xmlns:a14="http://schemas.microsoft.com/office/drawing/2010/main" xmlns:m="http://schemas.openxmlformats.org/officeDocument/2006/math" xmlns="" val="1"/>
+              <ma14:wrappingTextBoxFlag xmlns="" xmlns:m="http://schemas.openxmlformats.org/officeDocument/2006/math" xmlns:a14="http://schemas.microsoft.com/office/drawing/2010/main" xmlns:ma14="http://schemas.microsoft.com/office/mac/drawingml/2011/main" val="1"/>
             </a:ext>
           </a:extLst>
         </p:spPr>
@@ -6936,7 +6941,7 @@
           </a:ln>
           <a:extLst>
             <a:ext uri="{C572A759-6A51-4108-AA02-DFA0A04FC94B}">
-              <ma14:wrappingTextBoxFlag xmlns:ma14="http://schemas.microsoft.com/office/mac/drawingml/2011/main" xmlns:a14="http://schemas.microsoft.com/office/drawing/2010/main" xmlns:m="http://schemas.openxmlformats.org/officeDocument/2006/math" xmlns="" val="1"/>
+              <ma14:wrappingTextBoxFlag xmlns="" xmlns:m="http://schemas.openxmlformats.org/officeDocument/2006/math" xmlns:a14="http://schemas.microsoft.com/office/drawing/2010/main" xmlns:ma14="http://schemas.microsoft.com/office/mac/drawingml/2011/main" val="1"/>
             </a:ext>
           </a:extLst>
         </p:spPr>
@@ -7090,7 +7095,7 @@
           </a:ln>
           <a:extLst>
             <a:ext uri="{C572A759-6A51-4108-AA02-DFA0A04FC94B}">
-              <ma14:wrappingTextBoxFlag xmlns:ma14="http://schemas.microsoft.com/office/mac/drawingml/2011/main" xmlns:a14="http://schemas.microsoft.com/office/drawing/2010/main" xmlns:m="http://schemas.openxmlformats.org/officeDocument/2006/math" xmlns="" val="1"/>
+              <ma14:wrappingTextBoxFlag xmlns="" xmlns:m="http://schemas.openxmlformats.org/officeDocument/2006/math" xmlns:a14="http://schemas.microsoft.com/office/drawing/2010/main" xmlns:ma14="http://schemas.microsoft.com/office/mac/drawingml/2011/main" val="1"/>
             </a:ext>
           </a:extLst>
         </p:spPr>
@@ -7166,7 +7171,7 @@
           </a:ln>
           <a:extLst>
             <a:ext uri="{C572A759-6A51-4108-AA02-DFA0A04FC94B}">
-              <ma14:wrappingTextBoxFlag xmlns:ma14="http://schemas.microsoft.com/office/mac/drawingml/2011/main" xmlns:a14="http://schemas.microsoft.com/office/drawing/2010/main" xmlns:m="http://schemas.openxmlformats.org/officeDocument/2006/math" xmlns="" val="1"/>
+              <ma14:wrappingTextBoxFlag xmlns="" xmlns:m="http://schemas.openxmlformats.org/officeDocument/2006/math" xmlns:a14="http://schemas.microsoft.com/office/drawing/2010/main" xmlns:ma14="http://schemas.microsoft.com/office/mac/drawingml/2011/main" val="1"/>
             </a:ext>
           </a:extLst>
         </p:spPr>
@@ -7242,7 +7247,7 @@
           </a:ln>
           <a:extLst>
             <a:ext uri="{C572A759-6A51-4108-AA02-DFA0A04FC94B}">
-              <ma14:wrappingTextBoxFlag xmlns:ma14="http://schemas.microsoft.com/office/mac/drawingml/2011/main" xmlns:a14="http://schemas.microsoft.com/office/drawing/2010/main" xmlns:m="http://schemas.openxmlformats.org/officeDocument/2006/math" xmlns="" val="1"/>
+              <ma14:wrappingTextBoxFlag xmlns="" xmlns:m="http://schemas.openxmlformats.org/officeDocument/2006/math" xmlns:a14="http://schemas.microsoft.com/office/drawing/2010/main" xmlns:ma14="http://schemas.microsoft.com/office/mac/drawingml/2011/main" val="1"/>
             </a:ext>
           </a:extLst>
         </p:spPr>
@@ -7318,7 +7323,7 @@
           </a:ln>
           <a:extLst>
             <a:ext uri="{C572A759-6A51-4108-AA02-DFA0A04FC94B}">
-              <ma14:wrappingTextBoxFlag xmlns:ma14="http://schemas.microsoft.com/office/mac/drawingml/2011/main" xmlns:a14="http://schemas.microsoft.com/office/drawing/2010/main" xmlns:m="http://schemas.openxmlformats.org/officeDocument/2006/math" xmlns="" val="1"/>
+              <ma14:wrappingTextBoxFlag xmlns="" xmlns:m="http://schemas.openxmlformats.org/officeDocument/2006/math" xmlns:a14="http://schemas.microsoft.com/office/drawing/2010/main" xmlns:ma14="http://schemas.microsoft.com/office/mac/drawingml/2011/main" val="1"/>
             </a:ext>
           </a:extLst>
         </p:spPr>
@@ -7393,7 +7398,7 @@
           </a:ln>
           <a:extLst>
             <a:ext uri="{C572A759-6A51-4108-AA02-DFA0A04FC94B}">
-              <ma14:wrappingTextBoxFlag xmlns:ma14="http://schemas.microsoft.com/office/mac/drawingml/2011/main" xmlns:a14="http://schemas.microsoft.com/office/drawing/2010/main" xmlns:m="http://schemas.openxmlformats.org/officeDocument/2006/math" xmlns="" val="1"/>
+              <ma14:wrappingTextBoxFlag xmlns="" xmlns:m="http://schemas.openxmlformats.org/officeDocument/2006/math" xmlns:a14="http://schemas.microsoft.com/office/drawing/2010/main" xmlns:ma14="http://schemas.microsoft.com/office/mac/drawingml/2011/main" val="1"/>
             </a:ext>
           </a:extLst>
         </p:spPr>
@@ -7440,7 +7445,7 @@
           </a:ln>
           <a:extLst>
             <a:ext uri="{C572A759-6A51-4108-AA02-DFA0A04FC94B}">
-              <ma14:wrappingTextBoxFlag xmlns:ma14="http://schemas.microsoft.com/office/mac/drawingml/2011/main" xmlns:a14="http://schemas.microsoft.com/office/drawing/2010/main" xmlns:m="http://schemas.openxmlformats.org/officeDocument/2006/math" xmlns="" val="1"/>
+              <ma14:wrappingTextBoxFlag xmlns="" xmlns:m="http://schemas.openxmlformats.org/officeDocument/2006/math" xmlns:a14="http://schemas.microsoft.com/office/drawing/2010/main" xmlns:ma14="http://schemas.microsoft.com/office/mac/drawingml/2011/main" val="1"/>
             </a:ext>
           </a:extLst>
         </p:spPr>
@@ -7487,7 +7492,7 @@
           </a:ln>
           <a:extLst>
             <a:ext uri="{C572A759-6A51-4108-AA02-DFA0A04FC94B}">
-              <ma14:wrappingTextBoxFlag xmlns:ma14="http://schemas.microsoft.com/office/mac/drawingml/2011/main" xmlns:a14="http://schemas.microsoft.com/office/drawing/2010/main" xmlns:m="http://schemas.openxmlformats.org/officeDocument/2006/math" xmlns="" val="1"/>
+              <ma14:wrappingTextBoxFlag xmlns="" xmlns:m="http://schemas.openxmlformats.org/officeDocument/2006/math" xmlns:a14="http://schemas.microsoft.com/office/drawing/2010/main" xmlns:ma14="http://schemas.microsoft.com/office/mac/drawingml/2011/main" val="1"/>
             </a:ext>
           </a:extLst>
         </p:spPr>
@@ -7568,7 +7573,7 @@
           </a:ln>
           <a:extLst>
             <a:ext uri="{C572A759-6A51-4108-AA02-DFA0A04FC94B}">
-              <ma14:wrappingTextBoxFlag xmlns:ma14="http://schemas.microsoft.com/office/mac/drawingml/2011/main" xmlns:a14="http://schemas.microsoft.com/office/drawing/2010/main" xmlns:m="http://schemas.openxmlformats.org/officeDocument/2006/math" xmlns="" val="1"/>
+              <ma14:wrappingTextBoxFlag xmlns="" xmlns:m="http://schemas.openxmlformats.org/officeDocument/2006/math" xmlns:a14="http://schemas.microsoft.com/office/drawing/2010/main" xmlns:ma14="http://schemas.microsoft.com/office/mac/drawingml/2011/main" val="1"/>
             </a:ext>
           </a:extLst>
         </p:spPr>
@@ -7644,7 +7649,7 @@
           </a:ln>
           <a:extLst>
             <a:ext uri="{C572A759-6A51-4108-AA02-DFA0A04FC94B}">
-              <ma14:wrappingTextBoxFlag xmlns:ma14="http://schemas.microsoft.com/office/mac/drawingml/2011/main" xmlns:a14="http://schemas.microsoft.com/office/drawing/2010/main" xmlns:m="http://schemas.openxmlformats.org/officeDocument/2006/math" xmlns="" val="1"/>
+              <ma14:wrappingTextBoxFlag xmlns="" xmlns:m="http://schemas.openxmlformats.org/officeDocument/2006/math" xmlns:a14="http://schemas.microsoft.com/office/drawing/2010/main" xmlns:ma14="http://schemas.microsoft.com/office/mac/drawingml/2011/main" val="1"/>
             </a:ext>
           </a:extLst>
         </p:spPr>
@@ -7691,7 +7696,7 @@
           </a:ln>
           <a:extLst>
             <a:ext uri="{C572A759-6A51-4108-AA02-DFA0A04FC94B}">
-              <ma14:wrappingTextBoxFlag xmlns:ma14="http://schemas.microsoft.com/office/mac/drawingml/2011/main" xmlns:a14="http://schemas.microsoft.com/office/drawing/2010/main" xmlns:m="http://schemas.openxmlformats.org/officeDocument/2006/math" xmlns="" val="1"/>
+              <ma14:wrappingTextBoxFlag xmlns="" xmlns:m="http://schemas.openxmlformats.org/officeDocument/2006/math" xmlns:a14="http://schemas.microsoft.com/office/drawing/2010/main" xmlns:ma14="http://schemas.microsoft.com/office/mac/drawingml/2011/main" val="1"/>
             </a:ext>
           </a:extLst>
         </p:spPr>
@@ -7769,7 +7774,7 @@
           </a:ln>
           <a:extLst>
             <a:ext uri="{C572A759-6A51-4108-AA02-DFA0A04FC94B}">
-              <ma14:wrappingTextBoxFlag xmlns:ma14="http://schemas.microsoft.com/office/mac/drawingml/2011/main" xmlns:a14="http://schemas.microsoft.com/office/drawing/2010/main" xmlns:m="http://schemas.openxmlformats.org/officeDocument/2006/math" xmlns="" val="1"/>
+              <ma14:wrappingTextBoxFlag xmlns="" xmlns:m="http://schemas.openxmlformats.org/officeDocument/2006/math" xmlns:a14="http://schemas.microsoft.com/office/drawing/2010/main" xmlns:ma14="http://schemas.microsoft.com/office/mac/drawingml/2011/main" val="1"/>
             </a:ext>
           </a:extLst>
         </p:spPr>
@@ -7847,7 +7852,7 @@
           </a:ln>
           <a:extLst>
             <a:ext uri="{C572A759-6A51-4108-AA02-DFA0A04FC94B}">
-              <ma14:wrappingTextBoxFlag xmlns:ma14="http://schemas.microsoft.com/office/mac/drawingml/2011/main" xmlns:a14="http://schemas.microsoft.com/office/drawing/2010/main" xmlns:m="http://schemas.openxmlformats.org/officeDocument/2006/math" xmlns="" val="1"/>
+              <ma14:wrappingTextBoxFlag xmlns="" xmlns:m="http://schemas.openxmlformats.org/officeDocument/2006/math" xmlns:a14="http://schemas.microsoft.com/office/drawing/2010/main" xmlns:ma14="http://schemas.microsoft.com/office/mac/drawingml/2011/main" val="1"/>
             </a:ext>
           </a:extLst>
         </p:spPr>
@@ -7894,7 +7899,7 @@
           </a:ln>
           <a:extLst>
             <a:ext uri="{C572A759-6A51-4108-AA02-DFA0A04FC94B}">
-              <ma14:wrappingTextBoxFlag xmlns:ma14="http://schemas.microsoft.com/office/mac/drawingml/2011/main" xmlns:a14="http://schemas.microsoft.com/office/drawing/2010/main" xmlns:m="http://schemas.openxmlformats.org/officeDocument/2006/math" xmlns="" val="1"/>
+              <ma14:wrappingTextBoxFlag xmlns="" xmlns:m="http://schemas.openxmlformats.org/officeDocument/2006/math" xmlns:a14="http://schemas.microsoft.com/office/drawing/2010/main" xmlns:ma14="http://schemas.microsoft.com/office/mac/drawingml/2011/main" val="1"/>
             </a:ext>
           </a:extLst>
         </p:spPr>
@@ -7941,7 +7946,7 @@
           </a:ln>
           <a:extLst>
             <a:ext uri="{C572A759-6A51-4108-AA02-DFA0A04FC94B}">
-              <ma14:wrappingTextBoxFlag xmlns:ma14="http://schemas.microsoft.com/office/mac/drawingml/2011/main" xmlns:a14="http://schemas.microsoft.com/office/drawing/2010/main" xmlns:m="http://schemas.openxmlformats.org/officeDocument/2006/math" xmlns="" val="1"/>
+              <ma14:wrappingTextBoxFlag xmlns="" xmlns:m="http://schemas.openxmlformats.org/officeDocument/2006/math" xmlns:a14="http://schemas.microsoft.com/office/drawing/2010/main" xmlns:ma14="http://schemas.microsoft.com/office/mac/drawingml/2011/main" val="1"/>
             </a:ext>
           </a:extLst>
         </p:spPr>
@@ -8050,7 +8055,7 @@
           </a:ln>
           <a:extLst>
             <a:ext uri="{C572A759-6A51-4108-AA02-DFA0A04FC94B}">
-              <ma14:wrappingTextBoxFlag xmlns:ma14="http://schemas.microsoft.com/office/mac/drawingml/2011/main" xmlns:a14="http://schemas.microsoft.com/office/drawing/2010/main" xmlns:m="http://schemas.openxmlformats.org/officeDocument/2006/math" xmlns="" val="1"/>
+              <ma14:wrappingTextBoxFlag xmlns="" xmlns:m="http://schemas.openxmlformats.org/officeDocument/2006/math" xmlns:a14="http://schemas.microsoft.com/office/drawing/2010/main" xmlns:ma14="http://schemas.microsoft.com/office/mac/drawingml/2011/main" val="1"/>
             </a:ext>
           </a:extLst>
         </p:spPr>
@@ -8097,7 +8102,7 @@
           </a:ln>
           <a:extLst>
             <a:ext uri="{C572A759-6A51-4108-AA02-DFA0A04FC94B}">
-              <ma14:wrappingTextBoxFlag xmlns:ma14="http://schemas.microsoft.com/office/mac/drawingml/2011/main" xmlns:a14="http://schemas.microsoft.com/office/drawing/2010/main" xmlns:m="http://schemas.openxmlformats.org/officeDocument/2006/math" xmlns="" val="1"/>
+              <ma14:wrappingTextBoxFlag xmlns="" xmlns:m="http://schemas.openxmlformats.org/officeDocument/2006/math" xmlns:a14="http://schemas.microsoft.com/office/drawing/2010/main" xmlns:ma14="http://schemas.microsoft.com/office/mac/drawingml/2011/main" val="1"/>
             </a:ext>
           </a:extLst>
         </p:spPr>
@@ -8206,7 +8211,7 @@
           </a:ln>
           <a:extLst>
             <a:ext uri="{C572A759-6A51-4108-AA02-DFA0A04FC94B}">
-              <ma14:wrappingTextBoxFlag xmlns:ma14="http://schemas.microsoft.com/office/mac/drawingml/2011/main" xmlns:a14="http://schemas.microsoft.com/office/drawing/2010/main" xmlns:m="http://schemas.openxmlformats.org/officeDocument/2006/math" xmlns="" val="1"/>
+              <ma14:wrappingTextBoxFlag xmlns="" xmlns:m="http://schemas.openxmlformats.org/officeDocument/2006/math" xmlns:a14="http://schemas.microsoft.com/office/drawing/2010/main" xmlns:ma14="http://schemas.microsoft.com/office/mac/drawingml/2011/main" val="1"/>
             </a:ext>
           </a:extLst>
         </p:spPr>
@@ -8253,7 +8258,7 @@
           </a:ln>
           <a:extLst>
             <a:ext uri="{C572A759-6A51-4108-AA02-DFA0A04FC94B}">
-              <ma14:wrappingTextBoxFlag xmlns:ma14="http://schemas.microsoft.com/office/mac/drawingml/2011/main" xmlns:a14="http://schemas.microsoft.com/office/drawing/2010/main" xmlns:m="http://schemas.openxmlformats.org/officeDocument/2006/math" xmlns="" val="1"/>
+              <ma14:wrappingTextBoxFlag xmlns="" xmlns:m="http://schemas.openxmlformats.org/officeDocument/2006/math" xmlns:a14="http://schemas.microsoft.com/office/drawing/2010/main" xmlns:ma14="http://schemas.microsoft.com/office/mac/drawingml/2011/main" val="1"/>
             </a:ext>
           </a:extLst>
         </p:spPr>
@@ -8362,7 +8367,7 @@
           </a:ln>
           <a:extLst>
             <a:ext uri="{C572A759-6A51-4108-AA02-DFA0A04FC94B}">
-              <ma14:wrappingTextBoxFlag xmlns:ma14="http://schemas.microsoft.com/office/mac/drawingml/2011/main" xmlns:a14="http://schemas.microsoft.com/office/drawing/2010/main" xmlns:m="http://schemas.openxmlformats.org/officeDocument/2006/math" xmlns="" val="1"/>
+              <ma14:wrappingTextBoxFlag xmlns="" xmlns:m="http://schemas.openxmlformats.org/officeDocument/2006/math" xmlns:a14="http://schemas.microsoft.com/office/drawing/2010/main" xmlns:ma14="http://schemas.microsoft.com/office/mac/drawingml/2011/main" val="1"/>
             </a:ext>
           </a:extLst>
         </p:spPr>
@@ -8409,7 +8414,7 @@
           </a:ln>
           <a:extLst>
             <a:ext uri="{C572A759-6A51-4108-AA02-DFA0A04FC94B}">
-              <ma14:wrappingTextBoxFlag xmlns:ma14="http://schemas.microsoft.com/office/mac/drawingml/2011/main" xmlns:a14="http://schemas.microsoft.com/office/drawing/2010/main" xmlns:m="http://schemas.openxmlformats.org/officeDocument/2006/math" xmlns="" val="1"/>
+              <ma14:wrappingTextBoxFlag xmlns="" xmlns:m="http://schemas.openxmlformats.org/officeDocument/2006/math" xmlns:a14="http://schemas.microsoft.com/office/drawing/2010/main" xmlns:ma14="http://schemas.microsoft.com/office/mac/drawingml/2011/main" val="1"/>
             </a:ext>
           </a:extLst>
         </p:spPr>
@@ -8518,7 +8523,7 @@
           </a:ln>
           <a:extLst>
             <a:ext uri="{C572A759-6A51-4108-AA02-DFA0A04FC94B}">
-              <ma14:wrappingTextBoxFlag xmlns:ma14="http://schemas.microsoft.com/office/mac/drawingml/2011/main" xmlns:a14="http://schemas.microsoft.com/office/drawing/2010/main" xmlns:m="http://schemas.openxmlformats.org/officeDocument/2006/math" xmlns="" val="1"/>
+              <ma14:wrappingTextBoxFlag xmlns="" xmlns:m="http://schemas.openxmlformats.org/officeDocument/2006/math" xmlns:a14="http://schemas.microsoft.com/office/drawing/2010/main" xmlns:ma14="http://schemas.microsoft.com/office/mac/drawingml/2011/main" val="1"/>
             </a:ext>
           </a:extLst>
         </p:spPr>
@@ -8565,7 +8570,7 @@
           </a:ln>
           <a:extLst>
             <a:ext uri="{C572A759-6A51-4108-AA02-DFA0A04FC94B}">
-              <ma14:wrappingTextBoxFlag xmlns:ma14="http://schemas.microsoft.com/office/mac/drawingml/2011/main" xmlns:a14="http://schemas.microsoft.com/office/drawing/2010/main" xmlns:m="http://schemas.openxmlformats.org/officeDocument/2006/math" xmlns="" val="1"/>
+              <ma14:wrappingTextBoxFlag xmlns="" xmlns:m="http://schemas.openxmlformats.org/officeDocument/2006/math" xmlns:a14="http://schemas.microsoft.com/office/drawing/2010/main" xmlns:ma14="http://schemas.microsoft.com/office/mac/drawingml/2011/main" val="1"/>
             </a:ext>
           </a:extLst>
         </p:spPr>
@@ -8674,7 +8679,7 @@
           </a:ln>
           <a:extLst>
             <a:ext uri="{C572A759-6A51-4108-AA02-DFA0A04FC94B}">
-              <ma14:wrappingTextBoxFlag xmlns:ma14="http://schemas.microsoft.com/office/mac/drawingml/2011/main" xmlns:a14="http://schemas.microsoft.com/office/drawing/2010/main" xmlns:m="http://schemas.openxmlformats.org/officeDocument/2006/math" xmlns="" val="1"/>
+              <ma14:wrappingTextBoxFlag xmlns="" xmlns:m="http://schemas.openxmlformats.org/officeDocument/2006/math" xmlns:a14="http://schemas.microsoft.com/office/drawing/2010/main" xmlns:ma14="http://schemas.microsoft.com/office/mac/drawingml/2011/main" val="1"/>
             </a:ext>
           </a:extLst>
         </p:spPr>
@@ -8721,7 +8726,7 @@
           </a:ln>
           <a:extLst>
             <a:ext uri="{C572A759-6A51-4108-AA02-DFA0A04FC94B}">
-              <ma14:wrappingTextBoxFlag xmlns:ma14="http://schemas.microsoft.com/office/mac/drawingml/2011/main" xmlns:a14="http://schemas.microsoft.com/office/drawing/2010/main" xmlns:m="http://schemas.openxmlformats.org/officeDocument/2006/math" xmlns="" val="1"/>
+              <ma14:wrappingTextBoxFlag xmlns="" xmlns:m="http://schemas.openxmlformats.org/officeDocument/2006/math" xmlns:a14="http://schemas.microsoft.com/office/drawing/2010/main" xmlns:ma14="http://schemas.microsoft.com/office/mac/drawingml/2011/main" val="1"/>
             </a:ext>
           </a:extLst>
         </p:spPr>
@@ -8830,7 +8835,7 @@
           </a:ln>
           <a:extLst>
             <a:ext uri="{C572A759-6A51-4108-AA02-DFA0A04FC94B}">
-              <ma14:wrappingTextBoxFlag xmlns:ma14="http://schemas.microsoft.com/office/mac/drawingml/2011/main" xmlns:a14="http://schemas.microsoft.com/office/drawing/2010/main" xmlns:m="http://schemas.openxmlformats.org/officeDocument/2006/math" xmlns="" val="1"/>
+              <ma14:wrappingTextBoxFlag xmlns="" xmlns:m="http://schemas.openxmlformats.org/officeDocument/2006/math" xmlns:a14="http://schemas.microsoft.com/office/drawing/2010/main" xmlns:ma14="http://schemas.microsoft.com/office/mac/drawingml/2011/main" val="1"/>
             </a:ext>
           </a:extLst>
         </p:spPr>
@@ -8877,7 +8882,7 @@
           </a:ln>
           <a:extLst>
             <a:ext uri="{C572A759-6A51-4108-AA02-DFA0A04FC94B}">
-              <ma14:wrappingTextBoxFlag xmlns:ma14="http://schemas.microsoft.com/office/mac/drawingml/2011/main" xmlns:a14="http://schemas.microsoft.com/office/drawing/2010/main" xmlns:m="http://schemas.openxmlformats.org/officeDocument/2006/math" xmlns="" val="1"/>
+              <ma14:wrappingTextBoxFlag xmlns="" xmlns:m="http://schemas.openxmlformats.org/officeDocument/2006/math" xmlns:a14="http://schemas.microsoft.com/office/drawing/2010/main" xmlns:ma14="http://schemas.microsoft.com/office/mac/drawingml/2011/main" val="1"/>
             </a:ext>
           </a:extLst>
         </p:spPr>
@@ -8924,7 +8929,7 @@
           </a:ln>
           <a:extLst>
             <a:ext uri="{C572A759-6A51-4108-AA02-DFA0A04FC94B}">
-              <ma14:wrappingTextBoxFlag xmlns:ma14="http://schemas.microsoft.com/office/mac/drawingml/2011/main" xmlns:a14="http://schemas.microsoft.com/office/drawing/2010/main" xmlns:m="http://schemas.openxmlformats.org/officeDocument/2006/math" xmlns="" val="1"/>
+              <ma14:wrappingTextBoxFlag xmlns="" xmlns:m="http://schemas.openxmlformats.org/officeDocument/2006/math" xmlns:a14="http://schemas.microsoft.com/office/drawing/2010/main" xmlns:ma14="http://schemas.microsoft.com/office/mac/drawingml/2011/main" val="1"/>
             </a:ext>
           </a:extLst>
         </p:spPr>
@@ -9002,7 +9007,7 @@
           </a:ln>
           <a:extLst>
             <a:ext uri="{C572A759-6A51-4108-AA02-DFA0A04FC94B}">
-              <ma14:wrappingTextBoxFlag xmlns:ma14="http://schemas.microsoft.com/office/mac/drawingml/2011/main" xmlns:a14="http://schemas.microsoft.com/office/drawing/2010/main" xmlns:m="http://schemas.openxmlformats.org/officeDocument/2006/math" xmlns="" val="1"/>
+              <ma14:wrappingTextBoxFlag xmlns="" xmlns:m="http://schemas.openxmlformats.org/officeDocument/2006/math" xmlns:a14="http://schemas.microsoft.com/office/drawing/2010/main" xmlns:ma14="http://schemas.microsoft.com/office/mac/drawingml/2011/main" val="1"/>
             </a:ext>
           </a:extLst>
         </p:spPr>
@@ -9049,7 +9054,7 @@
           </a:ln>
           <a:extLst>
             <a:ext uri="{C572A759-6A51-4108-AA02-DFA0A04FC94B}">
-              <ma14:wrappingTextBoxFlag xmlns:ma14="http://schemas.microsoft.com/office/mac/drawingml/2011/main" xmlns:a14="http://schemas.microsoft.com/office/drawing/2010/main" xmlns:m="http://schemas.openxmlformats.org/officeDocument/2006/math" xmlns="" val="1"/>
+              <ma14:wrappingTextBoxFlag xmlns="" xmlns:m="http://schemas.openxmlformats.org/officeDocument/2006/math" xmlns:a14="http://schemas.microsoft.com/office/drawing/2010/main" xmlns:ma14="http://schemas.microsoft.com/office/mac/drawingml/2011/main" val="1"/>
             </a:ext>
           </a:extLst>
         </p:spPr>
@@ -9127,7 +9132,7 @@
           </a:ln>
           <a:extLst>
             <a:ext uri="{C572A759-6A51-4108-AA02-DFA0A04FC94B}">
-              <ma14:wrappingTextBoxFlag xmlns:ma14="http://schemas.microsoft.com/office/mac/drawingml/2011/main" xmlns:a14="http://schemas.microsoft.com/office/drawing/2010/main" xmlns:m="http://schemas.openxmlformats.org/officeDocument/2006/math" xmlns="" val="1"/>
+              <ma14:wrappingTextBoxFlag xmlns="" xmlns:m="http://schemas.openxmlformats.org/officeDocument/2006/math" xmlns:a14="http://schemas.microsoft.com/office/drawing/2010/main" xmlns:ma14="http://schemas.microsoft.com/office/mac/drawingml/2011/main" val="1"/>
             </a:ext>
           </a:extLst>
         </p:spPr>
@@ -9174,7 +9179,7 @@
           </a:ln>
           <a:extLst>
             <a:ext uri="{C572A759-6A51-4108-AA02-DFA0A04FC94B}">
-              <ma14:wrappingTextBoxFlag xmlns:ma14="http://schemas.microsoft.com/office/mac/drawingml/2011/main" xmlns:a14="http://schemas.microsoft.com/office/drawing/2010/main" xmlns:m="http://schemas.openxmlformats.org/officeDocument/2006/math" xmlns="" val="1"/>
+              <ma14:wrappingTextBoxFlag xmlns="" xmlns:m="http://schemas.openxmlformats.org/officeDocument/2006/math" xmlns:a14="http://schemas.microsoft.com/office/drawing/2010/main" xmlns:ma14="http://schemas.microsoft.com/office/mac/drawingml/2011/main" val="1"/>
             </a:ext>
           </a:extLst>
         </p:spPr>
@@ -9252,7 +9257,7 @@
           </a:ln>
           <a:extLst>
             <a:ext uri="{C572A759-6A51-4108-AA02-DFA0A04FC94B}">
-              <ma14:wrappingTextBoxFlag xmlns:ma14="http://schemas.microsoft.com/office/mac/drawingml/2011/main" xmlns:a14="http://schemas.microsoft.com/office/drawing/2010/main" xmlns:m="http://schemas.openxmlformats.org/officeDocument/2006/math" xmlns="" val="1"/>
+              <ma14:wrappingTextBoxFlag xmlns="" xmlns:m="http://schemas.openxmlformats.org/officeDocument/2006/math" xmlns:a14="http://schemas.microsoft.com/office/drawing/2010/main" xmlns:ma14="http://schemas.microsoft.com/office/mac/drawingml/2011/main" val="1"/>
             </a:ext>
           </a:extLst>
         </p:spPr>
@@ -9299,7 +9304,7 @@
           </a:ln>
           <a:extLst>
             <a:ext uri="{C572A759-6A51-4108-AA02-DFA0A04FC94B}">
-              <ma14:wrappingTextBoxFlag xmlns:ma14="http://schemas.microsoft.com/office/mac/drawingml/2011/main" xmlns:a14="http://schemas.microsoft.com/office/drawing/2010/main" xmlns:m="http://schemas.openxmlformats.org/officeDocument/2006/math" xmlns="" val="1"/>
+              <ma14:wrappingTextBoxFlag xmlns="" xmlns:m="http://schemas.openxmlformats.org/officeDocument/2006/math" xmlns:a14="http://schemas.microsoft.com/office/drawing/2010/main" xmlns:ma14="http://schemas.microsoft.com/office/mac/drawingml/2011/main" val="1"/>
             </a:ext>
           </a:extLst>
         </p:spPr>
@@ -9377,7 +9382,7 @@
           </a:ln>
           <a:extLst>
             <a:ext uri="{C572A759-6A51-4108-AA02-DFA0A04FC94B}">
-              <ma14:wrappingTextBoxFlag xmlns:ma14="http://schemas.microsoft.com/office/mac/drawingml/2011/main" xmlns:a14="http://schemas.microsoft.com/office/drawing/2010/main" xmlns:m="http://schemas.openxmlformats.org/officeDocument/2006/math" xmlns="" val="1"/>
+              <ma14:wrappingTextBoxFlag xmlns="" xmlns:m="http://schemas.openxmlformats.org/officeDocument/2006/math" xmlns:a14="http://schemas.microsoft.com/office/drawing/2010/main" xmlns:ma14="http://schemas.microsoft.com/office/mac/drawingml/2011/main" val="1"/>
             </a:ext>
           </a:extLst>
         </p:spPr>
@@ -9424,7 +9429,7 @@
           </a:ln>
           <a:extLst>
             <a:ext uri="{C572A759-6A51-4108-AA02-DFA0A04FC94B}">
-              <ma14:wrappingTextBoxFlag xmlns:ma14="http://schemas.microsoft.com/office/mac/drawingml/2011/main" xmlns:a14="http://schemas.microsoft.com/office/drawing/2010/main" xmlns:m="http://schemas.openxmlformats.org/officeDocument/2006/math" xmlns="" val="1"/>
+              <ma14:wrappingTextBoxFlag xmlns="" xmlns:m="http://schemas.openxmlformats.org/officeDocument/2006/math" xmlns:a14="http://schemas.microsoft.com/office/drawing/2010/main" xmlns:ma14="http://schemas.microsoft.com/office/mac/drawingml/2011/main" val="1"/>
             </a:ext>
           </a:extLst>
         </p:spPr>
@@ -9471,7 +9476,7 @@
           </a:ln>
           <a:extLst>
             <a:ext uri="{C572A759-6A51-4108-AA02-DFA0A04FC94B}">
-              <ma14:wrappingTextBoxFlag xmlns:ma14="http://schemas.microsoft.com/office/mac/drawingml/2011/main" xmlns:a14="http://schemas.microsoft.com/office/drawing/2010/main" xmlns:m="http://schemas.openxmlformats.org/officeDocument/2006/math" xmlns="" val="1"/>
+              <ma14:wrappingTextBoxFlag xmlns="" xmlns:m="http://schemas.openxmlformats.org/officeDocument/2006/math" xmlns:a14="http://schemas.microsoft.com/office/drawing/2010/main" xmlns:ma14="http://schemas.microsoft.com/office/mac/drawingml/2011/main" val="1"/>
             </a:ext>
           </a:extLst>
         </p:spPr>
@@ -9546,7 +9551,7 @@
           </a:ln>
           <a:extLst>
             <a:ext uri="{C572A759-6A51-4108-AA02-DFA0A04FC94B}">
-              <ma14:wrappingTextBoxFlag xmlns:ma14="http://schemas.microsoft.com/office/mac/drawingml/2011/main" xmlns:a14="http://schemas.microsoft.com/office/drawing/2010/main" xmlns:m="http://schemas.openxmlformats.org/officeDocument/2006/math" xmlns="" val="1"/>
+              <ma14:wrappingTextBoxFlag xmlns="" xmlns:m="http://schemas.openxmlformats.org/officeDocument/2006/math" xmlns:a14="http://schemas.microsoft.com/office/drawing/2010/main" xmlns:ma14="http://schemas.microsoft.com/office/mac/drawingml/2011/main" val="1"/>
             </a:ext>
           </a:extLst>
         </p:spPr>
@@ -9593,7 +9598,7 @@
           </a:ln>
           <a:extLst>
             <a:ext uri="{C572A759-6A51-4108-AA02-DFA0A04FC94B}">
-              <ma14:wrappingTextBoxFlag xmlns:ma14="http://schemas.microsoft.com/office/mac/drawingml/2011/main" xmlns:a14="http://schemas.microsoft.com/office/drawing/2010/main" xmlns:m="http://schemas.openxmlformats.org/officeDocument/2006/math" xmlns="" val="1"/>
+              <ma14:wrappingTextBoxFlag xmlns="" xmlns:m="http://schemas.openxmlformats.org/officeDocument/2006/math" xmlns:a14="http://schemas.microsoft.com/office/drawing/2010/main" xmlns:ma14="http://schemas.microsoft.com/office/mac/drawingml/2011/main" val="1"/>
             </a:ext>
           </a:extLst>
         </p:spPr>
@@ -9640,7 +9645,7 @@
           </a:ln>
           <a:extLst>
             <a:ext uri="{C572A759-6A51-4108-AA02-DFA0A04FC94B}">
-              <ma14:wrappingTextBoxFlag xmlns:ma14="http://schemas.microsoft.com/office/mac/drawingml/2011/main" xmlns:a14="http://schemas.microsoft.com/office/drawing/2010/main" xmlns:m="http://schemas.openxmlformats.org/officeDocument/2006/math" xmlns="" val="1"/>
+              <ma14:wrappingTextBoxFlag xmlns="" xmlns:m="http://schemas.openxmlformats.org/officeDocument/2006/math" xmlns:a14="http://schemas.microsoft.com/office/drawing/2010/main" xmlns:ma14="http://schemas.microsoft.com/office/mac/drawingml/2011/main" val="1"/>
             </a:ext>
           </a:extLst>
         </p:spPr>
@@ -9721,7 +9726,7 @@
           </a:ln>
           <a:extLst>
             <a:ext uri="{C572A759-6A51-4108-AA02-DFA0A04FC94B}">
-              <ma14:wrappingTextBoxFlag xmlns:ma14="http://schemas.microsoft.com/office/mac/drawingml/2011/main" xmlns:a14="http://schemas.microsoft.com/office/drawing/2010/main" xmlns:m="http://schemas.openxmlformats.org/officeDocument/2006/math" xmlns="" val="1"/>
+              <ma14:wrappingTextBoxFlag xmlns="" xmlns:m="http://schemas.openxmlformats.org/officeDocument/2006/math" xmlns:a14="http://schemas.microsoft.com/office/drawing/2010/main" xmlns:ma14="http://schemas.microsoft.com/office/mac/drawingml/2011/main" val="1"/>
             </a:ext>
           </a:extLst>
         </p:spPr>
@@ -9797,7 +9802,7 @@
           </a:ln>
           <a:extLst>
             <a:ext uri="{C572A759-6A51-4108-AA02-DFA0A04FC94B}">
-              <ma14:wrappingTextBoxFlag xmlns:ma14="http://schemas.microsoft.com/office/mac/drawingml/2011/main" xmlns:a14="http://schemas.microsoft.com/office/drawing/2010/main" xmlns:m="http://schemas.openxmlformats.org/officeDocument/2006/math" xmlns="" val="1"/>
+              <ma14:wrappingTextBoxFlag xmlns="" xmlns:m="http://schemas.openxmlformats.org/officeDocument/2006/math" xmlns:a14="http://schemas.microsoft.com/office/drawing/2010/main" xmlns:ma14="http://schemas.microsoft.com/office/mac/drawingml/2011/main" val="1"/>
             </a:ext>
           </a:extLst>
         </p:spPr>
@@ -9844,7 +9849,7 @@
           </a:ln>
           <a:extLst>
             <a:ext uri="{C572A759-6A51-4108-AA02-DFA0A04FC94B}">
-              <ma14:wrappingTextBoxFlag xmlns:ma14="http://schemas.microsoft.com/office/mac/drawingml/2011/main" xmlns:a14="http://schemas.microsoft.com/office/drawing/2010/main" xmlns:m="http://schemas.openxmlformats.org/officeDocument/2006/math" xmlns="" val="1"/>
+              <ma14:wrappingTextBoxFlag xmlns="" xmlns:m="http://schemas.openxmlformats.org/officeDocument/2006/math" xmlns:a14="http://schemas.microsoft.com/office/drawing/2010/main" xmlns:ma14="http://schemas.microsoft.com/office/mac/drawingml/2011/main" val="1"/>
             </a:ext>
           </a:extLst>
         </p:spPr>
@@ -9955,7 +9960,7 @@
           </a:ln>
           <a:extLst>
             <a:ext uri="{C572A759-6A51-4108-AA02-DFA0A04FC94B}">
-              <ma14:wrappingTextBoxFlag xmlns:ma14="http://schemas.microsoft.com/office/mac/drawingml/2011/main" xmlns:a14="http://schemas.microsoft.com/office/drawing/2010/main" xmlns:m="http://schemas.openxmlformats.org/officeDocument/2006/math" xmlns="" val="1"/>
+              <ma14:wrappingTextBoxFlag xmlns="" xmlns:m="http://schemas.openxmlformats.org/officeDocument/2006/math" xmlns:a14="http://schemas.microsoft.com/office/drawing/2010/main" xmlns:ma14="http://schemas.microsoft.com/office/mac/drawingml/2011/main" val="1"/>
             </a:ext>
           </a:extLst>
         </p:spPr>
@@ -10002,7 +10007,7 @@
           </a:ln>
           <a:extLst>
             <a:ext uri="{C572A759-6A51-4108-AA02-DFA0A04FC94B}">
-              <ma14:wrappingTextBoxFlag xmlns:ma14="http://schemas.microsoft.com/office/mac/drawingml/2011/main" xmlns:a14="http://schemas.microsoft.com/office/drawing/2010/main" xmlns:m="http://schemas.openxmlformats.org/officeDocument/2006/math" xmlns="" val="1"/>
+              <ma14:wrappingTextBoxFlag xmlns="" xmlns:m="http://schemas.openxmlformats.org/officeDocument/2006/math" xmlns:a14="http://schemas.microsoft.com/office/drawing/2010/main" xmlns:ma14="http://schemas.microsoft.com/office/mac/drawingml/2011/main" val="1"/>
             </a:ext>
           </a:extLst>
         </p:spPr>
@@ -10049,7 +10054,7 @@
           </a:ln>
           <a:extLst>
             <a:ext uri="{C572A759-6A51-4108-AA02-DFA0A04FC94B}">
-              <ma14:wrappingTextBoxFlag xmlns:ma14="http://schemas.microsoft.com/office/mac/drawingml/2011/main" xmlns:a14="http://schemas.microsoft.com/office/drawing/2010/main" xmlns:m="http://schemas.openxmlformats.org/officeDocument/2006/math" xmlns="" val="1"/>
+              <ma14:wrappingTextBoxFlag xmlns="" xmlns:m="http://schemas.openxmlformats.org/officeDocument/2006/math" xmlns:a14="http://schemas.microsoft.com/office/drawing/2010/main" xmlns:ma14="http://schemas.microsoft.com/office/mac/drawingml/2011/main" val="1"/>
             </a:ext>
           </a:extLst>
         </p:spPr>
@@ -10096,7 +10101,7 @@
           </a:ln>
           <a:extLst>
             <a:ext uri="{C572A759-6A51-4108-AA02-DFA0A04FC94B}">
-              <ma14:wrappingTextBoxFlag xmlns:ma14="http://schemas.microsoft.com/office/mac/drawingml/2011/main" xmlns:a14="http://schemas.microsoft.com/office/drawing/2010/main" xmlns:m="http://schemas.openxmlformats.org/officeDocument/2006/math" xmlns="" val="1"/>
+              <ma14:wrappingTextBoxFlag xmlns="" xmlns:m="http://schemas.openxmlformats.org/officeDocument/2006/math" xmlns:a14="http://schemas.microsoft.com/office/drawing/2010/main" xmlns:ma14="http://schemas.microsoft.com/office/mac/drawingml/2011/main" val="1"/>
             </a:ext>
           </a:extLst>
         </p:spPr>
@@ -10158,7 +10163,7 @@
           </a:ln>
           <a:extLst>
             <a:ext uri="{C572A759-6A51-4108-AA02-DFA0A04FC94B}">
-              <ma14:wrappingTextBoxFlag xmlns:ma14="http://schemas.microsoft.com/office/mac/drawingml/2011/main" xmlns:a14="http://schemas.microsoft.com/office/drawing/2010/main" xmlns:m="http://schemas.openxmlformats.org/officeDocument/2006/math" xmlns="" val="1"/>
+              <ma14:wrappingTextBoxFlag xmlns="" xmlns:m="http://schemas.openxmlformats.org/officeDocument/2006/math" xmlns:a14="http://schemas.microsoft.com/office/drawing/2010/main" xmlns:ma14="http://schemas.microsoft.com/office/mac/drawingml/2011/main" val="1"/>
             </a:ext>
           </a:extLst>
         </p:spPr>
@@ -10205,7 +10210,7 @@
           </a:ln>
           <a:extLst>
             <a:ext uri="{C572A759-6A51-4108-AA02-DFA0A04FC94B}">
-              <ma14:wrappingTextBoxFlag xmlns:ma14="http://schemas.microsoft.com/office/mac/drawingml/2011/main" xmlns:a14="http://schemas.microsoft.com/office/drawing/2010/main" xmlns:m="http://schemas.openxmlformats.org/officeDocument/2006/math" xmlns="" val="1"/>
+              <ma14:wrappingTextBoxFlag xmlns="" xmlns:m="http://schemas.openxmlformats.org/officeDocument/2006/math" xmlns:a14="http://schemas.microsoft.com/office/drawing/2010/main" xmlns:ma14="http://schemas.microsoft.com/office/mac/drawingml/2011/main" val="1"/>
             </a:ext>
           </a:extLst>
         </p:spPr>
@@ -10266,7 +10271,7 @@
           </a:ln>
           <a:extLst>
             <a:ext uri="{C572A759-6A51-4108-AA02-DFA0A04FC94B}">
-              <ma14:wrappingTextBoxFlag xmlns:ma14="http://schemas.microsoft.com/office/mac/drawingml/2011/main" xmlns:a14="http://schemas.microsoft.com/office/drawing/2010/main" xmlns:m="http://schemas.openxmlformats.org/officeDocument/2006/math" xmlns="" val="1"/>
+              <ma14:wrappingTextBoxFlag xmlns="" xmlns:m="http://schemas.openxmlformats.org/officeDocument/2006/math" xmlns:a14="http://schemas.microsoft.com/office/drawing/2010/main" xmlns:ma14="http://schemas.microsoft.com/office/mac/drawingml/2011/main" val="1"/>
             </a:ext>
           </a:extLst>
         </p:spPr>
@@ -10375,7 +10380,7 @@
           </a:ln>
           <a:extLst>
             <a:ext uri="{C572A759-6A51-4108-AA02-DFA0A04FC94B}">
-              <ma14:wrappingTextBoxFlag xmlns:ma14="http://schemas.microsoft.com/office/mac/drawingml/2011/main" xmlns:a14="http://schemas.microsoft.com/office/drawing/2010/main" xmlns:m="http://schemas.openxmlformats.org/officeDocument/2006/math" xmlns="" val="1"/>
+              <ma14:wrappingTextBoxFlag xmlns="" xmlns:m="http://schemas.openxmlformats.org/officeDocument/2006/math" xmlns:a14="http://schemas.microsoft.com/office/drawing/2010/main" xmlns:ma14="http://schemas.microsoft.com/office/mac/drawingml/2011/main" val="1"/>
             </a:ext>
           </a:extLst>
         </p:spPr>
@@ -10422,7 +10427,7 @@
           </a:ln>
           <a:extLst>
             <a:ext uri="{C572A759-6A51-4108-AA02-DFA0A04FC94B}">
-              <ma14:wrappingTextBoxFlag xmlns:ma14="http://schemas.microsoft.com/office/mac/drawingml/2011/main" xmlns:a14="http://schemas.microsoft.com/office/drawing/2010/main" xmlns:m="http://schemas.openxmlformats.org/officeDocument/2006/math" xmlns="" val="1"/>
+              <ma14:wrappingTextBoxFlag xmlns="" xmlns:m="http://schemas.openxmlformats.org/officeDocument/2006/math" xmlns:a14="http://schemas.microsoft.com/office/drawing/2010/main" xmlns:ma14="http://schemas.microsoft.com/office/mac/drawingml/2011/main" val="1"/>
             </a:ext>
           </a:extLst>
         </p:spPr>
@@ -10469,7 +10474,7 @@
           </a:ln>
           <a:extLst>
             <a:ext uri="{C572A759-6A51-4108-AA02-DFA0A04FC94B}">
-              <ma14:wrappingTextBoxFlag xmlns:ma14="http://schemas.microsoft.com/office/mac/drawingml/2011/main" xmlns:a14="http://schemas.microsoft.com/office/drawing/2010/main" xmlns:m="http://schemas.openxmlformats.org/officeDocument/2006/math" xmlns="" val="1"/>
+              <ma14:wrappingTextBoxFlag xmlns="" xmlns:m="http://schemas.openxmlformats.org/officeDocument/2006/math" xmlns:a14="http://schemas.microsoft.com/office/drawing/2010/main" xmlns:ma14="http://schemas.microsoft.com/office/mac/drawingml/2011/main" val="1"/>
             </a:ext>
           </a:extLst>
         </p:spPr>
@@ -10516,7 +10521,7 @@
           </a:ln>
           <a:extLst>
             <a:ext uri="{C572A759-6A51-4108-AA02-DFA0A04FC94B}">
-              <ma14:wrappingTextBoxFlag xmlns:ma14="http://schemas.microsoft.com/office/mac/drawingml/2011/main" xmlns:a14="http://schemas.microsoft.com/office/drawing/2010/main" xmlns:m="http://schemas.openxmlformats.org/officeDocument/2006/math" xmlns="" val="1"/>
+              <ma14:wrappingTextBoxFlag xmlns="" xmlns:m="http://schemas.openxmlformats.org/officeDocument/2006/math" xmlns:a14="http://schemas.microsoft.com/office/drawing/2010/main" xmlns:ma14="http://schemas.microsoft.com/office/mac/drawingml/2011/main" val="1"/>
             </a:ext>
           </a:extLst>
         </p:spPr>
@@ -10578,7 +10583,7 @@
           </a:ln>
           <a:extLst>
             <a:ext uri="{C572A759-6A51-4108-AA02-DFA0A04FC94B}">
-              <ma14:wrappingTextBoxFlag xmlns:ma14="http://schemas.microsoft.com/office/mac/drawingml/2011/main" xmlns:a14="http://schemas.microsoft.com/office/drawing/2010/main" xmlns:m="http://schemas.openxmlformats.org/officeDocument/2006/math" xmlns="" val="1"/>
+              <ma14:wrappingTextBoxFlag xmlns="" xmlns:m="http://schemas.openxmlformats.org/officeDocument/2006/math" xmlns:a14="http://schemas.microsoft.com/office/drawing/2010/main" xmlns:ma14="http://schemas.microsoft.com/office/mac/drawingml/2011/main" val="1"/>
             </a:ext>
           </a:extLst>
         </p:spPr>
@@ -10656,7 +10661,7 @@
           </a:ln>
           <a:extLst>
             <a:ext uri="{C572A759-6A51-4108-AA02-DFA0A04FC94B}">
-              <ma14:wrappingTextBoxFlag xmlns:ma14="http://schemas.microsoft.com/office/mac/drawingml/2011/main" xmlns:a14="http://schemas.microsoft.com/office/drawing/2010/main" xmlns:m="http://schemas.openxmlformats.org/officeDocument/2006/math" xmlns="" val="1"/>
+              <ma14:wrappingTextBoxFlag xmlns="" xmlns:m="http://schemas.openxmlformats.org/officeDocument/2006/math" xmlns:a14="http://schemas.microsoft.com/office/drawing/2010/main" xmlns:ma14="http://schemas.microsoft.com/office/mac/drawingml/2011/main" val="1"/>
             </a:ext>
           </a:extLst>
         </p:spPr>
@@ -10731,7 +10736,7 @@
           </a:ln>
           <a:extLst>
             <a:ext uri="{C572A759-6A51-4108-AA02-DFA0A04FC94B}">
-              <ma14:wrappingTextBoxFlag xmlns:ma14="http://schemas.microsoft.com/office/mac/drawingml/2011/main" xmlns:a14="http://schemas.microsoft.com/office/drawing/2010/main" xmlns:m="http://schemas.openxmlformats.org/officeDocument/2006/math" xmlns="" val="1"/>
+              <ma14:wrappingTextBoxFlag xmlns="" xmlns:m="http://schemas.openxmlformats.org/officeDocument/2006/math" xmlns:a14="http://schemas.microsoft.com/office/drawing/2010/main" xmlns:ma14="http://schemas.microsoft.com/office/mac/drawingml/2011/main" val="1"/>
             </a:ext>
           </a:extLst>
         </p:spPr>
@@ -10778,7 +10783,7 @@
           </a:ln>
           <a:extLst>
             <a:ext uri="{C572A759-6A51-4108-AA02-DFA0A04FC94B}">
-              <ma14:wrappingTextBoxFlag xmlns:ma14="http://schemas.microsoft.com/office/mac/drawingml/2011/main" xmlns:a14="http://schemas.microsoft.com/office/drawing/2010/main" xmlns:m="http://schemas.openxmlformats.org/officeDocument/2006/math" xmlns="" val="1"/>
+              <ma14:wrappingTextBoxFlag xmlns="" xmlns:m="http://schemas.openxmlformats.org/officeDocument/2006/math" xmlns:a14="http://schemas.microsoft.com/office/drawing/2010/main" xmlns:ma14="http://schemas.microsoft.com/office/mac/drawingml/2011/main" val="1"/>
             </a:ext>
           </a:extLst>
         </p:spPr>
@@ -10825,7 +10830,7 @@
           </a:ln>
           <a:extLst>
             <a:ext uri="{C572A759-6A51-4108-AA02-DFA0A04FC94B}">
-              <ma14:wrappingTextBoxFlag xmlns:ma14="http://schemas.microsoft.com/office/mac/drawingml/2011/main" xmlns:a14="http://schemas.microsoft.com/office/drawing/2010/main" xmlns:m="http://schemas.openxmlformats.org/officeDocument/2006/math" xmlns="" val="1"/>
+              <ma14:wrappingTextBoxFlag xmlns="" xmlns:m="http://schemas.openxmlformats.org/officeDocument/2006/math" xmlns:a14="http://schemas.microsoft.com/office/drawing/2010/main" xmlns:ma14="http://schemas.microsoft.com/office/mac/drawingml/2011/main" val="1"/>
             </a:ext>
           </a:extLst>
         </p:spPr>
@@ -10906,7 +10911,7 @@
           </a:ln>
           <a:extLst>
             <a:ext uri="{C572A759-6A51-4108-AA02-DFA0A04FC94B}">
-              <ma14:wrappingTextBoxFlag xmlns:ma14="http://schemas.microsoft.com/office/mac/drawingml/2011/main" xmlns:a14="http://schemas.microsoft.com/office/drawing/2010/main" xmlns:m="http://schemas.openxmlformats.org/officeDocument/2006/math" xmlns="" val="1"/>
+              <ma14:wrappingTextBoxFlag xmlns="" xmlns:m="http://schemas.openxmlformats.org/officeDocument/2006/math" xmlns:a14="http://schemas.microsoft.com/office/drawing/2010/main" xmlns:ma14="http://schemas.microsoft.com/office/mac/drawingml/2011/main" val="1"/>
             </a:ext>
           </a:extLst>
         </p:spPr>
@@ -10982,7 +10987,7 @@
           </a:ln>
           <a:extLst>
             <a:ext uri="{C572A759-6A51-4108-AA02-DFA0A04FC94B}">
-              <ma14:wrappingTextBoxFlag xmlns:ma14="http://schemas.microsoft.com/office/mac/drawingml/2011/main" xmlns:a14="http://schemas.microsoft.com/office/drawing/2010/main" xmlns:m="http://schemas.openxmlformats.org/officeDocument/2006/math" xmlns="" val="1"/>
+              <ma14:wrappingTextBoxFlag xmlns="" xmlns:m="http://schemas.openxmlformats.org/officeDocument/2006/math" xmlns:a14="http://schemas.microsoft.com/office/drawing/2010/main" xmlns:ma14="http://schemas.microsoft.com/office/mac/drawingml/2011/main" val="1"/>
             </a:ext>
           </a:extLst>
         </p:spPr>
@@ -11029,7 +11034,7 @@
           </a:ln>
           <a:extLst>
             <a:ext uri="{C572A759-6A51-4108-AA02-DFA0A04FC94B}">
-              <ma14:wrappingTextBoxFlag xmlns:ma14="http://schemas.microsoft.com/office/mac/drawingml/2011/main" xmlns:a14="http://schemas.microsoft.com/office/drawing/2010/main" xmlns:m="http://schemas.openxmlformats.org/officeDocument/2006/math" xmlns="" val="1"/>
+              <ma14:wrappingTextBoxFlag xmlns="" xmlns:m="http://schemas.openxmlformats.org/officeDocument/2006/math" xmlns:a14="http://schemas.microsoft.com/office/drawing/2010/main" xmlns:ma14="http://schemas.microsoft.com/office/mac/drawingml/2011/main" val="1"/>
             </a:ext>
           </a:extLst>
         </p:spPr>
@@ -11138,7 +11143,7 @@
           </a:ln>
           <a:extLst>
             <a:ext uri="{C572A759-6A51-4108-AA02-DFA0A04FC94B}">
-              <ma14:wrappingTextBoxFlag xmlns:ma14="http://schemas.microsoft.com/office/mac/drawingml/2011/main" xmlns:a14="http://schemas.microsoft.com/office/drawing/2010/main" xmlns:m="http://schemas.openxmlformats.org/officeDocument/2006/math" xmlns="" val="1"/>
+              <ma14:wrappingTextBoxFlag xmlns="" xmlns:m="http://schemas.openxmlformats.org/officeDocument/2006/math" xmlns:a14="http://schemas.microsoft.com/office/drawing/2010/main" xmlns:ma14="http://schemas.microsoft.com/office/mac/drawingml/2011/main" val="1"/>
             </a:ext>
           </a:extLst>
         </p:spPr>
@@ -11214,7 +11219,7 @@
           </a:ln>
           <a:extLst>
             <a:ext uri="{C572A759-6A51-4108-AA02-DFA0A04FC94B}">
-              <ma14:wrappingTextBoxFlag xmlns:ma14="http://schemas.microsoft.com/office/mac/drawingml/2011/main" xmlns:a14="http://schemas.microsoft.com/office/drawing/2010/main" xmlns:m="http://schemas.openxmlformats.org/officeDocument/2006/math" xmlns="" val="1"/>
+              <ma14:wrappingTextBoxFlag xmlns="" xmlns:m="http://schemas.openxmlformats.org/officeDocument/2006/math" xmlns:a14="http://schemas.microsoft.com/office/drawing/2010/main" xmlns:ma14="http://schemas.microsoft.com/office/mac/drawingml/2011/main" val="1"/>
             </a:ext>
           </a:extLst>
         </p:spPr>
@@ -11261,7 +11266,7 @@
           </a:ln>
           <a:extLst>
             <a:ext uri="{C572A759-6A51-4108-AA02-DFA0A04FC94B}">
-              <ma14:wrappingTextBoxFlag xmlns:ma14="http://schemas.microsoft.com/office/mac/drawingml/2011/main" xmlns:a14="http://schemas.microsoft.com/office/drawing/2010/main" xmlns:m="http://schemas.openxmlformats.org/officeDocument/2006/math" xmlns="" val="1"/>
+              <ma14:wrappingTextBoxFlag xmlns="" xmlns:m="http://schemas.openxmlformats.org/officeDocument/2006/math" xmlns:a14="http://schemas.microsoft.com/office/drawing/2010/main" xmlns:ma14="http://schemas.microsoft.com/office/mac/drawingml/2011/main" val="1"/>
             </a:ext>
           </a:extLst>
         </p:spPr>
@@ -11337,7 +11342,7 @@
           </a:ln>
           <a:extLst>
             <a:ext uri="{C572A759-6A51-4108-AA02-DFA0A04FC94B}">
-              <ma14:wrappingTextBoxFlag xmlns:ma14="http://schemas.microsoft.com/office/mac/drawingml/2011/main" xmlns:a14="http://schemas.microsoft.com/office/drawing/2010/main" xmlns:m="http://schemas.openxmlformats.org/officeDocument/2006/math" xmlns="" val="1"/>
+              <ma14:wrappingTextBoxFlag xmlns="" xmlns:m="http://schemas.openxmlformats.org/officeDocument/2006/math" xmlns:a14="http://schemas.microsoft.com/office/drawing/2010/main" xmlns:ma14="http://schemas.microsoft.com/office/mac/drawingml/2011/main" val="1"/>
             </a:ext>
           </a:extLst>
         </p:spPr>
@@ -11384,7 +11389,7 @@
           </a:ln>
           <a:extLst>
             <a:ext uri="{C572A759-6A51-4108-AA02-DFA0A04FC94B}">
-              <ma14:wrappingTextBoxFlag xmlns:ma14="http://schemas.microsoft.com/office/mac/drawingml/2011/main" xmlns:a14="http://schemas.microsoft.com/office/drawing/2010/main" xmlns:m="http://schemas.openxmlformats.org/officeDocument/2006/math" xmlns="" val="1"/>
+              <ma14:wrappingTextBoxFlag xmlns="" xmlns:m="http://schemas.openxmlformats.org/officeDocument/2006/math" xmlns:a14="http://schemas.microsoft.com/office/drawing/2010/main" xmlns:ma14="http://schemas.microsoft.com/office/mac/drawingml/2011/main" val="1"/>
             </a:ext>
           </a:extLst>
         </p:spPr>
@@ -11460,7 +11465,7 @@
           </a:ln>
           <a:extLst>
             <a:ext uri="{C572A759-6A51-4108-AA02-DFA0A04FC94B}">
-              <ma14:wrappingTextBoxFlag xmlns:ma14="http://schemas.microsoft.com/office/mac/drawingml/2011/main" xmlns:a14="http://schemas.microsoft.com/office/drawing/2010/main" xmlns:m="http://schemas.openxmlformats.org/officeDocument/2006/math" xmlns="" val="1"/>
+              <ma14:wrappingTextBoxFlag xmlns="" xmlns:m="http://schemas.openxmlformats.org/officeDocument/2006/math" xmlns:a14="http://schemas.microsoft.com/office/drawing/2010/main" xmlns:ma14="http://schemas.microsoft.com/office/mac/drawingml/2011/main" val="1"/>
             </a:ext>
           </a:extLst>
         </p:spPr>
@@ -11507,7 +11512,7 @@
           </a:ln>
           <a:extLst>
             <a:ext uri="{C572A759-6A51-4108-AA02-DFA0A04FC94B}">
-              <ma14:wrappingTextBoxFlag xmlns:ma14="http://schemas.microsoft.com/office/mac/drawingml/2011/main" xmlns:a14="http://schemas.microsoft.com/office/drawing/2010/main" xmlns:m="http://schemas.openxmlformats.org/officeDocument/2006/math" xmlns="" val="1"/>
+              <ma14:wrappingTextBoxFlag xmlns="" xmlns:m="http://schemas.openxmlformats.org/officeDocument/2006/math" xmlns:a14="http://schemas.microsoft.com/office/drawing/2010/main" xmlns:ma14="http://schemas.microsoft.com/office/mac/drawingml/2011/main" val="1"/>
             </a:ext>
           </a:extLst>
         </p:spPr>
@@ -11583,7 +11588,7 @@
           </a:ln>
           <a:extLst>
             <a:ext uri="{C572A759-6A51-4108-AA02-DFA0A04FC94B}">
-              <ma14:wrappingTextBoxFlag xmlns:ma14="http://schemas.microsoft.com/office/mac/drawingml/2011/main" xmlns:a14="http://schemas.microsoft.com/office/drawing/2010/main" xmlns:m="http://schemas.openxmlformats.org/officeDocument/2006/math" xmlns="" val="1"/>
+              <ma14:wrappingTextBoxFlag xmlns="" xmlns:m="http://schemas.openxmlformats.org/officeDocument/2006/math" xmlns:a14="http://schemas.microsoft.com/office/drawing/2010/main" xmlns:ma14="http://schemas.microsoft.com/office/mac/drawingml/2011/main" val="1"/>
             </a:ext>
           </a:extLst>
         </p:spPr>
@@ -11630,7 +11635,7 @@
           </a:ln>
           <a:extLst>
             <a:ext uri="{C572A759-6A51-4108-AA02-DFA0A04FC94B}">
-              <ma14:wrappingTextBoxFlag xmlns:ma14="http://schemas.microsoft.com/office/mac/drawingml/2011/main" xmlns:a14="http://schemas.microsoft.com/office/drawing/2010/main" xmlns:m="http://schemas.openxmlformats.org/officeDocument/2006/math" xmlns="" val="1"/>
+              <ma14:wrappingTextBoxFlag xmlns="" xmlns:m="http://schemas.openxmlformats.org/officeDocument/2006/math" xmlns:a14="http://schemas.microsoft.com/office/drawing/2010/main" xmlns:ma14="http://schemas.microsoft.com/office/mac/drawingml/2011/main" val="1"/>
             </a:ext>
           </a:extLst>
         </p:spPr>
@@ -11706,7 +11711,7 @@
           </a:ln>
           <a:extLst>
             <a:ext uri="{C572A759-6A51-4108-AA02-DFA0A04FC94B}">
-              <ma14:wrappingTextBoxFlag xmlns:ma14="http://schemas.microsoft.com/office/mac/drawingml/2011/main" xmlns:a14="http://schemas.microsoft.com/office/drawing/2010/main" xmlns:m="http://schemas.openxmlformats.org/officeDocument/2006/math" xmlns="" val="1"/>
+              <ma14:wrappingTextBoxFlag xmlns="" xmlns:m="http://schemas.openxmlformats.org/officeDocument/2006/math" xmlns:a14="http://schemas.microsoft.com/office/drawing/2010/main" xmlns:ma14="http://schemas.microsoft.com/office/mac/drawingml/2011/main" val="1"/>
             </a:ext>
           </a:extLst>
         </p:spPr>
@@ -11753,7 +11758,7 @@
           </a:ln>
           <a:extLst>
             <a:ext uri="{C572A759-6A51-4108-AA02-DFA0A04FC94B}">
-              <ma14:wrappingTextBoxFlag xmlns:ma14="http://schemas.microsoft.com/office/mac/drawingml/2011/main" xmlns:a14="http://schemas.microsoft.com/office/drawing/2010/main" xmlns:m="http://schemas.openxmlformats.org/officeDocument/2006/math" xmlns="" val="1"/>
+              <ma14:wrappingTextBoxFlag xmlns="" xmlns:m="http://schemas.openxmlformats.org/officeDocument/2006/math" xmlns:a14="http://schemas.microsoft.com/office/drawing/2010/main" xmlns:ma14="http://schemas.microsoft.com/office/mac/drawingml/2011/main" val="1"/>
             </a:ext>
           </a:extLst>
         </p:spPr>
@@ -11828,7 +11833,7 @@
           </a:ln>
           <a:extLst>
             <a:ext uri="{C572A759-6A51-4108-AA02-DFA0A04FC94B}">
-              <ma14:wrappingTextBoxFlag xmlns:ma14="http://schemas.microsoft.com/office/mac/drawingml/2011/main" xmlns:a14="http://schemas.microsoft.com/office/drawing/2010/main" xmlns:m="http://schemas.openxmlformats.org/officeDocument/2006/math" xmlns="" val="1"/>
+              <ma14:wrappingTextBoxFlag xmlns="" xmlns:m="http://schemas.openxmlformats.org/officeDocument/2006/math" xmlns:a14="http://schemas.microsoft.com/office/drawing/2010/main" xmlns:ma14="http://schemas.microsoft.com/office/mac/drawingml/2011/main" val="1"/>
             </a:ext>
           </a:extLst>
         </p:spPr>
@@ -11875,7 +11880,7 @@
           </a:ln>
           <a:extLst>
             <a:ext uri="{C572A759-6A51-4108-AA02-DFA0A04FC94B}">
-              <ma14:wrappingTextBoxFlag xmlns:ma14="http://schemas.microsoft.com/office/mac/drawingml/2011/main" xmlns:a14="http://schemas.microsoft.com/office/drawing/2010/main" xmlns:m="http://schemas.openxmlformats.org/officeDocument/2006/math" xmlns="" val="1"/>
+              <ma14:wrappingTextBoxFlag xmlns="" xmlns:m="http://schemas.openxmlformats.org/officeDocument/2006/math" xmlns:a14="http://schemas.microsoft.com/office/drawing/2010/main" xmlns:ma14="http://schemas.microsoft.com/office/mac/drawingml/2011/main" val="1"/>
             </a:ext>
           </a:extLst>
         </p:spPr>
@@ -11922,7 +11927,7 @@
           </a:ln>
           <a:extLst>
             <a:ext uri="{C572A759-6A51-4108-AA02-DFA0A04FC94B}">
-              <ma14:wrappingTextBoxFlag xmlns:ma14="http://schemas.microsoft.com/office/mac/drawingml/2011/main" xmlns:a14="http://schemas.microsoft.com/office/drawing/2010/main" xmlns:m="http://schemas.openxmlformats.org/officeDocument/2006/math" xmlns="" val="1"/>
+              <ma14:wrappingTextBoxFlag xmlns="" xmlns:m="http://schemas.openxmlformats.org/officeDocument/2006/math" xmlns:a14="http://schemas.microsoft.com/office/drawing/2010/main" xmlns:ma14="http://schemas.microsoft.com/office/mac/drawingml/2011/main" val="1"/>
             </a:ext>
           </a:extLst>
         </p:spPr>
@@ -12003,7 +12008,7 @@
           </a:ln>
           <a:extLst>
             <a:ext uri="{C572A759-6A51-4108-AA02-DFA0A04FC94B}">
-              <ma14:wrappingTextBoxFlag xmlns:ma14="http://schemas.microsoft.com/office/mac/drawingml/2011/main" xmlns:a14="http://schemas.microsoft.com/office/drawing/2010/main" xmlns:m="http://schemas.openxmlformats.org/officeDocument/2006/math" xmlns="" val="1"/>
+              <ma14:wrappingTextBoxFlag xmlns="" xmlns:m="http://schemas.openxmlformats.org/officeDocument/2006/math" xmlns:a14="http://schemas.microsoft.com/office/drawing/2010/main" xmlns:ma14="http://schemas.microsoft.com/office/mac/drawingml/2011/main" val="1"/>
             </a:ext>
           </a:extLst>
         </p:spPr>
@@ -12079,7 +12084,7 @@
           </a:ln>
           <a:extLst>
             <a:ext uri="{C572A759-6A51-4108-AA02-DFA0A04FC94B}">
-              <ma14:wrappingTextBoxFlag xmlns:ma14="http://schemas.microsoft.com/office/mac/drawingml/2011/main" xmlns:a14="http://schemas.microsoft.com/office/drawing/2010/main" xmlns:m="http://schemas.openxmlformats.org/officeDocument/2006/math" xmlns="" val="1"/>
+              <ma14:wrappingTextBoxFlag xmlns="" xmlns:m="http://schemas.openxmlformats.org/officeDocument/2006/math" xmlns:a14="http://schemas.microsoft.com/office/drawing/2010/main" xmlns:ma14="http://schemas.microsoft.com/office/mac/drawingml/2011/main" val="1"/>
             </a:ext>
           </a:extLst>
         </p:spPr>
@@ -12126,7 +12131,7 @@
           </a:ln>
           <a:extLst>
             <a:ext uri="{C572A759-6A51-4108-AA02-DFA0A04FC94B}">
-              <ma14:wrappingTextBoxFlag xmlns:ma14="http://schemas.microsoft.com/office/mac/drawingml/2011/main" xmlns:a14="http://schemas.microsoft.com/office/drawing/2010/main" xmlns:m="http://schemas.openxmlformats.org/officeDocument/2006/math" xmlns="" val="1"/>
+              <ma14:wrappingTextBoxFlag xmlns="" xmlns:m="http://schemas.openxmlformats.org/officeDocument/2006/math" xmlns:a14="http://schemas.microsoft.com/office/drawing/2010/main" xmlns:ma14="http://schemas.microsoft.com/office/mac/drawingml/2011/main" val="1"/>
             </a:ext>
           </a:extLst>
         </p:spPr>
@@ -12233,7 +12238,7 @@
           </a:ln>
           <a:extLst>
             <a:ext uri="{C572A759-6A51-4108-AA02-DFA0A04FC94B}">
-              <ma14:wrappingTextBoxFlag xmlns:ma14="http://schemas.microsoft.com/office/mac/drawingml/2011/main" xmlns:a14="http://schemas.microsoft.com/office/drawing/2010/main" xmlns:m="http://schemas.openxmlformats.org/officeDocument/2006/math" xmlns="" val="1"/>
+              <ma14:wrappingTextBoxFlag xmlns="" xmlns:m="http://schemas.openxmlformats.org/officeDocument/2006/math" xmlns:a14="http://schemas.microsoft.com/office/drawing/2010/main" xmlns:ma14="http://schemas.microsoft.com/office/mac/drawingml/2011/main" val="1"/>
             </a:ext>
           </a:extLst>
         </p:spPr>
@@ -12280,7 +12285,7 @@
           </a:ln>
           <a:extLst>
             <a:ext uri="{C572A759-6A51-4108-AA02-DFA0A04FC94B}">
-              <ma14:wrappingTextBoxFlag xmlns:ma14="http://schemas.microsoft.com/office/mac/drawingml/2011/main" xmlns:a14="http://schemas.microsoft.com/office/drawing/2010/main" xmlns:m="http://schemas.openxmlformats.org/officeDocument/2006/math" xmlns="" val="1"/>
+              <ma14:wrappingTextBoxFlag xmlns="" xmlns:m="http://schemas.openxmlformats.org/officeDocument/2006/math" xmlns:a14="http://schemas.microsoft.com/office/drawing/2010/main" xmlns:ma14="http://schemas.microsoft.com/office/mac/drawingml/2011/main" val="1"/>
             </a:ext>
           </a:extLst>
         </p:spPr>
@@ -12385,7 +12390,7 @@
           </a:ln>
           <a:extLst>
             <a:ext uri="{C572A759-6A51-4108-AA02-DFA0A04FC94B}">
-              <ma14:wrappingTextBoxFlag xmlns:ma14="http://schemas.microsoft.com/office/mac/drawingml/2011/main" xmlns:a14="http://schemas.microsoft.com/office/drawing/2010/main" xmlns:m="http://schemas.openxmlformats.org/officeDocument/2006/math" xmlns="" val="1"/>
+              <ma14:wrappingTextBoxFlag xmlns="" xmlns:m="http://schemas.openxmlformats.org/officeDocument/2006/math" xmlns:a14="http://schemas.microsoft.com/office/drawing/2010/main" xmlns:ma14="http://schemas.microsoft.com/office/mac/drawingml/2011/main" val="1"/>
             </a:ext>
           </a:extLst>
         </p:spPr>
@@ -12457,7 +12462,7 @@
           </a:ln>
           <a:extLst>
             <a:ext uri="{C572A759-6A51-4108-AA02-DFA0A04FC94B}">
-              <ma14:wrappingTextBoxFlag xmlns:ma14="http://schemas.microsoft.com/office/mac/drawingml/2011/main" xmlns:a14="http://schemas.microsoft.com/office/drawing/2010/main" xmlns:m="http://schemas.openxmlformats.org/officeDocument/2006/math" xmlns="" val="1"/>
+              <ma14:wrappingTextBoxFlag xmlns="" xmlns:m="http://schemas.openxmlformats.org/officeDocument/2006/math" xmlns:a14="http://schemas.microsoft.com/office/drawing/2010/main" xmlns:ma14="http://schemas.microsoft.com/office/mac/drawingml/2011/main" val="1"/>
             </a:ext>
           </a:extLst>
         </p:spPr>
@@ -12529,7 +12534,7 @@
           </a:ln>
           <a:extLst>
             <a:ext uri="{C572A759-6A51-4108-AA02-DFA0A04FC94B}">
-              <ma14:wrappingTextBoxFlag xmlns:ma14="http://schemas.microsoft.com/office/mac/drawingml/2011/main" xmlns:a14="http://schemas.microsoft.com/office/drawing/2010/main" xmlns:m="http://schemas.openxmlformats.org/officeDocument/2006/math" xmlns="" val="1"/>
+              <ma14:wrappingTextBoxFlag xmlns="" xmlns:m="http://schemas.openxmlformats.org/officeDocument/2006/math" xmlns:a14="http://schemas.microsoft.com/office/drawing/2010/main" xmlns:ma14="http://schemas.microsoft.com/office/mac/drawingml/2011/main" val="1"/>
             </a:ext>
           </a:extLst>
         </p:spPr>
@@ -12601,7 +12606,7 @@
           </a:ln>
           <a:extLst>
             <a:ext uri="{C572A759-6A51-4108-AA02-DFA0A04FC94B}">
-              <ma14:wrappingTextBoxFlag xmlns:ma14="http://schemas.microsoft.com/office/mac/drawingml/2011/main" xmlns:a14="http://schemas.microsoft.com/office/drawing/2010/main" xmlns:m="http://schemas.openxmlformats.org/officeDocument/2006/math" xmlns="" val="1"/>
+              <ma14:wrappingTextBoxFlag xmlns="" xmlns:m="http://schemas.openxmlformats.org/officeDocument/2006/math" xmlns:a14="http://schemas.microsoft.com/office/drawing/2010/main" xmlns:ma14="http://schemas.microsoft.com/office/mac/drawingml/2011/main" val="1"/>
             </a:ext>
           </a:extLst>
         </p:spPr>
@@ -12706,7 +12711,7 @@
           </a:ln>
           <a:extLst>
             <a:ext uri="{C572A759-6A51-4108-AA02-DFA0A04FC94B}">
-              <ma14:wrappingTextBoxFlag xmlns:ma14="http://schemas.microsoft.com/office/mac/drawingml/2011/main" xmlns:a14="http://schemas.microsoft.com/office/drawing/2010/main" xmlns:m="http://schemas.openxmlformats.org/officeDocument/2006/math" xmlns="" val="1"/>
+              <ma14:wrappingTextBoxFlag xmlns="" xmlns:m="http://schemas.openxmlformats.org/officeDocument/2006/math" xmlns:a14="http://schemas.microsoft.com/office/drawing/2010/main" xmlns:ma14="http://schemas.microsoft.com/office/mac/drawingml/2011/main" val="1"/>
             </a:ext>
           </a:extLst>
         </p:spPr>
@@ -12753,7 +12758,7 @@
           </a:ln>
           <a:extLst>
             <a:ext uri="{C572A759-6A51-4108-AA02-DFA0A04FC94B}">
-              <ma14:wrappingTextBoxFlag xmlns:ma14="http://schemas.microsoft.com/office/mac/drawingml/2011/main" xmlns:a14="http://schemas.microsoft.com/office/drawing/2010/main" xmlns:m="http://schemas.openxmlformats.org/officeDocument/2006/math" xmlns="" val="1"/>
+              <ma14:wrappingTextBoxFlag xmlns="" xmlns:m="http://schemas.openxmlformats.org/officeDocument/2006/math" xmlns:a14="http://schemas.microsoft.com/office/drawing/2010/main" xmlns:ma14="http://schemas.microsoft.com/office/mac/drawingml/2011/main" val="1"/>
             </a:ext>
           </a:extLst>
         </p:spPr>
@@ -12789,18 +12794,18 @@
         </p:nvSpPr>
         <p:spPr>
           <a:xfrm>
-            <a:off x="7545972" y="2181859"/>
-            <a:ext cx="3291841" cy="243841"/>
-          </a:xfrm>
-          <a:prstGeom prst="rect">
-            <a:avLst/>
-          </a:prstGeom>
-          <a:ln w="12700">
-            <a:miter lim="400000"/>
-          </a:ln>
-          <a:extLst>
-            <a:ext uri="{C572A759-6A51-4108-AA02-DFA0A04FC94B}">
-              <ma14:wrappingTextBoxFlag xmlns:ma14="http://schemas.microsoft.com/office/mac/drawingml/2011/main" xmlns:a14="http://schemas.microsoft.com/office/drawing/2010/main" xmlns:m="http://schemas.openxmlformats.org/officeDocument/2006/math" xmlns="" val="1"/>
+            <a:off x="7545972" y="2344412"/>
+            <a:ext cx="3291841" cy="1169551"/>
+          </a:xfrm>
+          <a:prstGeom prst="rect">
+            <a:avLst/>
+          </a:prstGeom>
+          <a:ln w="12700">
+            <a:miter lim="400000"/>
+          </a:ln>
+          <a:extLst>
+            <a:ext uri="{C572A759-6A51-4108-AA02-DFA0A04FC94B}">
+              <ma14:wrappingTextBoxFlag xmlns="" xmlns:m="http://schemas.openxmlformats.org/officeDocument/2006/math" xmlns:a14="http://schemas.microsoft.com/office/drawing/2010/main" xmlns:ma14="http://schemas.microsoft.com/office/mac/drawingml/2011/main" val="1"/>
             </a:ext>
           </a:extLst>
         </p:spPr>
@@ -12822,8 +12827,92 @@
             </a:lvl1pPr>
           </a:lstStyle>
           <a:p>
-            <a:r>
-              <a:t>Contributions to add</a:t>
+            <a:pPr marL="171450" indent="-171450">
+              <a:buFont typeface="Arial" panose="020B0604020202020204" pitchFamily="34" charset="0"/>
+              <a:buChar char="•"/>
+            </a:pPr>
+            <a:r>
+              <a:rPr lang="en-US" i="0" dirty="0">
+                <a:solidFill>
+                  <a:schemeClr val="tx1"/>
+                </a:solidFill>
+              </a:rPr>
+              <a:t>Helped determine feasibility of project</a:t>
+            </a:r>
+          </a:p>
+          <a:p>
+            <a:pPr marL="171450" indent="-171450">
+              <a:buFont typeface="Arial" panose="020B0604020202020204" pitchFamily="34" charset="0"/>
+              <a:buChar char="•"/>
+            </a:pPr>
+            <a:endParaRPr lang="en-US" i="0" dirty="0">
+              <a:solidFill>
+                <a:schemeClr val="tx1"/>
+              </a:solidFill>
+            </a:endParaRPr>
+          </a:p>
+          <a:p>
+            <a:pPr marL="171450" indent="-171450">
+              <a:buFont typeface="Arial" panose="020B0604020202020204" pitchFamily="34" charset="0"/>
+              <a:buChar char="•"/>
+            </a:pPr>
+            <a:r>
+              <a:rPr lang="en-US" i="0" dirty="0">
+                <a:solidFill>
+                  <a:schemeClr val="tx1"/>
+                </a:solidFill>
+              </a:rPr>
+              <a:t>Brainstormed methods of executing the project</a:t>
+            </a:r>
+          </a:p>
+          <a:p>
+            <a:pPr marL="171450" indent="-171450">
+              <a:buFont typeface="Arial" panose="020B0604020202020204" pitchFamily="34" charset="0"/>
+              <a:buChar char="•"/>
+            </a:pPr>
+            <a:endParaRPr lang="en-US" i="0" dirty="0">
+              <a:solidFill>
+                <a:schemeClr val="tx1"/>
+              </a:solidFill>
+            </a:endParaRPr>
+          </a:p>
+          <a:p>
+            <a:pPr marL="171450" indent="-171450">
+              <a:buFont typeface="Arial" panose="020B0604020202020204" pitchFamily="34" charset="0"/>
+              <a:buChar char="•"/>
+            </a:pPr>
+            <a:r>
+              <a:rPr lang="en-US" i="0" dirty="0">
+                <a:solidFill>
+                  <a:schemeClr val="tx1"/>
+                </a:solidFill>
+              </a:rPr>
+              <a:t>Considered different options for datasets</a:t>
+            </a:r>
+          </a:p>
+          <a:p>
+            <a:pPr marL="171450" indent="-171450">
+              <a:buFont typeface="Arial" panose="020B0604020202020204" pitchFamily="34" charset="0"/>
+              <a:buChar char="•"/>
+            </a:pPr>
+            <a:endParaRPr lang="en-US" i="0" dirty="0">
+              <a:solidFill>
+                <a:schemeClr val="tx1"/>
+              </a:solidFill>
+            </a:endParaRPr>
+          </a:p>
+          <a:p>
+            <a:pPr marL="171450" indent="-171450">
+              <a:buFont typeface="Arial" panose="020B0604020202020204" pitchFamily="34" charset="0"/>
+              <a:buChar char="•"/>
+            </a:pPr>
+            <a:r>
+              <a:rPr lang="en-US" i="0" dirty="0">
+                <a:solidFill>
+                  <a:schemeClr val="tx1"/>
+                </a:solidFill>
+              </a:rPr>
+              <a:t>Wrote project proposal</a:t>
             </a:r>
           </a:p>
         </p:txBody>
@@ -12909,7 +12998,7 @@
           </a:ln>
           <a:extLst>
             <a:ext uri="{C572A759-6A51-4108-AA02-DFA0A04FC94B}">
-              <ma14:wrappingTextBoxFlag xmlns:ma14="http://schemas.microsoft.com/office/mac/drawingml/2011/main" xmlns:a14="http://schemas.microsoft.com/office/drawing/2010/main" xmlns:m="http://schemas.openxmlformats.org/officeDocument/2006/math" xmlns="" val="1"/>
+              <ma14:wrappingTextBoxFlag xmlns="" xmlns:m="http://schemas.openxmlformats.org/officeDocument/2006/math" xmlns:a14="http://schemas.microsoft.com/office/drawing/2010/main" xmlns:ma14="http://schemas.microsoft.com/office/mac/drawingml/2011/main" val="1"/>
             </a:ext>
           </a:extLst>
         </p:spPr>
@@ -12956,7 +13045,7 @@
           </a:ln>
           <a:extLst>
             <a:ext uri="{C572A759-6A51-4108-AA02-DFA0A04FC94B}">
-              <ma14:wrappingTextBoxFlag xmlns:ma14="http://schemas.microsoft.com/office/mac/drawingml/2011/main" xmlns:a14="http://schemas.microsoft.com/office/drawing/2010/main" xmlns:m="http://schemas.openxmlformats.org/officeDocument/2006/math" xmlns="" val="1"/>
+              <ma14:wrappingTextBoxFlag xmlns="" xmlns:m="http://schemas.openxmlformats.org/officeDocument/2006/math" xmlns:a14="http://schemas.microsoft.com/office/drawing/2010/main" xmlns:ma14="http://schemas.microsoft.com/office/mac/drawingml/2011/main" val="1"/>
             </a:ext>
           </a:extLst>
         </p:spPr>
@@ -13003,7 +13092,7 @@
           </a:ln>
           <a:extLst>
             <a:ext uri="{C572A759-6A51-4108-AA02-DFA0A04FC94B}">
-              <ma14:wrappingTextBoxFlag xmlns:ma14="http://schemas.microsoft.com/office/mac/drawingml/2011/main" xmlns:a14="http://schemas.microsoft.com/office/drawing/2010/main" xmlns:m="http://schemas.openxmlformats.org/officeDocument/2006/math" xmlns="" val="1"/>
+              <ma14:wrappingTextBoxFlag xmlns="" xmlns:m="http://schemas.openxmlformats.org/officeDocument/2006/math" xmlns:a14="http://schemas.microsoft.com/office/drawing/2010/main" xmlns:ma14="http://schemas.microsoft.com/office/mac/drawingml/2011/main" val="1"/>
             </a:ext>
           </a:extLst>
         </p:spPr>
@@ -13078,7 +13167,7 @@
           </a:ln>
           <a:extLst>
             <a:ext uri="{C572A759-6A51-4108-AA02-DFA0A04FC94B}">
-              <ma14:wrappingTextBoxFlag xmlns:ma14="http://schemas.microsoft.com/office/mac/drawingml/2011/main" xmlns:a14="http://schemas.microsoft.com/office/drawing/2010/main" xmlns:m="http://schemas.openxmlformats.org/officeDocument/2006/math" xmlns="" val="1"/>
+              <ma14:wrappingTextBoxFlag xmlns="" xmlns:m="http://schemas.openxmlformats.org/officeDocument/2006/math" xmlns:a14="http://schemas.microsoft.com/office/drawing/2010/main" xmlns:ma14="http://schemas.microsoft.com/office/mac/drawingml/2011/main" val="1"/>
             </a:ext>
           </a:extLst>
         </p:spPr>
@@ -13125,7 +13214,7 @@
           </a:ln>
           <a:extLst>
             <a:ext uri="{C572A759-6A51-4108-AA02-DFA0A04FC94B}">
-              <ma14:wrappingTextBoxFlag xmlns:ma14="http://schemas.microsoft.com/office/mac/drawingml/2011/main" xmlns:a14="http://schemas.microsoft.com/office/drawing/2010/main" xmlns:m="http://schemas.openxmlformats.org/officeDocument/2006/math" xmlns="" val="1"/>
+              <ma14:wrappingTextBoxFlag xmlns="" xmlns:m="http://schemas.openxmlformats.org/officeDocument/2006/math" xmlns:a14="http://schemas.microsoft.com/office/drawing/2010/main" xmlns:ma14="http://schemas.microsoft.com/office/mac/drawingml/2011/main" val="1"/>
             </a:ext>
           </a:extLst>
         </p:spPr>
@@ -13172,7 +13261,7 @@
           </a:ln>
           <a:extLst>
             <a:ext uri="{C572A759-6A51-4108-AA02-DFA0A04FC94B}">
-              <ma14:wrappingTextBoxFlag xmlns:ma14="http://schemas.microsoft.com/office/mac/drawingml/2011/main" xmlns:a14="http://schemas.microsoft.com/office/drawing/2010/main" xmlns:m="http://schemas.openxmlformats.org/officeDocument/2006/math" xmlns="" val="1"/>
+              <ma14:wrappingTextBoxFlag xmlns="" xmlns:m="http://schemas.openxmlformats.org/officeDocument/2006/math" xmlns:a14="http://schemas.microsoft.com/office/drawing/2010/main" xmlns:ma14="http://schemas.microsoft.com/office/mac/drawingml/2011/main" val="1"/>
             </a:ext>
           </a:extLst>
         </p:spPr>
@@ -13219,7 +13308,7 @@
           </a:ln>
           <a:extLst>
             <a:ext uri="{C572A759-6A51-4108-AA02-DFA0A04FC94B}">
-              <ma14:wrappingTextBoxFlag xmlns:ma14="http://schemas.microsoft.com/office/mac/drawingml/2011/main" xmlns:a14="http://schemas.microsoft.com/office/drawing/2010/main" xmlns:m="http://schemas.openxmlformats.org/officeDocument/2006/math" xmlns="" val="1"/>
+              <ma14:wrappingTextBoxFlag xmlns="" xmlns:m="http://schemas.openxmlformats.org/officeDocument/2006/math" xmlns:a14="http://schemas.microsoft.com/office/drawing/2010/main" xmlns:ma14="http://schemas.microsoft.com/office/mac/drawingml/2011/main" val="1"/>
             </a:ext>
           </a:extLst>
         </p:spPr>
@@ -13322,7 +13411,7 @@
           </a:ln>
           <a:extLst>
             <a:ext uri="{C572A759-6A51-4108-AA02-DFA0A04FC94B}">
-              <ma14:wrappingTextBoxFlag xmlns:ma14="http://schemas.microsoft.com/office/mac/drawingml/2011/main" xmlns:a14="http://schemas.microsoft.com/office/drawing/2010/main" xmlns:m="http://schemas.openxmlformats.org/officeDocument/2006/math" xmlns="" val="1"/>
+              <ma14:wrappingTextBoxFlag xmlns="" xmlns:m="http://schemas.openxmlformats.org/officeDocument/2006/math" xmlns:a14="http://schemas.microsoft.com/office/drawing/2010/main" xmlns:ma14="http://schemas.microsoft.com/office/mac/drawingml/2011/main" val="1"/>
             </a:ext>
           </a:extLst>
         </p:spPr>
@@ -13369,7 +13458,7 @@
           </a:ln>
           <a:extLst>
             <a:ext uri="{C572A759-6A51-4108-AA02-DFA0A04FC94B}">
-              <ma14:wrappingTextBoxFlag xmlns:ma14="http://schemas.microsoft.com/office/mac/drawingml/2011/main" xmlns:a14="http://schemas.microsoft.com/office/drawing/2010/main" xmlns:m="http://schemas.openxmlformats.org/officeDocument/2006/math" xmlns="" val="1"/>
+              <ma14:wrappingTextBoxFlag xmlns="" xmlns:m="http://schemas.openxmlformats.org/officeDocument/2006/math" xmlns:a14="http://schemas.microsoft.com/office/drawing/2010/main" xmlns:ma14="http://schemas.microsoft.com/office/mac/drawingml/2011/main" val="1"/>
             </a:ext>
           </a:extLst>
         </p:spPr>
@@ -13445,7 +13534,7 @@
           </a:ln>
           <a:extLst>
             <a:ext uri="{C572A759-6A51-4108-AA02-DFA0A04FC94B}">
-              <ma14:wrappingTextBoxFlag xmlns:ma14="http://schemas.microsoft.com/office/mac/drawingml/2011/main" xmlns:a14="http://schemas.microsoft.com/office/drawing/2010/main" xmlns:m="http://schemas.openxmlformats.org/officeDocument/2006/math" xmlns="" val="1"/>
+              <ma14:wrappingTextBoxFlag xmlns="" xmlns:m="http://schemas.openxmlformats.org/officeDocument/2006/math" xmlns:a14="http://schemas.microsoft.com/office/drawing/2010/main" xmlns:ma14="http://schemas.microsoft.com/office/mac/drawingml/2011/main" val="1"/>
             </a:ext>
           </a:extLst>
         </p:spPr>
@@ -13530,7 +13619,7 @@
           </a:ln>
           <a:extLst>
             <a:ext uri="{C572A759-6A51-4108-AA02-DFA0A04FC94B}">
-              <ma14:wrappingTextBoxFlag xmlns="" xmlns:m="http://schemas.openxmlformats.org/officeDocument/2006/math" xmlns:a14="http://schemas.microsoft.com/office/drawing/2010/main" xmlns:ma14="http://schemas.microsoft.com/office/mac/drawingml/2011/main" val="1"/>
+              <ma14:wrappingTextBoxFlag xmlns:ma14="http://schemas.microsoft.com/office/mac/drawingml/2011/main" xmlns:a14="http://schemas.microsoft.com/office/drawing/2010/main" xmlns:m="http://schemas.openxmlformats.org/officeDocument/2006/math" xmlns="" val="1"/>
             </a:ext>
           </a:extLst>
         </p:spPr>
@@ -13580,7 +13669,7 @@
           </a:ln>
           <a:extLst>
             <a:ext uri="{C572A759-6A51-4108-AA02-DFA0A04FC94B}">
-              <ma14:wrappingTextBoxFlag xmlns:ma14="http://schemas.microsoft.com/office/mac/drawingml/2011/main" xmlns:a14="http://schemas.microsoft.com/office/drawing/2010/main" xmlns:m="http://schemas.openxmlformats.org/officeDocument/2006/math" xmlns="" val="1"/>
+              <ma14:wrappingTextBoxFlag xmlns="" xmlns:m="http://schemas.openxmlformats.org/officeDocument/2006/math" xmlns:a14="http://schemas.microsoft.com/office/drawing/2010/main" xmlns:ma14="http://schemas.microsoft.com/office/mac/drawingml/2011/main" val="1"/>
             </a:ext>
           </a:extLst>
         </p:spPr>
@@ -13693,7 +13782,7 @@
           </a:ln>
           <a:extLst>
             <a:ext uri="{C572A759-6A51-4108-AA02-DFA0A04FC94B}">
-              <ma14:wrappingTextBoxFlag xmlns:ma14="http://schemas.microsoft.com/office/mac/drawingml/2011/main" xmlns:a14="http://schemas.microsoft.com/office/drawing/2010/main" xmlns:m="http://schemas.openxmlformats.org/officeDocument/2006/math" xmlns="" val="1"/>
+              <ma14:wrappingTextBoxFlag xmlns="" xmlns:m="http://schemas.openxmlformats.org/officeDocument/2006/math" xmlns:a14="http://schemas.microsoft.com/office/drawing/2010/main" xmlns:ma14="http://schemas.microsoft.com/office/mac/drawingml/2011/main" val="1"/>
             </a:ext>
           </a:extLst>
         </p:spPr>
@@ -13769,7 +13858,7 @@
           </a:ln>
           <a:extLst>
             <a:ext uri="{C572A759-6A51-4108-AA02-DFA0A04FC94B}">
-              <ma14:wrappingTextBoxFlag xmlns:ma14="http://schemas.microsoft.com/office/mac/drawingml/2011/main" xmlns:a14="http://schemas.microsoft.com/office/drawing/2010/main" xmlns:m="http://schemas.openxmlformats.org/officeDocument/2006/math" xmlns="" val="1"/>
+              <ma14:wrappingTextBoxFlag xmlns="" xmlns:m="http://schemas.openxmlformats.org/officeDocument/2006/math" xmlns:a14="http://schemas.microsoft.com/office/drawing/2010/main" xmlns:ma14="http://schemas.microsoft.com/office/mac/drawingml/2011/main" val="1"/>
             </a:ext>
           </a:extLst>
         </p:spPr>
@@ -13816,7 +13905,7 @@
           </a:ln>
           <a:extLst>
             <a:ext uri="{C572A759-6A51-4108-AA02-DFA0A04FC94B}">
-              <ma14:wrappingTextBoxFlag xmlns:ma14="http://schemas.microsoft.com/office/mac/drawingml/2011/main" xmlns:a14="http://schemas.microsoft.com/office/drawing/2010/main" xmlns:m="http://schemas.openxmlformats.org/officeDocument/2006/math" xmlns="" val="1"/>
+              <ma14:wrappingTextBoxFlag xmlns="" xmlns:m="http://schemas.openxmlformats.org/officeDocument/2006/math" xmlns:a14="http://schemas.microsoft.com/office/drawing/2010/main" xmlns:ma14="http://schemas.microsoft.com/office/mac/drawingml/2011/main" val="1"/>
             </a:ext>
           </a:extLst>
         </p:spPr>
@@ -13925,7 +14014,7 @@
           </a:ln>
           <a:extLst>
             <a:ext uri="{C572A759-6A51-4108-AA02-DFA0A04FC94B}">
-              <ma14:wrappingTextBoxFlag xmlns:ma14="http://schemas.microsoft.com/office/mac/drawingml/2011/main" xmlns:a14="http://schemas.microsoft.com/office/drawing/2010/main" xmlns:m="http://schemas.openxmlformats.org/officeDocument/2006/math" xmlns="" val="1"/>
+              <ma14:wrappingTextBoxFlag xmlns="" xmlns:m="http://schemas.openxmlformats.org/officeDocument/2006/math" xmlns:a14="http://schemas.microsoft.com/office/drawing/2010/main" xmlns:ma14="http://schemas.microsoft.com/office/mac/drawingml/2011/main" val="1"/>
             </a:ext>
           </a:extLst>
         </p:spPr>
@@ -13972,7 +14061,7 @@
           </a:ln>
           <a:extLst>
             <a:ext uri="{C572A759-6A51-4108-AA02-DFA0A04FC94B}">
-              <ma14:wrappingTextBoxFlag xmlns:ma14="http://schemas.microsoft.com/office/mac/drawingml/2011/main" xmlns:a14="http://schemas.microsoft.com/office/drawing/2010/main" xmlns:m="http://schemas.openxmlformats.org/officeDocument/2006/math" xmlns="" val="1"/>
+              <ma14:wrappingTextBoxFlag xmlns="" xmlns:m="http://schemas.openxmlformats.org/officeDocument/2006/math" xmlns:a14="http://schemas.microsoft.com/office/drawing/2010/main" xmlns:ma14="http://schemas.microsoft.com/office/mac/drawingml/2011/main" val="1"/>
             </a:ext>
           </a:extLst>
         </p:spPr>
@@ -14048,7 +14137,7 @@
           </a:ln>
           <a:extLst>
             <a:ext uri="{C572A759-6A51-4108-AA02-DFA0A04FC94B}">
-              <ma14:wrappingTextBoxFlag xmlns:ma14="http://schemas.microsoft.com/office/mac/drawingml/2011/main" xmlns:a14="http://schemas.microsoft.com/office/drawing/2010/main" xmlns:m="http://schemas.openxmlformats.org/officeDocument/2006/math" xmlns="" val="1"/>
+              <ma14:wrappingTextBoxFlag xmlns="" xmlns:m="http://schemas.openxmlformats.org/officeDocument/2006/math" xmlns:a14="http://schemas.microsoft.com/office/drawing/2010/main" xmlns:ma14="http://schemas.microsoft.com/office/mac/drawingml/2011/main" val="1"/>
             </a:ext>
           </a:extLst>
         </p:spPr>
@@ -14095,7 +14184,7 @@
           </a:ln>
           <a:extLst>
             <a:ext uri="{C572A759-6A51-4108-AA02-DFA0A04FC94B}">
-              <ma14:wrappingTextBoxFlag xmlns:ma14="http://schemas.microsoft.com/office/mac/drawingml/2011/main" xmlns:a14="http://schemas.microsoft.com/office/drawing/2010/main" xmlns:m="http://schemas.openxmlformats.org/officeDocument/2006/math" xmlns="" val="1"/>
+              <ma14:wrappingTextBoxFlag xmlns="" xmlns:m="http://schemas.openxmlformats.org/officeDocument/2006/math" xmlns:a14="http://schemas.microsoft.com/office/drawing/2010/main" xmlns:ma14="http://schemas.microsoft.com/office/mac/drawingml/2011/main" val="1"/>
             </a:ext>
           </a:extLst>
         </p:spPr>
@@ -14171,7 +14260,7 @@
           </a:ln>
           <a:extLst>
             <a:ext uri="{C572A759-6A51-4108-AA02-DFA0A04FC94B}">
-              <ma14:wrappingTextBoxFlag xmlns:ma14="http://schemas.microsoft.com/office/mac/drawingml/2011/main" xmlns:a14="http://schemas.microsoft.com/office/drawing/2010/main" xmlns:m="http://schemas.openxmlformats.org/officeDocument/2006/math" xmlns="" val="1"/>
+              <ma14:wrappingTextBoxFlag xmlns="" xmlns:m="http://schemas.openxmlformats.org/officeDocument/2006/math" xmlns:a14="http://schemas.microsoft.com/office/drawing/2010/main" xmlns:ma14="http://schemas.microsoft.com/office/mac/drawingml/2011/main" val="1"/>
             </a:ext>
           </a:extLst>
         </p:spPr>
@@ -14218,7 +14307,7 @@
           </a:ln>
           <a:extLst>
             <a:ext uri="{C572A759-6A51-4108-AA02-DFA0A04FC94B}">
-              <ma14:wrappingTextBoxFlag xmlns:ma14="http://schemas.microsoft.com/office/mac/drawingml/2011/main" xmlns:a14="http://schemas.microsoft.com/office/drawing/2010/main" xmlns:m="http://schemas.openxmlformats.org/officeDocument/2006/math" xmlns="" val="1"/>
+              <ma14:wrappingTextBoxFlag xmlns="" xmlns:m="http://schemas.openxmlformats.org/officeDocument/2006/math" xmlns:a14="http://schemas.microsoft.com/office/drawing/2010/main" xmlns:ma14="http://schemas.microsoft.com/office/mac/drawingml/2011/main" val="1"/>
             </a:ext>
           </a:extLst>
         </p:spPr>
@@ -14294,7 +14383,7 @@
           </a:ln>
           <a:extLst>
             <a:ext uri="{C572A759-6A51-4108-AA02-DFA0A04FC94B}">
-              <ma14:wrappingTextBoxFlag xmlns:ma14="http://schemas.microsoft.com/office/mac/drawingml/2011/main" xmlns:a14="http://schemas.microsoft.com/office/drawing/2010/main" xmlns:m="http://schemas.openxmlformats.org/officeDocument/2006/math" xmlns="" val="1"/>
+              <ma14:wrappingTextBoxFlag xmlns="" xmlns:m="http://schemas.openxmlformats.org/officeDocument/2006/math" xmlns:a14="http://schemas.microsoft.com/office/drawing/2010/main" xmlns:ma14="http://schemas.microsoft.com/office/mac/drawingml/2011/main" val="1"/>
             </a:ext>
           </a:extLst>
         </p:spPr>
@@ -14341,7 +14430,7 @@
           </a:ln>
           <a:extLst>
             <a:ext uri="{C572A759-6A51-4108-AA02-DFA0A04FC94B}">
-              <ma14:wrappingTextBoxFlag xmlns:ma14="http://schemas.microsoft.com/office/mac/drawingml/2011/main" xmlns:a14="http://schemas.microsoft.com/office/drawing/2010/main" xmlns:m="http://schemas.openxmlformats.org/officeDocument/2006/math" xmlns="" val="1"/>
+              <ma14:wrappingTextBoxFlag xmlns="" xmlns:m="http://schemas.openxmlformats.org/officeDocument/2006/math" xmlns:a14="http://schemas.microsoft.com/office/drawing/2010/main" xmlns:ma14="http://schemas.microsoft.com/office/mac/drawingml/2011/main" val="1"/>
             </a:ext>
           </a:extLst>
         </p:spPr>
@@ -14421,7 +14510,7 @@
           </a:ln>
           <a:extLst>
             <a:ext uri="{C572A759-6A51-4108-AA02-DFA0A04FC94B}">
-              <ma14:wrappingTextBoxFlag xmlns:ma14="http://schemas.microsoft.com/office/mac/drawingml/2011/main" xmlns:a14="http://schemas.microsoft.com/office/drawing/2010/main" xmlns:m="http://schemas.openxmlformats.org/officeDocument/2006/math" xmlns="" val="1"/>
+              <ma14:wrappingTextBoxFlag xmlns="" xmlns:m="http://schemas.openxmlformats.org/officeDocument/2006/math" xmlns:a14="http://schemas.microsoft.com/office/drawing/2010/main" xmlns:ma14="http://schemas.microsoft.com/office/mac/drawingml/2011/main" val="1"/>
             </a:ext>
           </a:extLst>
         </p:spPr>
@@ -14468,7 +14557,7 @@
           </a:ln>
           <a:extLst>
             <a:ext uri="{C572A759-6A51-4108-AA02-DFA0A04FC94B}">
-              <ma14:wrappingTextBoxFlag xmlns:ma14="http://schemas.microsoft.com/office/mac/drawingml/2011/main" xmlns:a14="http://schemas.microsoft.com/office/drawing/2010/main" xmlns:m="http://schemas.openxmlformats.org/officeDocument/2006/math" xmlns="" val="1"/>
+              <ma14:wrappingTextBoxFlag xmlns="" xmlns:m="http://schemas.openxmlformats.org/officeDocument/2006/math" xmlns:a14="http://schemas.microsoft.com/office/drawing/2010/main" xmlns:ma14="http://schemas.microsoft.com/office/mac/drawingml/2011/main" val="1"/>
             </a:ext>
           </a:extLst>
         </p:spPr>
@@ -14515,7 +14604,7 @@
           </a:ln>
           <a:extLst>
             <a:ext uri="{C572A759-6A51-4108-AA02-DFA0A04FC94B}">
-              <ma14:wrappingTextBoxFlag xmlns:ma14="http://schemas.microsoft.com/office/mac/drawingml/2011/main" xmlns:a14="http://schemas.microsoft.com/office/drawing/2010/main" xmlns:m="http://schemas.openxmlformats.org/officeDocument/2006/math" xmlns="" val="1"/>
+              <ma14:wrappingTextBoxFlag xmlns="" xmlns:m="http://schemas.openxmlformats.org/officeDocument/2006/math" xmlns:a14="http://schemas.microsoft.com/office/drawing/2010/main" xmlns:ma14="http://schemas.microsoft.com/office/mac/drawingml/2011/main" val="1"/>
             </a:ext>
           </a:extLst>
         </p:spPr>
@@ -14562,7 +14651,7 @@
           </a:ln>
           <a:extLst>
             <a:ext uri="{C572A759-6A51-4108-AA02-DFA0A04FC94B}">
-              <ma14:wrappingTextBoxFlag xmlns:ma14="http://schemas.microsoft.com/office/mac/drawingml/2011/main" xmlns:a14="http://schemas.microsoft.com/office/drawing/2010/main" xmlns:m="http://schemas.openxmlformats.org/officeDocument/2006/math" xmlns="" val="1"/>
+              <ma14:wrappingTextBoxFlag xmlns="" xmlns:m="http://schemas.openxmlformats.org/officeDocument/2006/math" xmlns:a14="http://schemas.microsoft.com/office/drawing/2010/main" xmlns:ma14="http://schemas.microsoft.com/office/mac/drawingml/2011/main" val="1"/>
             </a:ext>
           </a:extLst>
         </p:spPr>
@@ -14609,7 +14698,7 @@
           </a:ln>
           <a:extLst>
             <a:ext uri="{C572A759-6A51-4108-AA02-DFA0A04FC94B}">
-              <ma14:wrappingTextBoxFlag xmlns:ma14="http://schemas.microsoft.com/office/mac/drawingml/2011/main" xmlns:a14="http://schemas.microsoft.com/office/drawing/2010/main" xmlns:m="http://schemas.openxmlformats.org/officeDocument/2006/math" xmlns="" val="1"/>
+              <ma14:wrappingTextBoxFlag xmlns="" xmlns:m="http://schemas.openxmlformats.org/officeDocument/2006/math" xmlns:a14="http://schemas.microsoft.com/office/drawing/2010/main" xmlns:ma14="http://schemas.microsoft.com/office/mac/drawingml/2011/main" val="1"/>
             </a:ext>
           </a:extLst>
         </p:spPr>
@@ -14656,7 +14745,7 @@
           </a:ln>
           <a:extLst>
             <a:ext uri="{C572A759-6A51-4108-AA02-DFA0A04FC94B}">
-              <ma14:wrappingTextBoxFlag xmlns:ma14="http://schemas.microsoft.com/office/mac/drawingml/2011/main" xmlns:a14="http://schemas.microsoft.com/office/drawing/2010/main" xmlns:m="http://schemas.openxmlformats.org/officeDocument/2006/math" xmlns="" val="1"/>
+              <ma14:wrappingTextBoxFlag xmlns="" xmlns:m="http://schemas.openxmlformats.org/officeDocument/2006/math" xmlns:a14="http://schemas.microsoft.com/office/drawing/2010/main" xmlns:ma14="http://schemas.microsoft.com/office/mac/drawingml/2011/main" val="1"/>
             </a:ext>
           </a:extLst>
         </p:spPr>
@@ -14703,7 +14792,7 @@
           </a:ln>
           <a:extLst>
             <a:ext uri="{C572A759-6A51-4108-AA02-DFA0A04FC94B}">
-              <ma14:wrappingTextBoxFlag xmlns:ma14="http://schemas.microsoft.com/office/mac/drawingml/2011/main" xmlns:a14="http://schemas.microsoft.com/office/drawing/2010/main" xmlns:m="http://schemas.openxmlformats.org/officeDocument/2006/math" xmlns="" val="1"/>
+              <ma14:wrappingTextBoxFlag xmlns="" xmlns:m="http://schemas.openxmlformats.org/officeDocument/2006/math" xmlns:a14="http://schemas.microsoft.com/office/drawing/2010/main" xmlns:ma14="http://schemas.microsoft.com/office/mac/drawingml/2011/main" val="1"/>
             </a:ext>
           </a:extLst>
         </p:spPr>
@@ -14750,7 +14839,7 @@
           </a:ln>
           <a:extLst>
             <a:ext uri="{C572A759-6A51-4108-AA02-DFA0A04FC94B}">
-              <ma14:wrappingTextBoxFlag xmlns:ma14="http://schemas.microsoft.com/office/mac/drawingml/2011/main" xmlns:a14="http://schemas.microsoft.com/office/drawing/2010/main" xmlns:m="http://schemas.openxmlformats.org/officeDocument/2006/math" xmlns="" val="1"/>
+              <ma14:wrappingTextBoxFlag xmlns="" xmlns:m="http://schemas.openxmlformats.org/officeDocument/2006/math" xmlns:a14="http://schemas.microsoft.com/office/drawing/2010/main" xmlns:ma14="http://schemas.microsoft.com/office/mac/drawingml/2011/main" val="1"/>
             </a:ext>
           </a:extLst>
         </p:spPr>
@@ -14797,7 +14886,7 @@
           </a:ln>
           <a:extLst>
             <a:ext uri="{C572A759-6A51-4108-AA02-DFA0A04FC94B}">
-              <ma14:wrappingTextBoxFlag xmlns:ma14="http://schemas.microsoft.com/office/mac/drawingml/2011/main" xmlns:a14="http://schemas.microsoft.com/office/drawing/2010/main" xmlns:m="http://schemas.openxmlformats.org/officeDocument/2006/math" xmlns="" val="1"/>
+              <ma14:wrappingTextBoxFlag xmlns="" xmlns:m="http://schemas.openxmlformats.org/officeDocument/2006/math" xmlns:a14="http://schemas.microsoft.com/office/drawing/2010/main" xmlns:ma14="http://schemas.microsoft.com/office/mac/drawingml/2011/main" val="1"/>
             </a:ext>
           </a:extLst>
         </p:spPr>
@@ -14844,7 +14933,7 @@
           </a:ln>
           <a:extLst>
             <a:ext uri="{C572A759-6A51-4108-AA02-DFA0A04FC94B}">
-              <ma14:wrappingTextBoxFlag xmlns:ma14="http://schemas.microsoft.com/office/mac/drawingml/2011/main" xmlns:a14="http://schemas.microsoft.com/office/drawing/2010/main" xmlns:m="http://schemas.openxmlformats.org/officeDocument/2006/math" xmlns="" val="1"/>
+              <ma14:wrappingTextBoxFlag xmlns="" xmlns:m="http://schemas.openxmlformats.org/officeDocument/2006/math" xmlns:a14="http://schemas.microsoft.com/office/drawing/2010/main" xmlns:ma14="http://schemas.microsoft.com/office/mac/drawingml/2011/main" val="1"/>
             </a:ext>
           </a:extLst>
         </p:spPr>
@@ -14891,7 +14980,7 @@
           </a:ln>
           <a:extLst>
             <a:ext uri="{C572A759-6A51-4108-AA02-DFA0A04FC94B}">
-              <ma14:wrappingTextBoxFlag xmlns:ma14="http://schemas.microsoft.com/office/mac/drawingml/2011/main" xmlns:a14="http://schemas.microsoft.com/office/drawing/2010/main" xmlns:m="http://schemas.openxmlformats.org/officeDocument/2006/math" xmlns="" val="1"/>
+              <ma14:wrappingTextBoxFlag xmlns="" xmlns:m="http://schemas.openxmlformats.org/officeDocument/2006/math" xmlns:a14="http://schemas.microsoft.com/office/drawing/2010/main" xmlns:ma14="http://schemas.microsoft.com/office/mac/drawingml/2011/main" val="1"/>
             </a:ext>
           </a:extLst>
         </p:spPr>
@@ -14938,7 +15027,7 @@
           </a:ln>
           <a:extLst>
             <a:ext uri="{C572A759-6A51-4108-AA02-DFA0A04FC94B}">
-              <ma14:wrappingTextBoxFlag xmlns:ma14="http://schemas.microsoft.com/office/mac/drawingml/2011/main" xmlns:a14="http://schemas.microsoft.com/office/drawing/2010/main" xmlns:m="http://schemas.openxmlformats.org/officeDocument/2006/math" xmlns="" val="1"/>
+              <ma14:wrappingTextBoxFlag xmlns="" xmlns:m="http://schemas.openxmlformats.org/officeDocument/2006/math" xmlns:a14="http://schemas.microsoft.com/office/drawing/2010/main" xmlns:ma14="http://schemas.microsoft.com/office/mac/drawingml/2011/main" val="1"/>
             </a:ext>
           </a:extLst>
         </p:spPr>
@@ -14985,7 +15074,7 @@
           </a:ln>
           <a:extLst>
             <a:ext uri="{C572A759-6A51-4108-AA02-DFA0A04FC94B}">
-              <ma14:wrappingTextBoxFlag xmlns:ma14="http://schemas.microsoft.com/office/mac/drawingml/2011/main" xmlns:a14="http://schemas.microsoft.com/office/drawing/2010/main" xmlns:m="http://schemas.openxmlformats.org/officeDocument/2006/math" xmlns="" val="1"/>
+              <ma14:wrappingTextBoxFlag xmlns="" xmlns:m="http://schemas.openxmlformats.org/officeDocument/2006/math" xmlns:a14="http://schemas.microsoft.com/office/drawing/2010/main" xmlns:ma14="http://schemas.microsoft.com/office/mac/drawingml/2011/main" val="1"/>
             </a:ext>
           </a:extLst>
         </p:spPr>
@@ -15063,7 +15152,7 @@
           </a:ln>
           <a:extLst>
             <a:ext uri="{C572A759-6A51-4108-AA02-DFA0A04FC94B}">
-              <ma14:wrappingTextBoxFlag xmlns:ma14="http://schemas.microsoft.com/office/mac/drawingml/2011/main" xmlns:a14="http://schemas.microsoft.com/office/drawing/2010/main" xmlns:m="http://schemas.openxmlformats.org/officeDocument/2006/math" xmlns="" val="1"/>
+              <ma14:wrappingTextBoxFlag xmlns="" xmlns:m="http://schemas.openxmlformats.org/officeDocument/2006/math" xmlns:a14="http://schemas.microsoft.com/office/drawing/2010/main" xmlns:ma14="http://schemas.microsoft.com/office/mac/drawingml/2011/main" val="1"/>
             </a:ext>
           </a:extLst>
         </p:spPr>
@@ -15138,7 +15227,7 @@
           </a:ln>
           <a:extLst>
             <a:ext uri="{C572A759-6A51-4108-AA02-DFA0A04FC94B}">
-              <ma14:wrappingTextBoxFlag xmlns:ma14="http://schemas.microsoft.com/office/mac/drawingml/2011/main" xmlns:a14="http://schemas.microsoft.com/office/drawing/2010/main" xmlns:m="http://schemas.openxmlformats.org/officeDocument/2006/math" xmlns="" val="1"/>
+              <ma14:wrappingTextBoxFlag xmlns="" xmlns:m="http://schemas.openxmlformats.org/officeDocument/2006/math" xmlns:a14="http://schemas.microsoft.com/office/drawing/2010/main" xmlns:ma14="http://schemas.microsoft.com/office/mac/drawingml/2011/main" val="1"/>
             </a:ext>
           </a:extLst>
         </p:spPr>
@@ -15185,7 +15274,7 @@
           </a:ln>
           <a:extLst>
             <a:ext uri="{C572A759-6A51-4108-AA02-DFA0A04FC94B}">
-              <ma14:wrappingTextBoxFlag xmlns:ma14="http://schemas.microsoft.com/office/mac/drawingml/2011/main" xmlns:a14="http://schemas.microsoft.com/office/drawing/2010/main" xmlns:m="http://schemas.openxmlformats.org/officeDocument/2006/math" xmlns="" val="1"/>
+              <ma14:wrappingTextBoxFlag xmlns="" xmlns:m="http://schemas.openxmlformats.org/officeDocument/2006/math" xmlns:a14="http://schemas.microsoft.com/office/drawing/2010/main" xmlns:ma14="http://schemas.microsoft.com/office/mac/drawingml/2011/main" val="1"/>
             </a:ext>
           </a:extLst>
         </p:spPr>
@@ -15232,7 +15321,7 @@
           </a:ln>
           <a:extLst>
             <a:ext uri="{C572A759-6A51-4108-AA02-DFA0A04FC94B}">
-              <ma14:wrappingTextBoxFlag xmlns:ma14="http://schemas.microsoft.com/office/mac/drawingml/2011/main" xmlns:a14="http://schemas.microsoft.com/office/drawing/2010/main" xmlns:m="http://schemas.openxmlformats.org/officeDocument/2006/math" xmlns="" val="1"/>
+              <ma14:wrappingTextBoxFlag xmlns="" xmlns:m="http://schemas.openxmlformats.org/officeDocument/2006/math" xmlns:a14="http://schemas.microsoft.com/office/drawing/2010/main" xmlns:ma14="http://schemas.microsoft.com/office/mac/drawingml/2011/main" val="1"/>
             </a:ext>
           </a:extLst>
         </p:spPr>
